--- a/reports/AI Jobs Project.pptx
+++ b/reports/AI Jobs Project.pptx
@@ -138,224 +138,6 @@
 </p:presentation>
 </file>
 
-<file path=ppt/charts/chart1.xml><?xml version="1.0" encoding="utf-8"?>
-<c:chartSpace xmlns:c="http://schemas.openxmlformats.org/drawingml/2006/chart" xmlns:a="http://schemas.openxmlformats.org/drawingml/2006/main" xmlns:r="http://schemas.openxmlformats.org/officeDocument/2006/relationships" xmlns:c16r2="http://schemas.microsoft.com/office/drawing/2015/06/chart">
-  <c:date1904 val="1"/>
-  <c:lang val="en-US"/>
-  <c:roundedCorners val="1"/>
-  <c:style val="2"/>
-  <c:chart>
-    <c:autoTitleDeleted val="1"/>
-    <c:plotArea>
-      <c:layout/>
-      <c:barChart>
-        <c:barDir val="bar"/>
-        <c:grouping val="clustered"/>
-        <c:varyColors val="0"/>
-        <c:ser>
-          <c:idx val="0"/>
-          <c:order val="0"/>
-          <c:tx>
-            <c:v>Postings</c:v>
-          </c:tx>
-          <c:spPr>
-            <a:solidFill>
-              <a:srgbClr val="275F96"/>
-            </a:solidFill>
-          </c:spPr>
-          <c:invertIfNegative val="1"/>
-          <c:dLbls>
-            <c:spPr>
-              <a:noFill/>
-              <a:ln>
-                <a:noFill/>
-              </a:ln>
-              <a:effectLst/>
-            </c:spPr>
-            <c:txPr>
-              <a:bodyPr anchorCtr="1"/>
-              <a:lstStyle/>
-              <a:p>
-                <a:pPr>
-                  <a:defRPr>
-                    <a:latin typeface="Aptos"/>
-                    <a:ea typeface="Aptos"/>
-                    <a:cs typeface="Aptos"/>
-                  </a:defRPr>
-                </a:pPr>
-                <a:endParaRPr lang="en-US"/>
-              </a:p>
-            </c:txPr>
-            <c:dLblPos val="outEnd"/>
-            <c:showLegendKey val="0"/>
-            <c:showVal val="1"/>
-            <c:showCatName val="0"/>
-            <c:showSerName val="0"/>
-            <c:showPercent val="0"/>
-            <c:showBubbleSize val="0"/>
-            <c:showLeaderLines val="0"/>
-            <c:extLst>
-              <c:ext xmlns:c15="http://schemas.microsoft.com/office/drawing/2012/chart" uri="{CE6537A1-D6FC-4f65-9D91-7224C49458BB}">
-                <c15:showLeaderLines val="0"/>
-              </c:ext>
-            </c:extLst>
-          </c:dLbls>
-          <c:cat>
-            <c:strRef>
-              <c:f>'Chart Data'!$A$2:$A$8</c:f>
-              <c:strCache>
-                <c:ptCount val="7"/>
-                <c:pt idx="0">
-                  <c:v>Machine Learning</c:v>
-                </c:pt>
-                <c:pt idx="1">
-                  <c:v>MLOps</c:v>
-                </c:pt>
-                <c:pt idx="2">
-                  <c:v>Generative AI</c:v>
-                </c:pt>
-                <c:pt idx="3">
-                  <c:v>NLP</c:v>
-                </c:pt>
-                <c:pt idx="4">
-                  <c:v>Computer Vision</c:v>
-                </c:pt>
-                <c:pt idx="5">
-                  <c:v>Deep Learning</c:v>
-                </c:pt>
-                <c:pt idx="6">
-                  <c:v>Data Science</c:v>
-                </c:pt>
-              </c:strCache>
-            </c:strRef>
-          </c:cat>
-          <c:val>
-            <c:numRef>
-              <c:f>'Chart Data'!$B$2:$B$8</c:f>
-              <c:numCache>
-                <c:formatCode>General</c:formatCode>
-                <c:ptCount val="7"/>
-                <c:pt idx="0">
-                  <c:v>3245</c:v>
-                </c:pt>
-                <c:pt idx="1">
-                  <c:v>1400</c:v>
-                </c:pt>
-                <c:pt idx="2">
-                  <c:v>1300</c:v>
-                </c:pt>
-                <c:pt idx="3">
-                  <c:v>950</c:v>
-                </c:pt>
-                <c:pt idx="4">
-                  <c:v>950</c:v>
-                </c:pt>
-                <c:pt idx="5">
-                  <c:v>500</c:v>
-                </c:pt>
-                <c:pt idx="6">
-                  <c:v>425</c:v>
-                </c:pt>
-              </c:numCache>
-            </c:numRef>
-          </c:val>
-          <c:extLst>
-            <c:ext xmlns:c14="http://schemas.microsoft.com/office/drawing/2007/8/2/chart" uri="{6F2FDCE9-48DA-4B69-8628-5D25D57E5C99}">
-              <c14:invertSolidFillFmt>
-                <c14:spPr xmlns:c14="http://schemas.microsoft.com/office/drawing/2007/8/2/chart">
-                  <a:solidFill>
-                    <a:srgbClr val="FFFFFF"/>
-                  </a:solidFill>
-                </c14:spPr>
-              </c14:invertSolidFillFmt>
-            </c:ext>
-            <c:ext xmlns:c16="http://schemas.microsoft.com/office/drawing/2014/chart" uri="{C3380CC4-5D6E-409C-BE32-E72D297353CC}">
-              <c16:uniqueId val="{00000000-3B4E-4B39-8286-29CAB18A3F73}"/>
-            </c:ext>
-          </c:extLst>
-        </c:ser>
-        <c:dLbls>
-          <c:dLblPos val="outEnd"/>
-          <c:showLegendKey val="0"/>
-          <c:showVal val="1"/>
-          <c:showCatName val="0"/>
-          <c:showSerName val="0"/>
-          <c:showPercent val="0"/>
-          <c:showBubbleSize val="0"/>
-        </c:dLbls>
-        <c:gapWidth val="150"/>
-        <c:axId val="48650112"/>
-        <c:axId val="48672768"/>
-      </c:barChart>
-      <c:catAx>
-        <c:axId val="48650112"/>
-        <c:scaling>
-          <c:orientation val="minMax"/>
-        </c:scaling>
-        <c:delete val="0"/>
-        <c:axPos val="l"/>
-        <c:numFmt formatCode="General" sourceLinked="1"/>
-        <c:majorTickMark val="none"/>
-        <c:minorTickMark val="none"/>
-        <c:tickLblPos val="nextTo"/>
-        <c:spPr>
-          <a:ln w="9525">
-            <a:solidFill>
-              <a:srgbClr val="D4D4D4"/>
-            </a:solidFill>
-            <a:prstDash val="solid"/>
-          </a:ln>
-        </c:spPr>
-        <c:txPr>
-          <a:bodyPr anchorCtr="1"/>
-          <a:lstStyle/>
-          <a:p>
-            <a:pPr>
-              <a:defRPr>
-                <a:solidFill>
-                  <a:srgbClr val="666666"/>
-                </a:solidFill>
-                <a:latin typeface="Aptos"/>
-                <a:ea typeface="Aptos"/>
-                <a:cs typeface="Aptos"/>
-              </a:defRPr>
-            </a:pPr>
-            <a:endParaRPr lang="en-US"/>
-          </a:p>
-        </c:txPr>
-        <c:crossAx val="48672768"/>
-        <c:crosses val="autoZero"/>
-        <c:auto val="1"/>
-        <c:lblAlgn val="ctr"/>
-        <c:lblOffset val="100"/>
-        <c:noMultiLvlLbl val="1"/>
-      </c:catAx>
-      <c:valAx>
-        <c:axId val="48672768"/>
-        <c:scaling>
-          <c:orientation val="minMax"/>
-        </c:scaling>
-        <c:delete val="1"/>
-        <c:axPos val="b"/>
-        <c:numFmt formatCode="General" sourceLinked="1"/>
-        <c:majorTickMark val="none"/>
-        <c:minorTickMark val="none"/>
-        <c:tickLblPos val="nextTo"/>
-        <c:crossAx val="48650112"/>
-        <c:crosses val="autoZero"/>
-        <c:crossBetween val="between"/>
-      </c:valAx>
-    </c:plotArea>
-    <c:plotVisOnly val="1"/>
-    <c:dispBlanksAs val="zero"/>
-    <c:showDLblsOverMax val="1"/>
-  </c:chart>
-  <c:externalData r:id="rId1">
-    <c:autoUpdate val="0"/>
-  </c:externalData>
-</c:chartSpace>
-</file>
-
 <file path=ppt/notesMasters/notesMaster1.xml><?xml version="1.0" encoding="utf-8"?>
 <p:notesMaster xmlns:a="http://schemas.openxmlformats.org/drawingml/2006/main" xmlns:r="http://schemas.openxmlformats.org/officeDocument/2006/relationships" xmlns:p="http://schemas.openxmlformats.org/presentationml/2006/main">
   <p:cSld>
@@ -572,7 +354,7 @@
           <a:lstStyle/>
           <a:p>
             <a:r>
-              <a:t>Source: Final_Report.docx. Salary results remain provisional pending currency and geographic corrections.</a:t>
+              <a:t>Opening problem statement supplied by the presenter. The project scope is North America, but the analyzed sample covers only U.S. and Canadian postings.</a:t>
             </a:r>
           </a:p>
         </p:txBody>
@@ -4888,16 +4670,38 @@
             <p:ph type="ctrTitle"/>
           </p:nvPr>
         </p:nvSpPr>
-        <p:spPr/>
+        <p:spPr>
+          <a:xfrm>
+            <a:off x="666750" y="428625"/>
+            <a:ext cx="10858500" cy="857250"/>
+          </a:xfrm>
+        </p:spPr>
         <p:txBody>
           <a:bodyPr>
             <a:normAutofit/>
           </a:bodyPr>
           <a:lstStyle/>
           <a:p>
-            <a:r>
-              <a:rPr b="1"/>
-              <a:t>AI Jobs Project</a:t>
+            <a:pPr algn="l">
+              <a:defRPr sz="3150" b="1">
+                <a:solidFill>
+                  <a:srgbClr val="172B45"/>
+                </a:solidFill>
+                <a:latin typeface="Aptos"/>
+                <a:ea typeface="Aptos"/>
+                <a:cs typeface="Aptos"/>
+              </a:defRPr>
+            </a:pPr>
+            <a:r>
+              <a:rPr sz="3150" b="1">
+                <a:solidFill>
+                  <a:srgbClr val="172B45"/>
+                </a:solidFill>
+                <a:latin typeface="Aptos"/>
+                <a:ea typeface="Aptos"/>
+                <a:cs typeface="Aptos"/>
+              </a:rPr>
+              <a:t>Problem statement</a:t>
             </a:r>
             <a:endParaRPr/>
           </a:p>
@@ -4919,40 +4723,71 @@
             <p:ph type="subTitle" idx="1"/>
           </p:nvPr>
         </p:nvSpPr>
-        <p:spPr/>
-        <p:txBody>
-          <a:bodyPr/>
-          <a:lstStyle/>
-          <a:p>
-            <a:r>
-              <a:t>Job characteristics and salary analysis</a:t>
-            </a:r>
-          </a:p>
-          <a:p>
-            <a:r>
-              <a:t>Bruno Sanchez Parra</a:t>
-            </a:r>
-          </a:p>
-        </p:txBody>
-      </p:sp>
-      <p:sp>
-        <p:nvSpPr>
-          <p:cNvPr id="4" name="Rectangle 3">
-            <a:extLst>
-              <a:ext uri="{FF2B5EF4-FFF2-40B4-BE49-F238E27FC236}">
-                <a16:creationId xmlns:a16="http://schemas.microsoft.com/office/drawing/2014/main" id="{092EF678-CD2D-49EC-AA67-9BC9C99656D0}"/>
-              </a:ext>
-            </a:extLst>
-          </p:cNvPr>
-          <p:cNvSpPr>
-            <a:spLocks noGrp="1"/>
-          </p:cNvSpPr>
-          <p:nvPr/>
-        </p:nvSpPr>
         <p:spPr>
           <a:xfrm>
-            <a:off x="2286000" y="5143500"/>
-            <a:ext cx="7620000" cy="571500"/>
+            <a:off x="762000" y="1714500"/>
+            <a:ext cx="10572750" cy="3238500"/>
+          </a:xfrm>
+        </p:spPr>
+        <p:txBody>
+          <a:bodyPr>
+            <a:noAutofit/>
+          </a:bodyPr>
+          <a:lstStyle/>
+          <a:p>
+            <a:pPr algn="l">
+              <a:defRPr sz="2325">
+                <a:solidFill>
+                  <a:srgbClr val="172B45"/>
+                </a:solidFill>
+                <a:latin typeface="Aptos"/>
+                <a:ea typeface="Aptos"/>
+                <a:cs typeface="Aptos"/>
+              </a:defRPr>
+            </a:pPr>
+            <a:r>
+              <a:rPr sz="2325">
+                <a:solidFill>
+                  <a:srgbClr val="172B45"/>
+                </a:solidFill>
+                <a:latin typeface="Aptos"/>
+                <a:ea typeface="Aptos"/>
+                <a:cs typeface="Aptos"/>
+              </a:rPr>
+              <a:t>The rapid expansion of AI-related employment has created inconsistent and overlapping job titles across industries, making it difficult for job seekers and analysts to understand how AI roles differ in compensation, experience expectations, work arrangements, and market positioning. </a:t>
+            </a:r>
+            <a:r>
+              <a:rPr sz="2325" dirty="0">
+                <a:solidFill>
+                  <a:srgbClr val="172B45"/>
+                </a:solidFill>
+                <a:latin typeface="Aptos"/>
+                <a:ea typeface="Aptos"/>
+                <a:cs typeface="Aptos"/>
+              </a:rPr>
+              <a:t>This project aims to identify meaningful categories of AI jobs across North America and explain the characteristics that distinguish them and what can be expected of them.</a:t>
+            </a:r>
+          </a:p>
+        </p:txBody>
+      </p:sp>
+      <p:sp>
+        <p:nvSpPr>
+          <p:cNvPr id="4" name="Rectangle 3">
+            <a:extLst>
+              <a:ext uri="{FF2B5EF4-FFF2-40B4-BE49-F238E27FC236}">
+                <a16:creationId xmlns:a16="http://schemas.microsoft.com/office/drawing/2014/main" id="{747FBD86-6753-4384-B1B5-8EAF68445059}"/>
+              </a:ext>
+            </a:extLst>
+          </p:cNvPr>
+          <p:cNvSpPr>
+            <a:spLocks noGrp="1"/>
+          </p:cNvSpPr>
+          <p:nvPr/>
+        </p:nvSpPr>
+        <p:spPr>
+          <a:xfrm>
+            <a:off x="762000" y="5867400"/>
+            <a:ext cx="10477500" cy="447675"/>
           </a:xfrm>
           <a:prstGeom prst="rect">
             <a:avLst/>
@@ -4969,7 +4804,7 @@
           <a:lstStyle/>
           <a:p>
             <a:pPr>
-              <a:defRPr sz="1950" b="0">
+              <a:defRPr sz="1350" b="0">
                 <a:solidFill>
                   <a:srgbClr val="687887"/>
                 </a:solidFill>
@@ -4979,7 +4814,7 @@
               </a:defRPr>
             </a:pPr>
             <a:r>
-              <a:rPr sz="1950" b="0">
+              <a:rPr sz="1350" b="0">
                 <a:solidFill>
                   <a:srgbClr val="687887"/>
                 </a:solidFill>
@@ -4987,7 +4822,7 @@
                 <a:ea typeface="Aptos"/>
                 <a:cs typeface="Aptos"/>
               </a:rPr>
-              <a:t>Findings from U.S. and Canadian job postings</a:t>
+              <a:t>AI Jobs Project   Bruno Sanchez Parra</a:t>
             </a:r>
           </a:p>
         </p:txBody>
@@ -5032,10 +4867,10 @@
       </p:grpSpPr>
       <p:sp>
         <p:nvSpPr>
-          <p:cNvPr id="7" name="Rectangle 6">
-            <a:extLst>
-              <a:ext uri="{FF2B5EF4-FFF2-40B4-BE49-F238E27FC236}">
-                <a16:creationId xmlns:a16="http://schemas.microsoft.com/office/drawing/2014/main" id="{3DEF5492-2ADE-4892-AD4B-752918B4EAD6}"/>
+          <p:cNvPr id="5" name="Rectangle 4">
+            <a:extLst>
+              <a:ext uri="{FF2B5EF4-FFF2-40B4-BE49-F238E27FC236}">
+                <a16:creationId xmlns:a16="http://schemas.microsoft.com/office/drawing/2014/main" id="{2900CDDD-CD7E-47D1-90B5-5DCEB0A7B952}"/>
               </a:ext>
             </a:extLst>
           </p:cNvPr>
@@ -5082,7 +4917,7 @@
                 <a:ea typeface="Aptos"/>
                 <a:cs typeface="Aptos"/>
               </a:rPr>
-              <a:t>Model features and evaluation</a:t>
+              <a:t>Business use requires corrected salary data</a:t>
             </a:r>
           </a:p>
         </p:txBody>
@@ -5092,7 +4927,7 @@
           <p:cNvPr id="2" name="Rectangle 1">
             <a:extLst>
               <a:ext uri="{FF2B5EF4-FFF2-40B4-BE49-F238E27FC236}">
-                <a16:creationId xmlns:a16="http://schemas.microsoft.com/office/drawing/2014/main" id="{A99C3839-F9D7-45EC-A301-19A484F926EA}"/>
+                <a16:creationId xmlns:a16="http://schemas.microsoft.com/office/drawing/2014/main" id="{10A2797E-F996-4996-9FA2-CC3052820D73}"/>
               </a:ext>
             </a:extLst>
           </p:cNvPr>
@@ -5144,183 +4979,266 @@
           </a:p>
         </p:txBody>
       </p:sp>
-      <p:sp>
-        <p:nvSpPr>
-          <p:cNvPr id="3" name="Rectangle 2">
-            <a:extLst>
-              <a:ext uri="{FF2B5EF4-FFF2-40B4-BE49-F238E27FC236}">
-                <a16:creationId xmlns:a16="http://schemas.microsoft.com/office/drawing/2014/main" id="{41050295-8599-4C83-B8CA-489C206FE6A3}"/>
-              </a:ext>
-            </a:extLst>
-          </p:cNvPr>
-          <p:cNvSpPr>
-            <a:spLocks noGrp="1"/>
-          </p:cNvSpPr>
+      <p:graphicFrame>
+        <p:nvGraphicFramePr>
+          <p:cNvPr id="7" name="Table 6"/>
+          <p:cNvGraphicFramePr/>
           <p:nvPr/>
-        </p:nvSpPr>
-        <p:spPr>
-          <a:xfrm>
-            <a:off x="762000" y="1571625"/>
-            <a:ext cx="10572750" cy="857250"/>
-          </a:xfrm>
-          <a:prstGeom prst="rect">
-            <a:avLst/>
-          </a:prstGeom>
-          <a:noFill/>
-          <a:ln w="0">
-            <a:noFill/>
-          </a:ln>
-        </p:spPr>
-        <p:txBody>
-          <a:bodyPr>
-            <a:noAutofit/>
-          </a:bodyPr>
-          <a:lstStyle/>
-          <a:p>
-            <a:pPr>
-              <a:defRPr sz="2100" b="0">
-                <a:solidFill>
-                  <a:srgbClr val="172B45"/>
-                </a:solidFill>
-                <a:latin typeface="Aptos"/>
-                <a:ea typeface="Aptos"/>
-                <a:cs typeface="Aptos"/>
-              </a:defRPr>
-            </a:pPr>
-            <a:r>
-              <a:rPr sz="2100" b="0">
-                <a:solidFill>
-                  <a:srgbClr val="172B45"/>
-                </a:solidFill>
-                <a:latin typeface="Aptos"/>
-                <a:ea typeface="Aptos"/>
-                <a:cs typeface="Aptos"/>
-              </a:rPr>
-              <a:t>Predictors: normalized years of experience, education indicators, experience-level indicators, and 15 skill indicators.</a:t>
-            </a:r>
-          </a:p>
-        </p:txBody>
-      </p:sp>
+        </p:nvGraphicFramePr>
+        <p:xfrm>
+          <a:off x="762000" y="1524000"/>
+          <a:ext cx="10668000" cy="3143252"/>
+        </p:xfrm>
+        <a:graphic>
+          <a:graphicData uri="http://schemas.openxmlformats.org/drawingml/2006/table">
+            <a:tbl>
+              <a:tblPr/>
+              <a:tblGrid>
+                <a:gridCol w="5334000">
+                  <a:extLst>
+                    <a:ext uri="{9D8B030D-6E8A-4147-A177-3AD203B41FA5}">
+                      <a16:colId xmlns:a16="http://schemas.microsoft.com/office/drawing/2014/main" val="20000"/>
+                    </a:ext>
+                  </a:extLst>
+                </a:gridCol>
+                <a:gridCol w="5334000">
+                  <a:extLst>
+                    <a:ext uri="{9D8B030D-6E8A-4147-A177-3AD203B41FA5}">
+                      <a16:colId xmlns:a16="http://schemas.microsoft.com/office/drawing/2014/main" val="20001"/>
+                    </a:ext>
+                  </a:extLst>
+                </a:gridCol>
+              </a:tblGrid>
+              <a:tr h="785813">
+                <a:tc>
+                  <a:txBody>
+                    <a:bodyPr/>
+                    <a:lstStyle/>
+                    <a:p>
+                      <a:r>
+                        <a:rPr sz="2025" b="1">
+                          <a:solidFill>
+                            <a:srgbClr val="FFFFFF"/>
+                          </a:solidFill>
+                          <a:latin typeface="Aptos"/>
+                          <a:ea typeface="Aptos"/>
+                          <a:cs typeface="Aptos"/>
+                        </a:rPr>
+                        <a:t>Useful now</a:t>
+                      </a:r>
+                    </a:p>
+                  </a:txBody>
+                  <a:tcPr>
+                    <a:solidFill>
+                      <a:srgbClr val="172B45"/>
+                    </a:solidFill>
+                  </a:tcPr>
+                </a:tc>
+                <a:tc>
+                  <a:txBody>
+                    <a:bodyPr/>
+                    <a:lstStyle/>
+                    <a:p>
+                      <a:r>
+                        <a:rPr sz="2025" b="1">
+                          <a:solidFill>
+                            <a:srgbClr val="FFFFFF"/>
+                          </a:solidFill>
+                          <a:latin typeface="Aptos"/>
+                          <a:ea typeface="Aptos"/>
+                          <a:cs typeface="Aptos"/>
+                        </a:rPr>
+                        <a:t>Requires further validation</a:t>
+                      </a:r>
+                    </a:p>
+                  </a:txBody>
+                  <a:tcPr>
+                    <a:solidFill>
+                      <a:srgbClr val="172B45"/>
+                    </a:solidFill>
+                  </a:tcPr>
+                </a:tc>
+                <a:extLst>
+                  <a:ext uri="{0D108BD9-81ED-4DB2-BD59-A6C34878D82A}">
+                    <a16:rowId xmlns:a16="http://schemas.microsoft.com/office/drawing/2014/main" val="10000"/>
+                  </a:ext>
+                </a:extLst>
+              </a:tr>
+              <a:tr h="785813">
+                <a:tc>
+                  <a:txBody>
+                    <a:bodyPr/>
+                    <a:lstStyle/>
+                    <a:p>
+                      <a:r>
+                        <a:rPr sz="2025" b="0">
+                          <a:solidFill>
+                            <a:srgbClr val="172B45"/>
+                          </a:solidFill>
+                          <a:latin typeface="Aptos"/>
+                          <a:ea typeface="Aptos"/>
+                          <a:cs typeface="Aptos"/>
+                        </a:rPr>
+                        <a:t>Role-specific skill profiles</a:t>
+                      </a:r>
+                    </a:p>
+                  </a:txBody>
+                  <a:tcPr>
+                    <a:solidFill>
+                      <a:srgbClr val="F0F4F8"/>
+                    </a:solidFill>
+                  </a:tcPr>
+                </a:tc>
+                <a:tc>
+                  <a:txBody>
+                    <a:bodyPr/>
+                    <a:lstStyle/>
+                    <a:p>
+                      <a:r>
+                        <a:rPr sz="2025" b="0">
+                          <a:solidFill>
+                            <a:srgbClr val="172B45"/>
+                          </a:solidFill>
+                          <a:latin typeface="Aptos"/>
+                          <a:ea typeface="Aptos"/>
+                          <a:cs typeface="Aptos"/>
+                        </a:rPr>
+                        <a:t>Compensation benchmarks and salary forecasts</a:t>
+                      </a:r>
+                    </a:p>
+                  </a:txBody>
+                  <a:tcPr>
+                    <a:solidFill>
+                      <a:srgbClr val="F0F4F8"/>
+                    </a:solidFill>
+                  </a:tcPr>
+                </a:tc>
+                <a:extLst>
+                  <a:ext uri="{0D108BD9-81ED-4DB2-BD59-A6C34878D82A}">
+                    <a16:rowId xmlns:a16="http://schemas.microsoft.com/office/drawing/2014/main" val="10001"/>
+                  </a:ext>
+                </a:extLst>
+              </a:tr>
+              <a:tr h="785813">
+                <a:tc>
+                  <a:txBody>
+                    <a:bodyPr/>
+                    <a:lstStyle/>
+                    <a:p>
+                      <a:r>
+                        <a:rPr sz="2025" b="0">
+                          <a:solidFill>
+                            <a:srgbClr val="172B45"/>
+                          </a:solidFill>
+                          <a:latin typeface="Aptos"/>
+                          <a:ea typeface="Aptos"/>
+                          <a:cs typeface="Aptos"/>
+                        </a:rPr>
+                        <a:t>Discussion of experience expectations</a:t>
+                      </a:r>
+                    </a:p>
+                  </a:txBody>
+                  <a:tcPr>
+                    <a:solidFill>
+                      <a:srgbClr val="FFFFFF"/>
+                    </a:solidFill>
+                  </a:tcPr>
+                </a:tc>
+                <a:tc>
+                  <a:txBody>
+                    <a:bodyPr/>
+                    <a:lstStyle/>
+                    <a:p>
+                      <a:r>
+                        <a:rPr sz="2025" b="0">
+                          <a:solidFill>
+                            <a:srgbClr val="172B45"/>
+                          </a:solidFill>
+                          <a:latin typeface="Aptos"/>
+                          <a:ea typeface="Aptos"/>
+                          <a:cs typeface="Aptos"/>
+                        </a:rPr>
+                        <a:t>Market-wide demand or hiring difficulty estimates</a:t>
+                      </a:r>
+                    </a:p>
+                  </a:txBody>
+                  <a:tcPr>
+                    <a:solidFill>
+                      <a:srgbClr val="FFFFFF"/>
+                    </a:solidFill>
+                  </a:tcPr>
+                </a:tc>
+                <a:extLst>
+                  <a:ext uri="{0D108BD9-81ED-4DB2-BD59-A6C34878D82A}">
+                    <a16:rowId xmlns:a16="http://schemas.microsoft.com/office/drawing/2014/main" val="10002"/>
+                  </a:ext>
+                </a:extLst>
+              </a:tr>
+              <a:tr h="785813">
+                <a:tc>
+                  <a:txBody>
+                    <a:bodyPr/>
+                    <a:lstStyle/>
+                    <a:p>
+                      <a:r>
+                        <a:rPr sz="2025" b="0">
+                          <a:solidFill>
+                            <a:srgbClr val="172B45"/>
+                          </a:solidFill>
+                          <a:latin typeface="Aptos"/>
+                          <a:ea typeface="Aptos"/>
+                          <a:cs typeface="Aptos"/>
+                        </a:rPr>
+                        <a:t>Sample work-arrangement patterns</a:t>
+                      </a:r>
+                    </a:p>
+                  </a:txBody>
+                  <a:tcPr>
+                    <a:solidFill>
+                      <a:srgbClr val="F0F4F8"/>
+                    </a:solidFill>
+                  </a:tcPr>
+                </a:tc>
+                <a:tc>
+                  <a:txBody>
+                    <a:bodyPr/>
+                    <a:lstStyle/>
+                    <a:p>
+                      <a:r>
+                        <a:rPr sz="2025" b="0">
+                          <a:solidFill>
+                            <a:srgbClr val="172B45"/>
+                          </a:solidFill>
+                          <a:latin typeface="Aptos"/>
+                          <a:ea typeface="Aptos"/>
+                          <a:cs typeface="Aptos"/>
+                        </a:rPr>
+                        <a:t>Generalization to future postings and new employers</a:t>
+                      </a:r>
+                    </a:p>
+                  </a:txBody>
+                  <a:tcPr>
+                    <a:solidFill>
+                      <a:srgbClr val="F0F4F8"/>
+                    </a:solidFill>
+                  </a:tcPr>
+                </a:tc>
+                <a:extLst>
+                  <a:ext uri="{0D108BD9-81ED-4DB2-BD59-A6C34878D82A}">
+                    <a16:rowId xmlns:a16="http://schemas.microsoft.com/office/drawing/2014/main" val="10003"/>
+                  </a:ext>
+                </a:extLst>
+              </a:tr>
+            </a:tbl>
+          </a:graphicData>
+        </a:graphic>
+      </p:graphicFrame>
       <p:sp>
         <p:nvSpPr>
           <p:cNvPr id="4" name="Rectangle 3">
             <a:extLst>
               <a:ext uri="{FF2B5EF4-FFF2-40B4-BE49-F238E27FC236}">
-                <a16:creationId xmlns:a16="http://schemas.microsoft.com/office/drawing/2014/main" id="{D15818CD-80EF-4F69-9FC6-0FD29BDC9911}"/>
-              </a:ext>
-            </a:extLst>
-          </p:cNvPr>
-          <p:cNvSpPr>
-            <a:spLocks noGrp="1"/>
-          </p:cNvSpPr>
-          <p:nvPr/>
-        </p:nvSpPr>
-        <p:spPr>
-          <a:xfrm>
-            <a:off x="762000" y="2571750"/>
-            <a:ext cx="10572750" cy="857250"/>
-          </a:xfrm>
-          <a:prstGeom prst="rect">
-            <a:avLst/>
-          </a:prstGeom>
-          <a:noFill/>
-          <a:ln w="0">
-            <a:noFill/>
-          </a:ln>
-        </p:spPr>
-        <p:txBody>
-          <a:bodyPr>
-            <a:noAutofit/>
-          </a:bodyPr>
-          <a:lstStyle/>
-          <a:p>
-            <a:pPr>
-              <a:defRPr sz="2100" b="0">
-                <a:solidFill>
-                  <a:srgbClr val="172B45"/>
-                </a:solidFill>
-                <a:latin typeface="Aptos"/>
-                <a:ea typeface="Aptos"/>
-                <a:cs typeface="Aptos"/>
-              </a:defRPr>
-            </a:pPr>
-            <a:r>
-              <a:rPr sz="2100" b="0">
-                <a:solidFill>
-                  <a:srgbClr val="172B45"/>
-                </a:solidFill>
-                <a:latin typeface="Aptos"/>
-                <a:ea typeface="Aptos"/>
-                <a:cs typeface="Aptos"/>
-              </a:rPr>
-              <a:t>80/20 split: 7,012 training rows and 1,754 test rows. Fixed random seed: 42.</a:t>
-            </a:r>
-          </a:p>
-        </p:txBody>
-      </p:sp>
-      <p:sp>
-        <p:nvSpPr>
-          <p:cNvPr id="5" name="Rectangle 4">
-            <a:extLst>
-              <a:ext uri="{FF2B5EF4-FFF2-40B4-BE49-F238E27FC236}">
-                <a16:creationId xmlns:a16="http://schemas.microsoft.com/office/drawing/2014/main" id="{FB8DFCDF-776E-4EB1-AC2B-C8E0CE5BDD10}"/>
-              </a:ext>
-            </a:extLst>
-          </p:cNvPr>
-          <p:cNvSpPr>
-            <a:spLocks noGrp="1"/>
-          </p:cNvSpPr>
-          <p:nvPr/>
-        </p:nvSpPr>
-        <p:spPr>
-          <a:xfrm>
-            <a:off x="762000" y="3571875"/>
-            <a:ext cx="10572750" cy="857250"/>
-          </a:xfrm>
-          <a:prstGeom prst="rect">
-            <a:avLst/>
-          </a:prstGeom>
-          <a:noFill/>
-          <a:ln w="0">
-            <a:noFill/>
-          </a:ln>
-        </p:spPr>
-        <p:txBody>
-          <a:bodyPr>
-            <a:noAutofit/>
-          </a:bodyPr>
-          <a:lstStyle/>
-          <a:p>
-            <a:pPr>
-              <a:defRPr sz="2100" b="0">
-                <a:solidFill>
-                  <a:srgbClr val="172B45"/>
-                </a:solidFill>
-                <a:latin typeface="Aptos"/>
-                <a:ea typeface="Aptos"/>
-                <a:cs typeface="Aptos"/>
-              </a:defRPr>
-            </a:pPr>
-            <a:r>
-              <a:rPr sz="2100" b="0">
-                <a:solidFill>
-                  <a:srgbClr val="172B45"/>
-                </a:solidFill>
-                <a:latin typeface="Aptos"/>
-                <a:ea typeface="Aptos"/>
-                <a:cs typeface="Aptos"/>
-              </a:rPr>
-              <a:t>Five-fold shuffled cross-validation selected models using MAE. RMSE and R² supplemented the final test comparison.</a:t>
-            </a:r>
-          </a:p>
-        </p:txBody>
-      </p:sp>
-      <p:sp>
-        <p:nvSpPr>
-          <p:cNvPr id="6" name="Rectangle 5">
-            <a:extLst>
-              <a:ext uri="{FF2B5EF4-FFF2-40B4-BE49-F238E27FC236}">
-                <a16:creationId xmlns:a16="http://schemas.microsoft.com/office/drawing/2014/main" id="{AA0926D2-9E3B-4DDF-A552-C0812284EF87}"/>
+                <a16:creationId xmlns:a16="http://schemas.microsoft.com/office/drawing/2014/main" id="{BD8A6DC1-B24D-4080-8AD1-64C9A05319B0}"/>
               </a:ext>
             </a:extLst>
           </p:cNvPr>
@@ -5367,7 +5285,7 @@
                 <a:ea typeface="Aptos"/>
                 <a:cs typeface="Aptos"/>
               </a:rPr>
-              <a:t>Linear Regression used 20 predictors. Random Forest used 22. A mean baseline provided a reference.</a:t>
+              <a:t>The sample covers the United States and Canada. It does not represent all of North America.</a:t>
             </a:r>
           </a:p>
         </p:txBody>
@@ -5375,7 +5293,7 @@
     </p:spTree>
     <p:extLst>
       <p:ext uri="{BB962C8B-B14F-4D97-AF65-F5344CB8AC3E}">
-        <p14:creationId xmlns:p14="http://schemas.microsoft.com/office/powerpoint/2010/main" val="487841170"/>
+        <p14:creationId xmlns:p14="http://schemas.microsoft.com/office/powerpoint/2010/main" val="1515171353"/>
       </p:ext>
     </p:extLst>
   </p:cSld>
@@ -5412,10 +5330,10 @@
       </p:grpSpPr>
       <p:sp>
         <p:nvSpPr>
-          <p:cNvPr id="7" name="Rectangle 6">
-            <a:extLst>
-              <a:ext uri="{FF2B5EF4-FFF2-40B4-BE49-F238E27FC236}">
-                <a16:creationId xmlns:a16="http://schemas.microsoft.com/office/drawing/2014/main" id="{A23ABEAB-1976-4B5A-9446-A6255E0213F4}"/>
+          <p:cNvPr id="5" name="Rectangle 4">
+            <a:extLst>
+              <a:ext uri="{FF2B5EF4-FFF2-40B4-BE49-F238E27FC236}">
+                <a16:creationId xmlns:a16="http://schemas.microsoft.com/office/drawing/2014/main" id="{0BDA5A7A-3E9C-4E7B-8BB6-C1E4DE261A8C}"/>
               </a:ext>
             </a:extLst>
           </p:cNvPr>
@@ -5462,7 +5380,7 @@
                 <a:ea typeface="Aptos"/>
                 <a:cs typeface="Aptos"/>
               </a:rPr>
-              <a:t>Model selection favored constrained fitting</a:t>
+              <a:t>Who can benefit from this information?</a:t>
             </a:r>
           </a:p>
         </p:txBody>
@@ -5472,7 +5390,7 @@
           <p:cNvPr id="2" name="Rectangle 1">
             <a:extLst>
               <a:ext uri="{FF2B5EF4-FFF2-40B4-BE49-F238E27FC236}">
-                <a16:creationId xmlns:a16="http://schemas.microsoft.com/office/drawing/2014/main" id="{39148957-05DA-4763-8648-73320C67E275}"/>
+                <a16:creationId xmlns:a16="http://schemas.microsoft.com/office/drawing/2014/main" id="{B23803E8-1455-4313-9254-9C9C1F7F7156}"/>
               </a:ext>
             </a:extLst>
           </p:cNvPr>
@@ -5526,49 +5444,42 @@
       </p:sp>
       <p:graphicFrame>
         <p:nvGraphicFramePr>
-          <p:cNvPr id="9" name="Table 8"/>
+          <p:cNvPr id="7" name="Table 6"/>
           <p:cNvGraphicFramePr/>
           <p:nvPr/>
         </p:nvGraphicFramePr>
         <p:xfrm>
-          <a:off x="762000" y="1524000"/>
-          <a:ext cx="10668000" cy="2381250"/>
+          <a:off x="762000" y="1428750"/>
+          <a:ext cx="10668000" cy="3810000"/>
         </p:xfrm>
         <a:graphic>
           <a:graphicData uri="http://schemas.openxmlformats.org/drawingml/2006/table">
             <a:tbl>
               <a:tblPr/>
               <a:tblGrid>
-                <a:gridCol w="2857500">
+                <a:gridCol w="4381500">
                   <a:extLst>
                     <a:ext uri="{9D8B030D-6E8A-4147-A177-3AD203B41FA5}">
                       <a16:colId xmlns:a16="http://schemas.microsoft.com/office/drawing/2014/main" val="20000"/>
                     </a:ext>
                   </a:extLst>
                 </a:gridCol>
-                <a:gridCol w="5810250">
+                <a:gridCol w="6286500">
                   <a:extLst>
                     <a:ext uri="{9D8B030D-6E8A-4147-A177-3AD203B41FA5}">
                       <a16:colId xmlns:a16="http://schemas.microsoft.com/office/drawing/2014/main" val="20001"/>
                     </a:ext>
                   </a:extLst>
                 </a:gridCol>
-                <a:gridCol w="2000250">
-                  <a:extLst>
-                    <a:ext uri="{9D8B030D-6E8A-4147-A177-3AD203B41FA5}">
-                      <a16:colId xmlns:a16="http://schemas.microsoft.com/office/drawing/2014/main" val="20002"/>
-                    </a:ext>
-                  </a:extLst>
-                </a:gridCol>
               </a:tblGrid>
-              <a:tr h="793750">
+              <a:tr h="762000">
                 <a:tc>
                   <a:txBody>
                     <a:bodyPr/>
                     <a:lstStyle/>
                     <a:p>
                       <a:r>
-                        <a:rPr sz="1725" b="1">
+                        <a:rPr sz="1950" b="1">
                           <a:solidFill>
                             <a:srgbClr val="FFFFFF"/>
                           </a:solidFill>
@@ -5576,7 +5487,7 @@
                           <a:ea typeface="Aptos"/>
                           <a:cs typeface="Aptos"/>
                         </a:rPr>
-                        <a:t>Model</a:t>
+                        <a:t>Audience</a:t>
                       </a:r>
                     </a:p>
                   </a:txBody>
@@ -5592,7 +5503,7 @@
                     <a:lstStyle/>
                     <a:p>
                       <a:r>
-                        <a:rPr sz="1725" b="1">
+                        <a:rPr sz="1950" b="1">
                           <a:solidFill>
                             <a:srgbClr val="FFFFFF"/>
                           </a:solidFill>
@@ -5600,31 +5511,7 @@
                           <a:ea typeface="Aptos"/>
                           <a:cs typeface="Aptos"/>
                         </a:rPr>
-                        <a:t>Selected configuration</a:t>
-                      </a:r>
-                    </a:p>
-                  </a:txBody>
-                  <a:tcPr>
-                    <a:solidFill>
-                      <a:srgbClr val="172B45"/>
-                    </a:solidFill>
-                  </a:tcPr>
-                </a:tc>
-                <a:tc>
-                  <a:txBody>
-                    <a:bodyPr/>
-                    <a:lstStyle/>
-                    <a:p>
-                      <a:r>
-                        <a:rPr sz="1725" b="1">
-                          <a:solidFill>
-                            <a:srgbClr val="FFFFFF"/>
-                          </a:solidFill>
-                          <a:latin typeface="Aptos"/>
-                          <a:ea typeface="Aptos"/>
-                          <a:cs typeface="Aptos"/>
-                        </a:rPr>
-                        <a:t>Validation MAE</a:t>
+                        <a:t>Potential benefit</a:t>
                       </a:r>
                     </a:p>
                   </a:txBody>
@@ -5640,14 +5527,14 @@
                   </a:ext>
                 </a:extLst>
               </a:tr>
-              <a:tr h="793750">
+              <a:tr h="762000">
                 <a:tc>
                   <a:txBody>
                     <a:bodyPr/>
                     <a:lstStyle/>
                     <a:p>
                       <a:r>
-                        <a:rPr sz="1725" b="0">
+                        <a:rPr sz="1950" b="0">
                           <a:solidFill>
                             <a:srgbClr val="172B45"/>
                           </a:solidFill>
@@ -5655,7 +5542,7 @@
                           <a:ea typeface="Aptos"/>
                           <a:cs typeface="Aptos"/>
                         </a:rPr>
-                        <a:t>Linear Regression</a:t>
+                        <a:t>HR and recruiting teams</a:t>
                       </a:r>
                     </a:p>
                   </a:txBody>
@@ -5671,7 +5558,7 @@
                     <a:lstStyle/>
                     <a:p>
                       <a:r>
-                        <a:rPr sz="1725" b="0">
+                        <a:rPr sz="1950" b="0">
                           <a:solidFill>
                             <a:srgbClr val="172B45"/>
                           </a:solidFill>
@@ -5679,7 +5566,93 @@
                           <a:ea typeface="Aptos"/>
                           <a:cs typeface="Aptos"/>
                         </a:rPr>
-                        <a:t>Intercept on, nonnegative coefficients</a:t>
+                        <a:t>Clarify requirements and screen for relevant skills</a:t>
+                      </a:r>
+                    </a:p>
+                  </a:txBody>
+                  <a:tcPr>
+                    <a:solidFill>
+                      <a:srgbClr val="F0F4F8"/>
+                    </a:solidFill>
+                  </a:tcPr>
+                </a:tc>
+                <a:extLst>
+                  <a:ext uri="{0D108BD9-81ED-4DB2-BD59-A6C34878D82A}">
+                    <a16:rowId xmlns:a16="http://schemas.microsoft.com/office/drawing/2014/main" val="10001"/>
+                  </a:ext>
+                </a:extLst>
+              </a:tr>
+              <a:tr h="762000">
+                <a:tc>
+                  <a:txBody>
+                    <a:bodyPr/>
+                    <a:lstStyle/>
+                    <a:p>
+                      <a:r>
+                        <a:rPr sz="1950" b="0">
+                          <a:solidFill>
+                            <a:srgbClr val="172B45"/>
+                          </a:solidFill>
+                          <a:latin typeface="Aptos"/>
+                          <a:ea typeface="Aptos"/>
+                          <a:cs typeface="Aptos"/>
+                        </a:rPr>
+                        <a:t>Executives and workforce planners</a:t>
+                      </a:r>
+                    </a:p>
+                  </a:txBody>
+                  <a:tcPr>
+                    <a:solidFill>
+                      <a:srgbClr val="FFFFFF"/>
+                    </a:solidFill>
+                  </a:tcPr>
+                </a:tc>
+                <a:tc>
+                  <a:txBody>
+                    <a:bodyPr/>
+                    <a:lstStyle/>
+                    <a:p>
+                      <a:r>
+                        <a:rPr sz="1950" b="0">
+                          <a:solidFill>
+                            <a:srgbClr val="172B45"/>
+                          </a:solidFill>
+                          <a:latin typeface="Aptos"/>
+                          <a:ea typeface="Aptos"/>
+                          <a:cs typeface="Aptos"/>
+                        </a:rPr>
+                        <a:t>Compare role needs and prioritize further workforce analysis</a:t>
+                      </a:r>
+                    </a:p>
+                  </a:txBody>
+                  <a:tcPr>
+                    <a:solidFill>
+                      <a:srgbClr val="FFFFFF"/>
+                    </a:solidFill>
+                  </a:tcPr>
+                </a:tc>
+                <a:extLst>
+                  <a:ext uri="{0D108BD9-81ED-4DB2-BD59-A6C34878D82A}">
+                    <a16:rowId xmlns:a16="http://schemas.microsoft.com/office/drawing/2014/main" val="10002"/>
+                  </a:ext>
+                </a:extLst>
+              </a:tr>
+              <a:tr h="762000">
+                <a:tc>
+                  <a:txBody>
+                    <a:bodyPr/>
+                    <a:lstStyle/>
+                    <a:p>
+                      <a:r>
+                        <a:rPr sz="1950" b="0">
+                          <a:solidFill>
+                            <a:srgbClr val="172B45"/>
+                          </a:solidFill>
+                          <a:latin typeface="Aptos"/>
+                          <a:ea typeface="Aptos"/>
+                          <a:cs typeface="Aptos"/>
+                        </a:rPr>
+                        <a:t>Academic leaders and educators</a:t>
                       </a:r>
                     </a:p>
                   </a:txBody>
@@ -5695,7 +5668,7 @@
                     <a:lstStyle/>
                     <a:p>
                       <a:r>
-                        <a:rPr sz="1725" b="0">
+                        <a:rPr sz="1950" b="0">
                           <a:solidFill>
                             <a:srgbClr val="172B45"/>
                           </a:solidFill>
@@ -5703,7 +5676,7 @@
                           <a:ea typeface="Aptos"/>
                           <a:cs typeface="Aptos"/>
                         </a:rPr>
-                        <a:t>$9,735.49</a:t>
+                        <a:t>Align course topics with specialization-specific skills</a:t>
                       </a:r>
                     </a:p>
                   </a:txBody>
@@ -5715,18 +5688,18 @@
                 </a:tc>
                 <a:extLst>
                   <a:ext uri="{0D108BD9-81ED-4DB2-BD59-A6C34878D82A}">
-                    <a16:rowId xmlns:a16="http://schemas.microsoft.com/office/drawing/2014/main" val="10001"/>
+                    <a16:rowId xmlns:a16="http://schemas.microsoft.com/office/drawing/2014/main" val="10003"/>
                   </a:ext>
                 </a:extLst>
               </a:tr>
-              <a:tr h="793750">
+              <a:tr h="762000">
                 <a:tc>
                   <a:txBody>
                     <a:bodyPr/>
                     <a:lstStyle/>
                     <a:p>
                       <a:r>
-                        <a:rPr sz="1725" b="0">
+                        <a:rPr sz="1950" b="0">
                           <a:solidFill>
                             <a:srgbClr val="172B45"/>
                           </a:solidFill>
@@ -5734,7 +5707,7 @@
                           <a:ea typeface="Aptos"/>
                           <a:cs typeface="Aptos"/>
                         </a:rPr>
-                        <a:t>Random Forest</a:t>
+                        <a:t>Job seekers and career advisers</a:t>
                       </a:r>
                     </a:p>
                   </a:txBody>
@@ -5750,7 +5723,7 @@
                     <a:lstStyle/>
                     <a:p>
                       <a:r>
-                        <a:rPr sz="1725" b="0">
+                        <a:rPr sz="1950" b="0">
                           <a:solidFill>
                             <a:srgbClr val="172B45"/>
                           </a:solidFill>
@@ -5758,31 +5731,7 @@
                           <a:ea typeface="Aptos"/>
                           <a:cs typeface="Aptos"/>
                         </a:rPr>
-                        <a:t>Depth 8, minimum leaf 5, half of features</a:t>
-                      </a:r>
-                    </a:p>
-                  </a:txBody>
-                  <a:tcPr>
-                    <a:solidFill>
-                      <a:srgbClr val="FFFFFF"/>
-                    </a:solidFill>
-                  </a:tcPr>
-                </a:tc>
-                <a:tc>
-                  <a:txBody>
-                    <a:bodyPr/>
-                    <a:lstStyle/>
-                    <a:p>
-                      <a:r>
-                        <a:rPr sz="1725" b="0">
-                          <a:solidFill>
-                            <a:srgbClr val="172B45"/>
-                          </a:solidFill>
-                          <a:latin typeface="Aptos"/>
-                          <a:ea typeface="Aptos"/>
-                          <a:cs typeface="Aptos"/>
-                        </a:rPr>
-                        <a:t>$9,559.79</a:t>
+                        <a:t>Compare roles and identify skills to develop</a:t>
                       </a:r>
                     </a:p>
                   </a:txBody>
@@ -5794,7 +5743,7 @@
                 </a:tc>
                 <a:extLst>
                   <a:ext uri="{0D108BD9-81ED-4DB2-BD59-A6C34878D82A}">
-                    <a16:rowId xmlns:a16="http://schemas.microsoft.com/office/drawing/2014/main" val="10002"/>
+                    <a16:rowId xmlns:a16="http://schemas.microsoft.com/office/drawing/2014/main" val="10004"/>
                   </a:ext>
                 </a:extLst>
               </a:tr>
@@ -5807,121 +5756,7 @@
           <p:cNvPr id="4" name="Rectangle 3">
             <a:extLst>
               <a:ext uri="{FF2B5EF4-FFF2-40B4-BE49-F238E27FC236}">
-                <a16:creationId xmlns:a16="http://schemas.microsoft.com/office/drawing/2014/main" id="{8973F4A4-3D7F-425A-B05E-B25EEC076CE0}"/>
-              </a:ext>
-            </a:extLst>
-          </p:cNvPr>
-          <p:cNvSpPr>
-            <a:spLocks noGrp="1"/>
-          </p:cNvSpPr>
-          <p:nvPr/>
-        </p:nvSpPr>
-        <p:spPr>
-          <a:xfrm>
-            <a:off x="762000" y="4238625"/>
-            <a:ext cx="10477500" cy="571500"/>
-          </a:xfrm>
-          <a:prstGeom prst="rect">
-            <a:avLst/>
-          </a:prstGeom>
-          <a:noFill/>
-          <a:ln w="0">
-            <a:noFill/>
-          </a:ln>
-        </p:spPr>
-        <p:txBody>
-          <a:bodyPr>
-            <a:noAutofit/>
-          </a:bodyPr>
-          <a:lstStyle/>
-          <a:p>
-            <a:pPr>
-              <a:defRPr sz="2100" b="0">
-                <a:solidFill>
-                  <a:srgbClr val="172B45"/>
-                </a:solidFill>
-                <a:latin typeface="Aptos"/>
-                <a:ea typeface="Aptos"/>
-                <a:cs typeface="Aptos"/>
-              </a:defRPr>
-            </a:pPr>
-            <a:r>
-              <a:rPr sz="2100" b="0">
-                <a:solidFill>
-                  <a:srgbClr val="172B45"/>
-                </a:solidFill>
-                <a:latin typeface="Aptos"/>
-                <a:ea typeface="Aptos"/>
-                <a:cs typeface="Aptos"/>
-              </a:rPr>
-              <a:t>Linear tuning improved MAE by only $21.39, or about 0.22%.</a:t>
-            </a:r>
-          </a:p>
-        </p:txBody>
-      </p:sp>
-      <p:sp>
-        <p:nvSpPr>
-          <p:cNvPr id="5" name="Rectangle 4">
-            <a:extLst>
-              <a:ext uri="{FF2B5EF4-FFF2-40B4-BE49-F238E27FC236}">
-                <a16:creationId xmlns:a16="http://schemas.microsoft.com/office/drawing/2014/main" id="{80A66B69-F061-403A-BD2B-FBB3F97A448A}"/>
-              </a:ext>
-            </a:extLst>
-          </p:cNvPr>
-          <p:cNvSpPr>
-            <a:spLocks noGrp="1"/>
-          </p:cNvSpPr>
-          <p:nvPr/>
-        </p:nvSpPr>
-        <p:spPr>
-          <a:xfrm>
-            <a:off x="762000" y="5000625"/>
-            <a:ext cx="10477500" cy="666750"/>
-          </a:xfrm>
-          <a:prstGeom prst="rect">
-            <a:avLst/>
-          </a:prstGeom>
-          <a:noFill/>
-          <a:ln w="0">
-            <a:noFill/>
-          </a:ln>
-        </p:spPr>
-        <p:txBody>
-          <a:bodyPr>
-            <a:noAutofit/>
-          </a:bodyPr>
-          <a:lstStyle/>
-          <a:p>
-            <a:pPr>
-              <a:defRPr sz="2100" b="0">
-                <a:solidFill>
-                  <a:srgbClr val="172B45"/>
-                </a:solidFill>
-                <a:latin typeface="Aptos"/>
-                <a:ea typeface="Aptos"/>
-                <a:cs typeface="Aptos"/>
-              </a:defRPr>
-            </a:pPr>
-            <a:r>
-              <a:rPr sz="2100" b="0">
-                <a:solidFill>
-                  <a:srgbClr val="172B45"/>
-                </a:solidFill>
-                <a:latin typeface="Aptos"/>
-                <a:ea typeface="Aptos"/>
-                <a:cs typeface="Aptos"/>
-              </a:rPr>
-              <a:t>Deeper forests fit training rows more closely but performed worse in validation.</a:t>
-            </a:r>
-          </a:p>
-        </p:txBody>
-      </p:sp>
-      <p:sp>
-        <p:nvSpPr>
-          <p:cNvPr id="6" name="Rectangle 5">
-            <a:extLst>
-              <a:ext uri="{FF2B5EF4-FFF2-40B4-BE49-F238E27FC236}">
-                <a16:creationId xmlns:a16="http://schemas.microsoft.com/office/drawing/2014/main" id="{B80A14B0-ABD9-458D-A5EF-5AD7384245C4}"/>
+                <a16:creationId xmlns:a16="http://schemas.microsoft.com/office/drawing/2014/main" id="{18470813-23EE-446D-A96E-1B7A8460E132}"/>
               </a:ext>
             </a:extLst>
           </p:cNvPr>
@@ -5968,7 +5803,7 @@
                 <a:ea typeface="Aptos"/>
                 <a:cs typeface="Aptos"/>
               </a:rPr>
-              <a:t>Random Forest used 150 trees and eight tested combinations. All salary scores remain provisional.</a:t>
+              <a:t>Compensation-related benefits depend on correcting the data and rerunning the analysis.</a:t>
             </a:r>
           </a:p>
         </p:txBody>
@@ -5976,7 +5811,7 @@
     </p:spTree>
     <p:extLst>
       <p:ext uri="{BB962C8B-B14F-4D97-AF65-F5344CB8AC3E}">
-        <p14:creationId xmlns:p14="http://schemas.microsoft.com/office/powerpoint/2010/main" val="1015811208"/>
+        <p14:creationId xmlns:p14="http://schemas.microsoft.com/office/powerpoint/2010/main" val="687730660"/>
       </p:ext>
     </p:extLst>
   </p:cSld>
@@ -6013,10 +5848,10 @@
       </p:grpSpPr>
       <p:sp>
         <p:nvSpPr>
-          <p:cNvPr id="6" name="Rectangle 5">
-            <a:extLst>
-              <a:ext uri="{FF2B5EF4-FFF2-40B4-BE49-F238E27FC236}">
-                <a16:creationId xmlns:a16="http://schemas.microsoft.com/office/drawing/2014/main" id="{0D4D4C20-F3E8-4CEA-A1ED-B7E131898460}"/>
+          <p:cNvPr id="7" name="Rectangle 6">
+            <a:extLst>
+              <a:ext uri="{FF2B5EF4-FFF2-40B4-BE49-F238E27FC236}">
+                <a16:creationId xmlns:a16="http://schemas.microsoft.com/office/drawing/2014/main" id="{F0A300F6-84DA-4A1A-8574-377CBEB591B5}"/>
               </a:ext>
             </a:extLst>
           </p:cNvPr>
@@ -6063,7 +5898,7 @@
                 <a:ea typeface="Aptos"/>
                 <a:cs typeface="Aptos"/>
               </a:rPr>
-              <a:t>Random Forest has the lowest test error</a:t>
+              <a:t>Next steps for a defensible business application</a:t>
             </a:r>
           </a:p>
         </p:txBody>
@@ -6073,7 +5908,7 @@
           <p:cNvPr id="2" name="Rectangle 1">
             <a:extLst>
               <a:ext uri="{FF2B5EF4-FFF2-40B4-BE49-F238E27FC236}">
-                <a16:creationId xmlns:a16="http://schemas.microsoft.com/office/drawing/2014/main" id="{A30EB5A1-5324-4808-A28E-E9D1DF08D01D}"/>
+                <a16:creationId xmlns:a16="http://schemas.microsoft.com/office/drawing/2014/main" id="{A339483C-93B9-4C89-B702-16FCF260FB2E}"/>
               </a:ext>
             </a:extLst>
           </p:cNvPr>
@@ -6125,472 +5960,12 @@
           </a:p>
         </p:txBody>
       </p:sp>
-      <p:graphicFrame>
-        <p:nvGraphicFramePr>
-          <p:cNvPr id="8" name="Table 7"/>
-          <p:cNvGraphicFramePr/>
-          <p:nvPr/>
-        </p:nvGraphicFramePr>
-        <p:xfrm>
-          <a:off x="762000" y="1524000"/>
-          <a:ext cx="10668000" cy="2857500"/>
-        </p:xfrm>
-        <a:graphic>
-          <a:graphicData uri="http://schemas.openxmlformats.org/drawingml/2006/table">
-            <a:tbl>
-              <a:tblPr/>
-              <a:tblGrid>
-                <a:gridCol w="3524250">
-                  <a:extLst>
-                    <a:ext uri="{9D8B030D-6E8A-4147-A177-3AD203B41FA5}">
-                      <a16:colId xmlns:a16="http://schemas.microsoft.com/office/drawing/2014/main" val="20000"/>
-                    </a:ext>
-                  </a:extLst>
-                </a:gridCol>
-                <a:gridCol w="2381250">
-                  <a:extLst>
-                    <a:ext uri="{9D8B030D-6E8A-4147-A177-3AD203B41FA5}">
-                      <a16:colId xmlns:a16="http://schemas.microsoft.com/office/drawing/2014/main" val="20001"/>
-                    </a:ext>
-                  </a:extLst>
-                </a:gridCol>
-                <a:gridCol w="2381250">
-                  <a:extLst>
-                    <a:ext uri="{9D8B030D-6E8A-4147-A177-3AD203B41FA5}">
-                      <a16:colId xmlns:a16="http://schemas.microsoft.com/office/drawing/2014/main" val="20002"/>
-                    </a:ext>
-                  </a:extLst>
-                </a:gridCol>
-                <a:gridCol w="2381250">
-                  <a:extLst>
-                    <a:ext uri="{9D8B030D-6E8A-4147-A177-3AD203B41FA5}">
-                      <a16:colId xmlns:a16="http://schemas.microsoft.com/office/drawing/2014/main" val="20003"/>
-                    </a:ext>
-                  </a:extLst>
-                </a:gridCol>
-              </a:tblGrid>
-              <a:tr h="714375">
-                <a:tc>
-                  <a:txBody>
-                    <a:bodyPr/>
-                    <a:lstStyle/>
-                    <a:p>
-                      <a:r>
-                        <a:rPr sz="2100" b="1">
-                          <a:solidFill>
-                            <a:srgbClr val="FFFFFF"/>
-                          </a:solidFill>
-                          <a:latin typeface="Aptos"/>
-                          <a:ea typeface="Aptos"/>
-                          <a:cs typeface="Aptos"/>
-                        </a:rPr>
-                        <a:t>Model</a:t>
-                      </a:r>
-                    </a:p>
-                  </a:txBody>
-                  <a:tcPr>
-                    <a:solidFill>
-                      <a:srgbClr val="172B45"/>
-                    </a:solidFill>
-                  </a:tcPr>
-                </a:tc>
-                <a:tc>
-                  <a:txBody>
-                    <a:bodyPr/>
-                    <a:lstStyle/>
-                    <a:p>
-                      <a:r>
-                        <a:rPr sz="2100" b="1">
-                          <a:solidFill>
-                            <a:srgbClr val="FFFFFF"/>
-                          </a:solidFill>
-                          <a:latin typeface="Aptos"/>
-                          <a:ea typeface="Aptos"/>
-                          <a:cs typeface="Aptos"/>
-                        </a:rPr>
-                        <a:t>Test MAE</a:t>
-                      </a:r>
-                    </a:p>
-                  </a:txBody>
-                  <a:tcPr>
-                    <a:solidFill>
-                      <a:srgbClr val="172B45"/>
-                    </a:solidFill>
-                  </a:tcPr>
-                </a:tc>
-                <a:tc>
-                  <a:txBody>
-                    <a:bodyPr/>
-                    <a:lstStyle/>
-                    <a:p>
-                      <a:r>
-                        <a:rPr sz="2100" b="1">
-                          <a:solidFill>
-                            <a:srgbClr val="FFFFFF"/>
-                          </a:solidFill>
-                          <a:latin typeface="Aptos"/>
-                          <a:ea typeface="Aptos"/>
-                          <a:cs typeface="Aptos"/>
-                        </a:rPr>
-                        <a:t>Test RMSE</a:t>
-                      </a:r>
-                    </a:p>
-                  </a:txBody>
-                  <a:tcPr>
-                    <a:solidFill>
-                      <a:srgbClr val="172B45"/>
-                    </a:solidFill>
-                  </a:tcPr>
-                </a:tc>
-                <a:tc>
-                  <a:txBody>
-                    <a:bodyPr/>
-                    <a:lstStyle/>
-                    <a:p>
-                      <a:r>
-                        <a:rPr sz="2100" b="1">
-                          <a:solidFill>
-                            <a:srgbClr val="FFFFFF"/>
-                          </a:solidFill>
-                          <a:latin typeface="Aptos"/>
-                          <a:ea typeface="Aptos"/>
-                          <a:cs typeface="Aptos"/>
-                        </a:rPr>
-                        <a:t>Test R²</a:t>
-                      </a:r>
-                    </a:p>
-                  </a:txBody>
-                  <a:tcPr>
-                    <a:solidFill>
-                      <a:srgbClr val="172B45"/>
-                    </a:solidFill>
-                  </a:tcPr>
-                </a:tc>
-                <a:extLst>
-                  <a:ext uri="{0D108BD9-81ED-4DB2-BD59-A6C34878D82A}">
-                    <a16:rowId xmlns:a16="http://schemas.microsoft.com/office/drawing/2014/main" val="10000"/>
-                  </a:ext>
-                </a:extLst>
-              </a:tr>
-              <a:tr h="714375">
-                <a:tc>
-                  <a:txBody>
-                    <a:bodyPr/>
-                    <a:lstStyle/>
-                    <a:p>
-                      <a:r>
-                        <a:rPr sz="2100" b="0">
-                          <a:solidFill>
-                            <a:srgbClr val="172B45"/>
-                          </a:solidFill>
-                          <a:latin typeface="Aptos"/>
-                          <a:ea typeface="Aptos"/>
-                          <a:cs typeface="Aptos"/>
-                        </a:rPr>
-                        <a:t>Mean baseline</a:t>
-                      </a:r>
-                    </a:p>
-                  </a:txBody>
-                  <a:tcPr>
-                    <a:solidFill>
-                      <a:srgbClr val="F0F4F8"/>
-                    </a:solidFill>
-                  </a:tcPr>
-                </a:tc>
-                <a:tc>
-                  <a:txBody>
-                    <a:bodyPr/>
-                    <a:lstStyle/>
-                    <a:p>
-                      <a:r>
-                        <a:rPr sz="2100" b="0">
-                          <a:solidFill>
-                            <a:srgbClr val="172B45"/>
-                          </a:solidFill>
-                          <a:latin typeface="Aptos"/>
-                          <a:ea typeface="Aptos"/>
-                          <a:cs typeface="Aptos"/>
-                        </a:rPr>
-                        <a:t>$40,567.00</a:t>
-                      </a:r>
-                    </a:p>
-                  </a:txBody>
-                  <a:tcPr>
-                    <a:solidFill>
-                      <a:srgbClr val="F0F4F8"/>
-                    </a:solidFill>
-                  </a:tcPr>
-                </a:tc>
-                <a:tc>
-                  <a:txBody>
-                    <a:bodyPr/>
-                    <a:lstStyle/>
-                    <a:p>
-                      <a:r>
-                        <a:rPr sz="2100" b="0">
-                          <a:solidFill>
-                            <a:srgbClr val="172B45"/>
-                          </a:solidFill>
-                          <a:latin typeface="Aptos"/>
-                          <a:ea typeface="Aptos"/>
-                          <a:cs typeface="Aptos"/>
-                        </a:rPr>
-                        <a:t>$48,596.96</a:t>
-                      </a:r>
-                    </a:p>
-                  </a:txBody>
-                  <a:tcPr>
-                    <a:solidFill>
-                      <a:srgbClr val="F0F4F8"/>
-                    </a:solidFill>
-                  </a:tcPr>
-                </a:tc>
-                <a:tc>
-                  <a:txBody>
-                    <a:bodyPr/>
-                    <a:lstStyle/>
-                    <a:p>
-                      <a:r>
-                        <a:rPr sz="2100" b="0">
-                          <a:solidFill>
-                            <a:srgbClr val="172B45"/>
-                          </a:solidFill>
-                          <a:latin typeface="Aptos"/>
-                          <a:ea typeface="Aptos"/>
-                          <a:cs typeface="Aptos"/>
-                        </a:rPr>
-                        <a:t>−0.0016</a:t>
-                      </a:r>
-                    </a:p>
-                  </a:txBody>
-                  <a:tcPr>
-                    <a:solidFill>
-                      <a:srgbClr val="F0F4F8"/>
-                    </a:solidFill>
-                  </a:tcPr>
-                </a:tc>
-                <a:extLst>
-                  <a:ext uri="{0D108BD9-81ED-4DB2-BD59-A6C34878D82A}">
-                    <a16:rowId xmlns:a16="http://schemas.microsoft.com/office/drawing/2014/main" val="10001"/>
-                  </a:ext>
-                </a:extLst>
-              </a:tr>
-              <a:tr h="714375">
-                <a:tc>
-                  <a:txBody>
-                    <a:bodyPr/>
-                    <a:lstStyle/>
-                    <a:p>
-                      <a:r>
-                        <a:rPr sz="2100" b="0">
-                          <a:solidFill>
-                            <a:srgbClr val="172B45"/>
-                          </a:solidFill>
-                          <a:latin typeface="Aptos"/>
-                          <a:ea typeface="Aptos"/>
-                          <a:cs typeface="Aptos"/>
-                        </a:rPr>
-                        <a:t>Linear Regression</a:t>
-                      </a:r>
-                    </a:p>
-                  </a:txBody>
-                  <a:tcPr>
-                    <a:solidFill>
-                      <a:srgbClr val="FFFFFF"/>
-                    </a:solidFill>
-                  </a:tcPr>
-                </a:tc>
-                <a:tc>
-                  <a:txBody>
-                    <a:bodyPr/>
-                    <a:lstStyle/>
-                    <a:p>
-                      <a:r>
-                        <a:rPr sz="2100" b="0">
-                          <a:solidFill>
-                            <a:srgbClr val="172B45"/>
-                          </a:solidFill>
-                          <a:latin typeface="Aptos"/>
-                          <a:ea typeface="Aptos"/>
-                          <a:cs typeface="Aptos"/>
-                        </a:rPr>
-                        <a:t>$9,478.15</a:t>
-                      </a:r>
-                    </a:p>
-                  </a:txBody>
-                  <a:tcPr>
-                    <a:solidFill>
-                      <a:srgbClr val="FFFFFF"/>
-                    </a:solidFill>
-                  </a:tcPr>
-                </a:tc>
-                <a:tc>
-                  <a:txBody>
-                    <a:bodyPr/>
-                    <a:lstStyle/>
-                    <a:p>
-                      <a:r>
-                        <a:rPr sz="2100" b="0">
-                          <a:solidFill>
-                            <a:srgbClr val="172B45"/>
-                          </a:solidFill>
-                          <a:latin typeface="Aptos"/>
-                          <a:ea typeface="Aptos"/>
-                          <a:cs typeface="Aptos"/>
-                        </a:rPr>
-                        <a:t>$12,117.90</a:t>
-                      </a:r>
-                    </a:p>
-                  </a:txBody>
-                  <a:tcPr>
-                    <a:solidFill>
-                      <a:srgbClr val="FFFFFF"/>
-                    </a:solidFill>
-                  </a:tcPr>
-                </a:tc>
-                <a:tc>
-                  <a:txBody>
-                    <a:bodyPr/>
-                    <a:lstStyle/>
-                    <a:p>
-                      <a:r>
-                        <a:rPr sz="2100" b="0">
-                          <a:solidFill>
-                            <a:srgbClr val="172B45"/>
-                          </a:solidFill>
-                          <a:latin typeface="Aptos"/>
-                          <a:ea typeface="Aptos"/>
-                          <a:cs typeface="Aptos"/>
-                        </a:rPr>
-                        <a:t>0.9377</a:t>
-                      </a:r>
-                    </a:p>
-                  </a:txBody>
-                  <a:tcPr>
-                    <a:solidFill>
-                      <a:srgbClr val="FFFFFF"/>
-                    </a:solidFill>
-                  </a:tcPr>
-                </a:tc>
-                <a:extLst>
-                  <a:ext uri="{0D108BD9-81ED-4DB2-BD59-A6C34878D82A}">
-                    <a16:rowId xmlns:a16="http://schemas.microsoft.com/office/drawing/2014/main" val="10002"/>
-                  </a:ext>
-                </a:extLst>
-              </a:tr>
-              <a:tr h="714375">
-                <a:tc>
-                  <a:txBody>
-                    <a:bodyPr/>
-                    <a:lstStyle/>
-                    <a:p>
-                      <a:r>
-                        <a:rPr sz="2100" b="0">
-                          <a:solidFill>
-                            <a:srgbClr val="172B45"/>
-                          </a:solidFill>
-                          <a:latin typeface="Aptos"/>
-                          <a:ea typeface="Aptos"/>
-                          <a:cs typeface="Aptos"/>
-                        </a:rPr>
-                        <a:t>Random Forest</a:t>
-                      </a:r>
-                    </a:p>
-                  </a:txBody>
-                  <a:tcPr>
-                    <a:solidFill>
-                      <a:srgbClr val="F0F4F8"/>
-                    </a:solidFill>
-                  </a:tcPr>
-                </a:tc>
-                <a:tc>
-                  <a:txBody>
-                    <a:bodyPr/>
-                    <a:lstStyle/>
-                    <a:p>
-                      <a:r>
-                        <a:rPr sz="2100" b="0">
-                          <a:solidFill>
-                            <a:srgbClr val="172B45"/>
-                          </a:solidFill>
-                          <a:latin typeface="Aptos"/>
-                          <a:ea typeface="Aptos"/>
-                          <a:cs typeface="Aptos"/>
-                        </a:rPr>
-                        <a:t>$9,250.28</a:t>
-                      </a:r>
-                    </a:p>
-                  </a:txBody>
-                  <a:tcPr>
-                    <a:solidFill>
-                      <a:srgbClr val="F0F4F8"/>
-                    </a:solidFill>
-                  </a:tcPr>
-                </a:tc>
-                <a:tc>
-                  <a:txBody>
-                    <a:bodyPr/>
-                    <a:lstStyle/>
-                    <a:p>
-                      <a:r>
-                        <a:rPr sz="2100" b="0">
-                          <a:solidFill>
-                            <a:srgbClr val="172B45"/>
-                          </a:solidFill>
-                          <a:latin typeface="Aptos"/>
-                          <a:ea typeface="Aptos"/>
-                          <a:cs typeface="Aptos"/>
-                        </a:rPr>
-                        <a:t>$11,403.42</a:t>
-                      </a:r>
-                    </a:p>
-                  </a:txBody>
-                  <a:tcPr>
-                    <a:solidFill>
-                      <a:srgbClr val="F0F4F8"/>
-                    </a:solidFill>
-                  </a:tcPr>
-                </a:tc>
-                <a:tc>
-                  <a:txBody>
-                    <a:bodyPr/>
-                    <a:lstStyle/>
-                    <a:p>
-                      <a:r>
-                        <a:rPr sz="2100" b="0">
-                          <a:solidFill>
-                            <a:srgbClr val="172B45"/>
-                          </a:solidFill>
-                          <a:latin typeface="Aptos"/>
-                          <a:ea typeface="Aptos"/>
-                          <a:cs typeface="Aptos"/>
-                        </a:rPr>
-                        <a:t>0.9449</a:t>
-                      </a:r>
-                    </a:p>
-                  </a:txBody>
-                  <a:tcPr>
-                    <a:solidFill>
-                      <a:srgbClr val="F0F4F8"/>
-                    </a:solidFill>
-                  </a:tcPr>
-                </a:tc>
-                <a:extLst>
-                  <a:ext uri="{0D108BD9-81ED-4DB2-BD59-A6C34878D82A}">
-                    <a16:rowId xmlns:a16="http://schemas.microsoft.com/office/drawing/2014/main" val="10003"/>
-                  </a:ext>
-                </a:extLst>
-              </a:tr>
-            </a:tbl>
-          </a:graphicData>
-        </a:graphic>
-      </p:graphicFrame>
-      <p:sp>
-        <p:nvSpPr>
-          <p:cNvPr id="4" name="Rectangle 3">
-            <a:extLst>
-              <a:ext uri="{FF2B5EF4-FFF2-40B4-BE49-F238E27FC236}">
-                <a16:creationId xmlns:a16="http://schemas.microsoft.com/office/drawing/2014/main" id="{76881061-DF62-4ED9-8EBA-4F5ABE63F4C7}"/>
+      <p:sp>
+        <p:nvSpPr>
+          <p:cNvPr id="3" name="Rectangle 2">
+            <a:extLst>
+              <a:ext uri="{FF2B5EF4-FFF2-40B4-BE49-F238E27FC236}">
+                <a16:creationId xmlns:a16="http://schemas.microsoft.com/office/drawing/2014/main" id="{7BC8EF08-872D-4A04-9B20-2B667EA75A0A}"/>
               </a:ext>
             </a:extLst>
           </p:cNvPr>
@@ -6601,8 +5976,8 @@
         </p:nvSpPr>
         <p:spPr>
           <a:xfrm>
-            <a:off x="762000" y="4810125"/>
-            <a:ext cx="10477500" cy="762000"/>
+            <a:off x="762000" y="1571625"/>
+            <a:ext cx="10572750" cy="857250"/>
           </a:xfrm>
           <a:prstGeom prst="rect">
             <a:avLst/>
@@ -6637,7 +6012,64 @@
                 <a:ea typeface="Aptos"/>
                 <a:cs typeface="Aptos"/>
               </a:rPr>
-              <a:t>Random Forest reduced test MAE by $227.87, about 2.4%, compared with Linear Regression.</a:t>
+              <a:t>Correct currency conversion and country labels, then rerun the salary pipeline.</a:t>
+            </a:r>
+          </a:p>
+        </p:txBody>
+      </p:sp>
+      <p:sp>
+        <p:nvSpPr>
+          <p:cNvPr id="4" name="Rectangle 3">
+            <a:extLst>
+              <a:ext uri="{FF2B5EF4-FFF2-40B4-BE49-F238E27FC236}">
+                <a16:creationId xmlns:a16="http://schemas.microsoft.com/office/drawing/2014/main" id="{A2F8F8B3-F341-48A3-94C8-3B39F9A06B9E}"/>
+              </a:ext>
+            </a:extLst>
+          </p:cNvPr>
+          <p:cNvSpPr>
+            <a:spLocks noGrp="1"/>
+          </p:cNvSpPr>
+          <p:nvPr/>
+        </p:nvSpPr>
+        <p:spPr>
+          <a:xfrm>
+            <a:off x="762000" y="2571750"/>
+            <a:ext cx="10572750" cy="857250"/>
+          </a:xfrm>
+          <a:prstGeom prst="rect">
+            <a:avLst/>
+          </a:prstGeom>
+          <a:noFill/>
+          <a:ln w="0">
+            <a:noFill/>
+          </a:ln>
+        </p:spPr>
+        <p:txBody>
+          <a:bodyPr>
+            <a:noAutofit/>
+          </a:bodyPr>
+          <a:lstStyle/>
+          <a:p>
+            <a:pPr>
+              <a:defRPr sz="2100" b="0">
+                <a:solidFill>
+                  <a:srgbClr val="172B45"/>
+                </a:solidFill>
+                <a:latin typeface="Aptos"/>
+                <a:ea typeface="Aptos"/>
+                <a:cs typeface="Aptos"/>
+              </a:defRPr>
+            </a:pPr>
+            <a:r>
+              <a:rPr sz="2100" b="0">
+                <a:solidFill>
+                  <a:srgbClr val="172B45"/>
+                </a:solidFill>
+                <a:latin typeface="Aptos"/>
+                <a:ea typeface="Aptos"/>
+                <a:cs typeface="Aptos"/>
+              </a:rPr>
+              <a:t>Test location, title, specialization, and industry. Evaluate errors by relevant workforce segment.</a:t>
             </a:r>
           </a:p>
         </p:txBody>
@@ -6647,7 +6079,64 @@
           <p:cNvPr id="5" name="Rectangle 4">
             <a:extLst>
               <a:ext uri="{FF2B5EF4-FFF2-40B4-BE49-F238E27FC236}">
-                <a16:creationId xmlns:a16="http://schemas.microsoft.com/office/drawing/2014/main" id="{BC982E2B-11C7-400D-8491-DF6615AEF66A}"/>
+                <a16:creationId xmlns:a16="http://schemas.microsoft.com/office/drawing/2014/main" id="{0703F2E5-F2CB-4E97-9807-F7C7E44CD5F2}"/>
+              </a:ext>
+            </a:extLst>
+          </p:cNvPr>
+          <p:cNvSpPr>
+            <a:spLocks noGrp="1"/>
+          </p:cNvSpPr>
+          <p:nvPr/>
+        </p:nvSpPr>
+        <p:spPr>
+          <a:xfrm>
+            <a:off x="762000" y="3571875"/>
+            <a:ext cx="10572750" cy="857250"/>
+          </a:xfrm>
+          <a:prstGeom prst="rect">
+            <a:avLst/>
+          </a:prstGeom>
+          <a:noFill/>
+          <a:ln w="0">
+            <a:noFill/>
+          </a:ln>
+        </p:spPr>
+        <p:txBody>
+          <a:bodyPr>
+            <a:noAutofit/>
+          </a:bodyPr>
+          <a:lstStyle/>
+          <a:p>
+            <a:pPr>
+              <a:defRPr sz="2100" b="0">
+                <a:solidFill>
+                  <a:srgbClr val="172B45"/>
+                </a:solidFill>
+                <a:latin typeface="Aptos"/>
+                <a:ea typeface="Aptos"/>
+                <a:cs typeface="Aptos"/>
+              </a:defRPr>
+            </a:pPr>
+            <a:r>
+              <a:rPr sz="2100" b="0">
+                <a:solidFill>
+                  <a:srgbClr val="172B45"/>
+                </a:solidFill>
+                <a:latin typeface="Aptos"/>
+                <a:ea typeface="Aptos"/>
+                <a:cs typeface="Aptos"/>
+              </a:rPr>
+              <a:t>Validate on future postings or unfamiliar employers before using predictions in planning.</a:t>
+            </a:r>
+          </a:p>
+        </p:txBody>
+      </p:sp>
+      <p:sp>
+        <p:nvSpPr>
+          <p:cNvPr id="6" name="Rectangle 5">
+            <a:extLst>
+              <a:ext uri="{FF2B5EF4-FFF2-40B4-BE49-F238E27FC236}">
+                <a16:creationId xmlns:a16="http://schemas.microsoft.com/office/drawing/2014/main" id="{10D53081-454A-4338-A7DD-090DDEACC632}"/>
               </a:ext>
             </a:extLst>
           </p:cNvPr>
@@ -6694,7 +6183,7 @@
                 <a:ea typeface="Aptos"/>
                 <a:cs typeface="Aptos"/>
               </a:rPr>
-              <a:t>PROVISIONAL: Currency conversion and geographic labels require correction before relying on these results.</a:t>
+              <a:t>Proposed sequence based on the report’s future work. No deployment decision has been established.</a:t>
             </a:r>
           </a:p>
         </p:txBody>
@@ -6702,7 +6191,7 @@
     </p:spTree>
     <p:extLst>
       <p:ext uri="{BB962C8B-B14F-4D97-AF65-F5344CB8AC3E}">
-        <p14:creationId xmlns:p14="http://schemas.microsoft.com/office/powerpoint/2010/main" val="610068235"/>
+        <p14:creationId xmlns:p14="http://schemas.microsoft.com/office/powerpoint/2010/main" val="1358412867"/>
       </p:ext>
     </p:extLst>
   </p:cSld>
@@ -6739,10 +6228,10 @@
       </p:grpSpPr>
       <p:sp>
         <p:nvSpPr>
-          <p:cNvPr id="8" name="Rectangle 7">
-            <a:extLst>
-              <a:ext uri="{FF2B5EF4-FFF2-40B4-BE49-F238E27FC236}">
-                <a16:creationId xmlns:a16="http://schemas.microsoft.com/office/drawing/2014/main" id="{7FA6B562-D6ED-4D23-921B-101CFC7A4571}"/>
+          <p:cNvPr id="7" name="Rectangle 6">
+            <a:extLst>
+              <a:ext uri="{FF2B5EF4-FFF2-40B4-BE49-F238E27FC236}">
+                <a16:creationId xmlns:a16="http://schemas.microsoft.com/office/drawing/2014/main" id="{862E0CBA-822A-4142-AE3B-0AEAA58A30DD}"/>
               </a:ext>
             </a:extLst>
           </p:cNvPr>
@@ -6789,7 +6278,7 @@
                 <a:ea typeface="Aptos"/>
                 <a:cs typeface="Aptos"/>
               </a:rPr>
-              <a:t>Experience dominates the fitted models</a:t>
+              <a:t>Closing perspective</a:t>
             </a:r>
           </a:p>
         </p:txBody>
@@ -6799,7 +6288,7 @@
           <p:cNvPr id="2" name="Rectangle 1">
             <a:extLst>
               <a:ext uri="{FF2B5EF4-FFF2-40B4-BE49-F238E27FC236}">
-                <a16:creationId xmlns:a16="http://schemas.microsoft.com/office/drawing/2014/main" id="{6F334058-936B-4122-85D3-D45BEAAD78ED}"/>
+                <a16:creationId xmlns:a16="http://schemas.microsoft.com/office/drawing/2014/main" id="{AA326C6A-F7A2-49EB-B00D-E4A4C1BD8249}"/>
               </a:ext>
             </a:extLst>
           </p:cNvPr>
@@ -6856,7 +6345,7 @@
           <p:cNvPr id="3" name="Rectangle 2">
             <a:extLst>
               <a:ext uri="{FF2B5EF4-FFF2-40B4-BE49-F238E27FC236}">
-                <a16:creationId xmlns:a16="http://schemas.microsoft.com/office/drawing/2014/main" id="{A38BC126-2621-4FB2-829C-E084B09AD082}"/>
+                <a16:creationId xmlns:a16="http://schemas.microsoft.com/office/drawing/2014/main" id="{8A4CEE2D-0D80-4ED8-8028-C8AC541D2CBC}"/>
               </a:ext>
             </a:extLst>
           </p:cNvPr>
@@ -6867,8 +6356,8 @@
         </p:nvSpPr>
         <p:spPr>
           <a:xfrm>
-            <a:off x="762000" y="1666875"/>
-            <a:ext cx="5143500" cy="1285875"/>
+            <a:off x="762000" y="1809750"/>
+            <a:ext cx="10382250" cy="1238250"/>
           </a:xfrm>
           <a:prstGeom prst="rect">
             <a:avLst/>
@@ -6885,9 +6374,9 @@
           <a:lstStyle/>
           <a:p>
             <a:pPr>
-              <a:defRPr sz="7500" b="1">
-                <a:solidFill>
-                  <a:srgbClr val="275F96"/>
+              <a:defRPr sz="3300" b="1">
+                <a:solidFill>
+                  <a:srgbClr val="172B45"/>
                 </a:solidFill>
                 <a:latin typeface="Aptos"/>
                 <a:ea typeface="Aptos"/>
@@ -6895,15 +6384,15 @@
               </a:defRPr>
             </a:pPr>
             <a:r>
-              <a:rPr sz="7500" b="1">
-                <a:solidFill>
-                  <a:srgbClr val="275F96"/>
+              <a:rPr sz="3300" b="1">
+                <a:solidFill>
+                  <a:srgbClr val="172B45"/>
                 </a:solidFill>
                 <a:latin typeface="Aptos"/>
                 <a:ea typeface="Aptos"/>
                 <a:cs typeface="Aptos"/>
               </a:rPr>
-              <a:t>96.8%</a:t>
+              <a:t>Clearer role definitions are the strongest immediate opportunity.</a:t>
             </a:r>
           </a:p>
         </p:txBody>
@@ -6913,7 +6402,7 @@
           <p:cNvPr id="4" name="Rectangle 3">
             <a:extLst>
               <a:ext uri="{FF2B5EF4-FFF2-40B4-BE49-F238E27FC236}">
-                <a16:creationId xmlns:a16="http://schemas.microsoft.com/office/drawing/2014/main" id="{E9603C09-1905-431B-B60F-FF78BDBBA6D5}"/>
+                <a16:creationId xmlns:a16="http://schemas.microsoft.com/office/drawing/2014/main" id="{6BF862F1-AE9B-425F-A0BC-6A32F1B7C3B6}"/>
               </a:ext>
             </a:extLst>
           </p:cNvPr>
@@ -6924,8 +6413,8 @@
         </p:nvSpPr>
         <p:spPr>
           <a:xfrm>
-            <a:off x="762000" y="3143250"/>
-            <a:ext cx="5143500" cy="1190625"/>
+            <a:off x="762000" y="3619500"/>
+            <a:ext cx="10477500" cy="952500"/>
           </a:xfrm>
           <a:prstGeom prst="rect">
             <a:avLst/>
@@ -6942,7 +6431,7 @@
           <a:lstStyle/>
           <a:p>
             <a:pPr>
-              <a:defRPr sz="2250" b="0">
+              <a:defRPr sz="2325" b="0">
                 <a:solidFill>
                   <a:srgbClr val="172B45"/>
                 </a:solidFill>
@@ -6952,7 +6441,7 @@
               </a:defRPr>
             </a:pPr>
             <a:r>
-              <a:rPr sz="2250" b="0">
+              <a:rPr sz="2325" b="0">
                 <a:solidFill>
                   <a:srgbClr val="172B45"/>
                 </a:solidFill>
@@ -6960,7 +6449,7 @@
                 <a:ea typeface="Aptos"/>
                 <a:cs typeface="Aptos"/>
               </a:rPr>
-              <a:t>Random Forest importance attributed to experience-related features</a:t>
+              <a:t>The analysis can support conversations about hiring requirements and training priorities.</a:t>
             </a:r>
           </a:p>
         </p:txBody>
@@ -6970,7 +6459,7 @@
           <p:cNvPr id="5" name="Rectangle 4">
             <a:extLst>
               <a:ext uri="{FF2B5EF4-FFF2-40B4-BE49-F238E27FC236}">
-                <a16:creationId xmlns:a16="http://schemas.microsoft.com/office/drawing/2014/main" id="{F1E5B6F3-B334-438A-8E4A-FFD9EA4FB841}"/>
+                <a16:creationId xmlns:a16="http://schemas.microsoft.com/office/drawing/2014/main" id="{C0AAA15B-9AB4-4144-B5D6-4E46C7DB68B0}"/>
               </a:ext>
             </a:extLst>
           </p:cNvPr>
@@ -6981,8 +6470,8 @@
         </p:nvSpPr>
         <p:spPr>
           <a:xfrm>
-            <a:off x="6858000" y="1762125"/>
-            <a:ext cx="4476750" cy="1190625"/>
+            <a:off x="762000" y="4810125"/>
+            <a:ext cx="10477500" cy="952500"/>
           </a:xfrm>
           <a:prstGeom prst="rect">
             <a:avLst/>
@@ -6999,7 +6488,7 @@
           <a:lstStyle/>
           <a:p>
             <a:pPr>
-              <a:defRPr sz="2250" b="0">
+              <a:defRPr sz="2325" b="0">
                 <a:solidFill>
                   <a:srgbClr val="172B45"/>
                 </a:solidFill>
@@ -7009,7 +6498,7 @@
               </a:defRPr>
             </a:pPr>
             <a:r>
-              <a:rPr sz="2250" b="0">
+              <a:rPr sz="2325" b="0">
                 <a:solidFill>
                   <a:srgbClr val="172B45"/>
                 </a:solidFill>
@@ -7017,7 +6506,7 @@
                 <a:ea typeface="Aptos"/>
                 <a:cs typeface="Aptos"/>
               </a:rPr>
-              <a:t>Experience-level indicators also had the largest Linear Regression coefficients.</a:t>
+              <a:t>Reliable compensation planning is the next opportunity after data correction and validation.</a:t>
             </a:r>
           </a:p>
         </p:txBody>
@@ -7027,64 +6516,7 @@
           <p:cNvPr id="6" name="Rectangle 5">
             <a:extLst>
               <a:ext uri="{FF2B5EF4-FFF2-40B4-BE49-F238E27FC236}">
-                <a16:creationId xmlns:a16="http://schemas.microsoft.com/office/drawing/2014/main" id="{2DB8F44A-7540-42A0-8BC1-7E8D2820B590}"/>
-              </a:ext>
-            </a:extLst>
-          </p:cNvPr>
-          <p:cNvSpPr>
-            <a:spLocks noGrp="1"/>
-          </p:cNvSpPr>
-          <p:nvPr/>
-        </p:nvSpPr>
-        <p:spPr>
-          <a:xfrm>
-            <a:off x="6858000" y="3524250"/>
-            <a:ext cx="4476750" cy="1524000"/>
-          </a:xfrm>
-          <a:prstGeom prst="rect">
-            <a:avLst/>
-          </a:prstGeom>
-          <a:noFill/>
-          <a:ln w="0">
-            <a:noFill/>
-          </a:ln>
-        </p:spPr>
-        <p:txBody>
-          <a:bodyPr>
-            <a:noAutofit/>
-          </a:bodyPr>
-          <a:lstStyle/>
-          <a:p>
-            <a:pPr>
-              <a:defRPr sz="2025" b="0">
-                <a:solidFill>
-                  <a:srgbClr val="172B45"/>
-                </a:solidFill>
-                <a:latin typeface="Aptos"/>
-                <a:ea typeface="Aptos"/>
-                <a:cs typeface="Aptos"/>
-              </a:defRPr>
-            </a:pPr>
-            <a:r>
-              <a:rPr sz="2025" b="0">
-                <a:solidFill>
-                  <a:srgbClr val="172B45"/>
-                </a:solidFill>
-                <a:latin typeface="Aptos"/>
-                <a:ea typeface="Aptos"/>
-                <a:cs typeface="Aptos"/>
-              </a:rPr>
-              <a:t>Importance describes model behavior. Correlated predictors and coefficient constraints affect interpretation.</a:t>
-            </a:r>
-          </a:p>
-        </p:txBody>
-      </p:sp>
-      <p:sp>
-        <p:nvSpPr>
-          <p:cNvPr id="7" name="Rectangle 6">
-            <a:extLst>
-              <a:ext uri="{FF2B5EF4-FFF2-40B4-BE49-F238E27FC236}">
-                <a16:creationId xmlns:a16="http://schemas.microsoft.com/office/drawing/2014/main" id="{6A7FC315-6A64-4E4D-ACDF-EF1850519648}"/>
+                <a16:creationId xmlns:a16="http://schemas.microsoft.com/office/drawing/2014/main" id="{FC100951-55FF-4751-A0DC-023B07D2A9AD}"/>
               </a:ext>
             </a:extLst>
           </p:cNvPr>
@@ -7131,7 +6563,7 @@
                 <a:ea typeface="Aptos"/>
                 <a:cs typeface="Aptos"/>
               </a:rPr>
-              <a:t>Impurity-based importance does not establish a causal effect of experience on salary.</a:t>
+              <a:t>Discussion: Which workforce decision would benefit most from better AI role definitions?</a:t>
             </a:r>
           </a:p>
         </p:txBody>
@@ -7139,7 +6571,7 @@
     </p:spTree>
     <p:extLst>
       <p:ext uri="{BB962C8B-B14F-4D97-AF65-F5344CB8AC3E}">
-        <p14:creationId xmlns:p14="http://schemas.microsoft.com/office/powerpoint/2010/main" val="605723769"/>
+        <p14:creationId xmlns:p14="http://schemas.microsoft.com/office/powerpoint/2010/main" val="1296489577"/>
       </p:ext>
     </p:extLst>
   </p:cSld>
@@ -7176,10 +6608,10 @@
       </p:grpSpPr>
       <p:sp>
         <p:nvSpPr>
-          <p:cNvPr id="7" name="Rectangle 6">
-            <a:extLst>
-              <a:ext uri="{FF2B5EF4-FFF2-40B4-BE49-F238E27FC236}">
-                <a16:creationId xmlns:a16="http://schemas.microsoft.com/office/drawing/2014/main" id="{D7CC9A77-B7CF-46A2-9E70-7268AC679820}"/>
+          <p:cNvPr id="5" name="Rectangle 4">
+            <a:extLst>
+              <a:ext uri="{FF2B5EF4-FFF2-40B4-BE49-F238E27FC236}">
+                <a16:creationId xmlns:a16="http://schemas.microsoft.com/office/drawing/2014/main" id="{1E0C060B-93D9-4341-98F0-2D6C521619F2}"/>
               </a:ext>
             </a:extLst>
           </p:cNvPr>
@@ -7226,7 +6658,7 @@
                 <a:ea typeface="Aptos"/>
                 <a:cs typeface="Aptos"/>
               </a:rPr>
-              <a:t>Data correction is the first priority</a:t>
+              <a:t>Appendix: Complete specialization profiles</a:t>
             </a:r>
           </a:p>
         </p:txBody>
@@ -7236,7 +6668,7 @@
           <p:cNvPr id="2" name="Rectangle 1">
             <a:extLst>
               <a:ext uri="{FF2B5EF4-FFF2-40B4-BE49-F238E27FC236}">
-                <a16:creationId xmlns:a16="http://schemas.microsoft.com/office/drawing/2014/main" id="{761CF691-61A4-40D5-A1B6-520CE4DCBB1F}"/>
+                <a16:creationId xmlns:a16="http://schemas.microsoft.com/office/drawing/2014/main" id="{7698DF9C-07F8-4392-BCB0-7C89D21D1A11}"/>
               </a:ext>
             </a:extLst>
           </p:cNvPr>
@@ -7284,3019 +6716,6 @@
                 <a:cs typeface="Aptos"/>
               </a:rPr>
               <a:t>14</a:t>
-            </a:r>
-          </a:p>
-        </p:txBody>
-      </p:sp>
-      <p:sp>
-        <p:nvSpPr>
-          <p:cNvPr id="3" name="Rectangle 2">
-            <a:extLst>
-              <a:ext uri="{FF2B5EF4-FFF2-40B4-BE49-F238E27FC236}">
-                <a16:creationId xmlns:a16="http://schemas.microsoft.com/office/drawing/2014/main" id="{5499FEAC-35D8-4313-9331-79399A48FE2C}"/>
-              </a:ext>
-            </a:extLst>
-          </p:cNvPr>
-          <p:cNvSpPr>
-            <a:spLocks noGrp="1"/>
-          </p:cNvSpPr>
-          <p:nvPr/>
-        </p:nvSpPr>
-        <p:spPr>
-          <a:xfrm>
-            <a:off x="762000" y="1571625"/>
-            <a:ext cx="10572750" cy="857250"/>
-          </a:xfrm>
-          <a:prstGeom prst="rect">
-            <a:avLst/>
-          </a:prstGeom>
-          <a:noFill/>
-          <a:ln w="0">
-            <a:noFill/>
-          </a:ln>
-        </p:spPr>
-        <p:txBody>
-          <a:bodyPr>
-            <a:noAutofit/>
-          </a:bodyPr>
-          <a:lstStyle/>
-          <a:p>
-            <a:pPr>
-              <a:defRPr sz="2100" b="0">
-                <a:solidFill>
-                  <a:srgbClr val="172B45"/>
-                </a:solidFill>
-                <a:latin typeface="Aptos"/>
-                <a:ea typeface="Aptos"/>
-                <a:cs typeface="Aptos"/>
-              </a:defRPr>
-            </a:pPr>
-            <a:r>
-              <a:rPr sz="2100" b="0">
-                <a:solidFill>
-                  <a:srgbClr val="172B45"/>
-                </a:solidFill>
-                <a:latin typeface="Aptos"/>
-                <a:ea typeface="Aptos"/>
-                <a:cs typeface="Aptos"/>
-              </a:rPr>
-              <a:t>Correct currency conversion and validate country labels against posting locations. Then regenerate all salary results.</a:t>
-            </a:r>
-          </a:p>
-        </p:txBody>
-      </p:sp>
-      <p:sp>
-        <p:nvSpPr>
-          <p:cNvPr id="4" name="Rectangle 3">
-            <a:extLst>
-              <a:ext uri="{FF2B5EF4-FFF2-40B4-BE49-F238E27FC236}">
-                <a16:creationId xmlns:a16="http://schemas.microsoft.com/office/drawing/2014/main" id="{A10759AA-D532-4A94-8A17-492E5DEA8EAB}"/>
-              </a:ext>
-            </a:extLst>
-          </p:cNvPr>
-          <p:cNvSpPr>
-            <a:spLocks noGrp="1"/>
-          </p:cNvSpPr>
-          <p:nvPr/>
-        </p:nvSpPr>
-        <p:spPr>
-          <a:xfrm>
-            <a:off x="762000" y="2571750"/>
-            <a:ext cx="10572750" cy="857250"/>
-          </a:xfrm>
-          <a:prstGeom prst="rect">
-            <a:avLst/>
-          </a:prstGeom>
-          <a:noFill/>
-          <a:ln w="0">
-            <a:noFill/>
-          </a:ln>
-        </p:spPr>
-        <p:txBody>
-          <a:bodyPr>
-            <a:noAutofit/>
-          </a:bodyPr>
-          <a:lstStyle/>
-          <a:p>
-            <a:pPr>
-              <a:defRPr sz="2100" b="0">
-                <a:solidFill>
-                  <a:srgbClr val="172B45"/>
-                </a:solidFill>
-                <a:latin typeface="Aptos"/>
-                <a:ea typeface="Aptos"/>
-                <a:cs typeface="Aptos"/>
-              </a:defRPr>
-            </a:pPr>
-            <a:r>
-              <a:rPr sz="2100" b="0">
-                <a:solidFill>
-                  <a:srgbClr val="172B45"/>
-                </a:solidFill>
-                <a:latin typeface="Aptos"/>
-                <a:ea typeface="Aptos"/>
-                <a:cs typeface="Aptos"/>
-              </a:rPr>
-              <a:t>Test omitted predictors, including location, title, industry, work arrangement, and specialization. Compare with an experience-only model.</a:t>
-            </a:r>
-          </a:p>
-        </p:txBody>
-      </p:sp>
-      <p:sp>
-        <p:nvSpPr>
-          <p:cNvPr id="5" name="Rectangle 4">
-            <a:extLst>
-              <a:ext uri="{FF2B5EF4-FFF2-40B4-BE49-F238E27FC236}">
-                <a16:creationId xmlns:a16="http://schemas.microsoft.com/office/drawing/2014/main" id="{AF92F8FA-CDCD-44DE-9675-C9D857531741}"/>
-              </a:ext>
-            </a:extLst>
-          </p:cNvPr>
-          <p:cNvSpPr>
-            <a:spLocks noGrp="1"/>
-          </p:cNvSpPr>
-          <p:nvPr/>
-        </p:nvSpPr>
-        <p:spPr>
-          <a:xfrm>
-            <a:off x="762000" y="3571875"/>
-            <a:ext cx="10572750" cy="857250"/>
-          </a:xfrm>
-          <a:prstGeom prst="rect">
-            <a:avLst/>
-          </a:prstGeom>
-          <a:noFill/>
-          <a:ln w="0">
-            <a:noFill/>
-          </a:ln>
-        </p:spPr>
-        <p:txBody>
-          <a:bodyPr>
-            <a:noAutofit/>
-          </a:bodyPr>
-          <a:lstStyle/>
-          <a:p>
-            <a:pPr>
-              <a:defRPr sz="2100" b="0">
-                <a:solidFill>
-                  <a:srgbClr val="172B45"/>
-                </a:solidFill>
-                <a:latin typeface="Aptos"/>
-                <a:ea typeface="Aptos"/>
-                <a:cs typeface="Aptos"/>
-              </a:defRPr>
-            </a:pPr>
-            <a:r>
-              <a:rPr sz="2100" b="0">
-                <a:solidFill>
-                  <a:srgbClr val="172B45"/>
-                </a:solidFill>
-                <a:latin typeface="Aptos"/>
-                <a:ea typeface="Aptos"/>
-                <a:cs typeface="Aptos"/>
-              </a:rPr>
-              <a:t>Use permutation importance and subgroup errors. Evaluate future postings or unfamiliar employers with a fresh holdout.</a:t>
-            </a:r>
-          </a:p>
-        </p:txBody>
-      </p:sp>
-      <p:sp>
-        <p:nvSpPr>
-          <p:cNvPr id="6" name="Rectangle 5">
-            <a:extLst>
-              <a:ext uri="{FF2B5EF4-FFF2-40B4-BE49-F238E27FC236}">
-                <a16:creationId xmlns:a16="http://schemas.microsoft.com/office/drawing/2014/main" id="{42964A59-447F-43CE-B7B8-5407EF1C1D25}"/>
-              </a:ext>
-            </a:extLst>
-          </p:cNvPr>
-          <p:cNvSpPr>
-            <a:spLocks noGrp="1"/>
-          </p:cNvSpPr>
-          <p:nvPr/>
-        </p:nvSpPr>
-        <p:spPr>
-          <a:xfrm>
-            <a:off x="762000" y="5867400"/>
-            <a:ext cx="10477500" cy="447675"/>
-          </a:xfrm>
-          <a:prstGeom prst="rect">
-            <a:avLst/>
-          </a:prstGeom>
-          <a:noFill/>
-          <a:ln w="0">
-            <a:noFill/>
-          </a:ln>
-        </p:spPr>
-        <p:txBody>
-          <a:bodyPr>
-            <a:noAutofit/>
-          </a:bodyPr>
-          <a:lstStyle/>
-          <a:p>
-            <a:pPr>
-              <a:defRPr sz="1350" b="0">
-                <a:solidFill>
-                  <a:srgbClr val="687887"/>
-                </a:solidFill>
-                <a:latin typeface="Aptos"/>
-                <a:ea typeface="Aptos"/>
-                <a:cs typeface="Aptos"/>
-              </a:defRPr>
-            </a:pPr>
-            <a:r>
-              <a:rPr sz="1350" b="0">
-                <a:solidFill>
-                  <a:srgbClr val="687887"/>
-                </a:solidFill>
-                <a:latin typeface="Aptos"/>
-                <a:ea typeface="Aptos"/>
-                <a:cs typeface="Aptos"/>
-              </a:rPr>
-              <a:t>Current random splitting does not directly test temporal or employer generalization.</a:t>
-            </a:r>
-          </a:p>
-        </p:txBody>
-      </p:sp>
-    </p:spTree>
-    <p:extLst>
-      <p:ext uri="{BB962C8B-B14F-4D97-AF65-F5344CB8AC3E}">
-        <p14:creationId xmlns:p14="http://schemas.microsoft.com/office/powerpoint/2010/main" val="1266615189"/>
-      </p:ext>
-    </p:extLst>
-  </p:cSld>
-  <p:clrMapOvr>
-    <a:masterClrMapping/>
-  </p:clrMapOvr>
-</p:sld>
-</file>
-
-<file path=ppt/slides/slide15.xml><?xml version="1.0" encoding="utf-8"?>
-<p:sld xmlns:a="http://schemas.openxmlformats.org/drawingml/2006/main" xmlns:r="http://schemas.openxmlformats.org/officeDocument/2006/relationships" xmlns:p="http://schemas.openxmlformats.org/presentationml/2006/main">
-  <p:cSld>
-    <p:bg>
-      <p:bgPr>
-        <a:solidFill>
-          <a:srgbClr val="FFFFFF"/>
-        </a:solidFill>
-        <a:effectLst/>
-      </p:bgPr>
-    </p:bg>
-    <p:spTree>
-      <p:nvGrpSpPr>
-        <p:cNvPr id="1" name=""/>
-        <p:cNvGrpSpPr/>
-        <p:nvPr/>
-      </p:nvGrpSpPr>
-      <p:grpSpPr>
-        <a:xfrm>
-          <a:off x="0" y="0"/>
-          <a:ext cx="0" cy="0"/>
-          <a:chOff x="0" y="0"/>
-          <a:chExt cx="0" cy="0"/>
-        </a:xfrm>
-      </p:grpSpPr>
-      <p:sp>
-        <p:nvSpPr>
-          <p:cNvPr id="7" name="Rectangle 6">
-            <a:extLst>
-              <a:ext uri="{FF2B5EF4-FFF2-40B4-BE49-F238E27FC236}">
-                <a16:creationId xmlns:a16="http://schemas.microsoft.com/office/drawing/2014/main" id="{9F4FA56B-B216-4EB6-B52E-5905344DEEA0}"/>
-              </a:ext>
-            </a:extLst>
-          </p:cNvPr>
-          <p:cNvSpPr>
-            <a:spLocks noGrp="1"/>
-          </p:cNvSpPr>
-          <p:nvPr/>
-        </p:nvSpPr>
-        <p:spPr>
-          <a:xfrm>
-            <a:off x="666750" y="428625"/>
-            <a:ext cx="10858500" cy="857250"/>
-          </a:xfrm>
-          <a:prstGeom prst="rect">
-            <a:avLst/>
-          </a:prstGeom>
-          <a:noFill/>
-          <a:ln w="0">
-            <a:noFill/>
-          </a:ln>
-        </p:spPr>
-        <p:txBody>
-          <a:bodyPr>
-            <a:noAutofit/>
-          </a:bodyPr>
-          <a:lstStyle/>
-          <a:p>
-            <a:pPr>
-              <a:defRPr sz="3150" b="1">
-                <a:solidFill>
-                  <a:srgbClr val="172B45"/>
-                </a:solidFill>
-                <a:latin typeface="Aptos"/>
-                <a:ea typeface="Aptos"/>
-                <a:cs typeface="Aptos"/>
-              </a:defRPr>
-            </a:pPr>
-            <a:r>
-              <a:rPr sz="3150" b="1">
-                <a:solidFill>
-                  <a:srgbClr val="172B45"/>
-                </a:solidFill>
-                <a:latin typeface="Aptos"/>
-                <a:ea typeface="Aptos"/>
-                <a:cs typeface="Aptos"/>
-              </a:rPr>
-              <a:t>Conclusions and intended use</a:t>
-            </a:r>
-          </a:p>
-        </p:txBody>
-      </p:sp>
-      <p:sp>
-        <p:nvSpPr>
-          <p:cNvPr id="2" name="Rectangle 1">
-            <a:extLst>
-              <a:ext uri="{FF2B5EF4-FFF2-40B4-BE49-F238E27FC236}">
-                <a16:creationId xmlns:a16="http://schemas.microsoft.com/office/drawing/2014/main" id="{4D61D0E8-FED6-4E21-8B50-035CB17074B8}"/>
-              </a:ext>
-            </a:extLst>
-          </p:cNvPr>
-          <p:cNvSpPr>
-            <a:spLocks noGrp="1"/>
-          </p:cNvSpPr>
-          <p:nvPr/>
-        </p:nvSpPr>
-        <p:spPr>
-          <a:xfrm>
-            <a:off x="11334750" y="6381750"/>
-            <a:ext cx="381000" cy="238125"/>
-          </a:xfrm>
-          <a:prstGeom prst="rect">
-            <a:avLst/>
-          </a:prstGeom>
-          <a:noFill/>
-          <a:ln w="0">
-            <a:noFill/>
-          </a:ln>
-        </p:spPr>
-        <p:txBody>
-          <a:bodyPr>
-            <a:noAutofit/>
-          </a:bodyPr>
-          <a:lstStyle/>
-          <a:p>
-            <a:pPr>
-              <a:defRPr sz="1200" b="0">
-                <a:solidFill>
-                  <a:srgbClr val="687887"/>
-                </a:solidFill>
-                <a:latin typeface="Aptos"/>
-                <a:ea typeface="Aptos"/>
-                <a:cs typeface="Aptos"/>
-              </a:defRPr>
-            </a:pPr>
-            <a:r>
-              <a:rPr sz="1200" b="0">
-                <a:solidFill>
-                  <a:srgbClr val="687887"/>
-                </a:solidFill>
-                <a:latin typeface="Aptos"/>
-                <a:ea typeface="Aptos"/>
-                <a:cs typeface="Aptos"/>
-              </a:rPr>
-              <a:t>15</a:t>
-            </a:r>
-          </a:p>
-        </p:txBody>
-      </p:sp>
-      <p:sp>
-        <p:nvSpPr>
-          <p:cNvPr id="3" name="Rectangle 2">
-            <a:extLst>
-              <a:ext uri="{FF2B5EF4-FFF2-40B4-BE49-F238E27FC236}">
-                <a16:creationId xmlns:a16="http://schemas.microsoft.com/office/drawing/2014/main" id="{085F9C57-29E0-4419-9C4F-5F91C74C4C08}"/>
-              </a:ext>
-            </a:extLst>
-          </p:cNvPr>
-          <p:cNvSpPr>
-            <a:spLocks noGrp="1"/>
-          </p:cNvSpPr>
-          <p:nvPr/>
-        </p:nvSpPr>
-        <p:spPr>
-          <a:xfrm>
-            <a:off x="762000" y="1571625"/>
-            <a:ext cx="10572750" cy="857250"/>
-          </a:xfrm>
-          <a:prstGeom prst="rect">
-            <a:avLst/>
-          </a:prstGeom>
-          <a:noFill/>
-          <a:ln w="0">
-            <a:noFill/>
-          </a:ln>
-        </p:spPr>
-        <p:txBody>
-          <a:bodyPr>
-            <a:noAutofit/>
-          </a:bodyPr>
-          <a:lstStyle/>
-          <a:p>
-            <a:pPr>
-              <a:defRPr sz="2100" b="0">
-                <a:solidFill>
-                  <a:srgbClr val="172B45"/>
-                </a:solidFill>
-                <a:latin typeface="Aptos"/>
-                <a:ea typeface="Aptos"/>
-                <a:cs typeface="Aptos"/>
-              </a:defRPr>
-            </a:pPr>
-            <a:r>
-              <a:rPr sz="2100" b="0">
-                <a:solidFill>
-                  <a:srgbClr val="172B45"/>
-                </a:solidFill>
-                <a:latin typeface="Aptos"/>
-                <a:ea typeface="Aptos"/>
-                <a:cs typeface="Aptos"/>
-              </a:rPr>
-              <a:t>Specializations correspond to recognizable technical skill profiles in this dataset.</a:t>
-            </a:r>
-          </a:p>
-        </p:txBody>
-      </p:sp>
-      <p:sp>
-        <p:nvSpPr>
-          <p:cNvPr id="4" name="Rectangle 3">
-            <a:extLst>
-              <a:ext uri="{FF2B5EF4-FFF2-40B4-BE49-F238E27FC236}">
-                <a16:creationId xmlns:a16="http://schemas.microsoft.com/office/drawing/2014/main" id="{EC5D085F-3ADA-4C50-9086-3E54C70D4446}"/>
-              </a:ext>
-            </a:extLst>
-          </p:cNvPr>
-          <p:cNvSpPr>
-            <a:spLocks noGrp="1"/>
-          </p:cNvSpPr>
-          <p:nvPr/>
-        </p:nvSpPr>
-        <p:spPr>
-          <a:xfrm>
-            <a:off x="762000" y="2571750"/>
-            <a:ext cx="10572750" cy="857250"/>
-          </a:xfrm>
-          <a:prstGeom prst="rect">
-            <a:avLst/>
-          </a:prstGeom>
-          <a:noFill/>
-          <a:ln w="0">
-            <a:noFill/>
-          </a:ln>
-        </p:spPr>
-        <p:txBody>
-          <a:bodyPr>
-            <a:noAutofit/>
-          </a:bodyPr>
-          <a:lstStyle/>
-          <a:p>
-            <a:pPr>
-              <a:defRPr sz="2100" b="0">
-                <a:solidFill>
-                  <a:srgbClr val="172B45"/>
-                </a:solidFill>
-                <a:latin typeface="Aptos"/>
-                <a:ea typeface="Aptos"/>
-                <a:cs typeface="Aptos"/>
-              </a:defRPr>
-            </a:pPr>
-            <a:r>
-              <a:rPr sz="2100" b="0">
-                <a:solidFill>
-                  <a:srgbClr val="172B45"/>
-                </a:solidFill>
-                <a:latin typeface="Aptos"/>
-                <a:ea typeface="Aptos"/>
-                <a:cs typeface="Aptos"/>
-              </a:rPr>
-              <a:t>The workflow demonstrates cleaning, feature engineering, tuning, and held-out evaluation. Experience dominates the current salary models.</a:t>
-            </a:r>
-          </a:p>
-        </p:txBody>
-      </p:sp>
-      <p:sp>
-        <p:nvSpPr>
-          <p:cNvPr id="5" name="Rectangle 4">
-            <a:extLst>
-              <a:ext uri="{FF2B5EF4-FFF2-40B4-BE49-F238E27FC236}">
-                <a16:creationId xmlns:a16="http://schemas.microsoft.com/office/drawing/2014/main" id="{857FE2C0-1712-48E9-AC6F-7E2AFDC9B258}"/>
-              </a:ext>
-            </a:extLst>
-          </p:cNvPr>
-          <p:cNvSpPr>
-            <a:spLocks noGrp="1"/>
-          </p:cNvSpPr>
-          <p:nvPr/>
-        </p:nvSpPr>
-        <p:spPr>
-          <a:xfrm>
-            <a:off x="762000" y="3571875"/>
-            <a:ext cx="10572750" cy="857250"/>
-          </a:xfrm>
-          <a:prstGeom prst="rect">
-            <a:avLst/>
-          </a:prstGeom>
-          <a:noFill/>
-          <a:ln w="0">
-            <a:noFill/>
-          </a:ln>
-        </p:spPr>
-        <p:txBody>
-          <a:bodyPr>
-            <a:noAutofit/>
-          </a:bodyPr>
-          <a:lstStyle/>
-          <a:p>
-            <a:pPr>
-              <a:defRPr sz="2100" b="0">
-                <a:solidFill>
-                  <a:srgbClr val="172B45"/>
-                </a:solidFill>
-                <a:latin typeface="Aptos"/>
-                <a:ea typeface="Aptos"/>
-                <a:cs typeface="Aptos"/>
-              </a:defRPr>
-            </a:pPr>
-            <a:r>
-              <a:rPr sz="2100" b="0">
-                <a:solidFill>
-                  <a:srgbClr val="172B45"/>
-                </a:solidFill>
-                <a:latin typeface="Aptos"/>
-                <a:ea typeface="Aptos"/>
-                <a:cs typeface="Aptos"/>
-              </a:rPr>
-              <a:t>Skill findings can inform hiring criteria and curricula. Salary planning requires corrected data and rerun results.</a:t>
-            </a:r>
-          </a:p>
-        </p:txBody>
-      </p:sp>
-      <p:sp>
-        <p:nvSpPr>
-          <p:cNvPr id="6" name="Rectangle 5">
-            <a:extLst>
-              <a:ext uri="{FF2B5EF4-FFF2-40B4-BE49-F238E27FC236}">
-                <a16:creationId xmlns:a16="http://schemas.microsoft.com/office/drawing/2014/main" id="{B41F885A-DA9D-4BC5-BB1D-990DE88F1AA8}"/>
-              </a:ext>
-            </a:extLst>
-          </p:cNvPr>
-          <p:cNvSpPr>
-            <a:spLocks noGrp="1"/>
-          </p:cNvSpPr>
-          <p:nvPr/>
-        </p:nvSpPr>
-        <p:spPr>
-          <a:xfrm>
-            <a:off x="762000" y="5867400"/>
-            <a:ext cx="10477500" cy="447675"/>
-          </a:xfrm>
-          <a:prstGeom prst="rect">
-            <a:avLst/>
-          </a:prstGeom>
-          <a:noFill/>
-          <a:ln w="0">
-            <a:noFill/>
-          </a:ln>
-        </p:spPr>
-        <p:txBody>
-          <a:bodyPr>
-            <a:noAutofit/>
-          </a:bodyPr>
-          <a:lstStyle/>
-          <a:p>
-            <a:pPr>
-              <a:defRPr sz="1350" b="0">
-                <a:solidFill>
-                  <a:srgbClr val="687887"/>
-                </a:solidFill>
-                <a:latin typeface="Aptos"/>
-                <a:ea typeface="Aptos"/>
-                <a:cs typeface="Aptos"/>
-              </a:defRPr>
-            </a:pPr>
-            <a:r>
-              <a:rPr sz="1350" b="0">
-                <a:solidFill>
-                  <a:srgbClr val="687887"/>
-                </a:solidFill>
-                <a:latin typeface="Aptos"/>
-                <a:ea typeface="Aptos"/>
-                <a:cs typeface="Aptos"/>
-              </a:rPr>
-              <a:t>Discussion: Which additional job characteristics would improve the analysis after data correction?</a:t>
-            </a:r>
-          </a:p>
-        </p:txBody>
-      </p:sp>
-    </p:spTree>
-    <p:extLst>
-      <p:ext uri="{BB962C8B-B14F-4D97-AF65-F5344CB8AC3E}">
-        <p14:creationId xmlns:p14="http://schemas.microsoft.com/office/powerpoint/2010/main" val="642971794"/>
-      </p:ext>
-    </p:extLst>
-  </p:cSld>
-  <p:clrMapOvr>
-    <a:masterClrMapping/>
-  </p:clrMapOvr>
-</p:sld>
-</file>
-
-<file path=ppt/slides/slide2.xml><?xml version="1.0" encoding="utf-8"?>
-<p:sld xmlns:a="http://schemas.openxmlformats.org/drawingml/2006/main" xmlns:r="http://schemas.openxmlformats.org/officeDocument/2006/relationships" xmlns:p="http://schemas.openxmlformats.org/presentationml/2006/main">
-  <p:cSld>
-    <p:bg>
-      <p:bgPr>
-        <a:solidFill>
-          <a:srgbClr val="FFFFFF"/>
-        </a:solidFill>
-        <a:effectLst/>
-      </p:bgPr>
-    </p:bg>
-    <p:spTree>
-      <p:nvGrpSpPr>
-        <p:cNvPr id="1" name=""/>
-        <p:cNvGrpSpPr/>
-        <p:nvPr/>
-      </p:nvGrpSpPr>
-      <p:grpSpPr>
-        <a:xfrm>
-          <a:off x="0" y="0"/>
-          <a:ext cx="0" cy="0"/>
-          <a:chOff x="0" y="0"/>
-          <a:chExt cx="0" cy="0"/>
-        </a:xfrm>
-      </p:grpSpPr>
-      <p:sp>
-        <p:nvSpPr>
-          <p:cNvPr id="7" name="Rectangle 6">
-            <a:extLst>
-              <a:ext uri="{FF2B5EF4-FFF2-40B4-BE49-F238E27FC236}">
-                <a16:creationId xmlns:a16="http://schemas.microsoft.com/office/drawing/2014/main" id="{A40F97ED-DCA6-4C89-B31F-C3BD581C92B1}"/>
-              </a:ext>
-            </a:extLst>
-          </p:cNvPr>
-          <p:cNvSpPr>
-            <a:spLocks noGrp="1"/>
-          </p:cNvSpPr>
-          <p:nvPr/>
-        </p:nvSpPr>
-        <p:spPr>
-          <a:xfrm>
-            <a:off x="666750" y="428625"/>
-            <a:ext cx="10858500" cy="857250"/>
-          </a:xfrm>
-          <a:prstGeom prst="rect">
-            <a:avLst/>
-          </a:prstGeom>
-          <a:noFill/>
-          <a:ln w="0">
-            <a:noFill/>
-          </a:ln>
-        </p:spPr>
-        <p:txBody>
-          <a:bodyPr>
-            <a:noAutofit/>
-          </a:bodyPr>
-          <a:lstStyle/>
-          <a:p>
-            <a:pPr>
-              <a:defRPr sz="3150" b="1">
-                <a:solidFill>
-                  <a:srgbClr val="172B45"/>
-                </a:solidFill>
-                <a:latin typeface="Aptos"/>
-                <a:ea typeface="Aptos"/>
-                <a:cs typeface="Aptos"/>
-              </a:defRPr>
-            </a:pPr>
-            <a:r>
-              <a:rPr sz="3150" b="1" dirty="0">
-                <a:solidFill>
-                  <a:srgbClr val="172B45"/>
-                </a:solidFill>
-                <a:latin typeface="Aptos"/>
-                <a:ea typeface="Aptos"/>
-                <a:cs typeface="Aptos"/>
-              </a:rPr>
-              <a:t>Project question</a:t>
-            </a:r>
-          </a:p>
-        </p:txBody>
-      </p:sp>
-      <p:sp>
-        <p:nvSpPr>
-          <p:cNvPr id="2" name="Rectangle 1">
-            <a:extLst>
-              <a:ext uri="{FF2B5EF4-FFF2-40B4-BE49-F238E27FC236}">
-                <a16:creationId xmlns:a16="http://schemas.microsoft.com/office/drawing/2014/main" id="{8FAD25D5-C812-4EAD-AF45-AD6595ABF63C}"/>
-              </a:ext>
-            </a:extLst>
-          </p:cNvPr>
-          <p:cNvSpPr>
-            <a:spLocks noGrp="1"/>
-          </p:cNvSpPr>
-          <p:nvPr/>
-        </p:nvSpPr>
-        <p:spPr>
-          <a:xfrm>
-            <a:off x="11334750" y="6381750"/>
-            <a:ext cx="381000" cy="238125"/>
-          </a:xfrm>
-          <a:prstGeom prst="rect">
-            <a:avLst/>
-          </a:prstGeom>
-          <a:noFill/>
-          <a:ln w="0">
-            <a:noFill/>
-          </a:ln>
-        </p:spPr>
-        <p:txBody>
-          <a:bodyPr>
-            <a:noAutofit/>
-          </a:bodyPr>
-          <a:lstStyle/>
-          <a:p>
-            <a:pPr>
-              <a:defRPr sz="1200" b="0">
-                <a:solidFill>
-                  <a:srgbClr val="687887"/>
-                </a:solidFill>
-                <a:latin typeface="Aptos"/>
-                <a:ea typeface="Aptos"/>
-                <a:cs typeface="Aptos"/>
-              </a:defRPr>
-            </a:pPr>
-            <a:r>
-              <a:rPr sz="1200" b="0">
-                <a:solidFill>
-                  <a:srgbClr val="687887"/>
-                </a:solidFill>
-                <a:latin typeface="Aptos"/>
-                <a:ea typeface="Aptos"/>
-                <a:cs typeface="Aptos"/>
-              </a:rPr>
-              <a:t>2</a:t>
-            </a:r>
-          </a:p>
-        </p:txBody>
-      </p:sp>
-      <p:sp>
-        <p:nvSpPr>
-          <p:cNvPr id="3" name="Rectangle 2">
-            <a:extLst>
-              <a:ext uri="{FF2B5EF4-FFF2-40B4-BE49-F238E27FC236}">
-                <a16:creationId xmlns:a16="http://schemas.microsoft.com/office/drawing/2014/main" id="{149CAAC0-23C2-437A-BAB7-F918DFFE06F0}"/>
-              </a:ext>
-            </a:extLst>
-          </p:cNvPr>
-          <p:cNvSpPr>
-            <a:spLocks noGrp="1"/>
-          </p:cNvSpPr>
-          <p:nvPr/>
-        </p:nvSpPr>
-        <p:spPr>
-          <a:xfrm>
-            <a:off x="762000" y="1571625"/>
-            <a:ext cx="10572750" cy="857250"/>
-          </a:xfrm>
-          <a:prstGeom prst="rect">
-            <a:avLst/>
-          </a:prstGeom>
-          <a:noFill/>
-          <a:ln w="0">
-            <a:noFill/>
-          </a:ln>
-        </p:spPr>
-        <p:txBody>
-          <a:bodyPr>
-            <a:noAutofit/>
-          </a:bodyPr>
-          <a:lstStyle/>
-          <a:p>
-            <a:pPr>
-              <a:defRPr sz="2100" b="0">
-                <a:solidFill>
-                  <a:srgbClr val="172B45"/>
-                </a:solidFill>
-                <a:latin typeface="Aptos"/>
-                <a:ea typeface="Aptos"/>
-                <a:cs typeface="Aptos"/>
-              </a:defRPr>
-            </a:pPr>
-            <a:r>
-              <a:rPr sz="2100" b="0">
-                <a:solidFill>
-                  <a:srgbClr val="172B45"/>
-                </a:solidFill>
-                <a:latin typeface="Aptos"/>
-                <a:ea typeface="Aptos"/>
-                <a:cs typeface="Aptos"/>
-              </a:rPr>
-              <a:t>Overlapping AI job titles make roles difficult to compare.</a:t>
-            </a:r>
-          </a:p>
-        </p:txBody>
-      </p:sp>
-      <p:sp>
-        <p:nvSpPr>
-          <p:cNvPr id="4" name="Rectangle 3">
-            <a:extLst>
-              <a:ext uri="{FF2B5EF4-FFF2-40B4-BE49-F238E27FC236}">
-                <a16:creationId xmlns:a16="http://schemas.microsoft.com/office/drawing/2014/main" id="{5F656F19-A9A1-4566-9DA3-90457951A792}"/>
-              </a:ext>
-            </a:extLst>
-          </p:cNvPr>
-          <p:cNvSpPr>
-            <a:spLocks noGrp="1"/>
-          </p:cNvSpPr>
-          <p:nvPr/>
-        </p:nvSpPr>
-        <p:spPr>
-          <a:xfrm>
-            <a:off x="762000" y="2571750"/>
-            <a:ext cx="10572750" cy="857250"/>
-          </a:xfrm>
-          <a:prstGeom prst="rect">
-            <a:avLst/>
-          </a:prstGeom>
-          <a:noFill/>
-          <a:ln w="0">
-            <a:noFill/>
-          </a:ln>
-        </p:spPr>
-        <p:txBody>
-          <a:bodyPr>
-            <a:noAutofit/>
-          </a:bodyPr>
-          <a:lstStyle/>
-          <a:p>
-            <a:pPr>
-              <a:defRPr sz="2100" b="0">
-                <a:solidFill>
-                  <a:srgbClr val="172B45"/>
-                </a:solidFill>
-                <a:latin typeface="Aptos"/>
-                <a:ea typeface="Aptos"/>
-                <a:cs typeface="Aptos"/>
-              </a:defRPr>
-            </a:pPr>
-            <a:r>
-              <a:rPr sz="2100" b="0">
-                <a:solidFill>
-                  <a:srgbClr val="172B45"/>
-                </a:solidFill>
-                <a:latin typeface="Aptos"/>
-                <a:ea typeface="Aptos"/>
-                <a:cs typeface="Aptos"/>
-              </a:rPr>
-              <a:t>This project compares skill profiles, experience requirements, work arrangements, and salary expectations.</a:t>
-            </a:r>
-          </a:p>
-        </p:txBody>
-      </p:sp>
-      <p:sp>
-        <p:nvSpPr>
-          <p:cNvPr id="5" name="Rectangle 4">
-            <a:extLst>
-              <a:ext uri="{FF2B5EF4-FFF2-40B4-BE49-F238E27FC236}">
-                <a16:creationId xmlns:a16="http://schemas.microsoft.com/office/drawing/2014/main" id="{37A89C72-60AC-465C-8684-1723E8826F6A}"/>
-              </a:ext>
-            </a:extLst>
-          </p:cNvPr>
-          <p:cNvSpPr>
-            <a:spLocks noGrp="1"/>
-          </p:cNvSpPr>
-          <p:nvPr/>
-        </p:nvSpPr>
-        <p:spPr>
-          <a:xfrm>
-            <a:off x="762000" y="3571875"/>
-            <a:ext cx="10572750" cy="857250"/>
-          </a:xfrm>
-          <a:prstGeom prst="rect">
-            <a:avLst/>
-          </a:prstGeom>
-          <a:noFill/>
-          <a:ln w="0">
-            <a:noFill/>
-          </a:ln>
-        </p:spPr>
-        <p:txBody>
-          <a:bodyPr>
-            <a:noAutofit/>
-          </a:bodyPr>
-          <a:lstStyle/>
-          <a:p>
-            <a:pPr>
-              <a:defRPr sz="2100" b="0">
-                <a:solidFill>
-                  <a:srgbClr val="172B45"/>
-                </a:solidFill>
-                <a:latin typeface="Aptos"/>
-                <a:ea typeface="Aptos"/>
-                <a:cs typeface="Aptos"/>
-              </a:defRPr>
-            </a:pPr>
-            <a:r>
-              <a:rPr sz="2100" b="0">
-                <a:solidFill>
-                  <a:srgbClr val="172B45"/>
-                </a:solidFill>
-                <a:latin typeface="Aptos"/>
-                <a:ea typeface="Aptos"/>
-                <a:cs typeface="Aptos"/>
-              </a:rPr>
-              <a:t>The analysis uses existing specialization labels to describe meaningful differences between roles.</a:t>
-            </a:r>
-          </a:p>
-        </p:txBody>
-      </p:sp>
-      <p:sp>
-        <p:nvSpPr>
-          <p:cNvPr id="6" name="Rectangle 5">
-            <a:extLst>
-              <a:ext uri="{FF2B5EF4-FFF2-40B4-BE49-F238E27FC236}">
-                <a16:creationId xmlns:a16="http://schemas.microsoft.com/office/drawing/2014/main" id="{CC306181-D178-41D4-9131-5BB6919A31E8}"/>
-              </a:ext>
-            </a:extLst>
-          </p:cNvPr>
-          <p:cNvSpPr>
-            <a:spLocks noGrp="1"/>
-          </p:cNvSpPr>
-          <p:nvPr/>
-        </p:nvSpPr>
-        <p:spPr>
-          <a:xfrm>
-            <a:off x="762000" y="5867400"/>
-            <a:ext cx="10477500" cy="447675"/>
-          </a:xfrm>
-          <a:prstGeom prst="rect">
-            <a:avLst/>
-          </a:prstGeom>
-          <a:noFill/>
-          <a:ln w="0">
-            <a:noFill/>
-          </a:ln>
-        </p:spPr>
-        <p:txBody>
-          <a:bodyPr>
-            <a:noAutofit/>
-          </a:bodyPr>
-          <a:lstStyle/>
-          <a:p>
-            <a:pPr>
-              <a:defRPr sz="1350" b="0">
-                <a:solidFill>
-                  <a:srgbClr val="687887"/>
-                </a:solidFill>
-                <a:latin typeface="Aptos"/>
-                <a:ea typeface="Aptos"/>
-                <a:cs typeface="Aptos"/>
-              </a:defRPr>
-            </a:pPr>
-            <a:r>
-              <a:rPr sz="1350" b="0">
-                <a:solidFill>
-                  <a:srgbClr val="687887"/>
-                </a:solidFill>
-                <a:latin typeface="Aptos"/>
-                <a:ea typeface="Aptos"/>
-                <a:cs typeface="Aptos"/>
-              </a:rPr>
-              <a:t>Descriptive findings reflect this dataset, rather than the entire AI job market.</a:t>
-            </a:r>
-          </a:p>
-        </p:txBody>
-      </p:sp>
-    </p:spTree>
-    <p:extLst>
-      <p:ext uri="{BB962C8B-B14F-4D97-AF65-F5344CB8AC3E}">
-        <p14:creationId xmlns:p14="http://schemas.microsoft.com/office/powerpoint/2010/main" val="1735192350"/>
-      </p:ext>
-    </p:extLst>
-  </p:cSld>
-  <p:clrMapOvr>
-    <a:masterClrMapping/>
-  </p:clrMapOvr>
-</p:sld>
-</file>
-
-<file path=ppt/slides/slide3.xml><?xml version="1.0" encoding="utf-8"?>
-<p:sld xmlns:a="http://schemas.openxmlformats.org/drawingml/2006/main" xmlns:r="http://schemas.openxmlformats.org/officeDocument/2006/relationships" xmlns:p="http://schemas.openxmlformats.org/presentationml/2006/main">
-  <p:cSld>
-    <p:bg>
-      <p:bgPr>
-        <a:solidFill>
-          <a:srgbClr val="FFFFFF"/>
-        </a:solidFill>
-        <a:effectLst/>
-      </p:bgPr>
-    </p:bg>
-    <p:spTree>
-      <p:nvGrpSpPr>
-        <p:cNvPr id="1" name=""/>
-        <p:cNvGrpSpPr/>
-        <p:nvPr/>
-      </p:nvGrpSpPr>
-      <p:grpSpPr>
-        <a:xfrm>
-          <a:off x="0" y="0"/>
-          <a:ext cx="0" cy="0"/>
-          <a:chOff x="0" y="0"/>
-          <a:chExt cx="0" cy="0"/>
-        </a:xfrm>
-      </p:grpSpPr>
-      <p:sp>
-        <p:nvSpPr>
-          <p:cNvPr id="5" name="Rectangle 4">
-            <a:extLst>
-              <a:ext uri="{FF2B5EF4-FFF2-40B4-BE49-F238E27FC236}">
-                <a16:creationId xmlns:a16="http://schemas.microsoft.com/office/drawing/2014/main" id="{0F849D7D-0812-444B-910C-A583DAE3E325}"/>
-              </a:ext>
-            </a:extLst>
-          </p:cNvPr>
-          <p:cNvSpPr>
-            <a:spLocks noGrp="1"/>
-          </p:cNvSpPr>
-          <p:nvPr/>
-        </p:nvSpPr>
-        <p:spPr>
-          <a:xfrm>
-            <a:off x="666750" y="428625"/>
-            <a:ext cx="10858500" cy="857250"/>
-          </a:xfrm>
-          <a:prstGeom prst="rect">
-            <a:avLst/>
-          </a:prstGeom>
-          <a:noFill/>
-          <a:ln w="0">
-            <a:noFill/>
-          </a:ln>
-        </p:spPr>
-        <p:txBody>
-          <a:bodyPr>
-            <a:noAutofit/>
-          </a:bodyPr>
-          <a:lstStyle/>
-          <a:p>
-            <a:pPr>
-              <a:defRPr sz="3150" b="1">
-                <a:solidFill>
-                  <a:srgbClr val="172B45"/>
-                </a:solidFill>
-                <a:latin typeface="Aptos"/>
-                <a:ea typeface="Aptos"/>
-                <a:cs typeface="Aptos"/>
-              </a:defRPr>
-            </a:pPr>
-            <a:r>
-              <a:rPr sz="3150" b="1">
-                <a:solidFill>
-                  <a:srgbClr val="172B45"/>
-                </a:solidFill>
-                <a:latin typeface="Aptos"/>
-                <a:ea typeface="Aptos"/>
-                <a:cs typeface="Aptos"/>
-              </a:rPr>
-              <a:t>Dataset and geographic scope</a:t>
-            </a:r>
-          </a:p>
-        </p:txBody>
-      </p:sp>
-      <p:sp>
-        <p:nvSpPr>
-          <p:cNvPr id="2" name="Rectangle 1">
-            <a:extLst>
-              <a:ext uri="{FF2B5EF4-FFF2-40B4-BE49-F238E27FC236}">
-                <a16:creationId xmlns:a16="http://schemas.microsoft.com/office/drawing/2014/main" id="{4437EB76-2686-4813-AB56-682F72B4C0AE}"/>
-              </a:ext>
-            </a:extLst>
-          </p:cNvPr>
-          <p:cNvSpPr>
-            <a:spLocks noGrp="1"/>
-          </p:cNvSpPr>
-          <p:nvPr/>
-        </p:nvSpPr>
-        <p:spPr>
-          <a:xfrm>
-            <a:off x="11334750" y="6381750"/>
-            <a:ext cx="381000" cy="238125"/>
-          </a:xfrm>
-          <a:prstGeom prst="rect">
-            <a:avLst/>
-          </a:prstGeom>
-          <a:noFill/>
-          <a:ln w="0">
-            <a:noFill/>
-          </a:ln>
-        </p:spPr>
-        <p:txBody>
-          <a:bodyPr>
-            <a:noAutofit/>
-          </a:bodyPr>
-          <a:lstStyle/>
-          <a:p>
-            <a:pPr>
-              <a:defRPr sz="1200" b="0">
-                <a:solidFill>
-                  <a:srgbClr val="687887"/>
-                </a:solidFill>
-                <a:latin typeface="Aptos"/>
-                <a:ea typeface="Aptos"/>
-                <a:cs typeface="Aptos"/>
-              </a:defRPr>
-            </a:pPr>
-            <a:r>
-              <a:rPr sz="1200" b="0">
-                <a:solidFill>
-                  <a:srgbClr val="687887"/>
-                </a:solidFill>
-                <a:latin typeface="Aptos"/>
-                <a:ea typeface="Aptos"/>
-                <a:cs typeface="Aptos"/>
-              </a:rPr>
-              <a:t>3</a:t>
-            </a:r>
-          </a:p>
-        </p:txBody>
-      </p:sp>
-      <p:graphicFrame>
-        <p:nvGraphicFramePr>
-          <p:cNvPr id="7" name="Table 6"/>
-          <p:cNvGraphicFramePr/>
-          <p:nvPr/>
-        </p:nvGraphicFramePr>
-        <p:xfrm>
-          <a:off x="762000" y="1524000"/>
-          <a:ext cx="10668000" cy="3714750"/>
-        </p:xfrm>
-        <a:graphic>
-          <a:graphicData uri="http://schemas.openxmlformats.org/drawingml/2006/table">
-            <a:tbl>
-              <a:tblPr/>
-              <a:tblGrid>
-                <a:gridCol w="4572000">
-                  <a:extLst>
-                    <a:ext uri="{9D8B030D-6E8A-4147-A177-3AD203B41FA5}">
-                      <a16:colId xmlns:a16="http://schemas.microsoft.com/office/drawing/2014/main" val="20000"/>
-                    </a:ext>
-                  </a:extLst>
-                </a:gridCol>
-                <a:gridCol w="1905000">
-                  <a:extLst>
-                    <a:ext uri="{9D8B030D-6E8A-4147-A177-3AD203B41FA5}">
-                      <a16:colId xmlns:a16="http://schemas.microsoft.com/office/drawing/2014/main" val="20001"/>
-                    </a:ext>
-                  </a:extLst>
-                </a:gridCol>
-                <a:gridCol w="4191000">
-                  <a:extLst>
-                    <a:ext uri="{9D8B030D-6E8A-4147-A177-3AD203B41FA5}">
-                      <a16:colId xmlns:a16="http://schemas.microsoft.com/office/drawing/2014/main" val="20002"/>
-                    </a:ext>
-                  </a:extLst>
-                </a:gridCol>
-              </a:tblGrid>
-              <a:tr h="742950">
-                <a:tc>
-                  <a:txBody>
-                    <a:bodyPr/>
-                    <a:lstStyle/>
-                    <a:p>
-                      <a:r>
-                        <a:rPr sz="1725" b="1">
-                          <a:solidFill>
-                            <a:srgbClr val="FFFFFF"/>
-                          </a:solidFill>
-                          <a:latin typeface="Aptos"/>
-                          <a:ea typeface="Aptos"/>
-                          <a:cs typeface="Aptos"/>
-                        </a:rPr>
-                        <a:t>Stage</a:t>
-                      </a:r>
-                    </a:p>
-                  </a:txBody>
-                  <a:tcPr>
-                    <a:solidFill>
-                      <a:srgbClr val="172B45"/>
-                    </a:solidFill>
-                  </a:tcPr>
-                </a:tc>
-                <a:tc>
-                  <a:txBody>
-                    <a:bodyPr/>
-                    <a:lstStyle/>
-                    <a:p>
-                      <a:r>
-                        <a:rPr sz="1725" b="1">
-                          <a:solidFill>
-                            <a:srgbClr val="FFFFFF"/>
-                          </a:solidFill>
-                          <a:latin typeface="Aptos"/>
-                          <a:ea typeface="Aptos"/>
-                          <a:cs typeface="Aptos"/>
-                        </a:rPr>
-                        <a:t>Postings</a:t>
-                      </a:r>
-                    </a:p>
-                  </a:txBody>
-                  <a:tcPr>
-                    <a:solidFill>
-                      <a:srgbClr val="172B45"/>
-                    </a:solidFill>
-                  </a:tcPr>
-                </a:tc>
-                <a:tc>
-                  <a:txBody>
-                    <a:bodyPr/>
-                    <a:lstStyle/>
-                    <a:p>
-                      <a:r>
-                        <a:rPr sz="1725" b="1">
-                          <a:solidFill>
-                            <a:srgbClr val="FFFFFF"/>
-                          </a:solidFill>
-                          <a:latin typeface="Aptos"/>
-                          <a:ea typeface="Aptos"/>
-                          <a:cs typeface="Aptos"/>
-                        </a:rPr>
-                        <a:t>Scope</a:t>
-                      </a:r>
-                    </a:p>
-                  </a:txBody>
-                  <a:tcPr>
-                    <a:solidFill>
-                      <a:srgbClr val="172B45"/>
-                    </a:solidFill>
-                  </a:tcPr>
-                </a:tc>
-                <a:extLst>
-                  <a:ext uri="{0D108BD9-81ED-4DB2-BD59-A6C34878D82A}">
-                    <a16:rowId xmlns:a16="http://schemas.microsoft.com/office/drawing/2014/main" val="10000"/>
-                  </a:ext>
-                </a:extLst>
-              </a:tr>
-              <a:tr h="742950">
-                <a:tc>
-                  <a:txBody>
-                    <a:bodyPr/>
-                    <a:lstStyle/>
-                    <a:p>
-                      <a:r>
-                        <a:rPr sz="1725" b="0">
-                          <a:solidFill>
-                            <a:srgbClr val="172B45"/>
-                          </a:solidFill>
-                          <a:latin typeface="Aptos"/>
-                          <a:ea typeface="Aptos"/>
-                          <a:cs typeface="Aptos"/>
-                        </a:rPr>
-                        <a:t>Original organized dataset</a:t>
-                      </a:r>
-                    </a:p>
-                  </a:txBody>
-                  <a:tcPr>
-                    <a:solidFill>
-                      <a:srgbClr val="F0F4F8"/>
-                    </a:solidFill>
-                  </a:tcPr>
-                </a:tc>
-                <a:tc>
-                  <a:txBody>
-                    <a:bodyPr/>
-                    <a:lstStyle/>
-                    <a:p>
-                      <a:r>
-                        <a:rPr sz="1725" b="0">
-                          <a:solidFill>
-                            <a:srgbClr val="172B45"/>
-                          </a:solidFill>
-                          <a:latin typeface="Aptos"/>
-                          <a:ea typeface="Aptos"/>
-                          <a:cs typeface="Aptos"/>
-                        </a:rPr>
-                        <a:t>51,932</a:t>
-                      </a:r>
-                    </a:p>
-                  </a:txBody>
-                  <a:tcPr>
-                    <a:solidFill>
-                      <a:srgbClr val="F0F4F8"/>
-                    </a:solidFill>
-                  </a:tcPr>
-                </a:tc>
-                <a:tc>
-                  <a:txBody>
-                    <a:bodyPr/>
-                    <a:lstStyle/>
-                    <a:p>
-                      <a:r>
-                        <a:rPr sz="1725" b="0">
-                          <a:solidFill>
-                            <a:srgbClr val="172B45"/>
-                          </a:solidFill>
-                          <a:latin typeface="Aptos"/>
-                          <a:ea typeface="Aptos"/>
-                          <a:cs typeface="Aptos"/>
-                        </a:rPr>
-                        <a:t>22 variables</a:t>
-                      </a:r>
-                    </a:p>
-                  </a:txBody>
-                  <a:tcPr>
-                    <a:solidFill>
-                      <a:srgbClr val="F0F4F8"/>
-                    </a:solidFill>
-                  </a:tcPr>
-                </a:tc>
-                <a:extLst>
-                  <a:ext uri="{0D108BD9-81ED-4DB2-BD59-A6C34878D82A}">
-                    <a16:rowId xmlns:a16="http://schemas.microsoft.com/office/drawing/2014/main" val="10001"/>
-                  </a:ext>
-                </a:extLst>
-              </a:tr>
-              <a:tr h="742950">
-                <a:tc>
-                  <a:txBody>
-                    <a:bodyPr/>
-                    <a:lstStyle/>
-                    <a:p>
-                      <a:r>
-                        <a:rPr sz="1725" b="0">
-                          <a:solidFill>
-                            <a:srgbClr val="172B45"/>
-                          </a:solidFill>
-                          <a:latin typeface="Aptos"/>
-                          <a:ea typeface="Aptos"/>
-                          <a:cs typeface="Aptos"/>
-                        </a:rPr>
-                        <a:t>After rare-industry exclusions</a:t>
-                      </a:r>
-                    </a:p>
-                  </a:txBody>
-                  <a:tcPr>
-                    <a:solidFill>
-                      <a:srgbClr val="FFFFFF"/>
-                    </a:solidFill>
-                  </a:tcPr>
-                </a:tc>
-                <a:tc>
-                  <a:txBody>
-                    <a:bodyPr/>
-                    <a:lstStyle/>
-                    <a:p>
-                      <a:r>
-                        <a:rPr sz="1725" b="0">
-                          <a:solidFill>
-                            <a:srgbClr val="172B45"/>
-                          </a:solidFill>
-                          <a:latin typeface="Aptos"/>
-                          <a:ea typeface="Aptos"/>
-                          <a:cs typeface="Aptos"/>
-                        </a:rPr>
-                        <a:t>51,929</a:t>
-                      </a:r>
-                    </a:p>
-                  </a:txBody>
-                  <a:tcPr>
-                    <a:solidFill>
-                      <a:srgbClr val="FFFFFF"/>
-                    </a:solidFill>
-                  </a:tcPr>
-                </a:tc>
-                <a:tc>
-                  <a:txBody>
-                    <a:bodyPr/>
-                    <a:lstStyle/>
-                    <a:p>
-                      <a:r>
-                        <a:rPr sz="1725" b="0">
-                          <a:solidFill>
-                            <a:srgbClr val="172B45"/>
-                          </a:solidFill>
-                          <a:latin typeface="Aptos"/>
-                          <a:ea typeface="Aptos"/>
-                          <a:cs typeface="Aptos"/>
-                        </a:rPr>
-                        <a:t>Three categories removed</a:t>
-                      </a:r>
-                    </a:p>
-                  </a:txBody>
-                  <a:tcPr>
-                    <a:solidFill>
-                      <a:srgbClr val="FFFFFF"/>
-                    </a:solidFill>
-                  </a:tcPr>
-                </a:tc>
-                <a:extLst>
-                  <a:ext uri="{0D108BD9-81ED-4DB2-BD59-A6C34878D82A}">
-                    <a16:rowId xmlns:a16="http://schemas.microsoft.com/office/drawing/2014/main" val="10002"/>
-                  </a:ext>
-                </a:extLst>
-              </a:tr>
-              <a:tr h="742950">
-                <a:tc>
-                  <a:txBody>
-                    <a:bodyPr/>
-                    <a:lstStyle/>
-                    <a:p>
-                      <a:r>
-                        <a:rPr sz="1725" b="0">
-                          <a:solidFill>
-                            <a:srgbClr val="172B45"/>
-                          </a:solidFill>
-                          <a:latin typeface="Aptos"/>
-                          <a:ea typeface="Aptos"/>
-                          <a:cs typeface="Aptos"/>
-                        </a:rPr>
-                        <a:t>Country-filtered analysis</a:t>
-                      </a:r>
-                    </a:p>
-                  </a:txBody>
-                  <a:tcPr>
-                    <a:solidFill>
-                      <a:srgbClr val="F0F4F8"/>
-                    </a:solidFill>
-                  </a:tcPr>
-                </a:tc>
-                <a:tc>
-                  <a:txBody>
-                    <a:bodyPr/>
-                    <a:lstStyle/>
-                    <a:p>
-                      <a:r>
-                        <a:rPr sz="1725" b="0">
-                          <a:solidFill>
-                            <a:srgbClr val="172B45"/>
-                          </a:solidFill>
-                          <a:latin typeface="Aptos"/>
-                          <a:ea typeface="Aptos"/>
-                          <a:cs typeface="Aptos"/>
-                        </a:rPr>
-                        <a:t>8,766</a:t>
-                      </a:r>
-                    </a:p>
-                  </a:txBody>
-                  <a:tcPr>
-                    <a:solidFill>
-                      <a:srgbClr val="F0F4F8"/>
-                    </a:solidFill>
-                  </a:tcPr>
-                </a:tc>
-                <a:tc>
-                  <a:txBody>
-                    <a:bodyPr/>
-                    <a:lstStyle/>
-                    <a:p>
-                      <a:r>
-                        <a:rPr sz="1725" b="0">
-                          <a:solidFill>
-                            <a:srgbClr val="172B45"/>
-                          </a:solidFill>
-                          <a:latin typeface="Aptos"/>
-                          <a:ea typeface="Aptos"/>
-                          <a:cs typeface="Aptos"/>
-                        </a:rPr>
-                        <a:t>United States and Canada</a:t>
-                      </a:r>
-                    </a:p>
-                  </a:txBody>
-                  <a:tcPr>
-                    <a:solidFill>
-                      <a:srgbClr val="F0F4F8"/>
-                    </a:solidFill>
-                  </a:tcPr>
-                </a:tc>
-                <a:extLst>
-                  <a:ext uri="{0D108BD9-81ED-4DB2-BD59-A6C34878D82A}">
-                    <a16:rowId xmlns:a16="http://schemas.microsoft.com/office/drawing/2014/main" val="10003"/>
-                  </a:ext>
-                </a:extLst>
-              </a:tr>
-              <a:tr h="742950">
-                <a:tc>
-                  <a:txBody>
-                    <a:bodyPr/>
-                    <a:lstStyle/>
-                    <a:p>
-                      <a:r>
-                        <a:rPr sz="1725" b="0">
-                          <a:solidFill>
-                            <a:srgbClr val="172B45"/>
-                          </a:solidFill>
-                          <a:latin typeface="Aptos"/>
-                          <a:ea typeface="Aptos"/>
-                          <a:cs typeface="Aptos"/>
-                        </a:rPr>
-                        <a:t>Popular-title comparisons</a:t>
-                      </a:r>
-                    </a:p>
-                  </a:txBody>
-                  <a:tcPr>
-                    <a:solidFill>
-                      <a:srgbClr val="FFFFFF"/>
-                    </a:solidFill>
-                  </a:tcPr>
-                </a:tc>
-                <a:tc>
-                  <a:txBody>
-                    <a:bodyPr/>
-                    <a:lstStyle/>
-                    <a:p>
-                      <a:r>
-                        <a:rPr sz="1725" b="0">
-                          <a:solidFill>
-                            <a:srgbClr val="172B45"/>
-                          </a:solidFill>
-                          <a:latin typeface="Aptos"/>
-                          <a:ea typeface="Aptos"/>
-                          <a:cs typeface="Aptos"/>
-                        </a:rPr>
-                        <a:t>8,741</a:t>
-                      </a:r>
-                    </a:p>
-                  </a:txBody>
-                  <a:tcPr>
-                    <a:solidFill>
-                      <a:srgbClr val="FFFFFF"/>
-                    </a:solidFill>
-                  </a:tcPr>
-                </a:tc>
-                <a:tc>
-                  <a:txBody>
-                    <a:bodyPr/>
-                    <a:lstStyle/>
-                    <a:p>
-                      <a:r>
-                        <a:rPr sz="1725" b="0">
-                          <a:solidFill>
-                            <a:srgbClr val="172B45"/>
-                          </a:solidFill>
-                          <a:latin typeface="Aptos"/>
-                          <a:ea typeface="Aptos"/>
-                          <a:cs typeface="Aptos"/>
-                        </a:rPr>
-                        <a:t>19 titles with &gt;100 postings</a:t>
-                      </a:r>
-                    </a:p>
-                  </a:txBody>
-                  <a:tcPr>
-                    <a:solidFill>
-                      <a:srgbClr val="FFFFFF"/>
-                    </a:solidFill>
-                  </a:tcPr>
-                </a:tc>
-                <a:extLst>
-                  <a:ext uri="{0D108BD9-81ED-4DB2-BD59-A6C34878D82A}">
-                    <a16:rowId xmlns:a16="http://schemas.microsoft.com/office/drawing/2014/main" val="10004"/>
-                  </a:ext>
-                </a:extLst>
-              </a:tr>
-            </a:tbl>
-          </a:graphicData>
-        </a:graphic>
-      </p:graphicFrame>
-      <p:sp>
-        <p:nvSpPr>
-          <p:cNvPr id="4" name="Rectangle 3">
-            <a:extLst>
-              <a:ext uri="{FF2B5EF4-FFF2-40B4-BE49-F238E27FC236}">
-                <a16:creationId xmlns:a16="http://schemas.microsoft.com/office/drawing/2014/main" id="{483328F9-A372-4F84-B73C-DA8D5A89D02E}"/>
-              </a:ext>
-            </a:extLst>
-          </p:cNvPr>
-          <p:cNvSpPr>
-            <a:spLocks noGrp="1"/>
-          </p:cNvSpPr>
-          <p:nvPr/>
-        </p:nvSpPr>
-        <p:spPr>
-          <a:xfrm>
-            <a:off x="762000" y="5867400"/>
-            <a:ext cx="10477500" cy="447675"/>
-          </a:xfrm>
-          <a:prstGeom prst="rect">
-            <a:avLst/>
-          </a:prstGeom>
-          <a:noFill/>
-          <a:ln w="0">
-            <a:noFill/>
-          </a:ln>
-        </p:spPr>
-        <p:txBody>
-          <a:bodyPr>
-            <a:noAutofit/>
-          </a:bodyPr>
-          <a:lstStyle/>
-          <a:p>
-            <a:pPr>
-              <a:defRPr sz="1350" b="0">
-                <a:solidFill>
-                  <a:srgbClr val="687887"/>
-                </a:solidFill>
-                <a:latin typeface="Aptos"/>
-                <a:ea typeface="Aptos"/>
-                <a:cs typeface="Aptos"/>
-              </a:defRPr>
-            </a:pPr>
-            <a:r>
-              <a:rPr sz="1350" b="0">
-                <a:solidFill>
-                  <a:srgbClr val="687887"/>
-                </a:solidFill>
-                <a:latin typeface="Aptos"/>
-                <a:ea typeface="Aptos"/>
-                <a:cs typeface="Aptos"/>
-              </a:rPr>
-              <a:t>4,370 U.S. postings and 4,396 Canadian postings. No Mexican records survived the filter.</a:t>
-            </a:r>
-          </a:p>
-        </p:txBody>
-      </p:sp>
-    </p:spTree>
-    <p:extLst>
-      <p:ext uri="{BB962C8B-B14F-4D97-AF65-F5344CB8AC3E}">
-        <p14:creationId xmlns:p14="http://schemas.microsoft.com/office/powerpoint/2010/main" val="1419008226"/>
-      </p:ext>
-    </p:extLst>
-  </p:cSld>
-  <p:clrMapOvr>
-    <a:masterClrMapping/>
-  </p:clrMapOvr>
-</p:sld>
-</file>
-
-<file path=ppt/slides/slide4.xml><?xml version="1.0" encoding="utf-8"?>
-<p:sld xmlns:a="http://schemas.openxmlformats.org/drawingml/2006/main" xmlns:r="http://schemas.openxmlformats.org/officeDocument/2006/relationships" xmlns:p="http://schemas.openxmlformats.org/presentationml/2006/main">
-  <p:cSld>
-    <p:bg>
-      <p:bgPr>
-        <a:solidFill>
-          <a:srgbClr val="FFFFFF"/>
-        </a:solidFill>
-        <a:effectLst/>
-      </p:bgPr>
-    </p:bg>
-    <p:spTree>
-      <p:nvGrpSpPr>
-        <p:cNvPr id="1" name=""/>
-        <p:cNvGrpSpPr/>
-        <p:nvPr/>
-      </p:nvGrpSpPr>
-      <p:grpSpPr>
-        <a:xfrm>
-          <a:off x="0" y="0"/>
-          <a:ext cx="0" cy="0"/>
-          <a:chOff x="0" y="0"/>
-          <a:chExt cx="0" cy="0"/>
-        </a:xfrm>
-      </p:grpSpPr>
-      <p:sp>
-        <p:nvSpPr>
-          <p:cNvPr id="7" name="Rectangle 6">
-            <a:extLst>
-              <a:ext uri="{FF2B5EF4-FFF2-40B4-BE49-F238E27FC236}">
-                <a16:creationId xmlns:a16="http://schemas.microsoft.com/office/drawing/2014/main" id="{B372A4FB-2D60-4107-BCA6-70A79A61BB49}"/>
-              </a:ext>
-            </a:extLst>
-          </p:cNvPr>
-          <p:cNvSpPr>
-            <a:spLocks noGrp="1"/>
-          </p:cNvSpPr>
-          <p:nvPr/>
-        </p:nvSpPr>
-        <p:spPr>
-          <a:xfrm>
-            <a:off x="666750" y="428625"/>
-            <a:ext cx="10858500" cy="857250"/>
-          </a:xfrm>
-          <a:prstGeom prst="rect">
-            <a:avLst/>
-          </a:prstGeom>
-          <a:noFill/>
-          <a:ln w="0">
-            <a:noFill/>
-          </a:ln>
-        </p:spPr>
-        <p:txBody>
-          <a:bodyPr>
-            <a:noAutofit/>
-          </a:bodyPr>
-          <a:lstStyle/>
-          <a:p>
-            <a:pPr>
-              <a:defRPr sz="3150" b="1">
-                <a:solidFill>
-                  <a:srgbClr val="172B45"/>
-                </a:solidFill>
-                <a:latin typeface="Aptos"/>
-                <a:ea typeface="Aptos"/>
-                <a:cs typeface="Aptos"/>
-              </a:defRPr>
-            </a:pPr>
-            <a:r>
-              <a:rPr sz="3150" b="1">
-                <a:solidFill>
-                  <a:srgbClr val="172B45"/>
-                </a:solidFill>
-                <a:latin typeface="Aptos"/>
-                <a:ea typeface="Aptos"/>
-                <a:cs typeface="Aptos"/>
-              </a:rPr>
-              <a:t>Data preparation and salary target</a:t>
-            </a:r>
-          </a:p>
-        </p:txBody>
-      </p:sp>
-      <p:sp>
-        <p:nvSpPr>
-          <p:cNvPr id="2" name="Rectangle 1">
-            <a:extLst>
-              <a:ext uri="{FF2B5EF4-FFF2-40B4-BE49-F238E27FC236}">
-                <a16:creationId xmlns:a16="http://schemas.microsoft.com/office/drawing/2014/main" id="{3857FE0B-242C-42A9-97CC-B97131E9608B}"/>
-              </a:ext>
-            </a:extLst>
-          </p:cNvPr>
-          <p:cNvSpPr>
-            <a:spLocks noGrp="1"/>
-          </p:cNvSpPr>
-          <p:nvPr/>
-        </p:nvSpPr>
-        <p:spPr>
-          <a:xfrm>
-            <a:off x="11334750" y="6381750"/>
-            <a:ext cx="381000" cy="238125"/>
-          </a:xfrm>
-          <a:prstGeom prst="rect">
-            <a:avLst/>
-          </a:prstGeom>
-          <a:noFill/>
-          <a:ln w="0">
-            <a:noFill/>
-          </a:ln>
-        </p:spPr>
-        <p:txBody>
-          <a:bodyPr>
-            <a:noAutofit/>
-          </a:bodyPr>
-          <a:lstStyle/>
-          <a:p>
-            <a:pPr>
-              <a:defRPr sz="1200" b="0">
-                <a:solidFill>
-                  <a:srgbClr val="687887"/>
-                </a:solidFill>
-                <a:latin typeface="Aptos"/>
-                <a:ea typeface="Aptos"/>
-                <a:cs typeface="Aptos"/>
-              </a:defRPr>
-            </a:pPr>
-            <a:r>
-              <a:rPr sz="1200" b="0">
-                <a:solidFill>
-                  <a:srgbClr val="687887"/>
-                </a:solidFill>
-                <a:latin typeface="Aptos"/>
-                <a:ea typeface="Aptos"/>
-                <a:cs typeface="Aptos"/>
-              </a:rPr>
-              <a:t>4</a:t>
-            </a:r>
-          </a:p>
-        </p:txBody>
-      </p:sp>
-      <p:sp>
-        <p:nvSpPr>
-          <p:cNvPr id="3" name="Rectangle 2">
-            <a:extLst>
-              <a:ext uri="{FF2B5EF4-FFF2-40B4-BE49-F238E27FC236}">
-                <a16:creationId xmlns:a16="http://schemas.microsoft.com/office/drawing/2014/main" id="{FC40D42B-4EB3-4949-B4BB-5926EF079CA3}"/>
-              </a:ext>
-            </a:extLst>
-          </p:cNvPr>
-          <p:cNvSpPr>
-            <a:spLocks noGrp="1"/>
-          </p:cNvSpPr>
-          <p:nvPr/>
-        </p:nvSpPr>
-        <p:spPr>
-          <a:xfrm>
-            <a:off x="762000" y="1571625"/>
-            <a:ext cx="10572750" cy="857250"/>
-          </a:xfrm>
-          <a:prstGeom prst="rect">
-            <a:avLst/>
-          </a:prstGeom>
-          <a:noFill/>
-          <a:ln w="0">
-            <a:noFill/>
-          </a:ln>
-        </p:spPr>
-        <p:txBody>
-          <a:bodyPr>
-            <a:noAutofit/>
-          </a:bodyPr>
-          <a:lstStyle/>
-          <a:p>
-            <a:pPr>
-              <a:defRPr sz="2100" b="0">
-                <a:solidFill>
-                  <a:srgbClr val="172B45"/>
-                </a:solidFill>
-                <a:latin typeface="Aptos"/>
-                <a:ea typeface="Aptos"/>
-                <a:cs typeface="Aptos"/>
-              </a:defRPr>
-            </a:pPr>
-            <a:r>
-              <a:rPr sz="2100" b="0">
-                <a:solidFill>
-                  <a:srgbClr val="172B45"/>
-                </a:solidFill>
-                <a:latin typeface="Aptos"/>
-                <a:ea typeface="Aptos"/>
-                <a:cs typeface="Aptos"/>
-              </a:rPr>
-              <a:t>Checks found no missing values or exact duplicate rows. Similar postings may still represent the same vacancy.</a:t>
-            </a:r>
-          </a:p>
-        </p:txBody>
-      </p:sp>
-      <p:sp>
-        <p:nvSpPr>
-          <p:cNvPr id="4" name="Rectangle 3">
-            <a:extLst>
-              <a:ext uri="{FF2B5EF4-FFF2-40B4-BE49-F238E27FC236}">
-                <a16:creationId xmlns:a16="http://schemas.microsoft.com/office/drawing/2014/main" id="{3773A89B-AD48-4740-8954-E19836157152}"/>
-              </a:ext>
-            </a:extLst>
-          </p:cNvPr>
-          <p:cNvSpPr>
-            <a:spLocks noGrp="1"/>
-          </p:cNvSpPr>
-          <p:nvPr/>
-        </p:nvSpPr>
-        <p:spPr>
-          <a:xfrm>
-            <a:off x="762000" y="2571750"/>
-            <a:ext cx="10572750" cy="857250"/>
-          </a:xfrm>
-          <a:prstGeom prst="rect">
-            <a:avLst/>
-          </a:prstGeom>
-          <a:noFill/>
-          <a:ln w="0">
-            <a:noFill/>
-          </a:ln>
-        </p:spPr>
-        <p:txBody>
-          <a:bodyPr>
-            <a:noAutofit/>
-          </a:bodyPr>
-          <a:lstStyle/>
-          <a:p>
-            <a:pPr>
-              <a:defRPr sz="2100" b="0">
-                <a:solidFill>
-                  <a:srgbClr val="172B45"/>
-                </a:solidFill>
-                <a:latin typeface="Aptos"/>
-                <a:ea typeface="Aptos"/>
-                <a:cs typeface="Aptos"/>
-              </a:defRPr>
-            </a:pPr>
-            <a:r>
-              <a:rPr sz="2100" b="0">
-                <a:solidFill>
-                  <a:srgbClr val="172B45"/>
-                </a:solidFill>
-                <a:latin typeface="Aptos"/>
-                <a:ea typeface="Aptos"/>
-                <a:cs typeface="Aptos"/>
-              </a:rPr>
-              <a:t>Company-size and education labels were consolidated. “Master’s or PhD” became a master’s category.</a:t>
-            </a:r>
-          </a:p>
-        </p:txBody>
-      </p:sp>
-      <p:sp>
-        <p:nvSpPr>
-          <p:cNvPr id="5" name="Rectangle 4">
-            <a:extLst>
-              <a:ext uri="{FF2B5EF4-FFF2-40B4-BE49-F238E27FC236}">
-                <a16:creationId xmlns:a16="http://schemas.microsoft.com/office/drawing/2014/main" id="{10863B0F-12B9-4AA7-AFC1-FCE0464F1DCF}"/>
-              </a:ext>
-            </a:extLst>
-          </p:cNvPr>
-          <p:cNvSpPr>
-            <a:spLocks noGrp="1"/>
-          </p:cNvSpPr>
-          <p:nvPr/>
-        </p:nvSpPr>
-        <p:spPr>
-          <a:xfrm>
-            <a:off x="762000" y="3571875"/>
-            <a:ext cx="10572750" cy="857250"/>
-          </a:xfrm>
-          <a:prstGeom prst="rect">
-            <a:avLst/>
-          </a:prstGeom>
-          <a:noFill/>
-          <a:ln w="0">
-            <a:noFill/>
-          </a:ln>
-        </p:spPr>
-        <p:txBody>
-          <a:bodyPr>
-            <a:noAutofit/>
-          </a:bodyPr>
-          <a:lstStyle/>
-          <a:p>
-            <a:pPr>
-              <a:defRPr sz="2100" b="0">
-                <a:solidFill>
-                  <a:srgbClr val="172B45"/>
-                </a:solidFill>
-                <a:latin typeface="Aptos"/>
-                <a:ea typeface="Aptos"/>
-                <a:cs typeface="Aptos"/>
-              </a:defRPr>
-            </a:pPr>
-            <a:r>
-              <a:rPr sz="2100" b="0">
-                <a:solidFill>
-                  <a:srgbClr val="172B45"/>
-                </a:solidFill>
-                <a:latin typeface="Aptos"/>
-                <a:ea typeface="Aptos"/>
-                <a:cs typeface="Aptos"/>
-              </a:rPr>
-              <a:t>Salary target = (lower bound + upper bound) / 2. This is the posted range midpoint.</a:t>
-            </a:r>
-          </a:p>
-        </p:txBody>
-      </p:sp>
-      <p:sp>
-        <p:nvSpPr>
-          <p:cNvPr id="6" name="Rectangle 5">
-            <a:extLst>
-              <a:ext uri="{FF2B5EF4-FFF2-40B4-BE49-F238E27FC236}">
-                <a16:creationId xmlns:a16="http://schemas.microsoft.com/office/drawing/2014/main" id="{8A291531-BE5F-4882-8ED4-3204A18ED8FB}"/>
-              </a:ext>
-            </a:extLst>
-          </p:cNvPr>
-          <p:cNvSpPr>
-            <a:spLocks noGrp="1"/>
-          </p:cNvSpPr>
-          <p:nvPr/>
-        </p:nvSpPr>
-        <p:spPr>
-          <a:xfrm>
-            <a:off x="762000" y="5867400"/>
-            <a:ext cx="10477500" cy="447675"/>
-          </a:xfrm>
-          <a:prstGeom prst="rect">
-            <a:avLst/>
-          </a:prstGeom>
-          <a:noFill/>
-          <a:ln w="0">
-            <a:noFill/>
-          </a:ln>
-        </p:spPr>
-        <p:txBody>
-          <a:bodyPr>
-            <a:noAutofit/>
-          </a:bodyPr>
-          <a:lstStyle/>
-          <a:p>
-            <a:pPr>
-              <a:defRPr sz="1350" b="0">
-                <a:solidFill>
-                  <a:srgbClr val="687887"/>
-                </a:solidFill>
-                <a:latin typeface="Aptos"/>
-                <a:ea typeface="Aptos"/>
-                <a:cs typeface="Aptos"/>
-              </a:defRPr>
-            </a:pPr>
-            <a:r>
-              <a:rPr sz="1350" b="0">
-                <a:solidFill>
-                  <a:srgbClr val="687887"/>
-                </a:solidFill>
-                <a:latin typeface="Aptos"/>
-                <a:ea typeface="Aptos"/>
-                <a:cs typeface="Aptos"/>
-              </a:rPr>
-              <a:t>The target does not measure employee median pay, accepted offers, or total compensation.</a:t>
-            </a:r>
-          </a:p>
-        </p:txBody>
-      </p:sp>
-    </p:spTree>
-    <p:extLst>
-      <p:ext uri="{BB962C8B-B14F-4D97-AF65-F5344CB8AC3E}">
-        <p14:creationId xmlns:p14="http://schemas.microsoft.com/office/powerpoint/2010/main" val="297137220"/>
-      </p:ext>
-    </p:extLst>
-  </p:cSld>
-  <p:clrMapOvr>
-    <a:masterClrMapping/>
-  </p:clrMapOvr>
-</p:sld>
-</file>
-
-<file path=ppt/slides/slide5.xml><?xml version="1.0" encoding="utf-8"?>
-<p:sld xmlns:a="http://schemas.openxmlformats.org/drawingml/2006/main" xmlns:r="http://schemas.openxmlformats.org/officeDocument/2006/relationships" xmlns:p="http://schemas.openxmlformats.org/presentationml/2006/main">
-  <p:cSld>
-    <p:bg>
-      <p:bgPr>
-        <a:solidFill>
-          <a:srgbClr val="FFFFFF"/>
-        </a:solidFill>
-        <a:effectLst/>
-      </p:bgPr>
-    </p:bg>
-    <p:spTree>
-      <p:nvGrpSpPr>
-        <p:cNvPr id="1" name=""/>
-        <p:cNvGrpSpPr/>
-        <p:nvPr/>
-      </p:nvGrpSpPr>
-      <p:grpSpPr>
-        <a:xfrm>
-          <a:off x="0" y="0"/>
-          <a:ext cx="0" cy="0"/>
-          <a:chOff x="0" y="0"/>
-          <a:chExt cx="0" cy="0"/>
-        </a:xfrm>
-      </p:grpSpPr>
-      <p:sp>
-        <p:nvSpPr>
-          <p:cNvPr id="5" name="Rectangle 4">
-            <a:extLst>
-              <a:ext uri="{FF2B5EF4-FFF2-40B4-BE49-F238E27FC236}">
-                <a16:creationId xmlns:a16="http://schemas.microsoft.com/office/drawing/2014/main" id="{2F294D90-DF89-43CB-BA60-712F41219F13}"/>
-              </a:ext>
-            </a:extLst>
-          </p:cNvPr>
-          <p:cNvSpPr>
-            <a:spLocks noGrp="1"/>
-          </p:cNvSpPr>
-          <p:nvPr/>
-        </p:nvSpPr>
-        <p:spPr>
-          <a:xfrm>
-            <a:off x="666750" y="428625"/>
-            <a:ext cx="10858500" cy="857250"/>
-          </a:xfrm>
-          <a:prstGeom prst="rect">
-            <a:avLst/>
-          </a:prstGeom>
-          <a:noFill/>
-          <a:ln w="0">
-            <a:noFill/>
-          </a:ln>
-        </p:spPr>
-        <p:txBody>
-          <a:bodyPr>
-            <a:noAutofit/>
-          </a:bodyPr>
-          <a:lstStyle/>
-          <a:p>
-            <a:pPr>
-              <a:defRPr sz="3150" b="1">
-                <a:solidFill>
-                  <a:srgbClr val="172B45"/>
-                </a:solidFill>
-                <a:latin typeface="Aptos"/>
-                <a:ea typeface="Aptos"/>
-                <a:cs typeface="Aptos"/>
-              </a:defRPr>
-            </a:pPr>
-            <a:r>
-              <a:rPr sz="3150" b="1">
-                <a:solidFill>
-                  <a:srgbClr val="172B45"/>
-                </a:solidFill>
-                <a:latin typeface="Aptos"/>
-                <a:ea typeface="Aptos"/>
-                <a:cs typeface="Aptos"/>
-              </a:rPr>
-              <a:t>Machine Learning is the largest specialization</a:t>
-            </a:r>
-          </a:p>
-        </p:txBody>
-      </p:sp>
-      <p:sp>
-        <p:nvSpPr>
-          <p:cNvPr id="2" name="Rectangle 1">
-            <a:extLst>
-              <a:ext uri="{FF2B5EF4-FFF2-40B4-BE49-F238E27FC236}">
-                <a16:creationId xmlns:a16="http://schemas.microsoft.com/office/drawing/2014/main" id="{0909B102-F4B2-4A0A-B4DA-8D0BC50068CD}"/>
-              </a:ext>
-            </a:extLst>
-          </p:cNvPr>
-          <p:cNvSpPr>
-            <a:spLocks noGrp="1"/>
-          </p:cNvSpPr>
-          <p:nvPr/>
-        </p:nvSpPr>
-        <p:spPr>
-          <a:xfrm>
-            <a:off x="11334750" y="6381750"/>
-            <a:ext cx="381000" cy="238125"/>
-          </a:xfrm>
-          <a:prstGeom prst="rect">
-            <a:avLst/>
-          </a:prstGeom>
-          <a:noFill/>
-          <a:ln w="0">
-            <a:noFill/>
-          </a:ln>
-        </p:spPr>
-        <p:txBody>
-          <a:bodyPr>
-            <a:noAutofit/>
-          </a:bodyPr>
-          <a:lstStyle/>
-          <a:p>
-            <a:pPr>
-              <a:defRPr sz="1200" b="0">
-                <a:solidFill>
-                  <a:srgbClr val="687887"/>
-                </a:solidFill>
-                <a:latin typeface="Aptos"/>
-                <a:ea typeface="Aptos"/>
-                <a:cs typeface="Aptos"/>
-              </a:defRPr>
-            </a:pPr>
-            <a:r>
-              <a:rPr sz="1200" b="0">
-                <a:solidFill>
-                  <a:srgbClr val="687887"/>
-                </a:solidFill>
-                <a:latin typeface="Aptos"/>
-                <a:ea typeface="Aptos"/>
-                <a:cs typeface="Aptos"/>
-              </a:rPr>
-              <a:t>5</a:t>
-            </a:r>
-          </a:p>
-        </p:txBody>
-      </p:sp>
-      <p:graphicFrame>
-        <p:nvGraphicFramePr>
-          <p:cNvPr id="7" name="Chart"/>
-          <p:cNvGraphicFramePr/>
-          <p:nvPr/>
-        </p:nvGraphicFramePr>
-        <p:xfrm>
-          <a:off x="762000" y="1476375"/>
-          <a:ext cx="10668000" cy="3952875"/>
-        </p:xfrm>
-        <a:graphic>
-          <a:graphicData uri="http://schemas.openxmlformats.org/drawingml/2006/chart">
-            <c:chart xmlns:c="http://schemas.openxmlformats.org/drawingml/2006/chart" xmlns:r="http://schemas.openxmlformats.org/officeDocument/2006/relationships" r:id="rId3"/>
-          </a:graphicData>
-        </a:graphic>
-      </p:graphicFrame>
-      <p:sp>
-        <p:nvSpPr>
-          <p:cNvPr id="4" name="Rectangle 3">
-            <a:extLst>
-              <a:ext uri="{FF2B5EF4-FFF2-40B4-BE49-F238E27FC236}">
-                <a16:creationId xmlns:a16="http://schemas.microsoft.com/office/drawing/2014/main" id="{2F84BFEA-1560-4A58-AFFD-59E32527E7AA}"/>
-              </a:ext>
-            </a:extLst>
-          </p:cNvPr>
-          <p:cNvSpPr>
-            <a:spLocks noGrp="1"/>
-          </p:cNvSpPr>
-          <p:nvPr/>
-        </p:nvSpPr>
-        <p:spPr>
-          <a:xfrm>
-            <a:off x="762000" y="5867400"/>
-            <a:ext cx="10477500" cy="447675"/>
-          </a:xfrm>
-          <a:prstGeom prst="rect">
-            <a:avLst/>
-          </a:prstGeom>
-          <a:noFill/>
-          <a:ln w="0">
-            <a:noFill/>
-          </a:ln>
-        </p:spPr>
-        <p:txBody>
-          <a:bodyPr>
-            <a:noAutofit/>
-          </a:bodyPr>
-          <a:lstStyle/>
-          <a:p>
-            <a:pPr>
-              <a:defRPr sz="1350" b="0">
-                <a:solidFill>
-                  <a:srgbClr val="687887"/>
-                </a:solidFill>
-                <a:latin typeface="Aptos"/>
-                <a:ea typeface="Aptos"/>
-                <a:cs typeface="Aptos"/>
-              </a:defRPr>
-            </a:pPr>
-            <a:r>
-              <a:rPr sz="1350" b="0">
-                <a:solidFill>
-                  <a:srgbClr val="687887"/>
-                </a:solidFill>
-                <a:latin typeface="Aptos"/>
-                <a:ea typeface="Aptos"/>
-                <a:cs typeface="Aptos"/>
-              </a:rPr>
-              <a:t>Counts other than Machine Learning are approximate values reported in the document.</a:t>
-            </a:r>
-          </a:p>
-        </p:txBody>
-      </p:sp>
-    </p:spTree>
-    <p:extLst>
-      <p:ext uri="{BB962C8B-B14F-4D97-AF65-F5344CB8AC3E}">
-        <p14:creationId xmlns:p14="http://schemas.microsoft.com/office/powerpoint/2010/main" val="2116463989"/>
-      </p:ext>
-    </p:extLst>
-  </p:cSld>
-  <p:clrMapOvr>
-    <a:masterClrMapping/>
-  </p:clrMapOvr>
-</p:sld>
-</file>
-
-<file path=ppt/slides/slide6.xml><?xml version="1.0" encoding="utf-8"?>
-<p:sld xmlns:a="http://schemas.openxmlformats.org/drawingml/2006/main" xmlns:r="http://schemas.openxmlformats.org/officeDocument/2006/relationships" xmlns:p="http://schemas.openxmlformats.org/presentationml/2006/main">
-  <p:cSld>
-    <p:bg>
-      <p:bgPr>
-        <a:solidFill>
-          <a:srgbClr val="FFFFFF"/>
-        </a:solidFill>
-        <a:effectLst/>
-      </p:bgPr>
-    </p:bg>
-    <p:spTree>
-      <p:nvGrpSpPr>
-        <p:cNvPr id="1" name=""/>
-        <p:cNvGrpSpPr/>
-        <p:nvPr/>
-      </p:nvGrpSpPr>
-      <p:grpSpPr>
-        <a:xfrm>
-          <a:off x="0" y="0"/>
-          <a:ext cx="0" cy="0"/>
-          <a:chOff x="0" y="0"/>
-          <a:chExt cx="0" cy="0"/>
-        </a:xfrm>
-      </p:grpSpPr>
-      <p:sp>
-        <p:nvSpPr>
-          <p:cNvPr id="6" name="Rectangle 5">
-            <a:extLst>
-              <a:ext uri="{FF2B5EF4-FFF2-40B4-BE49-F238E27FC236}">
-                <a16:creationId xmlns:a16="http://schemas.microsoft.com/office/drawing/2014/main" id="{44547653-D0ED-43A1-91AA-50E7673C0C0F}"/>
-              </a:ext>
-            </a:extLst>
-          </p:cNvPr>
-          <p:cNvSpPr>
-            <a:spLocks noGrp="1"/>
-          </p:cNvSpPr>
-          <p:nvPr/>
-        </p:nvSpPr>
-        <p:spPr>
-          <a:xfrm>
-            <a:off x="666750" y="428625"/>
-            <a:ext cx="10858500" cy="857250"/>
-          </a:xfrm>
-          <a:prstGeom prst="rect">
-            <a:avLst/>
-          </a:prstGeom>
-          <a:noFill/>
-          <a:ln w="0">
-            <a:noFill/>
-          </a:ln>
-        </p:spPr>
-        <p:txBody>
-          <a:bodyPr>
-            <a:noAutofit/>
-          </a:bodyPr>
-          <a:lstStyle/>
-          <a:p>
-            <a:pPr>
-              <a:defRPr sz="3150" b="1">
-                <a:solidFill>
-                  <a:srgbClr val="172B45"/>
-                </a:solidFill>
-                <a:latin typeface="Aptos"/>
-                <a:ea typeface="Aptos"/>
-                <a:cs typeface="Aptos"/>
-              </a:defRPr>
-            </a:pPr>
-            <a:r>
-              <a:rPr sz="3150" b="1">
-                <a:solidFill>
-                  <a:srgbClr val="172B45"/>
-                </a:solidFill>
-                <a:latin typeface="Aptos"/>
-                <a:ea typeface="Aptos"/>
-                <a:cs typeface="Aptos"/>
-              </a:rPr>
-              <a:t>Typical posting characteristics</a:t>
-            </a:r>
-          </a:p>
-        </p:txBody>
-      </p:sp>
-      <p:sp>
-        <p:nvSpPr>
-          <p:cNvPr id="2" name="Rectangle 1">
-            <a:extLst>
-              <a:ext uri="{FF2B5EF4-FFF2-40B4-BE49-F238E27FC236}">
-                <a16:creationId xmlns:a16="http://schemas.microsoft.com/office/drawing/2014/main" id="{942BDA53-56EE-4115-9836-846DB247524D}"/>
-              </a:ext>
-            </a:extLst>
-          </p:cNvPr>
-          <p:cNvSpPr>
-            <a:spLocks noGrp="1"/>
-          </p:cNvSpPr>
-          <p:nvPr/>
-        </p:nvSpPr>
-        <p:spPr>
-          <a:xfrm>
-            <a:off x="11334750" y="6381750"/>
-            <a:ext cx="381000" cy="238125"/>
-          </a:xfrm>
-          <a:prstGeom prst="rect">
-            <a:avLst/>
-          </a:prstGeom>
-          <a:noFill/>
-          <a:ln w="0">
-            <a:noFill/>
-          </a:ln>
-        </p:spPr>
-        <p:txBody>
-          <a:bodyPr>
-            <a:noAutofit/>
-          </a:bodyPr>
-          <a:lstStyle/>
-          <a:p>
-            <a:pPr>
-              <a:defRPr sz="1200" b="0">
-                <a:solidFill>
-                  <a:srgbClr val="687887"/>
-                </a:solidFill>
-                <a:latin typeface="Aptos"/>
-                <a:ea typeface="Aptos"/>
-                <a:cs typeface="Aptos"/>
-              </a:defRPr>
-            </a:pPr>
-            <a:r>
-              <a:rPr sz="1200" b="0">
-                <a:solidFill>
-                  <a:srgbClr val="687887"/>
-                </a:solidFill>
-                <a:latin typeface="Aptos"/>
-                <a:ea typeface="Aptos"/>
-                <a:cs typeface="Aptos"/>
-              </a:rPr>
-              <a:t>6</a:t>
-            </a:r>
-          </a:p>
-        </p:txBody>
-      </p:sp>
-      <p:graphicFrame>
-        <p:nvGraphicFramePr>
-          <p:cNvPr id="8" name="Table 7"/>
-          <p:cNvGraphicFramePr/>
-          <p:nvPr/>
-        </p:nvGraphicFramePr>
-        <p:xfrm>
-          <a:off x="762000" y="1619250"/>
-          <a:ext cx="10668000" cy="2857500"/>
-        </p:xfrm>
-        <a:graphic>
-          <a:graphicData uri="http://schemas.openxmlformats.org/drawingml/2006/table">
-            <a:tbl>
-              <a:tblPr/>
-              <a:tblGrid>
-                <a:gridCol w="3429000">
-                  <a:extLst>
-                    <a:ext uri="{9D8B030D-6E8A-4147-A177-3AD203B41FA5}">
-                      <a16:colId xmlns:a16="http://schemas.microsoft.com/office/drawing/2014/main" val="20000"/>
-                    </a:ext>
-                  </a:extLst>
-                </a:gridCol>
-                <a:gridCol w="3429000">
-                  <a:extLst>
-                    <a:ext uri="{9D8B030D-6E8A-4147-A177-3AD203B41FA5}">
-                      <a16:colId xmlns:a16="http://schemas.microsoft.com/office/drawing/2014/main" val="20001"/>
-                    </a:ext>
-                  </a:extLst>
-                </a:gridCol>
-                <a:gridCol w="3810000">
-                  <a:extLst>
-                    <a:ext uri="{9D8B030D-6E8A-4147-A177-3AD203B41FA5}">
-                      <a16:colId xmlns:a16="http://schemas.microsoft.com/office/drawing/2014/main" val="20002"/>
-                    </a:ext>
-                  </a:extLst>
-                </a:gridCol>
-              </a:tblGrid>
-              <a:tr h="714375">
-                <a:tc>
-                  <a:txBody>
-                    <a:bodyPr/>
-                    <a:lstStyle/>
-                    <a:p>
-                      <a:r>
-                        <a:rPr sz="2100" b="1">
-                          <a:solidFill>
-                            <a:srgbClr val="FFFFFF"/>
-                          </a:solidFill>
-                          <a:latin typeface="Aptos"/>
-                          <a:ea typeface="Aptos"/>
-                          <a:cs typeface="Aptos"/>
-                        </a:rPr>
-                        <a:t>Dimension</a:t>
-                      </a:r>
-                    </a:p>
-                  </a:txBody>
-                  <a:tcPr>
-                    <a:solidFill>
-                      <a:srgbClr val="172B45"/>
-                    </a:solidFill>
-                  </a:tcPr>
-                </a:tc>
-                <a:tc>
-                  <a:txBody>
-                    <a:bodyPr/>
-                    <a:lstStyle/>
-                    <a:p>
-                      <a:r>
-                        <a:rPr sz="2100" b="1">
-                          <a:solidFill>
-                            <a:srgbClr val="FFFFFF"/>
-                          </a:solidFill>
-                          <a:latin typeface="Aptos"/>
-                          <a:ea typeface="Aptos"/>
-                          <a:cs typeface="Aptos"/>
-                        </a:rPr>
-                        <a:t>Largest group</a:t>
-                      </a:r>
-                    </a:p>
-                  </a:txBody>
-                  <a:tcPr>
-                    <a:solidFill>
-                      <a:srgbClr val="172B45"/>
-                    </a:solidFill>
-                  </a:tcPr>
-                </a:tc>
-                <a:tc>
-                  <a:txBody>
-                    <a:bodyPr/>
-                    <a:lstStyle/>
-                    <a:p>
-                      <a:r>
-                        <a:rPr sz="2100" b="1">
-                          <a:solidFill>
-                            <a:srgbClr val="FFFFFF"/>
-                          </a:solidFill>
-                          <a:latin typeface="Aptos"/>
-                          <a:ea typeface="Aptos"/>
-                          <a:cs typeface="Aptos"/>
-                        </a:rPr>
-                        <a:t>Reported size</a:t>
-                      </a:r>
-                    </a:p>
-                  </a:txBody>
-                  <a:tcPr>
-                    <a:solidFill>
-                      <a:srgbClr val="172B45"/>
-                    </a:solidFill>
-                  </a:tcPr>
-                </a:tc>
-                <a:extLst>
-                  <a:ext uri="{0D108BD9-81ED-4DB2-BD59-A6C34878D82A}">
-                    <a16:rowId xmlns:a16="http://schemas.microsoft.com/office/drawing/2014/main" val="10000"/>
-                  </a:ext>
-                </a:extLst>
-              </a:tr>
-              <a:tr h="714375">
-                <a:tc>
-                  <a:txBody>
-                    <a:bodyPr/>
-                    <a:lstStyle/>
-                    <a:p>
-                      <a:r>
-                        <a:rPr sz="2100" b="0">
-                          <a:solidFill>
-                            <a:srgbClr val="172B45"/>
-                          </a:solidFill>
-                          <a:latin typeface="Aptos"/>
-                          <a:ea typeface="Aptos"/>
-                          <a:cs typeface="Aptos"/>
-                        </a:rPr>
-                        <a:t>Experience level</a:t>
-                      </a:r>
-                    </a:p>
-                  </a:txBody>
-                  <a:tcPr>
-                    <a:solidFill>
-                      <a:srgbClr val="F0F4F8"/>
-                    </a:solidFill>
-                  </a:tcPr>
-                </a:tc>
-                <a:tc>
-                  <a:txBody>
-                    <a:bodyPr/>
-                    <a:lstStyle/>
-                    <a:p>
-                      <a:r>
-                        <a:rPr sz="2100" b="0">
-                          <a:solidFill>
-                            <a:srgbClr val="172B45"/>
-                          </a:solidFill>
-                          <a:latin typeface="Aptos"/>
-                          <a:ea typeface="Aptos"/>
-                          <a:cs typeface="Aptos"/>
-                        </a:rPr>
-                        <a:t>Mid-level</a:t>
-                      </a:r>
-                    </a:p>
-                  </a:txBody>
-                  <a:tcPr>
-                    <a:solidFill>
-                      <a:srgbClr val="F0F4F8"/>
-                    </a:solidFill>
-                  </a:tcPr>
-                </a:tc>
-                <a:tc>
-                  <a:txBody>
-                    <a:bodyPr/>
-                    <a:lstStyle/>
-                    <a:p>
-                      <a:r>
-                        <a:rPr sz="2100" b="0">
-                          <a:solidFill>
-                            <a:srgbClr val="172B45"/>
-                          </a:solidFill>
-                          <a:latin typeface="Aptos"/>
-                          <a:ea typeface="Aptos"/>
-                          <a:cs typeface="Aptos"/>
-                        </a:rPr>
-                        <a:t>About half of postings</a:t>
-                      </a:r>
-                    </a:p>
-                  </a:txBody>
-                  <a:tcPr>
-                    <a:solidFill>
-                      <a:srgbClr val="F0F4F8"/>
-                    </a:solidFill>
-                  </a:tcPr>
-                </a:tc>
-                <a:extLst>
-                  <a:ext uri="{0D108BD9-81ED-4DB2-BD59-A6C34878D82A}">
-                    <a16:rowId xmlns:a16="http://schemas.microsoft.com/office/drawing/2014/main" val="10001"/>
-                  </a:ext>
-                </a:extLst>
-              </a:tr>
-              <a:tr h="714375">
-                <a:tc>
-                  <a:txBody>
-                    <a:bodyPr/>
-                    <a:lstStyle/>
-                    <a:p>
-                      <a:r>
-                        <a:rPr sz="2100" b="0">
-                          <a:solidFill>
-                            <a:srgbClr val="172B45"/>
-                          </a:solidFill>
-                          <a:latin typeface="Aptos"/>
-                          <a:ea typeface="Aptos"/>
-                          <a:cs typeface="Aptos"/>
-                        </a:rPr>
-                        <a:t>Work arrangement</a:t>
-                      </a:r>
-                    </a:p>
-                  </a:txBody>
-                  <a:tcPr>
-                    <a:solidFill>
-                      <a:srgbClr val="FFFFFF"/>
-                    </a:solidFill>
-                  </a:tcPr>
-                </a:tc>
-                <a:tc>
-                  <a:txBody>
-                    <a:bodyPr/>
-                    <a:lstStyle/>
-                    <a:p>
-                      <a:r>
-                        <a:rPr sz="2100" b="0">
-                          <a:solidFill>
-                            <a:srgbClr val="172B45"/>
-                          </a:solidFill>
-                          <a:latin typeface="Aptos"/>
-                          <a:ea typeface="Aptos"/>
-                          <a:cs typeface="Aptos"/>
-                        </a:rPr>
-                        <a:t>Remote</a:t>
-                      </a:r>
-                    </a:p>
-                  </a:txBody>
-                  <a:tcPr>
-                    <a:solidFill>
-                      <a:srgbClr val="FFFFFF"/>
-                    </a:solidFill>
-                  </a:tcPr>
-                </a:tc>
-                <a:tc>
-                  <a:txBody>
-                    <a:bodyPr/>
-                    <a:lstStyle/>
-                    <a:p>
-                      <a:r>
-                        <a:rPr sz="2100" b="0">
-                          <a:solidFill>
-                            <a:srgbClr val="172B45"/>
-                          </a:solidFill>
-                          <a:latin typeface="Aptos"/>
-                          <a:ea typeface="Aptos"/>
-                          <a:cs typeface="Aptos"/>
-                        </a:rPr>
-                        <a:t>About 4,000 postings</a:t>
-                      </a:r>
-                    </a:p>
-                  </a:txBody>
-                  <a:tcPr>
-                    <a:solidFill>
-                      <a:srgbClr val="FFFFFF"/>
-                    </a:solidFill>
-                  </a:tcPr>
-                </a:tc>
-                <a:extLst>
-                  <a:ext uri="{0D108BD9-81ED-4DB2-BD59-A6C34878D82A}">
-                    <a16:rowId xmlns:a16="http://schemas.microsoft.com/office/drawing/2014/main" val="10002"/>
-                  </a:ext>
-                </a:extLst>
-              </a:tr>
-              <a:tr h="714375">
-                <a:tc>
-                  <a:txBody>
-                    <a:bodyPr/>
-                    <a:lstStyle/>
-                    <a:p>
-                      <a:r>
-                        <a:rPr sz="2100" b="0">
-                          <a:solidFill>
-                            <a:srgbClr val="172B45"/>
-                          </a:solidFill>
-                          <a:latin typeface="Aptos"/>
-                          <a:ea typeface="Aptos"/>
-                          <a:cs typeface="Aptos"/>
-                        </a:rPr>
-                        <a:t>Employment type</a:t>
-                      </a:r>
-                    </a:p>
-                  </a:txBody>
-                  <a:tcPr>
-                    <a:solidFill>
-                      <a:srgbClr val="F0F4F8"/>
-                    </a:solidFill>
-                  </a:tcPr>
-                </a:tc>
-                <a:tc>
-                  <a:txBody>
-                    <a:bodyPr/>
-                    <a:lstStyle/>
-                    <a:p>
-                      <a:r>
-                        <a:rPr sz="2100" b="0">
-                          <a:solidFill>
-                            <a:srgbClr val="172B45"/>
-                          </a:solidFill>
-                          <a:latin typeface="Aptos"/>
-                          <a:ea typeface="Aptos"/>
-                          <a:cs typeface="Aptos"/>
-                        </a:rPr>
-                        <a:t>Full-time</a:t>
-                      </a:r>
-                    </a:p>
-                  </a:txBody>
-                  <a:tcPr>
-                    <a:solidFill>
-                      <a:srgbClr val="F0F4F8"/>
-                    </a:solidFill>
-                  </a:tcPr>
-                </a:tc>
-                <a:tc>
-                  <a:txBody>
-                    <a:bodyPr/>
-                    <a:lstStyle/>
-                    <a:p>
-                      <a:r>
-                        <a:rPr sz="2100" b="0">
-                          <a:solidFill>
-                            <a:srgbClr val="172B45"/>
-                          </a:solidFill>
-                          <a:latin typeface="Aptos"/>
-                          <a:ea typeface="Aptos"/>
-                          <a:cs typeface="Aptos"/>
-                        </a:rPr>
-                        <a:t>About 7,500 postings</a:t>
-                      </a:r>
-                    </a:p>
-                  </a:txBody>
-                  <a:tcPr>
-                    <a:solidFill>
-                      <a:srgbClr val="F0F4F8"/>
-                    </a:solidFill>
-                  </a:tcPr>
-                </a:tc>
-                <a:extLst>
-                  <a:ext uri="{0D108BD9-81ED-4DB2-BD59-A6C34878D82A}">
-                    <a16:rowId xmlns:a16="http://schemas.microsoft.com/office/drawing/2014/main" val="10003"/>
-                  </a:ext>
-                </a:extLst>
-              </a:tr>
-            </a:tbl>
-          </a:graphicData>
-        </a:graphic>
-      </p:graphicFrame>
-      <p:sp>
-        <p:nvSpPr>
-          <p:cNvPr id="4" name="Rectangle 3">
-            <a:extLst>
-              <a:ext uri="{FF2B5EF4-FFF2-40B4-BE49-F238E27FC236}">
-                <a16:creationId xmlns:a16="http://schemas.microsoft.com/office/drawing/2014/main" id="{457E414F-A8B0-4292-966C-6338C9DF0BF0}"/>
-              </a:ext>
-            </a:extLst>
-          </p:cNvPr>
-          <p:cNvSpPr>
-            <a:spLocks noGrp="1"/>
-          </p:cNvSpPr>
-          <p:nvPr/>
-        </p:nvSpPr>
-        <p:spPr>
-          <a:xfrm>
-            <a:off x="762000" y="4857750"/>
-            <a:ext cx="10477500" cy="762000"/>
-          </a:xfrm>
-          <a:prstGeom prst="rect">
-            <a:avLst/>
-          </a:prstGeom>
-          <a:noFill/>
-          <a:ln w="0">
-            <a:noFill/>
-          </a:ln>
-        </p:spPr>
-        <p:txBody>
-          <a:bodyPr>
-            <a:noAutofit/>
-          </a:bodyPr>
-          <a:lstStyle/>
-          <a:p>
-            <a:pPr>
-              <a:defRPr sz="2025" b="0">
-                <a:solidFill>
-                  <a:srgbClr val="172B45"/>
-                </a:solidFill>
-                <a:latin typeface="Aptos"/>
-                <a:ea typeface="Aptos"/>
-                <a:cs typeface="Aptos"/>
-              </a:defRPr>
-            </a:pPr>
-            <a:r>
-              <a:rPr sz="2025" b="0">
-                <a:solidFill>
-                  <a:srgbClr val="172B45"/>
-                </a:solidFill>
-                <a:latin typeface="Aptos"/>
-                <a:ea typeface="Aptos"/>
-                <a:cs typeface="Aptos"/>
-              </a:rPr>
-              <a:t>Industry counts were relatively similar across the ten retained industries.</a:t>
-            </a:r>
-          </a:p>
-        </p:txBody>
-      </p:sp>
-      <p:sp>
-        <p:nvSpPr>
-          <p:cNvPr id="5" name="Rectangle 4">
-            <a:extLst>
-              <a:ext uri="{FF2B5EF4-FFF2-40B4-BE49-F238E27FC236}">
-                <a16:creationId xmlns:a16="http://schemas.microsoft.com/office/drawing/2014/main" id="{DECE4D17-2FC0-49A7-AD48-AD117A9DC600}"/>
-              </a:ext>
-            </a:extLst>
-          </p:cNvPr>
-          <p:cNvSpPr>
-            <a:spLocks noGrp="1"/>
-          </p:cNvSpPr>
-          <p:nvPr/>
-        </p:nvSpPr>
-        <p:spPr>
-          <a:xfrm>
-            <a:off x="762000" y="5867400"/>
-            <a:ext cx="10477500" cy="447675"/>
-          </a:xfrm>
-          <a:prstGeom prst="rect">
-            <a:avLst/>
-          </a:prstGeom>
-          <a:noFill/>
-          <a:ln w="0">
-            <a:noFill/>
-          </a:ln>
-        </p:spPr>
-        <p:txBody>
-          <a:bodyPr>
-            <a:noAutofit/>
-          </a:bodyPr>
-          <a:lstStyle/>
-          <a:p>
-            <a:pPr>
-              <a:defRPr sz="1350" b="0">
-                <a:solidFill>
-                  <a:srgbClr val="687887"/>
-                </a:solidFill>
-                <a:latin typeface="Aptos"/>
-                <a:ea typeface="Aptos"/>
-                <a:cs typeface="Aptos"/>
-              </a:defRPr>
-            </a:pPr>
-            <a:r>
-              <a:rPr sz="1350" b="0">
-                <a:solidFill>
-                  <a:srgbClr val="687887"/>
-                </a:solidFill>
-                <a:latin typeface="Aptos"/>
-                <a:ea typeface="Aptos"/>
-                <a:cs typeface="Aptos"/>
-              </a:rPr>
-              <a:t>Rounded counts describe sample composition and do not estimate market-wide demand.</a:t>
-            </a:r>
-          </a:p>
-        </p:txBody>
-      </p:sp>
-    </p:spTree>
-    <p:extLst>
-      <p:ext uri="{BB962C8B-B14F-4D97-AF65-F5344CB8AC3E}">
-        <p14:creationId xmlns:p14="http://schemas.microsoft.com/office/powerpoint/2010/main" val="1441684340"/>
-      </p:ext>
-    </p:extLst>
-  </p:cSld>
-  <p:clrMapOvr>
-    <a:masterClrMapping/>
-  </p:clrMapOvr>
-</p:sld>
-</file>
-
-<file path=ppt/slides/slide7.xml><?xml version="1.0" encoding="utf-8"?>
-<p:sld xmlns:a="http://schemas.openxmlformats.org/drawingml/2006/main" xmlns:r="http://schemas.openxmlformats.org/officeDocument/2006/relationships" xmlns:p="http://schemas.openxmlformats.org/presentationml/2006/main">
-  <p:cSld>
-    <p:bg>
-      <p:bgPr>
-        <a:solidFill>
-          <a:srgbClr val="FFFFFF"/>
-        </a:solidFill>
-        <a:effectLst/>
-      </p:bgPr>
-    </p:bg>
-    <p:spTree>
-      <p:nvGrpSpPr>
-        <p:cNvPr id="1" name=""/>
-        <p:cNvGrpSpPr/>
-        <p:nvPr/>
-      </p:nvGrpSpPr>
-      <p:grpSpPr>
-        <a:xfrm>
-          <a:off x="0" y="0"/>
-          <a:ext cx="0" cy="0"/>
-          <a:chOff x="0" y="0"/>
-          <a:chExt cx="0" cy="0"/>
-        </a:xfrm>
-      </p:grpSpPr>
-      <p:sp>
-        <p:nvSpPr>
-          <p:cNvPr id="5" name="Rectangle 4">
-            <a:extLst>
-              <a:ext uri="{FF2B5EF4-FFF2-40B4-BE49-F238E27FC236}">
-                <a16:creationId xmlns:a16="http://schemas.microsoft.com/office/drawing/2014/main" id="{47BA7990-019A-48C5-BDA2-575A1854B91B}"/>
-              </a:ext>
-            </a:extLst>
-          </p:cNvPr>
-          <p:cNvSpPr>
-            <a:spLocks noGrp="1"/>
-          </p:cNvSpPr>
-          <p:nvPr/>
-        </p:nvSpPr>
-        <p:spPr>
-          <a:xfrm>
-            <a:off x="666750" y="428625"/>
-            <a:ext cx="10858500" cy="857250"/>
-          </a:xfrm>
-          <a:prstGeom prst="rect">
-            <a:avLst/>
-          </a:prstGeom>
-          <a:noFill/>
-          <a:ln w="0">
-            <a:noFill/>
-          </a:ln>
-        </p:spPr>
-        <p:txBody>
-          <a:bodyPr>
-            <a:noAutofit/>
-          </a:bodyPr>
-          <a:lstStyle/>
-          <a:p>
-            <a:pPr>
-              <a:defRPr sz="3150" b="1">
-                <a:solidFill>
-                  <a:srgbClr val="172B45"/>
-                </a:solidFill>
-                <a:latin typeface="Aptos"/>
-                <a:ea typeface="Aptos"/>
-                <a:cs typeface="Aptos"/>
-              </a:defRPr>
-            </a:pPr>
-            <a:r>
-              <a:rPr sz="3150" b="1">
-                <a:solidFill>
-                  <a:srgbClr val="172B45"/>
-                </a:solidFill>
-                <a:latin typeface="Aptos"/>
-                <a:ea typeface="Aptos"/>
-                <a:cs typeface="Aptos"/>
-              </a:rPr>
-              <a:t>Specializations have distinct skill profiles</a:t>
-            </a:r>
-          </a:p>
-        </p:txBody>
-      </p:sp>
-      <p:sp>
-        <p:nvSpPr>
-          <p:cNvPr id="2" name="Rectangle 1">
-            <a:extLst>
-              <a:ext uri="{FF2B5EF4-FFF2-40B4-BE49-F238E27FC236}">
-                <a16:creationId xmlns:a16="http://schemas.microsoft.com/office/drawing/2014/main" id="{F3A14246-57E4-4BEB-BDA8-05D2FAF02DFE}"/>
-              </a:ext>
-            </a:extLst>
-          </p:cNvPr>
-          <p:cNvSpPr>
-            <a:spLocks noGrp="1"/>
-          </p:cNvSpPr>
-          <p:nvPr/>
-        </p:nvSpPr>
-        <p:spPr>
-          <a:xfrm>
-            <a:off x="11334750" y="6381750"/>
-            <a:ext cx="381000" cy="238125"/>
-          </a:xfrm>
-          <a:prstGeom prst="rect">
-            <a:avLst/>
-          </a:prstGeom>
-          <a:noFill/>
-          <a:ln w="0">
-            <a:noFill/>
-          </a:ln>
-        </p:spPr>
-        <p:txBody>
-          <a:bodyPr>
-            <a:noAutofit/>
-          </a:bodyPr>
-          <a:lstStyle/>
-          <a:p>
-            <a:pPr>
-              <a:defRPr sz="1200" b="0">
-                <a:solidFill>
-                  <a:srgbClr val="687887"/>
-                </a:solidFill>
-                <a:latin typeface="Aptos"/>
-                <a:ea typeface="Aptos"/>
-                <a:cs typeface="Aptos"/>
-              </a:defRPr>
-            </a:pPr>
-            <a:r>
-              <a:rPr sz="1200" b="0">
-                <a:solidFill>
-                  <a:srgbClr val="687887"/>
-                </a:solidFill>
-                <a:latin typeface="Aptos"/>
-                <a:ea typeface="Aptos"/>
-                <a:cs typeface="Aptos"/>
-              </a:rPr>
-              <a:t>7</a:t>
             </a:r>
           </a:p>
         </p:txBody>
@@ -10780,7 +7199,7 @@
           <p:cNvPr id="4" name="Rectangle 3">
             <a:extLst>
               <a:ext uri="{FF2B5EF4-FFF2-40B4-BE49-F238E27FC236}">
-                <a16:creationId xmlns:a16="http://schemas.microsoft.com/office/drawing/2014/main" id="{19DBFEB3-260B-4DDE-AD00-FDB38FF769B6}"/>
+                <a16:creationId xmlns:a16="http://schemas.microsoft.com/office/drawing/2014/main" id="{9695000A-F7C5-4467-89E0-0FD06FB6C0EA}"/>
               </a:ext>
             </a:extLst>
           </p:cNvPr>
@@ -10827,7 +7246,7 @@
                 <a:ea typeface="Aptos"/>
                 <a:cs typeface="Aptos"/>
               </a:rPr>
-              <a:t>Profiles use within-specialization prevalence minus overall prevalence, in percentage points.</a:t>
+              <a:t>Comparison uses within-specialization skill prevalence minus overall prevalence in percentage points.</a:t>
             </a:r>
           </a:p>
         </p:txBody>
@@ -10835,7 +7254,3565 @@
     </p:spTree>
     <p:extLst>
       <p:ext uri="{BB962C8B-B14F-4D97-AF65-F5344CB8AC3E}">
-        <p14:creationId xmlns:p14="http://schemas.microsoft.com/office/powerpoint/2010/main" val="1884594870"/>
+        <p14:creationId xmlns:p14="http://schemas.microsoft.com/office/powerpoint/2010/main" val="235658023"/>
+      </p:ext>
+    </p:extLst>
+  </p:cSld>
+  <p:clrMapOvr>
+    <a:masterClrMapping/>
+  </p:clrMapOvr>
+</p:sld>
+</file>
+
+<file path=ppt/slides/slide15.xml><?xml version="1.0" encoding="utf-8"?>
+<p:sld xmlns:a="http://schemas.openxmlformats.org/drawingml/2006/main" xmlns:r="http://schemas.openxmlformats.org/officeDocument/2006/relationships" xmlns:p="http://schemas.openxmlformats.org/presentationml/2006/main">
+  <p:cSld>
+    <p:bg>
+      <p:bgPr>
+        <a:solidFill>
+          <a:srgbClr val="FFFFFF"/>
+        </a:solidFill>
+        <a:effectLst/>
+      </p:bgPr>
+    </p:bg>
+    <p:spTree>
+      <p:nvGrpSpPr>
+        <p:cNvPr id="1" name=""/>
+        <p:cNvGrpSpPr/>
+        <p:nvPr/>
+      </p:nvGrpSpPr>
+      <p:grpSpPr>
+        <a:xfrm>
+          <a:off x="0" y="0"/>
+          <a:ext cx="0" cy="0"/>
+          <a:chOff x="0" y="0"/>
+          <a:chExt cx="0" cy="0"/>
+        </a:xfrm>
+      </p:grpSpPr>
+      <p:sp>
+        <p:nvSpPr>
+          <p:cNvPr id="5" name="Rectangle 4">
+            <a:extLst>
+              <a:ext uri="{FF2B5EF4-FFF2-40B4-BE49-F238E27FC236}">
+                <a16:creationId xmlns:a16="http://schemas.microsoft.com/office/drawing/2014/main" id="{91368555-2083-4BE2-89C6-A4EA8FE7A361}"/>
+              </a:ext>
+            </a:extLst>
+          </p:cNvPr>
+          <p:cNvSpPr>
+            <a:spLocks noGrp="1"/>
+          </p:cNvSpPr>
+          <p:nvPr/>
+        </p:nvSpPr>
+        <p:spPr>
+          <a:xfrm>
+            <a:off x="666750" y="428625"/>
+            <a:ext cx="10858500" cy="857250"/>
+          </a:xfrm>
+          <a:prstGeom prst="rect">
+            <a:avLst/>
+          </a:prstGeom>
+          <a:noFill/>
+          <a:ln w="0">
+            <a:noFill/>
+          </a:ln>
+        </p:spPr>
+        <p:txBody>
+          <a:bodyPr>
+            <a:noAutofit/>
+          </a:bodyPr>
+          <a:lstStyle/>
+          <a:p>
+            <a:pPr>
+              <a:defRPr sz="3150" b="1">
+                <a:solidFill>
+                  <a:srgbClr val="172B45"/>
+                </a:solidFill>
+                <a:latin typeface="Aptos"/>
+                <a:ea typeface="Aptos"/>
+                <a:cs typeface="Aptos"/>
+              </a:defRPr>
+            </a:pPr>
+            <a:r>
+              <a:rPr sz="3150" b="1">
+                <a:solidFill>
+                  <a:srgbClr val="172B45"/>
+                </a:solidFill>
+                <a:latin typeface="Aptos"/>
+                <a:ea typeface="Aptos"/>
+                <a:cs typeface="Aptos"/>
+              </a:rPr>
+              <a:t>Appendix: Modeling and evaluation</a:t>
+            </a:r>
+          </a:p>
+        </p:txBody>
+      </p:sp>
+      <p:sp>
+        <p:nvSpPr>
+          <p:cNvPr id="2" name="Rectangle 1">
+            <a:extLst>
+              <a:ext uri="{FF2B5EF4-FFF2-40B4-BE49-F238E27FC236}">
+                <a16:creationId xmlns:a16="http://schemas.microsoft.com/office/drawing/2014/main" id="{B2E25BF1-5594-41B2-87BE-1997B5EFFDA5}"/>
+              </a:ext>
+            </a:extLst>
+          </p:cNvPr>
+          <p:cNvSpPr>
+            <a:spLocks noGrp="1"/>
+          </p:cNvSpPr>
+          <p:nvPr/>
+        </p:nvSpPr>
+        <p:spPr>
+          <a:xfrm>
+            <a:off x="11334750" y="6381750"/>
+            <a:ext cx="381000" cy="238125"/>
+          </a:xfrm>
+          <a:prstGeom prst="rect">
+            <a:avLst/>
+          </a:prstGeom>
+          <a:noFill/>
+          <a:ln w="0">
+            <a:noFill/>
+          </a:ln>
+        </p:spPr>
+        <p:txBody>
+          <a:bodyPr>
+            <a:noAutofit/>
+          </a:bodyPr>
+          <a:lstStyle/>
+          <a:p>
+            <a:pPr>
+              <a:defRPr sz="1200" b="0">
+                <a:solidFill>
+                  <a:srgbClr val="687887"/>
+                </a:solidFill>
+                <a:latin typeface="Aptos"/>
+                <a:ea typeface="Aptos"/>
+                <a:cs typeface="Aptos"/>
+              </a:defRPr>
+            </a:pPr>
+            <a:r>
+              <a:rPr sz="1200" b="0">
+                <a:solidFill>
+                  <a:srgbClr val="687887"/>
+                </a:solidFill>
+                <a:latin typeface="Aptos"/>
+                <a:ea typeface="Aptos"/>
+                <a:cs typeface="Aptos"/>
+              </a:rPr>
+              <a:t>15</a:t>
+            </a:r>
+          </a:p>
+        </p:txBody>
+      </p:sp>
+      <p:graphicFrame>
+        <p:nvGraphicFramePr>
+          <p:cNvPr id="7" name="Table 6"/>
+          <p:cNvGraphicFramePr/>
+          <p:nvPr/>
+        </p:nvGraphicFramePr>
+        <p:xfrm>
+          <a:off x="762000" y="1381125"/>
+          <a:ext cx="10668000" cy="3905250"/>
+        </p:xfrm>
+        <a:graphic>
+          <a:graphicData uri="http://schemas.openxmlformats.org/drawingml/2006/table">
+            <a:tbl>
+              <a:tblPr/>
+              <a:tblGrid>
+                <a:gridCol w="3714750">
+                  <a:extLst>
+                    <a:ext uri="{9D8B030D-6E8A-4147-A177-3AD203B41FA5}">
+                      <a16:colId xmlns:a16="http://schemas.microsoft.com/office/drawing/2014/main" val="20000"/>
+                    </a:ext>
+                  </a:extLst>
+                </a:gridCol>
+                <a:gridCol w="6953250">
+                  <a:extLst>
+                    <a:ext uri="{9D8B030D-6E8A-4147-A177-3AD203B41FA5}">
+                      <a16:colId xmlns:a16="http://schemas.microsoft.com/office/drawing/2014/main" val="20001"/>
+                    </a:ext>
+                  </a:extLst>
+                </a:gridCol>
+              </a:tblGrid>
+              <a:tr h="650875">
+                <a:tc>
+                  <a:txBody>
+                    <a:bodyPr/>
+                    <a:lstStyle/>
+                    <a:p>
+                      <a:r>
+                        <a:rPr sz="1800" b="1">
+                          <a:solidFill>
+                            <a:srgbClr val="FFFFFF"/>
+                          </a:solidFill>
+                          <a:latin typeface="Aptos"/>
+                          <a:ea typeface="Aptos"/>
+                          <a:cs typeface="Aptos"/>
+                        </a:rPr>
+                        <a:t>Evaluation component</a:t>
+                      </a:r>
+                    </a:p>
+                  </a:txBody>
+                  <a:tcPr>
+                    <a:solidFill>
+                      <a:srgbClr val="172B45"/>
+                    </a:solidFill>
+                  </a:tcPr>
+                </a:tc>
+                <a:tc>
+                  <a:txBody>
+                    <a:bodyPr/>
+                    <a:lstStyle/>
+                    <a:p>
+                      <a:r>
+                        <a:rPr sz="1800" b="1">
+                          <a:solidFill>
+                            <a:srgbClr val="FFFFFF"/>
+                          </a:solidFill>
+                          <a:latin typeface="Aptos"/>
+                          <a:ea typeface="Aptos"/>
+                          <a:cs typeface="Aptos"/>
+                        </a:rPr>
+                        <a:t>Approach</a:t>
+                      </a:r>
+                    </a:p>
+                  </a:txBody>
+                  <a:tcPr>
+                    <a:solidFill>
+                      <a:srgbClr val="172B45"/>
+                    </a:solidFill>
+                  </a:tcPr>
+                </a:tc>
+                <a:extLst>
+                  <a:ext uri="{0D108BD9-81ED-4DB2-BD59-A6C34878D82A}">
+                    <a16:rowId xmlns:a16="http://schemas.microsoft.com/office/drawing/2014/main" val="10000"/>
+                  </a:ext>
+                </a:extLst>
+              </a:tr>
+              <a:tr h="650875">
+                <a:tc>
+                  <a:txBody>
+                    <a:bodyPr/>
+                    <a:lstStyle/>
+                    <a:p>
+                      <a:r>
+                        <a:rPr sz="1800" b="0">
+                          <a:solidFill>
+                            <a:srgbClr val="172B45"/>
+                          </a:solidFill>
+                          <a:latin typeface="Aptos"/>
+                          <a:ea typeface="Aptos"/>
+                          <a:cs typeface="Aptos"/>
+                        </a:rPr>
+                        <a:t>Salary target</a:t>
+                      </a:r>
+                    </a:p>
+                  </a:txBody>
+                  <a:tcPr>
+                    <a:solidFill>
+                      <a:srgbClr val="F0F4F8"/>
+                    </a:solidFill>
+                  </a:tcPr>
+                </a:tc>
+                <a:tc>
+                  <a:txBody>
+                    <a:bodyPr/>
+                    <a:lstStyle/>
+                    <a:p>
+                      <a:r>
+                        <a:rPr sz="1800" b="0">
+                          <a:solidFill>
+                            <a:srgbClr val="172B45"/>
+                          </a:solidFill>
+                          <a:latin typeface="Aptos"/>
+                          <a:ea typeface="Aptos"/>
+                          <a:cs typeface="Aptos"/>
+                        </a:rPr>
+                        <a:t>Arithmetic midpoint of advertised salary bounds</a:t>
+                      </a:r>
+                    </a:p>
+                  </a:txBody>
+                  <a:tcPr>
+                    <a:solidFill>
+                      <a:srgbClr val="F0F4F8"/>
+                    </a:solidFill>
+                  </a:tcPr>
+                </a:tc>
+                <a:extLst>
+                  <a:ext uri="{0D108BD9-81ED-4DB2-BD59-A6C34878D82A}">
+                    <a16:rowId xmlns:a16="http://schemas.microsoft.com/office/drawing/2014/main" val="10001"/>
+                  </a:ext>
+                </a:extLst>
+              </a:tr>
+              <a:tr h="650875">
+                <a:tc>
+                  <a:txBody>
+                    <a:bodyPr/>
+                    <a:lstStyle/>
+                    <a:p>
+                      <a:r>
+                        <a:rPr sz="1800" b="0">
+                          <a:solidFill>
+                            <a:srgbClr val="172B45"/>
+                          </a:solidFill>
+                          <a:latin typeface="Aptos"/>
+                          <a:ea typeface="Aptos"/>
+                          <a:cs typeface="Aptos"/>
+                        </a:rPr>
+                        <a:t>Predictors</a:t>
+                      </a:r>
+                    </a:p>
+                  </a:txBody>
+                  <a:tcPr>
+                    <a:solidFill>
+                      <a:srgbClr val="FFFFFF"/>
+                    </a:solidFill>
+                  </a:tcPr>
+                </a:tc>
+                <a:tc>
+                  <a:txBody>
+                    <a:bodyPr/>
+                    <a:lstStyle/>
+                    <a:p>
+                      <a:r>
+                        <a:rPr sz="1800" b="0">
+                          <a:solidFill>
+                            <a:srgbClr val="172B45"/>
+                          </a:solidFill>
+                          <a:latin typeface="Aptos"/>
+                          <a:ea typeface="Aptos"/>
+                          <a:cs typeface="Aptos"/>
+                        </a:rPr>
+                        <a:t>Experience, education, and 15 binary skill indicators</a:t>
+                      </a:r>
+                    </a:p>
+                  </a:txBody>
+                  <a:tcPr>
+                    <a:solidFill>
+                      <a:srgbClr val="FFFFFF"/>
+                    </a:solidFill>
+                  </a:tcPr>
+                </a:tc>
+                <a:extLst>
+                  <a:ext uri="{0D108BD9-81ED-4DB2-BD59-A6C34878D82A}">
+                    <a16:rowId xmlns:a16="http://schemas.microsoft.com/office/drawing/2014/main" val="10002"/>
+                  </a:ext>
+                </a:extLst>
+              </a:tr>
+              <a:tr h="650875">
+                <a:tc>
+                  <a:txBody>
+                    <a:bodyPr/>
+                    <a:lstStyle/>
+                    <a:p>
+                      <a:r>
+                        <a:rPr sz="1800" b="0">
+                          <a:solidFill>
+                            <a:srgbClr val="172B45"/>
+                          </a:solidFill>
+                          <a:latin typeface="Aptos"/>
+                          <a:ea typeface="Aptos"/>
+                          <a:cs typeface="Aptos"/>
+                        </a:rPr>
+                        <a:t>Training and testing</a:t>
+                      </a:r>
+                    </a:p>
+                  </a:txBody>
+                  <a:tcPr>
+                    <a:solidFill>
+                      <a:srgbClr val="F0F4F8"/>
+                    </a:solidFill>
+                  </a:tcPr>
+                </a:tc>
+                <a:tc>
+                  <a:txBody>
+                    <a:bodyPr/>
+                    <a:lstStyle/>
+                    <a:p>
+                      <a:r>
+                        <a:rPr sz="1800" b="0">
+                          <a:solidFill>
+                            <a:srgbClr val="172B45"/>
+                          </a:solidFill>
+                          <a:latin typeface="Aptos"/>
+                          <a:ea typeface="Aptos"/>
+                          <a:cs typeface="Aptos"/>
+                        </a:rPr>
+                        <a:t>80/20 split, seed 42, five-fold training cross-validation</a:t>
+                      </a:r>
+                    </a:p>
+                  </a:txBody>
+                  <a:tcPr>
+                    <a:solidFill>
+                      <a:srgbClr val="F0F4F8"/>
+                    </a:solidFill>
+                  </a:tcPr>
+                </a:tc>
+                <a:extLst>
+                  <a:ext uri="{0D108BD9-81ED-4DB2-BD59-A6C34878D82A}">
+                    <a16:rowId xmlns:a16="http://schemas.microsoft.com/office/drawing/2014/main" val="10003"/>
+                  </a:ext>
+                </a:extLst>
+              </a:tr>
+              <a:tr h="650875">
+                <a:tc>
+                  <a:txBody>
+                    <a:bodyPr/>
+                    <a:lstStyle/>
+                    <a:p>
+                      <a:r>
+                        <a:rPr sz="1800" b="0">
+                          <a:solidFill>
+                            <a:srgbClr val="172B45"/>
+                          </a:solidFill>
+                          <a:latin typeface="Aptos"/>
+                          <a:ea typeface="Aptos"/>
+                          <a:cs typeface="Aptos"/>
+                        </a:rPr>
+                        <a:t>Selected Random Forest</a:t>
+                      </a:r>
+                    </a:p>
+                  </a:txBody>
+                  <a:tcPr>
+                    <a:solidFill>
+                      <a:srgbClr val="FFFFFF"/>
+                    </a:solidFill>
+                  </a:tcPr>
+                </a:tc>
+                <a:tc>
+                  <a:txBody>
+                    <a:bodyPr/>
+                    <a:lstStyle/>
+                    <a:p>
+                      <a:r>
+                        <a:rPr sz="1800" b="0">
+                          <a:solidFill>
+                            <a:srgbClr val="172B45"/>
+                          </a:solidFill>
+                          <a:latin typeface="Aptos"/>
+                          <a:ea typeface="Aptos"/>
+                          <a:cs typeface="Aptos"/>
+                        </a:rPr>
+                        <a:t>150 trees, depth 8, minimum leaf 5, half of features</a:t>
+                      </a:r>
+                    </a:p>
+                  </a:txBody>
+                  <a:tcPr>
+                    <a:solidFill>
+                      <a:srgbClr val="FFFFFF"/>
+                    </a:solidFill>
+                  </a:tcPr>
+                </a:tc>
+                <a:extLst>
+                  <a:ext uri="{0D108BD9-81ED-4DB2-BD59-A6C34878D82A}">
+                    <a16:rowId xmlns:a16="http://schemas.microsoft.com/office/drawing/2014/main" val="10004"/>
+                  </a:ext>
+                </a:extLst>
+              </a:tr>
+              <a:tr h="650875">
+                <a:tc>
+                  <a:txBody>
+                    <a:bodyPr/>
+                    <a:lstStyle/>
+                    <a:p>
+                      <a:r>
+                        <a:rPr sz="1800" b="0">
+                          <a:solidFill>
+                            <a:srgbClr val="172B45"/>
+                          </a:solidFill>
+                          <a:latin typeface="Aptos"/>
+                          <a:ea typeface="Aptos"/>
+                          <a:cs typeface="Aptos"/>
+                        </a:rPr>
+                        <a:t>Model comparison</a:t>
+                      </a:r>
+                    </a:p>
+                  </a:txBody>
+                  <a:tcPr>
+                    <a:solidFill>
+                      <a:srgbClr val="F0F4F8"/>
+                    </a:solidFill>
+                  </a:tcPr>
+                </a:tc>
+                <a:tc>
+                  <a:txBody>
+                    <a:bodyPr/>
+                    <a:lstStyle/>
+                    <a:p>
+                      <a:r>
+                        <a:rPr sz="1800" b="0">
+                          <a:solidFill>
+                            <a:srgbClr val="172B45"/>
+                          </a:solidFill>
+                          <a:latin typeface="Aptos"/>
+                          <a:ea typeface="Aptos"/>
+                          <a:cs typeface="Aptos"/>
+                        </a:rPr>
+                        <a:t>MAE, RMSE, and R² against a mean baseline</a:t>
+                      </a:r>
+                    </a:p>
+                  </a:txBody>
+                  <a:tcPr>
+                    <a:solidFill>
+                      <a:srgbClr val="F0F4F8"/>
+                    </a:solidFill>
+                  </a:tcPr>
+                </a:tc>
+                <a:extLst>
+                  <a:ext uri="{0D108BD9-81ED-4DB2-BD59-A6C34878D82A}">
+                    <a16:rowId xmlns:a16="http://schemas.microsoft.com/office/drawing/2014/main" val="10005"/>
+                  </a:ext>
+                </a:extLst>
+              </a:tr>
+            </a:tbl>
+          </a:graphicData>
+        </a:graphic>
+      </p:graphicFrame>
+      <p:sp>
+        <p:nvSpPr>
+          <p:cNvPr id="4" name="Rectangle 3">
+            <a:extLst>
+              <a:ext uri="{FF2B5EF4-FFF2-40B4-BE49-F238E27FC236}">
+                <a16:creationId xmlns:a16="http://schemas.microsoft.com/office/drawing/2014/main" id="{911EF14C-B9F7-4080-92DF-D1C24B74B0CE}"/>
+              </a:ext>
+            </a:extLst>
+          </p:cNvPr>
+          <p:cNvSpPr>
+            <a:spLocks noGrp="1"/>
+          </p:cNvSpPr>
+          <p:nvPr/>
+        </p:nvSpPr>
+        <p:spPr>
+          <a:xfrm>
+            <a:off x="762000" y="5867400"/>
+            <a:ext cx="10477500" cy="447675"/>
+          </a:xfrm>
+          <a:prstGeom prst="rect">
+            <a:avLst/>
+          </a:prstGeom>
+          <a:noFill/>
+          <a:ln w="0">
+            <a:noFill/>
+          </a:ln>
+        </p:spPr>
+        <p:txBody>
+          <a:bodyPr>
+            <a:noAutofit/>
+          </a:bodyPr>
+          <a:lstStyle/>
+          <a:p>
+            <a:pPr>
+              <a:defRPr sz="1350" b="0">
+                <a:solidFill>
+                  <a:srgbClr val="687887"/>
+                </a:solidFill>
+                <a:latin typeface="Aptos"/>
+                <a:ea typeface="Aptos"/>
+                <a:cs typeface="Aptos"/>
+              </a:defRPr>
+            </a:pPr>
+            <a:r>
+              <a:rPr sz="1350" b="0">
+                <a:solidFill>
+                  <a:srgbClr val="687887"/>
+                </a:solidFill>
+                <a:latin typeface="Aptos"/>
+                <a:ea typeface="Aptos"/>
+                <a:cs typeface="Aptos"/>
+              </a:rPr>
+              <a:t>All salary scores remain provisional. The feature set omits location, industry, title, and specialization.</a:t>
+            </a:r>
+          </a:p>
+        </p:txBody>
+      </p:sp>
+    </p:spTree>
+    <p:extLst>
+      <p:ext uri="{BB962C8B-B14F-4D97-AF65-F5344CB8AC3E}">
+        <p14:creationId xmlns:p14="http://schemas.microsoft.com/office/powerpoint/2010/main" val="380338603"/>
+      </p:ext>
+    </p:extLst>
+  </p:cSld>
+  <p:clrMapOvr>
+    <a:masterClrMapping/>
+  </p:clrMapOvr>
+</p:sld>
+</file>
+
+<file path=ppt/slides/slide2.xml><?xml version="1.0" encoding="utf-8"?>
+<p:sld xmlns:a="http://schemas.openxmlformats.org/drawingml/2006/main" xmlns:r="http://schemas.openxmlformats.org/officeDocument/2006/relationships" xmlns:p="http://schemas.openxmlformats.org/presentationml/2006/main">
+  <p:cSld>
+    <p:bg>
+      <p:bgPr>
+        <a:solidFill>
+          <a:srgbClr val="FFFFFF"/>
+        </a:solidFill>
+        <a:effectLst/>
+      </p:bgPr>
+    </p:bg>
+    <p:spTree>
+      <p:nvGrpSpPr>
+        <p:cNvPr id="1" name=""/>
+        <p:cNvGrpSpPr/>
+        <p:nvPr/>
+      </p:nvGrpSpPr>
+      <p:grpSpPr>
+        <a:xfrm>
+          <a:off x="0" y="0"/>
+          <a:ext cx="0" cy="0"/>
+          <a:chOff x="0" y="0"/>
+          <a:chExt cx="0" cy="0"/>
+        </a:xfrm>
+      </p:grpSpPr>
+      <p:sp>
+        <p:nvSpPr>
+          <p:cNvPr id="6" name="Rectangle 5">
+            <a:extLst>
+              <a:ext uri="{FF2B5EF4-FFF2-40B4-BE49-F238E27FC236}">
+                <a16:creationId xmlns:a16="http://schemas.microsoft.com/office/drawing/2014/main" id="{0644B927-73A3-458F-B751-0D0531DDBC66}"/>
+              </a:ext>
+            </a:extLst>
+          </p:cNvPr>
+          <p:cNvSpPr>
+            <a:spLocks noGrp="1"/>
+          </p:cNvSpPr>
+          <p:nvPr/>
+        </p:nvSpPr>
+        <p:spPr>
+          <a:xfrm>
+            <a:off x="666750" y="428625"/>
+            <a:ext cx="10858500" cy="857250"/>
+          </a:xfrm>
+          <a:prstGeom prst="rect">
+            <a:avLst/>
+          </a:prstGeom>
+          <a:noFill/>
+          <a:ln w="0">
+            <a:noFill/>
+          </a:ln>
+        </p:spPr>
+        <p:txBody>
+          <a:bodyPr>
+            <a:noAutofit/>
+          </a:bodyPr>
+          <a:lstStyle/>
+          <a:p>
+            <a:pPr>
+              <a:defRPr sz="3150" b="1">
+                <a:solidFill>
+                  <a:srgbClr val="172B45"/>
+                </a:solidFill>
+                <a:latin typeface="Aptos"/>
+                <a:ea typeface="Aptos"/>
+                <a:cs typeface="Aptos"/>
+              </a:defRPr>
+            </a:pPr>
+            <a:r>
+              <a:rPr sz="3150" b="1">
+                <a:solidFill>
+                  <a:srgbClr val="172B45"/>
+                </a:solidFill>
+                <a:latin typeface="Aptos"/>
+                <a:ea typeface="Aptos"/>
+                <a:cs typeface="Aptos"/>
+              </a:rPr>
+              <a:t>Executive findings</a:t>
+            </a:r>
+          </a:p>
+        </p:txBody>
+      </p:sp>
+      <p:sp>
+        <p:nvSpPr>
+          <p:cNvPr id="2" name="Rectangle 1">
+            <a:extLst>
+              <a:ext uri="{FF2B5EF4-FFF2-40B4-BE49-F238E27FC236}">
+                <a16:creationId xmlns:a16="http://schemas.microsoft.com/office/drawing/2014/main" id="{204944D8-4D03-44E3-B55F-9DA85825D72B}"/>
+              </a:ext>
+            </a:extLst>
+          </p:cNvPr>
+          <p:cNvSpPr>
+            <a:spLocks noGrp="1"/>
+          </p:cNvSpPr>
+          <p:nvPr/>
+        </p:nvSpPr>
+        <p:spPr>
+          <a:xfrm>
+            <a:off x="11334750" y="6381750"/>
+            <a:ext cx="381000" cy="238125"/>
+          </a:xfrm>
+          <a:prstGeom prst="rect">
+            <a:avLst/>
+          </a:prstGeom>
+          <a:noFill/>
+          <a:ln w="0">
+            <a:noFill/>
+          </a:ln>
+        </p:spPr>
+        <p:txBody>
+          <a:bodyPr>
+            <a:noAutofit/>
+          </a:bodyPr>
+          <a:lstStyle/>
+          <a:p>
+            <a:pPr>
+              <a:defRPr sz="1200" b="0">
+                <a:solidFill>
+                  <a:srgbClr val="687887"/>
+                </a:solidFill>
+                <a:latin typeface="Aptos"/>
+                <a:ea typeface="Aptos"/>
+                <a:cs typeface="Aptos"/>
+              </a:defRPr>
+            </a:pPr>
+            <a:r>
+              <a:rPr sz="1200" b="0">
+                <a:solidFill>
+                  <a:srgbClr val="687887"/>
+                </a:solidFill>
+                <a:latin typeface="Aptos"/>
+                <a:ea typeface="Aptos"/>
+                <a:cs typeface="Aptos"/>
+              </a:rPr>
+              <a:t>2</a:t>
+            </a:r>
+          </a:p>
+        </p:txBody>
+      </p:sp>
+      <p:sp>
+        <p:nvSpPr>
+          <p:cNvPr id="3" name="Rectangle 2">
+            <a:extLst>
+              <a:ext uri="{FF2B5EF4-FFF2-40B4-BE49-F238E27FC236}">
+                <a16:creationId xmlns:a16="http://schemas.microsoft.com/office/drawing/2014/main" id="{38B3EBE2-C70D-4569-A421-7F5285D6DAB0}"/>
+              </a:ext>
+            </a:extLst>
+          </p:cNvPr>
+          <p:cNvSpPr>
+            <a:spLocks noGrp="1"/>
+          </p:cNvSpPr>
+          <p:nvPr/>
+        </p:nvSpPr>
+        <p:spPr>
+          <a:xfrm>
+            <a:off x="762000" y="1571625"/>
+            <a:ext cx="10572750" cy="857250"/>
+          </a:xfrm>
+          <a:prstGeom prst="rect">
+            <a:avLst/>
+          </a:prstGeom>
+          <a:noFill/>
+          <a:ln w="0">
+            <a:noFill/>
+          </a:ln>
+        </p:spPr>
+        <p:txBody>
+          <a:bodyPr>
+            <a:noAutofit/>
+          </a:bodyPr>
+          <a:lstStyle/>
+          <a:p>
+            <a:pPr>
+              <a:defRPr sz="2100" b="0">
+                <a:solidFill>
+                  <a:srgbClr val="172B45"/>
+                </a:solidFill>
+                <a:latin typeface="Aptos"/>
+                <a:ea typeface="Aptos"/>
+                <a:cs typeface="Aptos"/>
+              </a:defRPr>
+            </a:pPr>
+            <a:r>
+              <a:rPr sz="2100" b="0">
+                <a:solidFill>
+                  <a:srgbClr val="172B45"/>
+                </a:solidFill>
+                <a:latin typeface="Aptos"/>
+                <a:ea typeface="Aptos"/>
+                <a:cs typeface="Aptos"/>
+              </a:rPr>
+              <a:t>Specializations have recognizable skill profiles that can inform role definitions and hiring criteria.</a:t>
+            </a:r>
+          </a:p>
+        </p:txBody>
+      </p:sp>
+      <p:sp>
+        <p:nvSpPr>
+          <p:cNvPr id="4" name="Rectangle 3">
+            <a:extLst>
+              <a:ext uri="{FF2B5EF4-FFF2-40B4-BE49-F238E27FC236}">
+                <a16:creationId xmlns:a16="http://schemas.microsoft.com/office/drawing/2014/main" id="{2F6B79A2-2B18-4133-A468-48CA9D31D97C}"/>
+              </a:ext>
+            </a:extLst>
+          </p:cNvPr>
+          <p:cNvSpPr>
+            <a:spLocks noGrp="1"/>
+          </p:cNvSpPr>
+          <p:nvPr/>
+        </p:nvSpPr>
+        <p:spPr>
+          <a:xfrm>
+            <a:off x="762000" y="2571750"/>
+            <a:ext cx="10572750" cy="857250"/>
+          </a:xfrm>
+          <a:prstGeom prst="rect">
+            <a:avLst/>
+          </a:prstGeom>
+          <a:noFill/>
+          <a:ln w="0">
+            <a:noFill/>
+          </a:ln>
+        </p:spPr>
+        <p:txBody>
+          <a:bodyPr>
+            <a:noAutofit/>
+          </a:bodyPr>
+          <a:lstStyle/>
+          <a:p>
+            <a:pPr>
+              <a:defRPr sz="2100" b="0">
+                <a:solidFill>
+                  <a:srgbClr val="172B45"/>
+                </a:solidFill>
+                <a:latin typeface="Aptos"/>
+                <a:ea typeface="Aptos"/>
+                <a:cs typeface="Aptos"/>
+              </a:defRPr>
+            </a:pPr>
+            <a:r>
+              <a:rPr sz="2100" b="0">
+                <a:solidFill>
+                  <a:srgbClr val="172B45"/>
+                </a:solidFill>
+                <a:latin typeface="Aptos"/>
+                <a:ea typeface="Aptos"/>
+                <a:cs typeface="Aptos"/>
+              </a:rPr>
+              <a:t>Experience dominates the current salary models, with only a modest advantage for Random Forest.</a:t>
+            </a:r>
+          </a:p>
+        </p:txBody>
+      </p:sp>
+      <p:sp>
+        <p:nvSpPr>
+          <p:cNvPr id="5" name="Rectangle 4">
+            <a:extLst>
+              <a:ext uri="{FF2B5EF4-FFF2-40B4-BE49-F238E27FC236}">
+                <a16:creationId xmlns:a16="http://schemas.microsoft.com/office/drawing/2014/main" id="{7DC9141E-1C59-4BC2-9595-D1BBCC1F2A6B}"/>
+              </a:ext>
+            </a:extLst>
+          </p:cNvPr>
+          <p:cNvSpPr>
+            <a:spLocks noGrp="1"/>
+          </p:cNvSpPr>
+          <p:nvPr/>
+        </p:nvSpPr>
+        <p:spPr>
+          <a:xfrm>
+            <a:off x="762000" y="3571875"/>
+            <a:ext cx="10572750" cy="857250"/>
+          </a:xfrm>
+          <a:prstGeom prst="rect">
+            <a:avLst/>
+          </a:prstGeom>
+          <a:noFill/>
+          <a:ln w="0">
+            <a:noFill/>
+          </a:ln>
+        </p:spPr>
+        <p:txBody>
+          <a:bodyPr>
+            <a:noAutofit/>
+          </a:bodyPr>
+          <a:lstStyle/>
+          <a:p>
+            <a:pPr>
+              <a:defRPr sz="2100" b="0">
+                <a:solidFill>
+                  <a:srgbClr val="172B45"/>
+                </a:solidFill>
+                <a:latin typeface="Aptos"/>
+                <a:ea typeface="Aptos"/>
+                <a:cs typeface="Aptos"/>
+              </a:defRPr>
+            </a:pPr>
+            <a:r>
+              <a:rPr sz="2100" b="0">
+                <a:solidFill>
+                  <a:srgbClr val="172B45"/>
+                </a:solidFill>
+                <a:latin typeface="Aptos"/>
+                <a:ea typeface="Aptos"/>
+                <a:cs typeface="Aptos"/>
+              </a:rPr>
+              <a:t>Salary results remain provisional. Currency conversion and country labels need correction before compensation planning.</a:t>
+            </a:r>
+          </a:p>
+        </p:txBody>
+      </p:sp>
+    </p:spTree>
+    <p:extLst>
+      <p:ext uri="{BB962C8B-B14F-4D97-AF65-F5344CB8AC3E}">
+        <p14:creationId xmlns:p14="http://schemas.microsoft.com/office/powerpoint/2010/main" val="914607489"/>
+      </p:ext>
+    </p:extLst>
+  </p:cSld>
+  <p:clrMapOvr>
+    <a:masterClrMapping/>
+  </p:clrMapOvr>
+</p:sld>
+</file>
+
+<file path=ppt/slides/slide3.xml><?xml version="1.0" encoding="utf-8"?>
+<p:sld xmlns:a="http://schemas.openxmlformats.org/drawingml/2006/main" xmlns:r="http://schemas.openxmlformats.org/officeDocument/2006/relationships" xmlns:p="http://schemas.openxmlformats.org/presentationml/2006/main">
+  <p:cSld>
+    <p:bg>
+      <p:bgPr>
+        <a:solidFill>
+          <a:srgbClr val="FFFFFF"/>
+        </a:solidFill>
+        <a:effectLst/>
+      </p:bgPr>
+    </p:bg>
+    <p:spTree>
+      <p:nvGrpSpPr>
+        <p:cNvPr id="1" name=""/>
+        <p:cNvGrpSpPr/>
+        <p:nvPr/>
+      </p:nvGrpSpPr>
+      <p:grpSpPr>
+        <a:xfrm>
+          <a:off x="0" y="0"/>
+          <a:ext cx="0" cy="0"/>
+          <a:chOff x="0" y="0"/>
+          <a:chExt cx="0" cy="0"/>
+        </a:xfrm>
+      </p:grpSpPr>
+      <p:sp>
+        <p:nvSpPr>
+          <p:cNvPr id="5" name="Rectangle 4">
+            <a:extLst>
+              <a:ext uri="{FF2B5EF4-FFF2-40B4-BE49-F238E27FC236}">
+                <a16:creationId xmlns:a16="http://schemas.microsoft.com/office/drawing/2014/main" id="{C92000DF-CA41-4D28-95C9-578EB291F23E}"/>
+              </a:ext>
+            </a:extLst>
+          </p:cNvPr>
+          <p:cNvSpPr>
+            <a:spLocks noGrp="1"/>
+          </p:cNvSpPr>
+          <p:nvPr/>
+        </p:nvSpPr>
+        <p:spPr>
+          <a:xfrm>
+            <a:off x="666750" y="428625"/>
+            <a:ext cx="10858500" cy="857250"/>
+          </a:xfrm>
+          <a:prstGeom prst="rect">
+            <a:avLst/>
+          </a:prstGeom>
+          <a:noFill/>
+          <a:ln w="0">
+            <a:noFill/>
+          </a:ln>
+        </p:spPr>
+        <p:txBody>
+          <a:bodyPr>
+            <a:noAutofit/>
+          </a:bodyPr>
+          <a:lstStyle/>
+          <a:p>
+            <a:pPr>
+              <a:defRPr sz="3150" b="1">
+                <a:solidFill>
+                  <a:srgbClr val="172B45"/>
+                </a:solidFill>
+                <a:latin typeface="Aptos"/>
+                <a:ea typeface="Aptos"/>
+                <a:cs typeface="Aptos"/>
+              </a:defRPr>
+            </a:pPr>
+            <a:r>
+              <a:rPr sz="3150" b="1">
+                <a:solidFill>
+                  <a:srgbClr val="172B45"/>
+                </a:solidFill>
+                <a:latin typeface="Aptos"/>
+                <a:ea typeface="Aptos"/>
+                <a:cs typeface="Aptos"/>
+              </a:rPr>
+              <a:t>Evidence behind the findings</a:t>
+            </a:r>
+          </a:p>
+        </p:txBody>
+      </p:sp>
+      <p:sp>
+        <p:nvSpPr>
+          <p:cNvPr id="2" name="Rectangle 1">
+            <a:extLst>
+              <a:ext uri="{FF2B5EF4-FFF2-40B4-BE49-F238E27FC236}">
+                <a16:creationId xmlns:a16="http://schemas.microsoft.com/office/drawing/2014/main" id="{74D489C7-6DFB-43D2-97DD-AB7E5FAF0B4F}"/>
+              </a:ext>
+            </a:extLst>
+          </p:cNvPr>
+          <p:cNvSpPr>
+            <a:spLocks noGrp="1"/>
+          </p:cNvSpPr>
+          <p:nvPr/>
+        </p:nvSpPr>
+        <p:spPr>
+          <a:xfrm>
+            <a:off x="11334750" y="6381750"/>
+            <a:ext cx="381000" cy="238125"/>
+          </a:xfrm>
+          <a:prstGeom prst="rect">
+            <a:avLst/>
+          </a:prstGeom>
+          <a:noFill/>
+          <a:ln w="0">
+            <a:noFill/>
+          </a:ln>
+        </p:spPr>
+        <p:txBody>
+          <a:bodyPr>
+            <a:noAutofit/>
+          </a:bodyPr>
+          <a:lstStyle/>
+          <a:p>
+            <a:pPr>
+              <a:defRPr sz="1200" b="0">
+                <a:solidFill>
+                  <a:srgbClr val="687887"/>
+                </a:solidFill>
+                <a:latin typeface="Aptos"/>
+                <a:ea typeface="Aptos"/>
+                <a:cs typeface="Aptos"/>
+              </a:defRPr>
+            </a:pPr>
+            <a:r>
+              <a:rPr sz="1200" b="0">
+                <a:solidFill>
+                  <a:srgbClr val="687887"/>
+                </a:solidFill>
+                <a:latin typeface="Aptos"/>
+                <a:ea typeface="Aptos"/>
+                <a:cs typeface="Aptos"/>
+              </a:rPr>
+              <a:t>3</a:t>
+            </a:r>
+          </a:p>
+        </p:txBody>
+      </p:sp>
+      <p:graphicFrame>
+        <p:nvGraphicFramePr>
+          <p:cNvPr id="7" name="Table 6"/>
+          <p:cNvGraphicFramePr/>
+          <p:nvPr/>
+        </p:nvGraphicFramePr>
+        <p:xfrm>
+          <a:off x="762000" y="1524000"/>
+          <a:ext cx="10668000" cy="3143252"/>
+        </p:xfrm>
+        <a:graphic>
+          <a:graphicData uri="http://schemas.openxmlformats.org/drawingml/2006/table">
+            <a:tbl>
+              <a:tblPr/>
+              <a:tblGrid>
+                <a:gridCol w="3905250">
+                  <a:extLst>
+                    <a:ext uri="{9D8B030D-6E8A-4147-A177-3AD203B41FA5}">
+                      <a16:colId xmlns:a16="http://schemas.microsoft.com/office/drawing/2014/main" val="20000"/>
+                    </a:ext>
+                  </a:extLst>
+                </a:gridCol>
+                <a:gridCol w="6762750">
+                  <a:extLst>
+                    <a:ext uri="{9D8B030D-6E8A-4147-A177-3AD203B41FA5}">
+                      <a16:colId xmlns:a16="http://schemas.microsoft.com/office/drawing/2014/main" val="20001"/>
+                    </a:ext>
+                  </a:extLst>
+                </a:gridCol>
+              </a:tblGrid>
+              <a:tr h="785813">
+                <a:tc>
+                  <a:txBody>
+                    <a:bodyPr/>
+                    <a:lstStyle/>
+                    <a:p>
+                      <a:r>
+                        <a:rPr sz="1950" b="1">
+                          <a:solidFill>
+                            <a:srgbClr val="FFFFFF"/>
+                          </a:solidFill>
+                          <a:latin typeface="Aptos"/>
+                          <a:ea typeface="Aptos"/>
+                          <a:cs typeface="Aptos"/>
+                        </a:rPr>
+                        <a:t>Analysis scope</a:t>
+                      </a:r>
+                    </a:p>
+                  </a:txBody>
+                  <a:tcPr>
+                    <a:solidFill>
+                      <a:srgbClr val="172B45"/>
+                    </a:solidFill>
+                  </a:tcPr>
+                </a:tc>
+                <a:tc>
+                  <a:txBody>
+                    <a:bodyPr/>
+                    <a:lstStyle/>
+                    <a:p>
+                      <a:r>
+                        <a:rPr sz="1950" b="1">
+                          <a:solidFill>
+                            <a:srgbClr val="FFFFFF"/>
+                          </a:solidFill>
+                          <a:latin typeface="Aptos"/>
+                          <a:ea typeface="Aptos"/>
+                          <a:cs typeface="Aptos"/>
+                        </a:rPr>
+                        <a:t>What it covers</a:t>
+                      </a:r>
+                    </a:p>
+                  </a:txBody>
+                  <a:tcPr>
+                    <a:solidFill>
+                      <a:srgbClr val="172B45"/>
+                    </a:solidFill>
+                  </a:tcPr>
+                </a:tc>
+                <a:extLst>
+                  <a:ext uri="{0D108BD9-81ED-4DB2-BD59-A6C34878D82A}">
+                    <a16:rowId xmlns:a16="http://schemas.microsoft.com/office/drawing/2014/main" val="10000"/>
+                  </a:ext>
+                </a:extLst>
+              </a:tr>
+              <a:tr h="785813">
+                <a:tc>
+                  <a:txBody>
+                    <a:bodyPr/>
+                    <a:lstStyle/>
+                    <a:p>
+                      <a:r>
+                        <a:rPr sz="1950" b="0">
+                          <a:solidFill>
+                            <a:srgbClr val="172B45"/>
+                          </a:solidFill>
+                          <a:latin typeface="Aptos"/>
+                          <a:ea typeface="Aptos"/>
+                          <a:cs typeface="Aptos"/>
+                        </a:rPr>
+                        <a:t>8,766 job postings</a:t>
+                      </a:r>
+                    </a:p>
+                  </a:txBody>
+                  <a:tcPr>
+                    <a:solidFill>
+                      <a:srgbClr val="F0F4F8"/>
+                    </a:solidFill>
+                  </a:tcPr>
+                </a:tc>
+                <a:tc>
+                  <a:txBody>
+                    <a:bodyPr/>
+                    <a:lstStyle/>
+                    <a:p>
+                      <a:r>
+                        <a:rPr sz="1950" b="0">
+                          <a:solidFill>
+                            <a:srgbClr val="172B45"/>
+                          </a:solidFill>
+                          <a:latin typeface="Aptos"/>
+                          <a:ea typeface="Aptos"/>
+                          <a:cs typeface="Aptos"/>
+                        </a:rPr>
+                        <a:t>4,370 United States and 4,396 Canada</a:t>
+                      </a:r>
+                    </a:p>
+                  </a:txBody>
+                  <a:tcPr>
+                    <a:solidFill>
+                      <a:srgbClr val="F0F4F8"/>
+                    </a:solidFill>
+                  </a:tcPr>
+                </a:tc>
+                <a:extLst>
+                  <a:ext uri="{0D108BD9-81ED-4DB2-BD59-A6C34878D82A}">
+                    <a16:rowId xmlns:a16="http://schemas.microsoft.com/office/drawing/2014/main" val="10001"/>
+                  </a:ext>
+                </a:extLst>
+              </a:tr>
+              <a:tr h="785813">
+                <a:tc>
+                  <a:txBody>
+                    <a:bodyPr/>
+                    <a:lstStyle/>
+                    <a:p>
+                      <a:r>
+                        <a:rPr sz="1950" b="0">
+                          <a:solidFill>
+                            <a:srgbClr val="172B45"/>
+                          </a:solidFill>
+                          <a:latin typeface="Aptos"/>
+                          <a:ea typeface="Aptos"/>
+                          <a:cs typeface="Aptos"/>
+                        </a:rPr>
+                        <a:t>22 source variables</a:t>
+                      </a:r>
+                    </a:p>
+                  </a:txBody>
+                  <a:tcPr>
+                    <a:solidFill>
+                      <a:srgbClr val="FFFFFF"/>
+                    </a:solidFill>
+                  </a:tcPr>
+                </a:tc>
+                <a:tc>
+                  <a:txBody>
+                    <a:bodyPr/>
+                    <a:lstStyle/>
+                    <a:p>
+                      <a:r>
+                        <a:rPr sz="1950" b="0">
+                          <a:solidFill>
+                            <a:srgbClr val="172B45"/>
+                          </a:solidFill>
+                          <a:latin typeface="Aptos"/>
+                          <a:ea typeface="Aptos"/>
+                          <a:cs typeface="Aptos"/>
+                        </a:rPr>
+                        <a:t>Skills, experience, compensation, and job characteristics</a:t>
+                      </a:r>
+                    </a:p>
+                  </a:txBody>
+                  <a:tcPr>
+                    <a:solidFill>
+                      <a:srgbClr val="FFFFFF"/>
+                    </a:solidFill>
+                  </a:tcPr>
+                </a:tc>
+                <a:extLst>
+                  <a:ext uri="{0D108BD9-81ED-4DB2-BD59-A6C34878D82A}">
+                    <a16:rowId xmlns:a16="http://schemas.microsoft.com/office/drawing/2014/main" val="10002"/>
+                  </a:ext>
+                </a:extLst>
+              </a:tr>
+              <a:tr h="785813">
+                <a:tc>
+                  <a:txBody>
+                    <a:bodyPr/>
+                    <a:lstStyle/>
+                    <a:p>
+                      <a:r>
+                        <a:rPr sz="1950" b="0">
+                          <a:solidFill>
+                            <a:srgbClr val="172B45"/>
+                          </a:solidFill>
+                          <a:latin typeface="Aptos"/>
+                          <a:ea typeface="Aptos"/>
+                          <a:cs typeface="Aptos"/>
+                        </a:rPr>
+                        <a:t>19 frequently listed titles</a:t>
+                      </a:r>
+                    </a:p>
+                  </a:txBody>
+                  <a:tcPr>
+                    <a:solidFill>
+                      <a:srgbClr val="F0F4F8"/>
+                    </a:solidFill>
+                  </a:tcPr>
+                </a:tc>
+                <a:tc>
+                  <a:txBody>
+                    <a:bodyPr/>
+                    <a:lstStyle/>
+                    <a:p>
+                      <a:r>
+                        <a:rPr sz="1950" b="0">
+                          <a:solidFill>
+                            <a:srgbClr val="172B45"/>
+                          </a:solidFill>
+                          <a:latin typeface="Aptos"/>
+                          <a:ea typeface="Aptos"/>
+                          <a:cs typeface="Aptos"/>
+                        </a:rPr>
+                        <a:t>8,741 postings for detailed title and skill comparisons</a:t>
+                      </a:r>
+                    </a:p>
+                  </a:txBody>
+                  <a:tcPr>
+                    <a:solidFill>
+                      <a:srgbClr val="F0F4F8"/>
+                    </a:solidFill>
+                  </a:tcPr>
+                </a:tc>
+                <a:extLst>
+                  <a:ext uri="{0D108BD9-81ED-4DB2-BD59-A6C34878D82A}">
+                    <a16:rowId xmlns:a16="http://schemas.microsoft.com/office/drawing/2014/main" val="10003"/>
+                  </a:ext>
+                </a:extLst>
+              </a:tr>
+            </a:tbl>
+          </a:graphicData>
+        </a:graphic>
+      </p:graphicFrame>
+      <p:sp>
+        <p:nvSpPr>
+          <p:cNvPr id="4" name="Rectangle 3">
+            <a:extLst>
+              <a:ext uri="{FF2B5EF4-FFF2-40B4-BE49-F238E27FC236}">
+                <a16:creationId xmlns:a16="http://schemas.microsoft.com/office/drawing/2014/main" id="{B8A1122F-8734-47EB-9531-1A995FC41105}"/>
+              </a:ext>
+            </a:extLst>
+          </p:cNvPr>
+          <p:cNvSpPr>
+            <a:spLocks noGrp="1"/>
+          </p:cNvSpPr>
+          <p:nvPr/>
+        </p:nvSpPr>
+        <p:spPr>
+          <a:xfrm>
+            <a:off x="762000" y="5867400"/>
+            <a:ext cx="10477500" cy="447675"/>
+          </a:xfrm>
+          <a:prstGeom prst="rect">
+            <a:avLst/>
+          </a:prstGeom>
+          <a:noFill/>
+          <a:ln w="0">
+            <a:noFill/>
+          </a:ln>
+        </p:spPr>
+        <p:txBody>
+          <a:bodyPr>
+            <a:noAutofit/>
+          </a:bodyPr>
+          <a:lstStyle/>
+          <a:p>
+            <a:pPr>
+              <a:defRPr sz="1350" b="0">
+                <a:solidFill>
+                  <a:srgbClr val="687887"/>
+                </a:solidFill>
+                <a:latin typeface="Aptos"/>
+                <a:ea typeface="Aptos"/>
+                <a:cs typeface="Aptos"/>
+              </a:defRPr>
+            </a:pPr>
+            <a:r>
+              <a:rPr sz="1350" b="0">
+                <a:solidFill>
+                  <a:srgbClr val="687887"/>
+                </a:solidFill>
+                <a:latin typeface="Aptos"/>
+                <a:ea typeface="Aptos"/>
+                <a:cs typeface="Aptos"/>
+              </a:rPr>
+              <a:t>Source: AI Jobs Dataset 2026 via KaggleHub. Sample patterns do not estimate the entire AI labor market.</a:t>
+            </a:r>
+          </a:p>
+        </p:txBody>
+      </p:sp>
+    </p:spTree>
+    <p:extLst>
+      <p:ext uri="{BB962C8B-B14F-4D97-AF65-F5344CB8AC3E}">
+        <p14:creationId xmlns:p14="http://schemas.microsoft.com/office/powerpoint/2010/main" val="1387911222"/>
+      </p:ext>
+    </p:extLst>
+  </p:cSld>
+  <p:clrMapOvr>
+    <a:masterClrMapping/>
+  </p:clrMapOvr>
+</p:sld>
+</file>
+
+<file path=ppt/slides/slide4.xml><?xml version="1.0" encoding="utf-8"?>
+<p:sld xmlns:a="http://schemas.openxmlformats.org/drawingml/2006/main" xmlns:r="http://schemas.openxmlformats.org/officeDocument/2006/relationships" xmlns:p="http://schemas.openxmlformats.org/presentationml/2006/main">
+  <p:cSld>
+    <p:bg>
+      <p:bgPr>
+        <a:solidFill>
+          <a:srgbClr val="FFFFFF"/>
+        </a:solidFill>
+        <a:effectLst/>
+      </p:bgPr>
+    </p:bg>
+    <p:spTree>
+      <p:nvGrpSpPr>
+        <p:cNvPr id="1" name=""/>
+        <p:cNvGrpSpPr/>
+        <p:nvPr/>
+      </p:nvGrpSpPr>
+      <p:grpSpPr>
+        <a:xfrm>
+          <a:off x="0" y="0"/>
+          <a:ext cx="0" cy="0"/>
+          <a:chOff x="0" y="0"/>
+          <a:chExt cx="0" cy="0"/>
+        </a:xfrm>
+      </p:grpSpPr>
+      <p:sp>
+        <p:nvSpPr>
+          <p:cNvPr id="6" name="Rectangle 5">
+            <a:extLst>
+              <a:ext uri="{FF2B5EF4-FFF2-40B4-BE49-F238E27FC236}">
+                <a16:creationId xmlns:a16="http://schemas.microsoft.com/office/drawing/2014/main" id="{2DA3F644-CE0B-402B-B0DD-38111CA48D4A}"/>
+              </a:ext>
+            </a:extLst>
+          </p:cNvPr>
+          <p:cNvSpPr>
+            <a:spLocks noGrp="1"/>
+          </p:cNvSpPr>
+          <p:nvPr/>
+        </p:nvSpPr>
+        <p:spPr>
+          <a:xfrm>
+            <a:off x="666750" y="428625"/>
+            <a:ext cx="10858500" cy="857250"/>
+          </a:xfrm>
+          <a:prstGeom prst="rect">
+            <a:avLst/>
+          </a:prstGeom>
+          <a:noFill/>
+          <a:ln w="0">
+            <a:noFill/>
+          </a:ln>
+        </p:spPr>
+        <p:txBody>
+          <a:bodyPr>
+            <a:noAutofit/>
+          </a:bodyPr>
+          <a:lstStyle/>
+          <a:p>
+            <a:pPr>
+              <a:defRPr sz="3150" b="1">
+                <a:solidFill>
+                  <a:srgbClr val="172B45"/>
+                </a:solidFill>
+                <a:latin typeface="Aptos"/>
+                <a:ea typeface="Aptos"/>
+                <a:cs typeface="Aptos"/>
+              </a:defRPr>
+            </a:pPr>
+            <a:r>
+              <a:rPr sz="3150" b="1">
+                <a:solidFill>
+                  <a:srgbClr val="172B45"/>
+                </a:solidFill>
+                <a:latin typeface="Aptos"/>
+                <a:ea typeface="Aptos"/>
+                <a:cs typeface="Aptos"/>
+              </a:rPr>
+              <a:t>Specialization is a useful starting point for hiring</a:t>
+            </a:r>
+          </a:p>
+        </p:txBody>
+      </p:sp>
+      <p:sp>
+        <p:nvSpPr>
+          <p:cNvPr id="2" name="Rectangle 1">
+            <a:extLst>
+              <a:ext uri="{FF2B5EF4-FFF2-40B4-BE49-F238E27FC236}">
+                <a16:creationId xmlns:a16="http://schemas.microsoft.com/office/drawing/2014/main" id="{492D9C9F-7917-4546-9251-AE83065342E5}"/>
+              </a:ext>
+            </a:extLst>
+          </p:cNvPr>
+          <p:cNvSpPr>
+            <a:spLocks noGrp="1"/>
+          </p:cNvSpPr>
+          <p:nvPr/>
+        </p:nvSpPr>
+        <p:spPr>
+          <a:xfrm>
+            <a:off x="11334750" y="6381750"/>
+            <a:ext cx="381000" cy="238125"/>
+          </a:xfrm>
+          <a:prstGeom prst="rect">
+            <a:avLst/>
+          </a:prstGeom>
+          <a:noFill/>
+          <a:ln w="0">
+            <a:noFill/>
+          </a:ln>
+        </p:spPr>
+        <p:txBody>
+          <a:bodyPr>
+            <a:noAutofit/>
+          </a:bodyPr>
+          <a:lstStyle/>
+          <a:p>
+            <a:pPr>
+              <a:defRPr sz="1200" b="0">
+                <a:solidFill>
+                  <a:srgbClr val="687887"/>
+                </a:solidFill>
+                <a:latin typeface="Aptos"/>
+                <a:ea typeface="Aptos"/>
+                <a:cs typeface="Aptos"/>
+              </a:defRPr>
+            </a:pPr>
+            <a:r>
+              <a:rPr sz="1200" b="0">
+                <a:solidFill>
+                  <a:srgbClr val="687887"/>
+                </a:solidFill>
+                <a:latin typeface="Aptos"/>
+                <a:ea typeface="Aptos"/>
+                <a:cs typeface="Aptos"/>
+              </a:rPr>
+              <a:t>4</a:t>
+            </a:r>
+          </a:p>
+        </p:txBody>
+      </p:sp>
+      <p:graphicFrame>
+        <p:nvGraphicFramePr>
+          <p:cNvPr id="8" name="Table 7"/>
+          <p:cNvGraphicFramePr/>
+          <p:nvPr/>
+        </p:nvGraphicFramePr>
+        <p:xfrm>
+          <a:off x="762000" y="1476375"/>
+          <a:ext cx="10668000" cy="3429000"/>
+        </p:xfrm>
+        <a:graphic>
+          <a:graphicData uri="http://schemas.openxmlformats.org/drawingml/2006/table">
+            <a:tbl>
+              <a:tblPr/>
+              <a:tblGrid>
+                <a:gridCol w="2857500">
+                  <a:extLst>
+                    <a:ext uri="{9D8B030D-6E8A-4147-A177-3AD203B41FA5}">
+                      <a16:colId xmlns:a16="http://schemas.microsoft.com/office/drawing/2014/main" val="20000"/>
+                    </a:ext>
+                  </a:extLst>
+                </a:gridCol>
+                <a:gridCol w="3714750">
+                  <a:extLst>
+                    <a:ext uri="{9D8B030D-6E8A-4147-A177-3AD203B41FA5}">
+                      <a16:colId xmlns:a16="http://schemas.microsoft.com/office/drawing/2014/main" val="20001"/>
+                    </a:ext>
+                  </a:extLst>
+                </a:gridCol>
+                <a:gridCol w="4095750">
+                  <a:extLst>
+                    <a:ext uri="{9D8B030D-6E8A-4147-A177-3AD203B41FA5}">
+                      <a16:colId xmlns:a16="http://schemas.microsoft.com/office/drawing/2014/main" val="20002"/>
+                    </a:ext>
+                  </a:extLst>
+                </a:gridCol>
+              </a:tblGrid>
+              <a:tr h="685800">
+                <a:tc>
+                  <a:txBody>
+                    <a:bodyPr/>
+                    <a:lstStyle/>
+                    <a:p>
+                      <a:r>
+                        <a:rPr sz="1800" b="1">
+                          <a:solidFill>
+                            <a:srgbClr val="FFFFFF"/>
+                          </a:solidFill>
+                          <a:latin typeface="Aptos"/>
+                          <a:ea typeface="Aptos"/>
+                          <a:cs typeface="Aptos"/>
+                        </a:rPr>
+                        <a:t>Role family</a:t>
+                      </a:r>
+                    </a:p>
+                  </a:txBody>
+                  <a:tcPr>
+                    <a:solidFill>
+                      <a:srgbClr val="172B45"/>
+                    </a:solidFill>
+                  </a:tcPr>
+                </a:tc>
+                <a:tc>
+                  <a:txBody>
+                    <a:bodyPr/>
+                    <a:lstStyle/>
+                    <a:p>
+                      <a:r>
+                        <a:rPr sz="1800" b="1">
+                          <a:solidFill>
+                            <a:srgbClr val="FFFFFF"/>
+                          </a:solidFill>
+                          <a:latin typeface="Aptos"/>
+                          <a:ea typeface="Aptos"/>
+                          <a:cs typeface="Aptos"/>
+                        </a:rPr>
+                        <a:t>Technical focus</a:t>
+                      </a:r>
+                    </a:p>
+                  </a:txBody>
+                  <a:tcPr>
+                    <a:solidFill>
+                      <a:srgbClr val="172B45"/>
+                    </a:solidFill>
+                  </a:tcPr>
+                </a:tc>
+                <a:tc>
+                  <a:txBody>
+                    <a:bodyPr/>
+                    <a:lstStyle/>
+                    <a:p>
+                      <a:r>
+                        <a:rPr sz="1800" b="1">
+                          <a:solidFill>
+                            <a:srgbClr val="FFFFFF"/>
+                          </a:solidFill>
+                          <a:latin typeface="Aptos"/>
+                          <a:ea typeface="Aptos"/>
+                          <a:cs typeface="Aptos"/>
+                        </a:rPr>
+                        <a:t>Examples in the report</a:t>
+                      </a:r>
+                    </a:p>
+                  </a:txBody>
+                  <a:tcPr>
+                    <a:solidFill>
+                      <a:srgbClr val="172B45"/>
+                    </a:solidFill>
+                  </a:tcPr>
+                </a:tc>
+                <a:extLst>
+                  <a:ext uri="{0D108BD9-81ED-4DB2-BD59-A6C34878D82A}">
+                    <a16:rowId xmlns:a16="http://schemas.microsoft.com/office/drawing/2014/main" val="10000"/>
+                  </a:ext>
+                </a:extLst>
+              </a:tr>
+              <a:tr h="685800">
+                <a:tc>
+                  <a:txBody>
+                    <a:bodyPr/>
+                    <a:lstStyle/>
+                    <a:p>
+                      <a:r>
+                        <a:rPr sz="1800" b="0">
+                          <a:solidFill>
+                            <a:srgbClr val="172B45"/>
+                          </a:solidFill>
+                          <a:latin typeface="Aptos"/>
+                          <a:ea typeface="Aptos"/>
+                          <a:cs typeface="Aptos"/>
+                        </a:rPr>
+                        <a:t>Machine Learning</a:t>
+                      </a:r>
+                    </a:p>
+                  </a:txBody>
+                  <a:tcPr>
+                    <a:solidFill>
+                      <a:srgbClr val="F0F4F8"/>
+                    </a:solidFill>
+                  </a:tcPr>
+                </a:tc>
+                <a:tc>
+                  <a:txBody>
+                    <a:bodyPr/>
+                    <a:lstStyle/>
+                    <a:p>
+                      <a:r>
+                        <a:rPr sz="1800" b="0">
+                          <a:solidFill>
+                            <a:srgbClr val="172B45"/>
+                          </a:solidFill>
+                          <a:latin typeface="Aptos"/>
+                          <a:ea typeface="Aptos"/>
+                          <a:cs typeface="Aptos"/>
+                        </a:rPr>
+                        <a:t>Model development</a:t>
+                      </a:r>
+                    </a:p>
+                  </a:txBody>
+                  <a:tcPr>
+                    <a:solidFill>
+                      <a:srgbClr val="F0F4F8"/>
+                    </a:solidFill>
+                  </a:tcPr>
+                </a:tc>
+                <a:tc>
+                  <a:txBody>
+                    <a:bodyPr/>
+                    <a:lstStyle/>
+                    <a:p>
+                      <a:r>
+                        <a:rPr sz="1800" b="0">
+                          <a:solidFill>
+                            <a:srgbClr val="172B45"/>
+                          </a:solidFill>
+                          <a:latin typeface="Aptos"/>
+                          <a:ea typeface="Aptos"/>
+                          <a:cs typeface="Aptos"/>
+                        </a:rPr>
+                        <a:t>Feature engineering, XGBoost</a:t>
+                      </a:r>
+                    </a:p>
+                  </a:txBody>
+                  <a:tcPr>
+                    <a:solidFill>
+                      <a:srgbClr val="F0F4F8"/>
+                    </a:solidFill>
+                  </a:tcPr>
+                </a:tc>
+                <a:extLst>
+                  <a:ext uri="{0D108BD9-81ED-4DB2-BD59-A6C34878D82A}">
+                    <a16:rowId xmlns:a16="http://schemas.microsoft.com/office/drawing/2014/main" val="10001"/>
+                  </a:ext>
+                </a:extLst>
+              </a:tr>
+              <a:tr h="685800">
+                <a:tc>
+                  <a:txBody>
+                    <a:bodyPr/>
+                    <a:lstStyle/>
+                    <a:p>
+                      <a:r>
+                        <a:rPr sz="1800" b="0">
+                          <a:solidFill>
+                            <a:srgbClr val="172B45"/>
+                          </a:solidFill>
+                          <a:latin typeface="Aptos"/>
+                          <a:ea typeface="Aptos"/>
+                          <a:cs typeface="Aptos"/>
+                        </a:rPr>
+                        <a:t>Generative AI</a:t>
+                      </a:r>
+                    </a:p>
+                  </a:txBody>
+                  <a:tcPr>
+                    <a:solidFill>
+                      <a:srgbClr val="FFFFFF"/>
+                    </a:solidFill>
+                  </a:tcPr>
+                </a:tc>
+                <a:tc>
+                  <a:txBody>
+                    <a:bodyPr/>
+                    <a:lstStyle/>
+                    <a:p>
+                      <a:r>
+                        <a:rPr sz="1800" b="0">
+                          <a:solidFill>
+                            <a:srgbClr val="172B45"/>
+                          </a:solidFill>
+                          <a:latin typeface="Aptos"/>
+                          <a:ea typeface="Aptos"/>
+                          <a:cs typeface="Aptos"/>
+                        </a:rPr>
+                        <a:t>Applications using language models</a:t>
+                      </a:r>
+                    </a:p>
+                  </a:txBody>
+                  <a:tcPr>
+                    <a:solidFill>
+                      <a:srgbClr val="FFFFFF"/>
+                    </a:solidFill>
+                  </a:tcPr>
+                </a:tc>
+                <a:tc>
+                  <a:txBody>
+                    <a:bodyPr/>
+                    <a:lstStyle/>
+                    <a:p>
+                      <a:r>
+                        <a:rPr sz="1800" b="0">
+                          <a:solidFill>
+                            <a:srgbClr val="172B45"/>
+                          </a:solidFill>
+                          <a:latin typeface="Aptos"/>
+                          <a:ea typeface="Aptos"/>
+                          <a:cs typeface="Aptos"/>
+                        </a:rPr>
+                        <a:t>RAG, vector databases, fine-tuning</a:t>
+                      </a:r>
+                    </a:p>
+                  </a:txBody>
+                  <a:tcPr>
+                    <a:solidFill>
+                      <a:srgbClr val="FFFFFF"/>
+                    </a:solidFill>
+                  </a:tcPr>
+                </a:tc>
+                <a:extLst>
+                  <a:ext uri="{0D108BD9-81ED-4DB2-BD59-A6C34878D82A}">
+                    <a16:rowId xmlns:a16="http://schemas.microsoft.com/office/drawing/2014/main" val="10002"/>
+                  </a:ext>
+                </a:extLst>
+              </a:tr>
+              <a:tr h="685800">
+                <a:tc>
+                  <a:txBody>
+                    <a:bodyPr/>
+                    <a:lstStyle/>
+                    <a:p>
+                      <a:r>
+                        <a:rPr sz="1800" b="0">
+                          <a:solidFill>
+                            <a:srgbClr val="172B45"/>
+                          </a:solidFill>
+                          <a:latin typeface="Aptos"/>
+                          <a:ea typeface="Aptos"/>
+                          <a:cs typeface="Aptos"/>
+                        </a:rPr>
+                        <a:t>MLOps</a:t>
+                      </a:r>
+                    </a:p>
+                  </a:txBody>
+                  <a:tcPr>
+                    <a:solidFill>
+                      <a:srgbClr val="F0F4F8"/>
+                    </a:solidFill>
+                  </a:tcPr>
+                </a:tc>
+                <a:tc>
+                  <a:txBody>
+                    <a:bodyPr/>
+                    <a:lstStyle/>
+                    <a:p>
+                      <a:r>
+                        <a:rPr sz="1800" b="0">
+                          <a:solidFill>
+                            <a:srgbClr val="172B45"/>
+                          </a:solidFill>
+                          <a:latin typeface="Aptos"/>
+                          <a:ea typeface="Aptos"/>
+                          <a:cs typeface="Aptos"/>
+                        </a:rPr>
+                        <a:t>Deployment and operations</a:t>
+                      </a:r>
+                    </a:p>
+                  </a:txBody>
+                  <a:tcPr>
+                    <a:solidFill>
+                      <a:srgbClr val="F0F4F8"/>
+                    </a:solidFill>
+                  </a:tcPr>
+                </a:tc>
+                <a:tc>
+                  <a:txBody>
+                    <a:bodyPr/>
+                    <a:lstStyle/>
+                    <a:p>
+                      <a:r>
+                        <a:rPr sz="1800" b="0">
+                          <a:solidFill>
+                            <a:srgbClr val="172B45"/>
+                          </a:solidFill>
+                          <a:latin typeface="Aptos"/>
+                          <a:ea typeface="Aptos"/>
+                          <a:cs typeface="Aptos"/>
+                        </a:rPr>
+                        <a:t>Monitoring, Kubernetes, Terraform</a:t>
+                      </a:r>
+                    </a:p>
+                  </a:txBody>
+                  <a:tcPr>
+                    <a:solidFill>
+                      <a:srgbClr val="F0F4F8"/>
+                    </a:solidFill>
+                  </a:tcPr>
+                </a:tc>
+                <a:extLst>
+                  <a:ext uri="{0D108BD9-81ED-4DB2-BD59-A6C34878D82A}">
+                    <a16:rowId xmlns:a16="http://schemas.microsoft.com/office/drawing/2014/main" val="10003"/>
+                  </a:ext>
+                </a:extLst>
+              </a:tr>
+              <a:tr h="685800">
+                <a:tc>
+                  <a:txBody>
+                    <a:bodyPr/>
+                    <a:lstStyle/>
+                    <a:p>
+                      <a:r>
+                        <a:rPr sz="1800" b="0">
+                          <a:solidFill>
+                            <a:srgbClr val="172B45"/>
+                          </a:solidFill>
+                          <a:latin typeface="Aptos"/>
+                          <a:ea typeface="Aptos"/>
+                          <a:cs typeface="Aptos"/>
+                        </a:rPr>
+                        <a:t>Computer Vision</a:t>
+                      </a:r>
+                    </a:p>
+                  </a:txBody>
+                  <a:tcPr>
+                    <a:solidFill>
+                      <a:srgbClr val="FFFFFF"/>
+                    </a:solidFill>
+                  </a:tcPr>
+                </a:tc>
+                <a:tc>
+                  <a:txBody>
+                    <a:bodyPr/>
+                    <a:lstStyle/>
+                    <a:p>
+                      <a:r>
+                        <a:rPr sz="1800" b="0">
+                          <a:solidFill>
+                            <a:srgbClr val="172B45"/>
+                          </a:solidFill>
+                          <a:latin typeface="Aptos"/>
+                          <a:ea typeface="Aptos"/>
+                          <a:cs typeface="Aptos"/>
+                        </a:rPr>
+                        <a:t>Image understanding</a:t>
+                      </a:r>
+                    </a:p>
+                  </a:txBody>
+                  <a:tcPr>
+                    <a:solidFill>
+                      <a:srgbClr val="FFFFFF"/>
+                    </a:solidFill>
+                  </a:tcPr>
+                </a:tc>
+                <a:tc>
+                  <a:txBody>
+                    <a:bodyPr/>
+                    <a:lstStyle/>
+                    <a:p>
+                      <a:r>
+                        <a:rPr sz="1800" b="0">
+                          <a:solidFill>
+                            <a:srgbClr val="172B45"/>
+                          </a:solidFill>
+                          <a:latin typeface="Aptos"/>
+                          <a:ea typeface="Aptos"/>
+                          <a:cs typeface="Aptos"/>
+                        </a:rPr>
+                        <a:t>OpenCV, OCR, YOLO</a:t>
+                      </a:r>
+                    </a:p>
+                  </a:txBody>
+                  <a:tcPr>
+                    <a:solidFill>
+                      <a:srgbClr val="FFFFFF"/>
+                    </a:solidFill>
+                  </a:tcPr>
+                </a:tc>
+                <a:extLst>
+                  <a:ext uri="{0D108BD9-81ED-4DB2-BD59-A6C34878D82A}">
+                    <a16:rowId xmlns:a16="http://schemas.microsoft.com/office/drawing/2014/main" val="10004"/>
+                  </a:ext>
+                </a:extLst>
+              </a:tr>
+            </a:tbl>
+          </a:graphicData>
+        </a:graphic>
+      </p:graphicFrame>
+      <p:sp>
+        <p:nvSpPr>
+          <p:cNvPr id="4" name="Rectangle 3">
+            <a:extLst>
+              <a:ext uri="{FF2B5EF4-FFF2-40B4-BE49-F238E27FC236}">
+                <a16:creationId xmlns:a16="http://schemas.microsoft.com/office/drawing/2014/main" id="{A2A5B1EC-C73C-4016-8B4C-0097E49F746A}"/>
+              </a:ext>
+            </a:extLst>
+          </p:cNvPr>
+          <p:cNvSpPr>
+            <a:spLocks noGrp="1"/>
+          </p:cNvSpPr>
+          <p:nvPr/>
+        </p:nvSpPr>
+        <p:spPr>
+          <a:xfrm>
+            <a:off x="762000" y="5191125"/>
+            <a:ext cx="10572750" cy="666750"/>
+          </a:xfrm>
+          <a:prstGeom prst="rect">
+            <a:avLst/>
+          </a:prstGeom>
+          <a:noFill/>
+          <a:ln w="0">
+            <a:noFill/>
+          </a:ln>
+        </p:spPr>
+        <p:txBody>
+          <a:bodyPr>
+            <a:noAutofit/>
+          </a:bodyPr>
+          <a:lstStyle/>
+          <a:p>
+            <a:pPr>
+              <a:defRPr sz="2100" b="0">
+                <a:solidFill>
+                  <a:srgbClr val="172B45"/>
+                </a:solidFill>
+                <a:latin typeface="Aptos"/>
+                <a:ea typeface="Aptos"/>
+                <a:cs typeface="Aptos"/>
+              </a:defRPr>
+            </a:pPr>
+            <a:r>
+              <a:rPr sz="2100" b="0">
+                <a:solidFill>
+                  <a:srgbClr val="172B45"/>
+                </a:solidFill>
+                <a:latin typeface="Aptos"/>
+                <a:ea typeface="Aptos"/>
+                <a:cs typeface="Aptos"/>
+              </a:rPr>
+              <a:t>Business implication: define the work and required capabilities before choosing the job title.</a:t>
+            </a:r>
+          </a:p>
+        </p:txBody>
+      </p:sp>
+      <p:sp>
+        <p:nvSpPr>
+          <p:cNvPr id="5" name="Rectangle 4">
+            <a:extLst>
+              <a:ext uri="{FF2B5EF4-FFF2-40B4-BE49-F238E27FC236}">
+                <a16:creationId xmlns:a16="http://schemas.microsoft.com/office/drawing/2014/main" id="{567E2813-192B-4780-8DB4-A3E751810055}"/>
+              </a:ext>
+            </a:extLst>
+          </p:cNvPr>
+          <p:cNvSpPr>
+            <a:spLocks noGrp="1"/>
+          </p:cNvSpPr>
+          <p:nvPr/>
+        </p:nvSpPr>
+        <p:spPr>
+          <a:xfrm>
+            <a:off x="762000" y="5867400"/>
+            <a:ext cx="10477500" cy="447675"/>
+          </a:xfrm>
+          <a:prstGeom prst="rect">
+            <a:avLst/>
+          </a:prstGeom>
+          <a:noFill/>
+          <a:ln w="0">
+            <a:noFill/>
+          </a:ln>
+        </p:spPr>
+        <p:txBody>
+          <a:bodyPr>
+            <a:noAutofit/>
+          </a:bodyPr>
+          <a:lstStyle/>
+          <a:p>
+            <a:pPr>
+              <a:defRPr sz="1350" b="0">
+                <a:solidFill>
+                  <a:srgbClr val="687887"/>
+                </a:solidFill>
+                <a:latin typeface="Aptos"/>
+                <a:ea typeface="Aptos"/>
+                <a:cs typeface="Aptos"/>
+              </a:defRPr>
+            </a:pPr>
+            <a:r>
+              <a:rPr sz="1350" b="0">
+                <a:solidFill>
+                  <a:srgbClr val="687887"/>
+                </a:solidFill>
+                <a:latin typeface="Aptos"/>
+                <a:ea typeface="Aptos"/>
+                <a:cs typeface="Aptos"/>
+              </a:rPr>
+              <a:t>Illustrative role families. The appendix includes all seven specialization profiles.</a:t>
+            </a:r>
+          </a:p>
+        </p:txBody>
+      </p:sp>
+    </p:spTree>
+    <p:extLst>
+      <p:ext uri="{BB962C8B-B14F-4D97-AF65-F5344CB8AC3E}">
+        <p14:creationId xmlns:p14="http://schemas.microsoft.com/office/powerpoint/2010/main" val="1704334850"/>
+      </p:ext>
+    </p:extLst>
+  </p:cSld>
+  <p:clrMapOvr>
+    <a:masterClrMapping/>
+  </p:clrMapOvr>
+</p:sld>
+</file>
+
+<file path=ppt/slides/slide5.xml><?xml version="1.0" encoding="utf-8"?>
+<p:sld xmlns:a="http://schemas.openxmlformats.org/drawingml/2006/main" xmlns:r="http://schemas.openxmlformats.org/officeDocument/2006/relationships" xmlns:p="http://schemas.openxmlformats.org/presentationml/2006/main">
+  <p:cSld>
+    <p:bg>
+      <p:bgPr>
+        <a:solidFill>
+          <a:srgbClr val="FFFFFF"/>
+        </a:solidFill>
+        <a:effectLst/>
+      </p:bgPr>
+    </p:bg>
+    <p:spTree>
+      <p:nvGrpSpPr>
+        <p:cNvPr id="1" name=""/>
+        <p:cNvGrpSpPr/>
+        <p:nvPr/>
+      </p:nvGrpSpPr>
+      <p:grpSpPr>
+        <a:xfrm>
+          <a:off x="0" y="0"/>
+          <a:ext cx="0" cy="0"/>
+          <a:chOff x="0" y="0"/>
+          <a:chExt cx="0" cy="0"/>
+        </a:xfrm>
+      </p:grpSpPr>
+      <p:sp>
+        <p:nvSpPr>
+          <p:cNvPr id="9" name="Rectangle 8">
+            <a:extLst>
+              <a:ext uri="{FF2B5EF4-FFF2-40B4-BE49-F238E27FC236}">
+                <a16:creationId xmlns:a16="http://schemas.microsoft.com/office/drawing/2014/main" id="{07919708-80D7-46F4-AFDE-90C908B7BF3E}"/>
+              </a:ext>
+            </a:extLst>
+          </p:cNvPr>
+          <p:cNvSpPr>
+            <a:spLocks noGrp="1"/>
+          </p:cNvSpPr>
+          <p:nvPr/>
+        </p:nvSpPr>
+        <p:spPr>
+          <a:xfrm>
+            <a:off x="666750" y="428625"/>
+            <a:ext cx="10858500" cy="857250"/>
+          </a:xfrm>
+          <a:prstGeom prst="rect">
+            <a:avLst/>
+          </a:prstGeom>
+          <a:noFill/>
+          <a:ln w="0">
+            <a:noFill/>
+          </a:ln>
+        </p:spPr>
+        <p:txBody>
+          <a:bodyPr>
+            <a:noAutofit/>
+          </a:bodyPr>
+          <a:lstStyle/>
+          <a:p>
+            <a:pPr>
+              <a:defRPr sz="3150" b="1">
+                <a:solidFill>
+                  <a:srgbClr val="172B45"/>
+                </a:solidFill>
+                <a:latin typeface="Aptos"/>
+                <a:ea typeface="Aptos"/>
+                <a:cs typeface="Aptos"/>
+              </a:defRPr>
+            </a:pPr>
+            <a:r>
+              <a:rPr sz="3150" b="1">
+                <a:solidFill>
+                  <a:srgbClr val="172B45"/>
+                </a:solidFill>
+                <a:latin typeface="Aptos"/>
+                <a:ea typeface="Aptos"/>
+                <a:cs typeface="Aptos"/>
+              </a:rPr>
+              <a:t>Common tools support a shared skills foundation</a:t>
+            </a:r>
+          </a:p>
+        </p:txBody>
+      </p:sp>
+      <p:sp>
+        <p:nvSpPr>
+          <p:cNvPr id="2" name="Rectangle 1">
+            <a:extLst>
+              <a:ext uri="{FF2B5EF4-FFF2-40B4-BE49-F238E27FC236}">
+                <a16:creationId xmlns:a16="http://schemas.microsoft.com/office/drawing/2014/main" id="{29914BE1-518B-44BB-B080-212243D5A4D3}"/>
+              </a:ext>
+            </a:extLst>
+          </p:cNvPr>
+          <p:cNvSpPr>
+            <a:spLocks noGrp="1"/>
+          </p:cNvSpPr>
+          <p:nvPr/>
+        </p:nvSpPr>
+        <p:spPr>
+          <a:xfrm>
+            <a:off x="11334750" y="6381750"/>
+            <a:ext cx="381000" cy="238125"/>
+          </a:xfrm>
+          <a:prstGeom prst="rect">
+            <a:avLst/>
+          </a:prstGeom>
+          <a:noFill/>
+          <a:ln w="0">
+            <a:noFill/>
+          </a:ln>
+        </p:spPr>
+        <p:txBody>
+          <a:bodyPr>
+            <a:noAutofit/>
+          </a:bodyPr>
+          <a:lstStyle/>
+          <a:p>
+            <a:pPr>
+              <a:defRPr sz="1200" b="0">
+                <a:solidFill>
+                  <a:srgbClr val="687887"/>
+                </a:solidFill>
+                <a:latin typeface="Aptos"/>
+                <a:ea typeface="Aptos"/>
+                <a:cs typeface="Aptos"/>
+              </a:defRPr>
+            </a:pPr>
+            <a:r>
+              <a:rPr sz="1200" b="0">
+                <a:solidFill>
+                  <a:srgbClr val="687887"/>
+                </a:solidFill>
+                <a:latin typeface="Aptos"/>
+                <a:ea typeface="Aptos"/>
+                <a:cs typeface="Aptos"/>
+              </a:rPr>
+              <a:t>5</a:t>
+            </a:r>
+          </a:p>
+        </p:txBody>
+      </p:sp>
+      <p:sp>
+        <p:nvSpPr>
+          <p:cNvPr id="3" name="Rectangle 2">
+            <a:extLst>
+              <a:ext uri="{FF2B5EF4-FFF2-40B4-BE49-F238E27FC236}">
+                <a16:creationId xmlns:a16="http://schemas.microsoft.com/office/drawing/2014/main" id="{8DC3438A-03AA-473D-9DB7-0073E5753674}"/>
+              </a:ext>
+            </a:extLst>
+          </p:cNvPr>
+          <p:cNvSpPr>
+            <a:spLocks noGrp="1"/>
+          </p:cNvSpPr>
+          <p:nvPr/>
+        </p:nvSpPr>
+        <p:spPr>
+          <a:xfrm>
+            <a:off x="762000" y="1619250"/>
+            <a:ext cx="4286250" cy="1047750"/>
+          </a:xfrm>
+          <a:prstGeom prst="rect">
+            <a:avLst/>
+          </a:prstGeom>
+          <a:noFill/>
+          <a:ln w="0">
+            <a:noFill/>
+          </a:ln>
+        </p:spPr>
+        <p:txBody>
+          <a:bodyPr>
+            <a:noAutofit/>
+          </a:bodyPr>
+          <a:lstStyle/>
+          <a:p>
+            <a:pPr>
+              <a:defRPr sz="6450" b="1">
+                <a:solidFill>
+                  <a:srgbClr val="275F96"/>
+                </a:solidFill>
+                <a:latin typeface="Aptos"/>
+                <a:ea typeface="Aptos"/>
+                <a:cs typeface="Aptos"/>
+              </a:defRPr>
+            </a:pPr>
+            <a:r>
+              <a:rPr sz="6450" b="1">
+                <a:solidFill>
+                  <a:srgbClr val="275F96"/>
+                </a:solidFill>
+                <a:latin typeface="Aptos"/>
+                <a:ea typeface="Aptos"/>
+                <a:cs typeface="Aptos"/>
+              </a:rPr>
+              <a:t>46%</a:t>
+            </a:r>
+          </a:p>
+        </p:txBody>
+      </p:sp>
+      <p:sp>
+        <p:nvSpPr>
+          <p:cNvPr id="4" name="Rectangle 3">
+            <a:extLst>
+              <a:ext uri="{FF2B5EF4-FFF2-40B4-BE49-F238E27FC236}">
+                <a16:creationId xmlns:a16="http://schemas.microsoft.com/office/drawing/2014/main" id="{A741049C-5D53-43AB-B537-A01DA1FF13A8}"/>
+              </a:ext>
+            </a:extLst>
+          </p:cNvPr>
+          <p:cNvSpPr>
+            <a:spLocks noGrp="1"/>
+          </p:cNvSpPr>
+          <p:nvPr/>
+        </p:nvSpPr>
+        <p:spPr>
+          <a:xfrm>
+            <a:off x="762000" y="2857500"/>
+            <a:ext cx="4572000" cy="857250"/>
+          </a:xfrm>
+          <a:prstGeom prst="rect">
+            <a:avLst/>
+          </a:prstGeom>
+          <a:noFill/>
+          <a:ln w="0">
+            <a:noFill/>
+          </a:ln>
+        </p:spPr>
+        <p:txBody>
+          <a:bodyPr>
+            <a:noAutofit/>
+          </a:bodyPr>
+          <a:lstStyle/>
+          <a:p>
+            <a:pPr>
+              <a:defRPr sz="2250" b="0">
+                <a:solidFill>
+                  <a:srgbClr val="172B45"/>
+                </a:solidFill>
+                <a:latin typeface="Aptos"/>
+                <a:ea typeface="Aptos"/>
+                <a:cs typeface="Aptos"/>
+              </a:defRPr>
+            </a:pPr>
+            <a:r>
+              <a:rPr sz="2250" b="0">
+                <a:solidFill>
+                  <a:srgbClr val="172B45"/>
+                </a:solidFill>
+                <a:latin typeface="Aptos"/>
+                <a:ea typeface="Aptos"/>
+                <a:cs typeface="Aptos"/>
+              </a:rPr>
+              <a:t>Pandas in the popular-title sample</a:t>
+            </a:r>
+          </a:p>
+        </p:txBody>
+      </p:sp>
+      <p:sp>
+        <p:nvSpPr>
+          <p:cNvPr id="5" name="Rectangle 4">
+            <a:extLst>
+              <a:ext uri="{FF2B5EF4-FFF2-40B4-BE49-F238E27FC236}">
+                <a16:creationId xmlns:a16="http://schemas.microsoft.com/office/drawing/2014/main" id="{754CC2FA-E612-41B0-8C48-C21A4CEAB106}"/>
+              </a:ext>
+            </a:extLst>
+          </p:cNvPr>
+          <p:cNvSpPr>
+            <a:spLocks noGrp="1"/>
+          </p:cNvSpPr>
+          <p:nvPr/>
+        </p:nvSpPr>
+        <p:spPr>
+          <a:xfrm>
+            <a:off x="6286500" y="1619250"/>
+            <a:ext cx="5048250" cy="1047750"/>
+          </a:xfrm>
+          <a:prstGeom prst="rect">
+            <a:avLst/>
+          </a:prstGeom>
+          <a:noFill/>
+          <a:ln w="0">
+            <a:noFill/>
+          </a:ln>
+        </p:spPr>
+        <p:txBody>
+          <a:bodyPr>
+            <a:noAutofit/>
+          </a:bodyPr>
+          <a:lstStyle/>
+          <a:p>
+            <a:pPr>
+              <a:defRPr sz="6450" b="1">
+                <a:solidFill>
+                  <a:srgbClr val="275F96"/>
+                </a:solidFill>
+                <a:latin typeface="Aptos"/>
+                <a:ea typeface="Aptos"/>
+                <a:cs typeface="Aptos"/>
+              </a:defRPr>
+            </a:pPr>
+            <a:r>
+              <a:rPr sz="6450" b="1">
+                <a:solidFill>
+                  <a:srgbClr val="275F96"/>
+                </a:solidFill>
+                <a:latin typeface="Aptos"/>
+                <a:ea typeface="Aptos"/>
+                <a:cs typeface="Aptos"/>
+              </a:rPr>
+              <a:t>39–40%</a:t>
+            </a:r>
+          </a:p>
+        </p:txBody>
+      </p:sp>
+      <p:sp>
+        <p:nvSpPr>
+          <p:cNvPr id="6" name="Rectangle 5">
+            <a:extLst>
+              <a:ext uri="{FF2B5EF4-FFF2-40B4-BE49-F238E27FC236}">
+                <a16:creationId xmlns:a16="http://schemas.microsoft.com/office/drawing/2014/main" id="{57019480-8A0B-4361-A9DF-9AA32C31C368}"/>
+              </a:ext>
+            </a:extLst>
+          </p:cNvPr>
+          <p:cNvSpPr>
+            <a:spLocks noGrp="1"/>
+          </p:cNvSpPr>
+          <p:nvPr/>
+        </p:nvSpPr>
+        <p:spPr>
+          <a:xfrm>
+            <a:off x="6286500" y="2857500"/>
+            <a:ext cx="5048250" cy="857250"/>
+          </a:xfrm>
+          <a:prstGeom prst="rect">
+            <a:avLst/>
+          </a:prstGeom>
+          <a:noFill/>
+          <a:ln w="0">
+            <a:noFill/>
+          </a:ln>
+        </p:spPr>
+        <p:txBody>
+          <a:bodyPr>
+            <a:noAutofit/>
+          </a:bodyPr>
+          <a:lstStyle/>
+          <a:p>
+            <a:pPr>
+              <a:defRPr sz="2250" b="0">
+                <a:solidFill>
+                  <a:srgbClr val="172B45"/>
+                </a:solidFill>
+                <a:latin typeface="Aptos"/>
+                <a:ea typeface="Aptos"/>
+                <a:cs typeface="Aptos"/>
+              </a:defRPr>
+            </a:pPr>
+            <a:r>
+              <a:rPr sz="2250" b="0">
+                <a:solidFill>
+                  <a:srgbClr val="172B45"/>
+                </a:solidFill>
+                <a:latin typeface="Aptos"/>
+                <a:ea typeface="Aptos"/>
+                <a:cs typeface="Aptos"/>
+              </a:rPr>
+              <a:t>Several traditional ML tools and methods</a:t>
+            </a:r>
+          </a:p>
+        </p:txBody>
+      </p:sp>
+      <p:sp>
+        <p:nvSpPr>
+          <p:cNvPr id="7" name="Rectangle 6">
+            <a:extLst>
+              <a:ext uri="{FF2B5EF4-FFF2-40B4-BE49-F238E27FC236}">
+                <a16:creationId xmlns:a16="http://schemas.microsoft.com/office/drawing/2014/main" id="{41343D28-EEEB-4E18-B995-EEE379275F3A}"/>
+              </a:ext>
+            </a:extLst>
+          </p:cNvPr>
+          <p:cNvSpPr>
+            <a:spLocks noGrp="1"/>
+          </p:cNvSpPr>
+          <p:nvPr/>
+        </p:nvSpPr>
+        <p:spPr>
+          <a:xfrm>
+            <a:off x="762000" y="4524375"/>
+            <a:ext cx="10477500" cy="1047750"/>
+          </a:xfrm>
+          <a:prstGeom prst="rect">
+            <a:avLst/>
+          </a:prstGeom>
+          <a:noFill/>
+          <a:ln w="0">
+            <a:noFill/>
+          </a:ln>
+        </p:spPr>
+        <p:txBody>
+          <a:bodyPr>
+            <a:noAutofit/>
+          </a:bodyPr>
+          <a:lstStyle/>
+          <a:p>
+            <a:pPr>
+              <a:defRPr sz="2250" b="0">
+                <a:solidFill>
+                  <a:srgbClr val="172B45"/>
+                </a:solidFill>
+                <a:latin typeface="Aptos"/>
+                <a:ea typeface="Aptos"/>
+                <a:cs typeface="Aptos"/>
+              </a:defRPr>
+            </a:pPr>
+            <a:r>
+              <a:rPr sz="2250" b="0">
+                <a:solidFill>
+                  <a:srgbClr val="172B45"/>
+                </a:solidFill>
+                <a:latin typeface="Aptos"/>
+                <a:ea typeface="Aptos"/>
+                <a:cs typeface="Aptos"/>
+              </a:rPr>
+              <a:t>Business implication: distinguish broadly useful skills from the capabilities specific to the role.</a:t>
+            </a:r>
+          </a:p>
+        </p:txBody>
+      </p:sp>
+      <p:sp>
+        <p:nvSpPr>
+          <p:cNvPr id="8" name="Rectangle 7">
+            <a:extLst>
+              <a:ext uri="{FF2B5EF4-FFF2-40B4-BE49-F238E27FC236}">
+                <a16:creationId xmlns:a16="http://schemas.microsoft.com/office/drawing/2014/main" id="{6356A763-1031-47A2-8551-D9C62926DBBD}"/>
+              </a:ext>
+            </a:extLst>
+          </p:cNvPr>
+          <p:cNvSpPr>
+            <a:spLocks noGrp="1"/>
+          </p:cNvSpPr>
+          <p:nvPr/>
+        </p:nvSpPr>
+        <p:spPr>
+          <a:xfrm>
+            <a:off x="762000" y="5867400"/>
+            <a:ext cx="10477500" cy="447675"/>
+          </a:xfrm>
+          <a:prstGeom prst="rect">
+            <a:avLst/>
+          </a:prstGeom>
+          <a:noFill/>
+          <a:ln w="0">
+            <a:noFill/>
+          </a:ln>
+        </p:spPr>
+        <p:txBody>
+          <a:bodyPr>
+            <a:noAutofit/>
+          </a:bodyPr>
+          <a:lstStyle/>
+          <a:p>
+            <a:pPr>
+              <a:defRPr sz="1350" b="0">
+                <a:solidFill>
+                  <a:srgbClr val="687887"/>
+                </a:solidFill>
+                <a:latin typeface="Aptos"/>
+                <a:ea typeface="Aptos"/>
+                <a:cs typeface="Aptos"/>
+              </a:defRPr>
+            </a:pPr>
+            <a:r>
+              <a:rPr sz="1350" b="0">
+                <a:solidFill>
+                  <a:srgbClr val="687887"/>
+                </a:solidFill>
+                <a:latin typeface="Aptos"/>
+                <a:ea typeface="Aptos"/>
+                <a:cs typeface="Aptos"/>
+              </a:rPr>
+              <a:t>Recorded skill frequency measures posting requirements, rather than verified candidate proficiency.</a:t>
+            </a:r>
+          </a:p>
+        </p:txBody>
+      </p:sp>
+    </p:spTree>
+    <p:extLst>
+      <p:ext uri="{BB962C8B-B14F-4D97-AF65-F5344CB8AC3E}">
+        <p14:creationId xmlns:p14="http://schemas.microsoft.com/office/powerpoint/2010/main" val="1912993417"/>
+      </p:ext>
+    </p:extLst>
+  </p:cSld>
+  <p:clrMapOvr>
+    <a:masterClrMapping/>
+  </p:clrMapOvr>
+</p:sld>
+</file>
+
+<file path=ppt/slides/slide6.xml><?xml version="1.0" encoding="utf-8"?>
+<p:sld xmlns:a="http://schemas.openxmlformats.org/drawingml/2006/main" xmlns:r="http://schemas.openxmlformats.org/officeDocument/2006/relationships" xmlns:p="http://schemas.openxmlformats.org/presentationml/2006/main">
+  <p:cSld>
+    <p:bg>
+      <p:bgPr>
+        <a:solidFill>
+          <a:srgbClr val="FFFFFF"/>
+        </a:solidFill>
+        <a:effectLst/>
+      </p:bgPr>
+    </p:bg>
+    <p:spTree>
+      <p:nvGrpSpPr>
+        <p:cNvPr id="1" name=""/>
+        <p:cNvGrpSpPr/>
+        <p:nvPr/>
+      </p:nvGrpSpPr>
+      <p:grpSpPr>
+        <a:xfrm>
+          <a:off x="0" y="0"/>
+          <a:ext cx="0" cy="0"/>
+          <a:chOff x="0" y="0"/>
+          <a:chExt cx="0" cy="0"/>
+        </a:xfrm>
+      </p:grpSpPr>
+      <p:sp>
+        <p:nvSpPr>
+          <p:cNvPr id="6" name="Rectangle 5">
+            <a:extLst>
+              <a:ext uri="{FF2B5EF4-FFF2-40B4-BE49-F238E27FC236}">
+                <a16:creationId xmlns:a16="http://schemas.microsoft.com/office/drawing/2014/main" id="{35B345F3-AF45-43CA-ACFE-3F09C8A8CD51}"/>
+              </a:ext>
+            </a:extLst>
+          </p:cNvPr>
+          <p:cNvSpPr>
+            <a:spLocks noGrp="1"/>
+          </p:cNvSpPr>
+          <p:nvPr/>
+        </p:nvSpPr>
+        <p:spPr>
+          <a:xfrm>
+            <a:off x="666750" y="428625"/>
+            <a:ext cx="10858500" cy="857250"/>
+          </a:xfrm>
+          <a:prstGeom prst="rect">
+            <a:avLst/>
+          </a:prstGeom>
+          <a:noFill/>
+          <a:ln w="0">
+            <a:noFill/>
+          </a:ln>
+        </p:spPr>
+        <p:txBody>
+          <a:bodyPr>
+            <a:noAutofit/>
+          </a:bodyPr>
+          <a:lstStyle/>
+          <a:p>
+            <a:pPr>
+              <a:defRPr sz="3150" b="1">
+                <a:solidFill>
+                  <a:srgbClr val="172B45"/>
+                </a:solidFill>
+                <a:latin typeface="Aptos"/>
+                <a:ea typeface="Aptos"/>
+                <a:cs typeface="Aptos"/>
+              </a:defRPr>
+            </a:pPr>
+            <a:r>
+              <a:rPr sz="3150" b="1">
+                <a:solidFill>
+                  <a:srgbClr val="172B45"/>
+                </a:solidFill>
+                <a:latin typeface="Aptos"/>
+                <a:ea typeface="Aptos"/>
+                <a:cs typeface="Aptos"/>
+              </a:rPr>
+              <a:t>The sample favors mid-level, remote, full-time roles</a:t>
+            </a:r>
+          </a:p>
+        </p:txBody>
+      </p:sp>
+      <p:sp>
+        <p:nvSpPr>
+          <p:cNvPr id="2" name="Rectangle 1">
+            <a:extLst>
+              <a:ext uri="{FF2B5EF4-FFF2-40B4-BE49-F238E27FC236}">
+                <a16:creationId xmlns:a16="http://schemas.microsoft.com/office/drawing/2014/main" id="{C0E1FBBB-51F8-4D92-A19E-872506362E75}"/>
+              </a:ext>
+            </a:extLst>
+          </p:cNvPr>
+          <p:cNvSpPr>
+            <a:spLocks noGrp="1"/>
+          </p:cNvSpPr>
+          <p:nvPr/>
+        </p:nvSpPr>
+        <p:spPr>
+          <a:xfrm>
+            <a:off x="11334750" y="6381750"/>
+            <a:ext cx="381000" cy="238125"/>
+          </a:xfrm>
+          <a:prstGeom prst="rect">
+            <a:avLst/>
+          </a:prstGeom>
+          <a:noFill/>
+          <a:ln w="0">
+            <a:noFill/>
+          </a:ln>
+        </p:spPr>
+        <p:txBody>
+          <a:bodyPr>
+            <a:noAutofit/>
+          </a:bodyPr>
+          <a:lstStyle/>
+          <a:p>
+            <a:pPr>
+              <a:defRPr sz="1200" b="0">
+                <a:solidFill>
+                  <a:srgbClr val="687887"/>
+                </a:solidFill>
+                <a:latin typeface="Aptos"/>
+                <a:ea typeface="Aptos"/>
+                <a:cs typeface="Aptos"/>
+              </a:defRPr>
+            </a:pPr>
+            <a:r>
+              <a:rPr sz="1200" b="0">
+                <a:solidFill>
+                  <a:srgbClr val="687887"/>
+                </a:solidFill>
+                <a:latin typeface="Aptos"/>
+                <a:ea typeface="Aptos"/>
+                <a:cs typeface="Aptos"/>
+              </a:rPr>
+              <a:t>6</a:t>
+            </a:r>
+          </a:p>
+        </p:txBody>
+      </p:sp>
+      <p:graphicFrame>
+        <p:nvGraphicFramePr>
+          <p:cNvPr id="8" name="Table 7"/>
+          <p:cNvGraphicFramePr/>
+          <p:nvPr/>
+        </p:nvGraphicFramePr>
+        <p:xfrm>
+          <a:off x="762000" y="1524000"/>
+          <a:ext cx="10668000" cy="2857500"/>
+        </p:xfrm>
+        <a:graphic>
+          <a:graphicData uri="http://schemas.openxmlformats.org/drawingml/2006/table">
+            <a:tbl>
+              <a:tblPr/>
+              <a:tblGrid>
+                <a:gridCol w="3429000">
+                  <a:extLst>
+                    <a:ext uri="{9D8B030D-6E8A-4147-A177-3AD203B41FA5}">
+                      <a16:colId xmlns:a16="http://schemas.microsoft.com/office/drawing/2014/main" val="20000"/>
+                    </a:ext>
+                  </a:extLst>
+                </a:gridCol>
+                <a:gridCol w="3429000">
+                  <a:extLst>
+                    <a:ext uri="{9D8B030D-6E8A-4147-A177-3AD203B41FA5}">
+                      <a16:colId xmlns:a16="http://schemas.microsoft.com/office/drawing/2014/main" val="20001"/>
+                    </a:ext>
+                  </a:extLst>
+                </a:gridCol>
+                <a:gridCol w="3810000">
+                  <a:extLst>
+                    <a:ext uri="{9D8B030D-6E8A-4147-A177-3AD203B41FA5}">
+                      <a16:colId xmlns:a16="http://schemas.microsoft.com/office/drawing/2014/main" val="20002"/>
+                    </a:ext>
+                  </a:extLst>
+                </a:gridCol>
+              </a:tblGrid>
+              <a:tr h="714375">
+                <a:tc>
+                  <a:txBody>
+                    <a:bodyPr/>
+                    <a:lstStyle/>
+                    <a:p>
+                      <a:r>
+                        <a:rPr sz="2100" b="1">
+                          <a:solidFill>
+                            <a:srgbClr val="FFFFFF"/>
+                          </a:solidFill>
+                          <a:latin typeface="Aptos"/>
+                          <a:ea typeface="Aptos"/>
+                          <a:cs typeface="Aptos"/>
+                        </a:rPr>
+                        <a:t>Posting characteristic</a:t>
+                      </a:r>
+                    </a:p>
+                  </a:txBody>
+                  <a:tcPr>
+                    <a:solidFill>
+                      <a:srgbClr val="172B45"/>
+                    </a:solidFill>
+                  </a:tcPr>
+                </a:tc>
+                <a:tc>
+                  <a:txBody>
+                    <a:bodyPr/>
+                    <a:lstStyle/>
+                    <a:p>
+                      <a:r>
+                        <a:rPr sz="2100" b="1">
+                          <a:solidFill>
+                            <a:srgbClr val="FFFFFF"/>
+                          </a:solidFill>
+                          <a:latin typeface="Aptos"/>
+                          <a:ea typeface="Aptos"/>
+                          <a:cs typeface="Aptos"/>
+                        </a:rPr>
+                        <a:t>Largest group</a:t>
+                      </a:r>
+                    </a:p>
+                  </a:txBody>
+                  <a:tcPr>
+                    <a:solidFill>
+                      <a:srgbClr val="172B45"/>
+                    </a:solidFill>
+                  </a:tcPr>
+                </a:tc>
+                <a:tc>
+                  <a:txBody>
+                    <a:bodyPr/>
+                    <a:lstStyle/>
+                    <a:p>
+                      <a:r>
+                        <a:rPr sz="2100" b="1">
+                          <a:solidFill>
+                            <a:srgbClr val="FFFFFF"/>
+                          </a:solidFill>
+                          <a:latin typeface="Aptos"/>
+                          <a:ea typeface="Aptos"/>
+                          <a:cs typeface="Aptos"/>
+                        </a:rPr>
+                        <a:t>Reported scale</a:t>
+                      </a:r>
+                    </a:p>
+                  </a:txBody>
+                  <a:tcPr>
+                    <a:solidFill>
+                      <a:srgbClr val="172B45"/>
+                    </a:solidFill>
+                  </a:tcPr>
+                </a:tc>
+                <a:extLst>
+                  <a:ext uri="{0D108BD9-81ED-4DB2-BD59-A6C34878D82A}">
+                    <a16:rowId xmlns:a16="http://schemas.microsoft.com/office/drawing/2014/main" val="10000"/>
+                  </a:ext>
+                </a:extLst>
+              </a:tr>
+              <a:tr h="714375">
+                <a:tc>
+                  <a:txBody>
+                    <a:bodyPr/>
+                    <a:lstStyle/>
+                    <a:p>
+                      <a:r>
+                        <a:rPr sz="2100" b="0">
+                          <a:solidFill>
+                            <a:srgbClr val="172B45"/>
+                          </a:solidFill>
+                          <a:latin typeface="Aptos"/>
+                          <a:ea typeface="Aptos"/>
+                          <a:cs typeface="Aptos"/>
+                        </a:rPr>
+                        <a:t>Experience</a:t>
+                      </a:r>
+                    </a:p>
+                  </a:txBody>
+                  <a:tcPr>
+                    <a:solidFill>
+                      <a:srgbClr val="F0F4F8"/>
+                    </a:solidFill>
+                  </a:tcPr>
+                </a:tc>
+                <a:tc>
+                  <a:txBody>
+                    <a:bodyPr/>
+                    <a:lstStyle/>
+                    <a:p>
+                      <a:r>
+                        <a:rPr sz="2100" b="0">
+                          <a:solidFill>
+                            <a:srgbClr val="172B45"/>
+                          </a:solidFill>
+                          <a:latin typeface="Aptos"/>
+                          <a:ea typeface="Aptos"/>
+                          <a:cs typeface="Aptos"/>
+                        </a:rPr>
+                        <a:t>Mid-level</a:t>
+                      </a:r>
+                    </a:p>
+                  </a:txBody>
+                  <a:tcPr>
+                    <a:solidFill>
+                      <a:srgbClr val="F0F4F8"/>
+                    </a:solidFill>
+                  </a:tcPr>
+                </a:tc>
+                <a:tc>
+                  <a:txBody>
+                    <a:bodyPr/>
+                    <a:lstStyle/>
+                    <a:p>
+                      <a:r>
+                        <a:rPr sz="2100" b="0">
+                          <a:solidFill>
+                            <a:srgbClr val="172B45"/>
+                          </a:solidFill>
+                          <a:latin typeface="Aptos"/>
+                          <a:ea typeface="Aptos"/>
+                          <a:cs typeface="Aptos"/>
+                        </a:rPr>
+                        <a:t>About half the sample</a:t>
+                      </a:r>
+                    </a:p>
+                  </a:txBody>
+                  <a:tcPr>
+                    <a:solidFill>
+                      <a:srgbClr val="F0F4F8"/>
+                    </a:solidFill>
+                  </a:tcPr>
+                </a:tc>
+                <a:extLst>
+                  <a:ext uri="{0D108BD9-81ED-4DB2-BD59-A6C34878D82A}">
+                    <a16:rowId xmlns:a16="http://schemas.microsoft.com/office/drawing/2014/main" val="10001"/>
+                  </a:ext>
+                </a:extLst>
+              </a:tr>
+              <a:tr h="714375">
+                <a:tc>
+                  <a:txBody>
+                    <a:bodyPr/>
+                    <a:lstStyle/>
+                    <a:p>
+                      <a:r>
+                        <a:rPr sz="2100" b="0">
+                          <a:solidFill>
+                            <a:srgbClr val="172B45"/>
+                          </a:solidFill>
+                          <a:latin typeface="Aptos"/>
+                          <a:ea typeface="Aptos"/>
+                          <a:cs typeface="Aptos"/>
+                        </a:rPr>
+                        <a:t>Work arrangement</a:t>
+                      </a:r>
+                    </a:p>
+                  </a:txBody>
+                  <a:tcPr>
+                    <a:solidFill>
+                      <a:srgbClr val="FFFFFF"/>
+                    </a:solidFill>
+                  </a:tcPr>
+                </a:tc>
+                <a:tc>
+                  <a:txBody>
+                    <a:bodyPr/>
+                    <a:lstStyle/>
+                    <a:p>
+                      <a:r>
+                        <a:rPr sz="2100" b="0">
+                          <a:solidFill>
+                            <a:srgbClr val="172B45"/>
+                          </a:solidFill>
+                          <a:latin typeface="Aptos"/>
+                          <a:ea typeface="Aptos"/>
+                          <a:cs typeface="Aptos"/>
+                        </a:rPr>
+                        <a:t>Remote</a:t>
+                      </a:r>
+                    </a:p>
+                  </a:txBody>
+                  <a:tcPr>
+                    <a:solidFill>
+                      <a:srgbClr val="FFFFFF"/>
+                    </a:solidFill>
+                  </a:tcPr>
+                </a:tc>
+                <a:tc>
+                  <a:txBody>
+                    <a:bodyPr/>
+                    <a:lstStyle/>
+                    <a:p>
+                      <a:r>
+                        <a:rPr sz="2100" b="0">
+                          <a:solidFill>
+                            <a:srgbClr val="172B45"/>
+                          </a:solidFill>
+                          <a:latin typeface="Aptos"/>
+                          <a:ea typeface="Aptos"/>
+                          <a:cs typeface="Aptos"/>
+                        </a:rPr>
+                        <a:t>About 4,000 postings</a:t>
+                      </a:r>
+                    </a:p>
+                  </a:txBody>
+                  <a:tcPr>
+                    <a:solidFill>
+                      <a:srgbClr val="FFFFFF"/>
+                    </a:solidFill>
+                  </a:tcPr>
+                </a:tc>
+                <a:extLst>
+                  <a:ext uri="{0D108BD9-81ED-4DB2-BD59-A6C34878D82A}">
+                    <a16:rowId xmlns:a16="http://schemas.microsoft.com/office/drawing/2014/main" val="10002"/>
+                  </a:ext>
+                </a:extLst>
+              </a:tr>
+              <a:tr h="714375">
+                <a:tc>
+                  <a:txBody>
+                    <a:bodyPr/>
+                    <a:lstStyle/>
+                    <a:p>
+                      <a:r>
+                        <a:rPr sz="2100" b="0">
+                          <a:solidFill>
+                            <a:srgbClr val="172B45"/>
+                          </a:solidFill>
+                          <a:latin typeface="Aptos"/>
+                          <a:ea typeface="Aptos"/>
+                          <a:cs typeface="Aptos"/>
+                        </a:rPr>
+                        <a:t>Employment type</a:t>
+                      </a:r>
+                    </a:p>
+                  </a:txBody>
+                  <a:tcPr>
+                    <a:solidFill>
+                      <a:srgbClr val="F0F4F8"/>
+                    </a:solidFill>
+                  </a:tcPr>
+                </a:tc>
+                <a:tc>
+                  <a:txBody>
+                    <a:bodyPr/>
+                    <a:lstStyle/>
+                    <a:p>
+                      <a:r>
+                        <a:rPr sz="2100" b="0">
+                          <a:solidFill>
+                            <a:srgbClr val="172B45"/>
+                          </a:solidFill>
+                          <a:latin typeface="Aptos"/>
+                          <a:ea typeface="Aptos"/>
+                          <a:cs typeface="Aptos"/>
+                        </a:rPr>
+                        <a:t>Full-time</a:t>
+                      </a:r>
+                    </a:p>
+                  </a:txBody>
+                  <a:tcPr>
+                    <a:solidFill>
+                      <a:srgbClr val="F0F4F8"/>
+                    </a:solidFill>
+                  </a:tcPr>
+                </a:tc>
+                <a:tc>
+                  <a:txBody>
+                    <a:bodyPr/>
+                    <a:lstStyle/>
+                    <a:p>
+                      <a:r>
+                        <a:rPr sz="2100" b="0">
+                          <a:solidFill>
+                            <a:srgbClr val="172B45"/>
+                          </a:solidFill>
+                          <a:latin typeface="Aptos"/>
+                          <a:ea typeface="Aptos"/>
+                          <a:cs typeface="Aptos"/>
+                        </a:rPr>
+                        <a:t>About 7,500 postings</a:t>
+                      </a:r>
+                    </a:p>
+                  </a:txBody>
+                  <a:tcPr>
+                    <a:solidFill>
+                      <a:srgbClr val="F0F4F8"/>
+                    </a:solidFill>
+                  </a:tcPr>
+                </a:tc>
+                <a:extLst>
+                  <a:ext uri="{0D108BD9-81ED-4DB2-BD59-A6C34878D82A}">
+                    <a16:rowId xmlns:a16="http://schemas.microsoft.com/office/drawing/2014/main" val="10003"/>
+                  </a:ext>
+                </a:extLst>
+              </a:tr>
+            </a:tbl>
+          </a:graphicData>
+        </a:graphic>
+      </p:graphicFrame>
+      <p:sp>
+        <p:nvSpPr>
+          <p:cNvPr id="4" name="Rectangle 3">
+            <a:extLst>
+              <a:ext uri="{FF2B5EF4-FFF2-40B4-BE49-F238E27FC236}">
+                <a16:creationId xmlns:a16="http://schemas.microsoft.com/office/drawing/2014/main" id="{ABFAE8E7-BA2C-4162-982F-8913071CCA5A}"/>
+              </a:ext>
+            </a:extLst>
+          </p:cNvPr>
+          <p:cNvSpPr>
+            <a:spLocks noGrp="1"/>
+          </p:cNvSpPr>
+          <p:nvPr/>
+        </p:nvSpPr>
+        <p:spPr>
+          <a:xfrm>
+            <a:off x="762000" y="4810125"/>
+            <a:ext cx="10572750" cy="714375"/>
+          </a:xfrm>
+          <a:prstGeom prst="rect">
+            <a:avLst/>
+          </a:prstGeom>
+          <a:noFill/>
+          <a:ln w="0">
+            <a:noFill/>
+          </a:ln>
+        </p:spPr>
+        <p:txBody>
+          <a:bodyPr>
+            <a:noAutofit/>
+          </a:bodyPr>
+          <a:lstStyle/>
+          <a:p>
+            <a:pPr>
+              <a:defRPr sz="2175" b="0">
+                <a:solidFill>
+                  <a:srgbClr val="172B45"/>
+                </a:solidFill>
+                <a:latin typeface="Aptos"/>
+                <a:ea typeface="Aptos"/>
+                <a:cs typeface="Aptos"/>
+              </a:defRPr>
+            </a:pPr>
+            <a:r>
+              <a:rPr sz="2175" b="0">
+                <a:solidFill>
+                  <a:srgbClr val="172B45"/>
+                </a:solidFill>
+                <a:latin typeface="Aptos"/>
+                <a:ea typeface="Aptos"/>
+                <a:cs typeface="Aptos"/>
+              </a:rPr>
+              <a:t>These patterns provide context for talent planning and recruiting discussions.</a:t>
+            </a:r>
+          </a:p>
+        </p:txBody>
+      </p:sp>
+      <p:sp>
+        <p:nvSpPr>
+          <p:cNvPr id="5" name="Rectangle 4">
+            <a:extLst>
+              <a:ext uri="{FF2B5EF4-FFF2-40B4-BE49-F238E27FC236}">
+                <a16:creationId xmlns:a16="http://schemas.microsoft.com/office/drawing/2014/main" id="{F359564E-7E7F-488B-97A2-3235B969CDEA}"/>
+              </a:ext>
+            </a:extLst>
+          </p:cNvPr>
+          <p:cNvSpPr>
+            <a:spLocks noGrp="1"/>
+          </p:cNvSpPr>
+          <p:nvPr/>
+        </p:nvSpPr>
+        <p:spPr>
+          <a:xfrm>
+            <a:off x="762000" y="5867400"/>
+            <a:ext cx="10477500" cy="447675"/>
+          </a:xfrm>
+          <a:prstGeom prst="rect">
+            <a:avLst/>
+          </a:prstGeom>
+          <a:noFill/>
+          <a:ln w="0">
+            <a:noFill/>
+          </a:ln>
+        </p:spPr>
+        <p:txBody>
+          <a:bodyPr>
+            <a:noAutofit/>
+          </a:bodyPr>
+          <a:lstStyle/>
+          <a:p>
+            <a:pPr>
+              <a:defRPr sz="1350" b="0">
+                <a:solidFill>
+                  <a:srgbClr val="687887"/>
+                </a:solidFill>
+                <a:latin typeface="Aptos"/>
+                <a:ea typeface="Aptos"/>
+                <a:cs typeface="Aptos"/>
+              </a:defRPr>
+            </a:pPr>
+            <a:r>
+              <a:rPr sz="1350" b="0">
+                <a:solidFill>
+                  <a:srgbClr val="687887"/>
+                </a:solidFill>
+                <a:latin typeface="Aptos"/>
+                <a:ea typeface="Aptos"/>
+                <a:cs typeface="Aptos"/>
+              </a:rPr>
+              <a:t>Counts are approximate. Validate against the relevant geography and talent pool before setting policy.</a:t>
+            </a:r>
+          </a:p>
+        </p:txBody>
+      </p:sp>
+    </p:spTree>
+    <p:extLst>
+      <p:ext uri="{BB962C8B-B14F-4D97-AF65-F5344CB8AC3E}">
+        <p14:creationId xmlns:p14="http://schemas.microsoft.com/office/powerpoint/2010/main" val="431837212"/>
+      </p:ext>
+    </p:extLst>
+  </p:cSld>
+  <p:clrMapOvr>
+    <a:masterClrMapping/>
+  </p:clrMapOvr>
+</p:sld>
+</file>
+
+<file path=ppt/slides/slide7.xml><?xml version="1.0" encoding="utf-8"?>
+<p:sld xmlns:a="http://schemas.openxmlformats.org/drawingml/2006/main" xmlns:r="http://schemas.openxmlformats.org/officeDocument/2006/relationships" xmlns:p="http://schemas.openxmlformats.org/presentationml/2006/main">
+  <p:cSld>
+    <p:bg>
+      <p:bgPr>
+        <a:solidFill>
+          <a:srgbClr val="FFFFFF"/>
+        </a:solidFill>
+        <a:effectLst/>
+      </p:bgPr>
+    </p:bg>
+    <p:spTree>
+      <p:nvGrpSpPr>
+        <p:cNvPr id="1" name=""/>
+        <p:cNvGrpSpPr/>
+        <p:nvPr/>
+      </p:nvGrpSpPr>
+      <p:grpSpPr>
+        <a:xfrm>
+          <a:off x="0" y="0"/>
+          <a:ext cx="0" cy="0"/>
+          <a:chOff x="0" y="0"/>
+          <a:chExt cx="0" cy="0"/>
+        </a:xfrm>
+      </p:grpSpPr>
+      <p:sp>
+        <p:nvSpPr>
+          <p:cNvPr id="7" name="Rectangle 6">
+            <a:extLst>
+              <a:ext uri="{FF2B5EF4-FFF2-40B4-BE49-F238E27FC236}">
+                <a16:creationId xmlns:a16="http://schemas.microsoft.com/office/drawing/2014/main" id="{FCA74D15-2201-4048-84BD-387AD5C52359}"/>
+              </a:ext>
+            </a:extLst>
+          </p:cNvPr>
+          <p:cNvSpPr>
+            <a:spLocks noGrp="1"/>
+          </p:cNvSpPr>
+          <p:nvPr/>
+        </p:nvSpPr>
+        <p:spPr>
+          <a:xfrm>
+            <a:off x="666750" y="428625"/>
+            <a:ext cx="10858500" cy="857250"/>
+          </a:xfrm>
+          <a:prstGeom prst="rect">
+            <a:avLst/>
+          </a:prstGeom>
+          <a:noFill/>
+          <a:ln w="0">
+            <a:noFill/>
+          </a:ln>
+        </p:spPr>
+        <p:txBody>
+          <a:bodyPr>
+            <a:noAutofit/>
+          </a:bodyPr>
+          <a:lstStyle/>
+          <a:p>
+            <a:pPr>
+              <a:defRPr sz="3150" b="1">
+                <a:solidFill>
+                  <a:srgbClr val="172B45"/>
+                </a:solidFill>
+                <a:latin typeface="Aptos"/>
+                <a:ea typeface="Aptos"/>
+                <a:cs typeface="Aptos"/>
+              </a:defRPr>
+            </a:pPr>
+            <a:r>
+              <a:rPr sz="3150" b="1">
+                <a:solidFill>
+                  <a:srgbClr val="172B45"/>
+                </a:solidFill>
+                <a:latin typeface="Aptos"/>
+                <a:ea typeface="Aptos"/>
+                <a:cs typeface="Aptos"/>
+              </a:rPr>
+              <a:t>Applicant counts offer limited differentiation</a:t>
+            </a:r>
+          </a:p>
+        </p:txBody>
+      </p:sp>
+      <p:sp>
+        <p:nvSpPr>
+          <p:cNvPr id="2" name="Rectangle 1">
+            <a:extLst>
+              <a:ext uri="{FF2B5EF4-FFF2-40B4-BE49-F238E27FC236}">
+                <a16:creationId xmlns:a16="http://schemas.microsoft.com/office/drawing/2014/main" id="{CF57E2E6-5B54-4A84-9521-F7825E8A4988}"/>
+              </a:ext>
+            </a:extLst>
+          </p:cNvPr>
+          <p:cNvSpPr>
+            <a:spLocks noGrp="1"/>
+          </p:cNvSpPr>
+          <p:nvPr/>
+        </p:nvSpPr>
+        <p:spPr>
+          <a:xfrm>
+            <a:off x="11334750" y="6381750"/>
+            <a:ext cx="381000" cy="238125"/>
+          </a:xfrm>
+          <a:prstGeom prst="rect">
+            <a:avLst/>
+          </a:prstGeom>
+          <a:noFill/>
+          <a:ln w="0">
+            <a:noFill/>
+          </a:ln>
+        </p:spPr>
+        <p:txBody>
+          <a:bodyPr>
+            <a:noAutofit/>
+          </a:bodyPr>
+          <a:lstStyle/>
+          <a:p>
+            <a:pPr>
+              <a:defRPr sz="1200" b="0">
+                <a:solidFill>
+                  <a:srgbClr val="687887"/>
+                </a:solidFill>
+                <a:latin typeface="Aptos"/>
+                <a:ea typeface="Aptos"/>
+                <a:cs typeface="Aptos"/>
+              </a:defRPr>
+            </a:pPr>
+            <a:r>
+              <a:rPr sz="1200" b="0">
+                <a:solidFill>
+                  <a:srgbClr val="687887"/>
+                </a:solidFill>
+                <a:latin typeface="Aptos"/>
+                <a:ea typeface="Aptos"/>
+                <a:cs typeface="Aptos"/>
+              </a:rPr>
+              <a:t>7</a:t>
+            </a:r>
+          </a:p>
+        </p:txBody>
+      </p:sp>
+      <p:sp>
+        <p:nvSpPr>
+          <p:cNvPr id="3" name="Rectangle 2">
+            <a:extLst>
+              <a:ext uri="{FF2B5EF4-FFF2-40B4-BE49-F238E27FC236}">
+                <a16:creationId xmlns:a16="http://schemas.microsoft.com/office/drawing/2014/main" id="{49E992DB-EB21-4E12-BBDC-D1C65799FA43}"/>
+              </a:ext>
+            </a:extLst>
+          </p:cNvPr>
+          <p:cNvSpPr>
+            <a:spLocks noGrp="1"/>
+          </p:cNvSpPr>
+          <p:nvPr/>
+        </p:nvSpPr>
+        <p:spPr>
+          <a:xfrm>
+            <a:off x="762000" y="1666875"/>
+            <a:ext cx="5715000" cy="1047750"/>
+          </a:xfrm>
+          <a:prstGeom prst="rect">
+            <a:avLst/>
+          </a:prstGeom>
+          <a:noFill/>
+          <a:ln w="0">
+            <a:noFill/>
+          </a:ln>
+        </p:spPr>
+        <p:txBody>
+          <a:bodyPr>
+            <a:noAutofit/>
+          </a:bodyPr>
+          <a:lstStyle/>
+          <a:p>
+            <a:pPr>
+              <a:defRPr sz="5850" b="1">
+                <a:solidFill>
+                  <a:srgbClr val="275F96"/>
+                </a:solidFill>
+                <a:latin typeface="Aptos"/>
+                <a:ea typeface="Aptos"/>
+                <a:cs typeface="Aptos"/>
+              </a:defRPr>
+            </a:pPr>
+            <a:r>
+              <a:rPr sz="5850" b="1">
+                <a:solidFill>
+                  <a:srgbClr val="275F96"/>
+                </a:solidFill>
+                <a:latin typeface="Aptos"/>
+                <a:ea typeface="Aptos"/>
+                <a:cs typeface="Aptos"/>
+              </a:rPr>
+              <a:t>212–238</a:t>
+            </a:r>
+          </a:p>
+        </p:txBody>
+      </p:sp>
+      <p:sp>
+        <p:nvSpPr>
+          <p:cNvPr id="4" name="Rectangle 3">
+            <a:extLst>
+              <a:ext uri="{FF2B5EF4-FFF2-40B4-BE49-F238E27FC236}">
+                <a16:creationId xmlns:a16="http://schemas.microsoft.com/office/drawing/2014/main" id="{AED1595D-549B-4D69-B460-9C63E96CB883}"/>
+              </a:ext>
+            </a:extLst>
+          </p:cNvPr>
+          <p:cNvSpPr>
+            <a:spLocks noGrp="1"/>
+          </p:cNvSpPr>
+          <p:nvPr/>
+        </p:nvSpPr>
+        <p:spPr>
+          <a:xfrm>
+            <a:off x="762000" y="2857500"/>
+            <a:ext cx="10001250" cy="619125"/>
+          </a:xfrm>
+          <a:prstGeom prst="rect">
+            <a:avLst/>
+          </a:prstGeom>
+          <a:noFill/>
+          <a:ln w="0">
+            <a:noFill/>
+          </a:ln>
+        </p:spPr>
+        <p:txBody>
+          <a:bodyPr>
+            <a:noAutofit/>
+          </a:bodyPr>
+          <a:lstStyle/>
+          <a:p>
+            <a:pPr>
+              <a:defRPr sz="2250" b="0">
+                <a:solidFill>
+                  <a:srgbClr val="172B45"/>
+                </a:solidFill>
+                <a:latin typeface="Aptos"/>
+                <a:ea typeface="Aptos"/>
+                <a:cs typeface="Aptos"/>
+              </a:defRPr>
+            </a:pPr>
+            <a:r>
+              <a:rPr sz="2250" b="0">
+                <a:solidFill>
+                  <a:srgbClr val="172B45"/>
+                </a:solidFill>
+                <a:latin typeface="Aptos"/>
+                <a:ea typeface="Aptos"/>
+                <a:cs typeface="Aptos"/>
+              </a:rPr>
+              <a:t>Median applicants by specialization</a:t>
+            </a:r>
+          </a:p>
+        </p:txBody>
+      </p:sp>
+      <p:sp>
+        <p:nvSpPr>
+          <p:cNvPr id="5" name="Rectangle 4">
+            <a:extLst>
+              <a:ext uri="{FF2B5EF4-FFF2-40B4-BE49-F238E27FC236}">
+                <a16:creationId xmlns:a16="http://schemas.microsoft.com/office/drawing/2014/main" id="{18CE96BE-AE77-4E6E-82D0-EBD738B945D3}"/>
+              </a:ext>
+            </a:extLst>
+          </p:cNvPr>
+          <p:cNvSpPr>
+            <a:spLocks noGrp="1"/>
+          </p:cNvSpPr>
+          <p:nvPr/>
+        </p:nvSpPr>
+        <p:spPr>
+          <a:xfrm>
+            <a:off x="762000" y="3857625"/>
+            <a:ext cx="10477500" cy="952500"/>
+          </a:xfrm>
+          <a:prstGeom prst="rect">
+            <a:avLst/>
+          </a:prstGeom>
+          <a:noFill/>
+          <a:ln w="0">
+            <a:noFill/>
+          </a:ln>
+        </p:spPr>
+        <p:txBody>
+          <a:bodyPr>
+            <a:noAutofit/>
+          </a:bodyPr>
+          <a:lstStyle/>
+          <a:p>
+            <a:pPr>
+              <a:defRPr sz="2250" b="0">
+                <a:solidFill>
+                  <a:srgbClr val="172B45"/>
+                </a:solidFill>
+                <a:latin typeface="Aptos"/>
+                <a:ea typeface="Aptos"/>
+                <a:cs typeface="Aptos"/>
+              </a:defRPr>
+            </a:pPr>
+            <a:r>
+              <a:rPr sz="2250" b="0">
+                <a:solidFill>
+                  <a:srgbClr val="172B45"/>
+                </a:solidFill>
+                <a:latin typeface="Aptos"/>
+                <a:ea typeface="Aptos"/>
+                <a:cs typeface="Aptos"/>
+              </a:rPr>
+              <a:t>Variation within groups was much larger than differences between their typical applicant counts.</a:t>
+            </a:r>
+          </a:p>
+        </p:txBody>
+      </p:sp>
+      <p:sp>
+        <p:nvSpPr>
+          <p:cNvPr id="6" name="Rectangle 5">
+            <a:extLst>
+              <a:ext uri="{FF2B5EF4-FFF2-40B4-BE49-F238E27FC236}">
+                <a16:creationId xmlns:a16="http://schemas.microsoft.com/office/drawing/2014/main" id="{30889914-CDBE-4219-B4A4-A3642009450F}"/>
+              </a:ext>
+            </a:extLst>
+          </p:cNvPr>
+          <p:cNvSpPr>
+            <a:spLocks noGrp="1"/>
+          </p:cNvSpPr>
+          <p:nvPr/>
+        </p:nvSpPr>
+        <p:spPr>
+          <a:xfrm>
+            <a:off x="762000" y="5867400"/>
+            <a:ext cx="10477500" cy="447675"/>
+          </a:xfrm>
+          <a:prstGeom prst="rect">
+            <a:avLst/>
+          </a:prstGeom>
+          <a:noFill/>
+          <a:ln w="0">
+            <a:noFill/>
+          </a:ln>
+        </p:spPr>
+        <p:txBody>
+          <a:bodyPr>
+            <a:noAutofit/>
+          </a:bodyPr>
+          <a:lstStyle/>
+          <a:p>
+            <a:pPr>
+              <a:defRPr sz="1350" b="0">
+                <a:solidFill>
+                  <a:srgbClr val="687887"/>
+                </a:solidFill>
+                <a:latin typeface="Aptos"/>
+                <a:ea typeface="Aptos"/>
+                <a:cs typeface="Aptos"/>
+              </a:defRPr>
+            </a:pPr>
+            <a:r>
+              <a:rPr sz="1350" b="0">
+                <a:solidFill>
+                  <a:srgbClr val="687887"/>
+                </a:solidFill>
+                <a:latin typeface="Aptos"/>
+                <a:ea typeface="Aptos"/>
+                <a:cs typeface="Aptos"/>
+              </a:rPr>
+              <a:t>The analysis does not establish hiring difficulty, candidate quality, or the causes of applicant volume.</a:t>
+            </a:r>
+          </a:p>
+        </p:txBody>
+      </p:sp>
+    </p:spTree>
+    <p:extLst>
+      <p:ext uri="{BB962C8B-B14F-4D97-AF65-F5344CB8AC3E}">
+        <p14:creationId xmlns:p14="http://schemas.microsoft.com/office/powerpoint/2010/main" val="1912377907"/>
       </p:ext>
     </p:extLst>
   </p:cSld>
@@ -10872,10 +10849,10 @@
       </p:grpSpPr>
       <p:sp>
         <p:nvSpPr>
-          <p:cNvPr id="9" name="Rectangle 8">
-            <a:extLst>
-              <a:ext uri="{FF2B5EF4-FFF2-40B4-BE49-F238E27FC236}">
-                <a16:creationId xmlns:a16="http://schemas.microsoft.com/office/drawing/2014/main" id="{E12D53BB-C535-4FDC-812A-8808704E1B2B}"/>
+          <p:cNvPr id="8" name="Rectangle 7">
+            <a:extLst>
+              <a:ext uri="{FF2B5EF4-FFF2-40B4-BE49-F238E27FC236}">
+                <a16:creationId xmlns:a16="http://schemas.microsoft.com/office/drawing/2014/main" id="{FCC1D0E6-E1E1-432C-97A5-49283F27E5DC}"/>
               </a:ext>
             </a:extLst>
           </p:cNvPr>
@@ -10922,7 +10899,7 @@
                 <a:ea typeface="Aptos"/>
                 <a:cs typeface="Aptos"/>
               </a:rPr>
-              <a:t>Common skills and specialization signals</a:t>
+              <a:t>Experience carries most of the current salary signal</a:t>
             </a:r>
           </a:p>
         </p:txBody>
@@ -10932,7 +10909,7 @@
           <p:cNvPr id="2" name="Rectangle 1">
             <a:extLst>
               <a:ext uri="{FF2B5EF4-FFF2-40B4-BE49-F238E27FC236}">
-                <a16:creationId xmlns:a16="http://schemas.microsoft.com/office/drawing/2014/main" id="{644B8A71-1423-44D7-B3EA-04AE83FD36C4}"/>
+                <a16:creationId xmlns:a16="http://schemas.microsoft.com/office/drawing/2014/main" id="{D1ADB659-AE9C-4DB1-BEE5-FC6C24835C86}"/>
               </a:ext>
             </a:extLst>
           </p:cNvPr>
@@ -10989,7 +10966,7 @@
           <p:cNvPr id="3" name="Rectangle 2">
             <a:extLst>
               <a:ext uri="{FF2B5EF4-FFF2-40B4-BE49-F238E27FC236}">
-                <a16:creationId xmlns:a16="http://schemas.microsoft.com/office/drawing/2014/main" id="{EC962717-7533-4E50-A34E-3C58BBD03254}"/>
+                <a16:creationId xmlns:a16="http://schemas.microsoft.com/office/drawing/2014/main" id="{D158BD30-268D-4DC7-9546-E914096DB01F}"/>
               </a:ext>
             </a:extLst>
           </p:cNvPr>
@@ -11000,8 +10977,8 @@
         </p:nvSpPr>
         <p:spPr>
           <a:xfrm>
-            <a:off x="762000" y="1571625"/>
-            <a:ext cx="3810000" cy="1000125"/>
+            <a:off x="762000" y="1619250"/>
+            <a:ext cx="5238750" cy="1238250"/>
           </a:xfrm>
           <a:prstGeom prst="rect">
             <a:avLst/>
@@ -11018,7 +10995,7 @@
           <a:lstStyle/>
           <a:p>
             <a:pPr>
-              <a:defRPr sz="5700" b="1">
+              <a:defRPr sz="7200" b="1">
                 <a:solidFill>
                   <a:srgbClr val="275F96"/>
                 </a:solidFill>
@@ -11028,7 +11005,7 @@
               </a:defRPr>
             </a:pPr>
             <a:r>
-              <a:rPr sz="5700" b="1">
+              <a:rPr sz="7200" b="1">
                 <a:solidFill>
                   <a:srgbClr val="275F96"/>
                 </a:solidFill>
@@ -11036,7 +11013,7 @@
                 <a:ea typeface="Aptos"/>
                 <a:cs typeface="Aptos"/>
               </a:rPr>
-              <a:t>46.0%</a:t>
+              <a:t>96.8%</a:t>
             </a:r>
           </a:p>
         </p:txBody>
@@ -11046,7 +11023,7 @@
           <p:cNvPr id="4" name="Rectangle 3">
             <a:extLst>
               <a:ext uri="{FF2B5EF4-FFF2-40B4-BE49-F238E27FC236}">
-                <a16:creationId xmlns:a16="http://schemas.microsoft.com/office/drawing/2014/main" id="{DD7E720B-15BC-4E95-8CC0-86DAB207A781}"/>
+                <a16:creationId xmlns:a16="http://schemas.microsoft.com/office/drawing/2014/main" id="{2CEC0ECA-CDE7-429C-BF38-6FFBDD61FF65}"/>
               </a:ext>
             </a:extLst>
           </p:cNvPr>
@@ -11057,8 +11034,8 @@
         </p:nvSpPr>
         <p:spPr>
           <a:xfrm>
-            <a:off x="762000" y="2667000"/>
-            <a:ext cx="3810000" cy="476250"/>
+            <a:off x="762000" y="3143250"/>
+            <a:ext cx="5238750" cy="1238250"/>
           </a:xfrm>
           <a:prstGeom prst="rect">
             <a:avLst/>
@@ -11075,7 +11052,7 @@
           <a:lstStyle/>
           <a:p>
             <a:pPr>
-              <a:defRPr sz="2100" b="0">
+              <a:defRPr sz="2175" b="0">
                 <a:solidFill>
                   <a:srgbClr val="172B45"/>
                 </a:solidFill>
@@ -11085,7 +11062,7 @@
               </a:defRPr>
             </a:pPr>
             <a:r>
-              <a:rPr sz="2100" b="0">
+              <a:rPr sz="2175" b="0">
                 <a:solidFill>
                   <a:srgbClr val="172B45"/>
                 </a:solidFill>
@@ -11093,7 +11070,7 @@
                 <a:ea typeface="Aptos"/>
                 <a:cs typeface="Aptos"/>
               </a:rPr>
-              <a:t>Pandas prevalence</a:t>
+              <a:t>Random Forest importance attributed to experience-related features</a:t>
             </a:r>
           </a:p>
         </p:txBody>
@@ -11103,7 +11080,7 @@
           <p:cNvPr id="5" name="Rectangle 4">
             <a:extLst>
               <a:ext uri="{FF2B5EF4-FFF2-40B4-BE49-F238E27FC236}">
-                <a16:creationId xmlns:a16="http://schemas.microsoft.com/office/drawing/2014/main" id="{CE65390F-730B-4097-939D-0C1683663A6E}"/>
+                <a16:creationId xmlns:a16="http://schemas.microsoft.com/office/drawing/2014/main" id="{14300B84-DDDA-40E8-A6DA-2090544FE161}"/>
               </a:ext>
             </a:extLst>
           </p:cNvPr>
@@ -11114,8 +11091,8 @@
         </p:nvSpPr>
         <p:spPr>
           <a:xfrm>
-            <a:off x="6191250" y="1571625"/>
-            <a:ext cx="5048250" cy="1000125"/>
+            <a:off x="6858000" y="1666875"/>
+            <a:ext cx="4476750" cy="571500"/>
           </a:xfrm>
           <a:prstGeom prst="rect">
             <a:avLst/>
@@ -11132,9 +11109,9 @@
           <a:lstStyle/>
           <a:p>
             <a:pPr>
-              <a:defRPr sz="5700" b="1">
-                <a:solidFill>
-                  <a:srgbClr val="275F96"/>
+              <a:defRPr sz="2400" b="1">
+                <a:solidFill>
+                  <a:srgbClr val="172B45"/>
                 </a:solidFill>
                 <a:latin typeface="Aptos"/>
                 <a:ea typeface="Aptos"/>
@@ -11142,15 +11119,15 @@
               </a:defRPr>
             </a:pPr>
             <a:r>
-              <a:rPr sz="5700" b="1">
-                <a:solidFill>
-                  <a:srgbClr val="275F96"/>
+              <a:rPr sz="2400" b="1">
+                <a:solidFill>
+                  <a:srgbClr val="172B45"/>
                 </a:solidFill>
                 <a:latin typeface="Aptos"/>
                 <a:ea typeface="Aptos"/>
                 <a:cs typeface="Aptos"/>
               </a:rPr>
-              <a:t>39–40%</a:t>
+              <a:t>Business implication</a:t>
             </a:r>
           </a:p>
         </p:txBody>
@@ -11160,7 +11137,7 @@
           <p:cNvPr id="6" name="Rectangle 5">
             <a:extLst>
               <a:ext uri="{FF2B5EF4-FFF2-40B4-BE49-F238E27FC236}">
-                <a16:creationId xmlns:a16="http://schemas.microsoft.com/office/drawing/2014/main" id="{AF6D50B9-81CE-4B50-8647-437608935D21}"/>
+                <a16:creationId xmlns:a16="http://schemas.microsoft.com/office/drawing/2014/main" id="{D1F25515-80E7-4958-B613-EB2C2CF3277D}"/>
               </a:ext>
             </a:extLst>
           </p:cNvPr>
@@ -11171,8 +11148,8 @@
         </p:nvSpPr>
         <p:spPr>
           <a:xfrm>
-            <a:off x="6191250" y="2667000"/>
-            <a:ext cx="5048250" cy="809625"/>
+            <a:off x="6858000" y="2428875"/>
+            <a:ext cx="4476750" cy="1476375"/>
           </a:xfrm>
           <a:prstGeom prst="rect">
             <a:avLst/>
@@ -11189,7 +11166,7 @@
           <a:lstStyle/>
           <a:p>
             <a:pPr>
-              <a:defRPr sz="2100" b="0">
+              <a:defRPr sz="2250" b="0">
                 <a:solidFill>
                   <a:srgbClr val="172B45"/>
                 </a:solidFill>
@@ -11199,7 +11176,7 @@
               </a:defRPr>
             </a:pPr>
             <a:r>
-              <a:rPr sz="2100" b="0">
+              <a:rPr sz="2250" b="0">
                 <a:solidFill>
                   <a:srgbClr val="172B45"/>
                 </a:solidFill>
@@ -11207,7 +11184,7 @@
                 <a:ea typeface="Aptos"/>
                 <a:cs typeface="Aptos"/>
               </a:rPr>
-              <a:t>Several traditional ML tools and methods</a:t>
+              <a:t>Consistent seniority and experience definitions deserve attention in role design.</a:t>
             </a:r>
           </a:p>
         </p:txBody>
@@ -11217,64 +11194,7 @@
           <p:cNvPr id="7" name="Rectangle 6">
             <a:extLst>
               <a:ext uri="{FF2B5EF4-FFF2-40B4-BE49-F238E27FC236}">
-                <a16:creationId xmlns:a16="http://schemas.microsoft.com/office/drawing/2014/main" id="{08E2CFE8-8F0E-4AE4-9F02-8E42107759C3}"/>
-              </a:ext>
-            </a:extLst>
-          </p:cNvPr>
-          <p:cNvSpPr>
-            <a:spLocks noGrp="1"/>
-          </p:cNvSpPr>
-          <p:nvPr/>
-        </p:nvSpPr>
-        <p:spPr>
-          <a:xfrm>
-            <a:off x="762000" y="4095750"/>
-            <a:ext cx="10477500" cy="809625"/>
-          </a:xfrm>
-          <a:prstGeom prst="rect">
-            <a:avLst/>
-          </a:prstGeom>
-          <a:noFill/>
-          <a:ln w="0">
-            <a:noFill/>
-          </a:ln>
-        </p:spPr>
-        <p:txBody>
-          <a:bodyPr>
-            <a:noAutofit/>
-          </a:bodyPr>
-          <a:lstStyle/>
-          <a:p>
-            <a:pPr>
-              <a:defRPr sz="2100" b="0">
-                <a:solidFill>
-                  <a:srgbClr val="172B45"/>
-                </a:solidFill>
-                <a:latin typeface="Aptos"/>
-                <a:ea typeface="Aptos"/>
-                <a:cs typeface="Aptos"/>
-              </a:defRPr>
-            </a:pPr>
-            <a:r>
-              <a:rPr sz="2100" b="0">
-                <a:solidFill>
-                  <a:srgbClr val="172B45"/>
-                </a:solidFill>
-                <a:latin typeface="Aptos"/>
-                <a:ea typeface="Aptos"/>
-                <a:cs typeface="Aptos"/>
-              </a:rPr>
-              <a:t>PyTorch appeared in about 22.1% of postings. Several MLOps tools appeared in about 19%.</a:t>
-            </a:r>
-          </a:p>
-        </p:txBody>
-      </p:sp>
-      <p:sp>
-        <p:nvSpPr>
-          <p:cNvPr id="8" name="Rectangle 7">
-            <a:extLst>
-              <a:ext uri="{FF2B5EF4-FFF2-40B4-BE49-F238E27FC236}">
-                <a16:creationId xmlns:a16="http://schemas.microsoft.com/office/drawing/2014/main" id="{4886B824-76AD-4696-9CEE-CF9D34DE05F8}"/>
+                <a16:creationId xmlns:a16="http://schemas.microsoft.com/office/drawing/2014/main" id="{0C70719A-E441-48A8-87C0-DB7454467B02}"/>
               </a:ext>
             </a:extLst>
           </p:cNvPr>
@@ -11321,7 +11241,7 @@
                 <a:ea typeface="Aptos"/>
                 <a:cs typeface="Aptos"/>
               </a:rPr>
-              <a:t>Popular-title subset only. Overall frequency differs from usefulness for identifying a specialization.</a:t>
+              <a:t>Provisional model finding. Feature importance describes model behavior and does not establish causation.</a:t>
             </a:r>
           </a:p>
         </p:txBody>
@@ -11329,7 +11249,7 @@
     </p:spTree>
     <p:extLst>
       <p:ext uri="{BB962C8B-B14F-4D97-AF65-F5344CB8AC3E}">
-        <p14:creationId xmlns:p14="http://schemas.microsoft.com/office/powerpoint/2010/main" val="832244519"/>
+        <p14:creationId xmlns:p14="http://schemas.microsoft.com/office/powerpoint/2010/main" val="1464580989"/>
       </p:ext>
     </p:extLst>
   </p:cSld>
@@ -11369,7 +11289,7 @@
           <p:cNvPr id="6" name="Rectangle 5">
             <a:extLst>
               <a:ext uri="{FF2B5EF4-FFF2-40B4-BE49-F238E27FC236}">
-                <a16:creationId xmlns:a16="http://schemas.microsoft.com/office/drawing/2014/main" id="{30B69D8B-ED19-4791-B2BC-BE612622A71A}"/>
+                <a16:creationId xmlns:a16="http://schemas.microsoft.com/office/drawing/2014/main" id="{E8D149C5-204A-4CD8-A9C2-23FC31067220}"/>
               </a:ext>
             </a:extLst>
           </p:cNvPr>
@@ -11416,7 +11336,7 @@
                 <a:ea typeface="Aptos"/>
                 <a:cs typeface="Aptos"/>
               </a:rPr>
-              <a:t>Industry, work arrangement, and applicants</a:t>
+              <a:t>The salary model is an initial analytical result</a:t>
             </a:r>
           </a:p>
         </p:txBody>
@@ -11426,7 +11346,7 @@
           <p:cNvPr id="2" name="Rectangle 1">
             <a:extLst>
               <a:ext uri="{FF2B5EF4-FFF2-40B4-BE49-F238E27FC236}">
-                <a16:creationId xmlns:a16="http://schemas.microsoft.com/office/drawing/2014/main" id="{9FF22263-D7E9-4763-B908-5C2FA364DC32}"/>
+                <a16:creationId xmlns:a16="http://schemas.microsoft.com/office/drawing/2014/main" id="{8B97B610-FCB9-41BA-BE1D-4E490BE13433}"/>
               </a:ext>
             </a:extLst>
           </p:cNvPr>
@@ -11485,44 +11405,37 @@
           <p:nvPr/>
         </p:nvGraphicFramePr>
         <p:xfrm>
-          <a:off x="762000" y="1524000"/>
-          <a:ext cx="10668000" cy="2095500"/>
+          <a:off x="762000" y="1571625"/>
+          <a:ext cx="10668000" cy="2286000"/>
         </p:xfrm>
         <a:graphic>
           <a:graphicData uri="http://schemas.openxmlformats.org/drawingml/2006/table">
             <a:tbl>
               <a:tblPr/>
               <a:tblGrid>
-                <a:gridCol w="4857750">
+                <a:gridCol w="6096000">
                   <a:extLst>
                     <a:ext uri="{9D8B030D-6E8A-4147-A177-3AD203B41FA5}">
                       <a16:colId xmlns:a16="http://schemas.microsoft.com/office/drawing/2014/main" val="20000"/>
                     </a:ext>
                   </a:extLst>
                 </a:gridCol>
-                <a:gridCol w="2095500">
+                <a:gridCol w="4572000">
                   <a:extLst>
                     <a:ext uri="{9D8B030D-6E8A-4147-A177-3AD203B41FA5}">
                       <a16:colId xmlns:a16="http://schemas.microsoft.com/office/drawing/2014/main" val="20001"/>
                     </a:ext>
                   </a:extLst>
                 </a:gridCol>
-                <a:gridCol w="3714750">
-                  <a:extLst>
-                    <a:ext uri="{9D8B030D-6E8A-4147-A177-3AD203B41FA5}">
-                      <a16:colId xmlns:a16="http://schemas.microsoft.com/office/drawing/2014/main" val="20002"/>
-                    </a:ext>
-                  </a:extLst>
-                </a:gridCol>
               </a:tblGrid>
-              <a:tr h="698500">
+              <a:tr h="762000">
                 <a:tc>
                   <a:txBody>
                     <a:bodyPr/>
                     <a:lstStyle/>
                     <a:p>
                       <a:r>
-                        <a:rPr sz="1725" b="1">
+                        <a:rPr sz="2175" b="1">
                           <a:solidFill>
                             <a:srgbClr val="FFFFFF"/>
                           </a:solidFill>
@@ -11530,7 +11443,7 @@
                           <a:ea typeface="Aptos"/>
                           <a:cs typeface="Aptos"/>
                         </a:rPr>
-                        <a:t>Comparison</a:t>
+                        <a:t>Model</a:t>
                       </a:r>
                     </a:p>
                   </a:txBody>
@@ -11546,7 +11459,7 @@
                     <a:lstStyle/>
                     <a:p>
                       <a:r>
-                        <a:rPr sz="1725" b="1">
+                        <a:rPr sz="2175" b="1">
                           <a:solidFill>
                             <a:srgbClr val="FFFFFF"/>
                           </a:solidFill>
@@ -11554,31 +11467,7 @@
                           <a:ea typeface="Aptos"/>
                           <a:cs typeface="Aptos"/>
                         </a:rPr>
-                        <a:t>Result</a:t>
-                      </a:r>
-                    </a:p>
-                  </a:txBody>
-                  <a:tcPr>
-                    <a:solidFill>
-                      <a:srgbClr val="172B45"/>
-                    </a:solidFill>
-                  </a:tcPr>
-                </a:tc>
-                <a:tc>
-                  <a:txBody>
-                    <a:bodyPr/>
-                    <a:lstStyle/>
-                    <a:p>
-                      <a:r>
-                        <a:rPr sz="1725" b="1">
-                          <a:solidFill>
-                            <a:srgbClr val="FFFFFF"/>
-                          </a:solidFill>
-                          <a:latin typeface="Aptos"/>
-                          <a:ea typeface="Aptos"/>
-                          <a:cs typeface="Aptos"/>
-                        </a:rPr>
-                        <a:t>Interpretation</a:t>
+                        <a:t>Average absolute test error</a:t>
                       </a:r>
                     </a:p>
                   </a:txBody>
@@ -11594,14 +11483,14 @@
                   </a:ext>
                 </a:extLst>
               </a:tr>
-              <a:tr h="698500">
+              <a:tr h="762000">
                 <a:tc>
                   <a:txBody>
                     <a:bodyPr/>
                     <a:lstStyle/>
                     <a:p>
                       <a:r>
-                        <a:rPr sz="1725" b="0">
+                        <a:rPr sz="2175" b="0">
                           <a:solidFill>
                             <a:srgbClr val="172B45"/>
                           </a:solidFill>
@@ -11609,7 +11498,7 @@
                           <a:ea typeface="Aptos"/>
                           <a:cs typeface="Aptos"/>
                         </a:rPr>
-                        <a:t>Industry vs. specialization</a:t>
+                        <a:t>Linear Regression</a:t>
                       </a:r>
                     </a:p>
                   </a:txBody>
@@ -11625,7 +11514,7 @@
                     <a:lstStyle/>
                     <a:p>
                       <a:r>
-                        <a:rPr sz="1725" b="0">
+                        <a:rPr sz="2175" b="0">
                           <a:solidFill>
                             <a:srgbClr val="172B45"/>
                           </a:solidFill>
@@ -11633,31 +11522,7 @@
                           <a:ea typeface="Aptos"/>
                           <a:cs typeface="Aptos"/>
                         </a:rPr>
-                        <a:t>p = 0.2141</a:t>
-                      </a:r>
-                    </a:p>
-                  </a:txBody>
-                  <a:tcPr>
-                    <a:solidFill>
-                      <a:srgbClr val="F0F4F8"/>
-                    </a:solidFill>
-                  </a:tcPr>
-                </a:tc>
-                <a:tc>
-                  <a:txBody>
-                    <a:bodyPr/>
-                    <a:lstStyle/>
-                    <a:p>
-                      <a:r>
-                        <a:rPr sz="1725" b="0">
-                          <a:solidFill>
-                            <a:srgbClr val="172B45"/>
-                          </a:solidFill>
-                          <a:latin typeface="Aptos"/>
-                          <a:ea typeface="Aptos"/>
-                          <a:cs typeface="Aptos"/>
-                        </a:rPr>
-                        <a:t>No rejection of independence</a:t>
+                        <a:t>$9,478.15</a:t>
                       </a:r>
                     </a:p>
                   </a:txBody>
@@ -11673,14 +11538,14 @@
                   </a:ext>
                 </a:extLst>
               </a:tr>
-              <a:tr h="698500">
+              <a:tr h="762000">
                 <a:tc>
                   <a:txBody>
                     <a:bodyPr/>
                     <a:lstStyle/>
                     <a:p>
                       <a:r>
-                        <a:rPr sz="1725" b="0">
+                        <a:rPr sz="2175" b="0">
                           <a:solidFill>
                             <a:srgbClr val="172B45"/>
                           </a:solidFill>
@@ -11688,7 +11553,7 @@
                           <a:ea typeface="Aptos"/>
                           <a:cs typeface="Aptos"/>
                         </a:rPr>
-                        <a:t>Work arrangement vs. specialization</a:t>
+                        <a:t>Random Forest</a:t>
                       </a:r>
                     </a:p>
                   </a:txBody>
@@ -11704,7 +11569,7 @@
                     <a:lstStyle/>
                     <a:p>
                       <a:r>
-                        <a:rPr sz="1725" b="0">
+                        <a:rPr sz="2175" b="0">
                           <a:solidFill>
                             <a:srgbClr val="172B45"/>
                           </a:solidFill>
@@ -11712,31 +11577,7 @@
                           <a:ea typeface="Aptos"/>
                           <a:cs typeface="Aptos"/>
                         </a:rPr>
-                        <a:t>p = 0.7279</a:t>
-                      </a:r>
-                    </a:p>
-                  </a:txBody>
-                  <a:tcPr>
-                    <a:solidFill>
-                      <a:srgbClr val="FFFFFF"/>
-                    </a:solidFill>
-                  </a:tcPr>
-                </a:tc>
-                <a:tc>
-                  <a:txBody>
-                    <a:bodyPr/>
-                    <a:lstStyle/>
-                    <a:p>
-                      <a:r>
-                        <a:rPr sz="1725" b="0">
-                          <a:solidFill>
-                            <a:srgbClr val="172B45"/>
-                          </a:solidFill>
-                          <a:latin typeface="Aptos"/>
-                          <a:ea typeface="Aptos"/>
-                          <a:cs typeface="Aptos"/>
-                        </a:rPr>
-                        <a:t>No rejection of independence</a:t>
+                        <a:t>$9,250.28</a:t>
                       </a:r>
                     </a:p>
                   </a:txBody>
@@ -11761,7 +11602,7 @@
           <p:cNvPr id="4" name="Rectangle 3">
             <a:extLst>
               <a:ext uri="{FF2B5EF4-FFF2-40B4-BE49-F238E27FC236}">
-                <a16:creationId xmlns:a16="http://schemas.microsoft.com/office/drawing/2014/main" id="{68EE6EFB-8AD2-464E-8E69-BD6D046C7DF7}"/>
+                <a16:creationId xmlns:a16="http://schemas.microsoft.com/office/drawing/2014/main" id="{AC2C4E7E-D368-49E9-8E4E-1A9E022FE808}"/>
               </a:ext>
             </a:extLst>
           </p:cNvPr>
@@ -11772,8 +11613,8 @@
         </p:nvSpPr>
         <p:spPr>
           <a:xfrm>
-            <a:off x="762000" y="4048125"/>
-            <a:ext cx="10572750" cy="1047750"/>
+            <a:off x="762000" y="4238625"/>
+            <a:ext cx="10572750" cy="952500"/>
           </a:xfrm>
           <a:prstGeom prst="rect">
             <a:avLst/>
@@ -11790,7 +11631,7 @@
           <a:lstStyle/>
           <a:p>
             <a:pPr>
-              <a:defRPr sz="2100" b="0">
+              <a:defRPr sz="2250" b="0">
                 <a:solidFill>
                   <a:srgbClr val="172B45"/>
                 </a:solidFill>
@@ -11800,7 +11641,7 @@
               </a:defRPr>
             </a:pPr>
             <a:r>
-              <a:rPr sz="2100" b="0">
+              <a:rPr sz="2250" b="0">
                 <a:solidFill>
                   <a:srgbClr val="172B45"/>
                 </a:solidFill>
@@ -11808,7 +11649,7 @@
                 <a:ea typeface="Aptos"/>
                 <a:cs typeface="Aptos"/>
               </a:rPr>
-              <a:t>Median applicant counts ranged from 212 to 238 by specialization. Within-group standard deviations were about 128–132.</a:t>
+              <a:t>Random Forest improved error by about 2.4%. This modest gain does not establish readiness for business use.</a:t>
             </a:r>
           </a:p>
         </p:txBody>
@@ -11818,7 +11659,7 @@
           <p:cNvPr id="5" name="Rectangle 4">
             <a:extLst>
               <a:ext uri="{FF2B5EF4-FFF2-40B4-BE49-F238E27FC236}">
-                <a16:creationId xmlns:a16="http://schemas.microsoft.com/office/drawing/2014/main" id="{B8ACD38F-639B-4B5F-98FD-2A3EDC2CFEA2}"/>
+                <a16:creationId xmlns:a16="http://schemas.microsoft.com/office/drawing/2014/main" id="{050AA144-D25B-40C5-BC43-DE44C19AAB72}"/>
               </a:ext>
             </a:extLst>
           </p:cNvPr>
@@ -11865,7 +11706,7 @@
                 <a:ea typeface="Aptos"/>
                 <a:cs typeface="Aptos"/>
               </a:rPr>
-              <a:t>At α = 0.05, these tests do not prove independence. Applicant patterns are descriptive.</a:t>
+              <a:t>PROVISIONAL: Errors use the currently processed salary-range midpoints. Currency and geography need correction.</a:t>
             </a:r>
           </a:p>
         </p:txBody>
@@ -11873,7 +11714,7 @@
     </p:spTree>
     <p:extLst>
       <p:ext uri="{BB962C8B-B14F-4D97-AF65-F5344CB8AC3E}">
-        <p14:creationId xmlns:p14="http://schemas.microsoft.com/office/powerpoint/2010/main" val="1695798344"/>
+        <p14:creationId xmlns:p14="http://schemas.microsoft.com/office/powerpoint/2010/main" val="2113613"/>
       </p:ext>
     </p:extLst>
   </p:cSld>

--- a/reports/AI Jobs Project.pptx
+++ b/reports/AI Jobs Project.pptx
@@ -5,24 +5,25 @@
     <p:sldMasterId id="2147483648" r:id="rId1"/>
   </p:sldMasterIdLst>
   <p:notesMasterIdLst>
-    <p:notesMasterId r:id="rId17"/>
+    <p:notesMasterId r:id="rId18"/>
   </p:notesMasterIdLst>
   <p:sldIdLst>
-    <p:sldId id="256" r:id="rId2"/>
-    <p:sldId id="257" r:id="rId3"/>
-    <p:sldId id="258" r:id="rId4"/>
-    <p:sldId id="259" r:id="rId5"/>
-    <p:sldId id="260" r:id="rId6"/>
-    <p:sldId id="261" r:id="rId7"/>
-    <p:sldId id="262" r:id="rId8"/>
-    <p:sldId id="263" r:id="rId9"/>
-    <p:sldId id="264" r:id="rId10"/>
-    <p:sldId id="265" r:id="rId11"/>
-    <p:sldId id="266" r:id="rId12"/>
-    <p:sldId id="267" r:id="rId13"/>
-    <p:sldId id="268" r:id="rId14"/>
-    <p:sldId id="269" r:id="rId15"/>
-    <p:sldId id="270" r:id="rId16"/>
+    <p:sldId id="271" r:id="rId2"/>
+    <p:sldId id="256" r:id="rId3"/>
+    <p:sldId id="257" r:id="rId4"/>
+    <p:sldId id="258" r:id="rId5"/>
+    <p:sldId id="259" r:id="rId6"/>
+    <p:sldId id="260" r:id="rId7"/>
+    <p:sldId id="261" r:id="rId8"/>
+    <p:sldId id="262" r:id="rId9"/>
+    <p:sldId id="263" r:id="rId10"/>
+    <p:sldId id="264" r:id="rId11"/>
+    <p:sldId id="265" r:id="rId12"/>
+    <p:sldId id="266" r:id="rId13"/>
+    <p:sldId id="267" r:id="rId14"/>
+    <p:sldId id="268" r:id="rId15"/>
+    <p:sldId id="269" r:id="rId16"/>
+    <p:sldId id="270" r:id="rId17"/>
   </p:sldIdLst>
   <p:sldSz cx="12192000" cy="6858000"/>
   <p:notesSz cx="6858000" cy="9144000"/>
@@ -1609,7 +1610,7 @@
           <a:lstStyle/>
           <a:p>
             <a:fld id="{61C7EFC4-DD65-40CB-B951-0945CF071A29}" type="datetimeFigureOut">
-              <a:t>10/1/2026</a:t>
+              <a:t>10/1/26</a:t>
             </a:fld>
             <a:endParaRPr/>
           </a:p>
@@ -1804,7 +1805,7 @@
           <a:lstStyle/>
           <a:p>
             <a:fld id="{61C7EFC4-DD65-40CB-B951-0945CF071A29}" type="datetimeFigureOut">
-              <a:t>10/1/2026</a:t>
+              <a:t>10/1/26</a:t>
             </a:fld>
             <a:endParaRPr/>
           </a:p>
@@ -2009,7 +2010,7 @@
           <a:lstStyle/>
           <a:p>
             <a:fld id="{61C7EFC4-DD65-40CB-B951-0945CF071A29}" type="datetimeFigureOut">
-              <a:t>10/1/2026</a:t>
+              <a:t>10/1/26</a:t>
             </a:fld>
             <a:endParaRPr/>
           </a:p>
@@ -2204,7 +2205,7 @@
           <a:lstStyle/>
           <a:p>
             <a:fld id="{61C7EFC4-DD65-40CB-B951-0945CF071A29}" type="datetimeFigureOut">
-              <a:t>10/1/2026</a:t>
+              <a:t>10/1/26</a:t>
             </a:fld>
             <a:endParaRPr/>
           </a:p>
@@ -2473,7 +2474,7 @@
           <a:lstStyle/>
           <a:p>
             <a:fld id="{61C7EFC4-DD65-40CB-B951-0945CF071A29}" type="datetimeFigureOut">
-              <a:t>10/1/2026</a:t>
+              <a:t>10/1/26</a:t>
             </a:fld>
             <a:endParaRPr/>
           </a:p>
@@ -2740,7 +2741,7 @@
           <a:lstStyle/>
           <a:p>
             <a:fld id="{61C7EFC4-DD65-40CB-B951-0945CF071A29}" type="datetimeFigureOut">
-              <a:t>10/1/2026</a:t>
+              <a:t>10/1/26</a:t>
             </a:fld>
             <a:endParaRPr/>
           </a:p>
@@ -3156,7 +3157,7 @@
           <a:lstStyle/>
           <a:p>
             <a:fld id="{61C7EFC4-DD65-40CB-B951-0945CF071A29}" type="datetimeFigureOut">
-              <a:t>10/1/2026</a:t>
+              <a:t>10/1/26</a:t>
             </a:fld>
             <a:endParaRPr/>
           </a:p>
@@ -3289,7 +3290,7 @@
           <a:lstStyle/>
           <a:p>
             <a:fld id="{61C7EFC4-DD65-40CB-B951-0945CF071A29}" type="datetimeFigureOut">
-              <a:t>10/1/2026</a:t>
+              <a:t>10/1/26</a:t>
             </a:fld>
             <a:endParaRPr/>
           </a:p>
@@ -3395,7 +3396,7 @@
           <a:lstStyle/>
           <a:p>
             <a:fld id="{61C7EFC4-DD65-40CB-B951-0945CF071A29}" type="datetimeFigureOut">
-              <a:t>10/1/2026</a:t>
+              <a:t>10/1/26</a:t>
             </a:fld>
             <a:endParaRPr/>
           </a:p>
@@ -3714,7 +3715,7 @@
           <a:lstStyle/>
           <a:p>
             <a:fld id="{61C7EFC4-DD65-40CB-B951-0945CF071A29}" type="datetimeFigureOut">
-              <a:t>10/1/2026</a:t>
+              <a:t>10/1/26</a:t>
             </a:fld>
             <a:endParaRPr/>
           </a:p>
@@ -3996,7 +3997,7 @@
           <a:lstStyle/>
           <a:p>
             <a:fld id="{61C7EFC4-DD65-40CB-B951-0945CF071A29}" type="datetimeFigureOut">
-              <a:t>10/1/2026</a:t>
+              <a:t>10/1/26</a:t>
             </a:fld>
             <a:endParaRPr/>
           </a:p>
@@ -4235,7 +4236,7 @@
           </a:lstStyle>
           <a:p>
             <a:fld id="{61C7EFC4-DD65-40CB-B951-0945CF071A29}" type="datetimeFigureOut">
-              <a:t>10/1/2026</a:t>
+              <a:t>10/1/26</a:t>
             </a:fld>
             <a:endParaRPr/>
           </a:p>
@@ -4656,10 +4657,10 @@
       </p:grpSpPr>
       <p:sp>
         <p:nvSpPr>
-          <p:cNvPr id="2" name="Title 1">
-            <a:extLst>
-              <a:ext uri="{FF2B5EF4-FFF2-40B4-BE49-F238E27FC236}">
-                <a16:creationId xmlns:a16="http://schemas.microsoft.com/office/drawing/2014/main" id="{C576054E-6BDC-5965-777B-8E5A146AF99F}"/>
+          <p:cNvPr id="4" name="Title 3">
+            <a:extLst>
+              <a:ext uri="{FF2B5EF4-FFF2-40B4-BE49-F238E27FC236}">
+                <a16:creationId xmlns:a16="http://schemas.microsoft.com/office/drawing/2014/main" id="{8A5A3B81-C6EA-4305-48AC-C2431F1D2114}"/>
               </a:ext>
             </a:extLst>
           </p:cNvPr>
@@ -4669,65 +4670,111 @@
           <p:nvPr>
             <p:ph type="ctrTitle"/>
           </p:nvPr>
+        </p:nvSpPr>
+        <p:spPr/>
+        <p:txBody>
+          <a:bodyPr/>
+          <a:lstStyle/>
+          <a:p>
+            <a:r>
+              <a:rPr lang="en-US" dirty="0"/>
+              <a:t>AI Jobs Report</a:t>
+            </a:r>
+          </a:p>
+        </p:txBody>
+      </p:sp>
+      <p:sp>
+        <p:nvSpPr>
+          <p:cNvPr id="5" name="Subtitle 4">
+            <a:extLst>
+              <a:ext uri="{FF2B5EF4-FFF2-40B4-BE49-F238E27FC236}">
+                <a16:creationId xmlns:a16="http://schemas.microsoft.com/office/drawing/2014/main" id="{6792E298-CE8D-845A-8E27-671D42E0AC83}"/>
+              </a:ext>
+            </a:extLst>
+          </p:cNvPr>
+          <p:cNvSpPr>
+            <a:spLocks noGrp="1"/>
+          </p:cNvSpPr>
+          <p:nvPr>
+            <p:ph type="subTitle" idx="1"/>
+          </p:nvPr>
+        </p:nvSpPr>
+        <p:spPr/>
+        <p:txBody>
+          <a:bodyPr/>
+          <a:lstStyle/>
+          <a:p>
+            <a:r>
+              <a:rPr lang="en-US" dirty="0"/>
+              <a:t>By Bruno Sanchez</a:t>
+            </a:r>
+          </a:p>
+        </p:txBody>
+      </p:sp>
+    </p:spTree>
+    <p:extLst>
+      <p:ext uri="{BB962C8B-B14F-4D97-AF65-F5344CB8AC3E}">
+        <p14:creationId xmlns:p14="http://schemas.microsoft.com/office/powerpoint/2010/main" val="1276086028"/>
+      </p:ext>
+    </p:extLst>
+  </p:cSld>
+  <p:clrMapOvr>
+    <a:masterClrMapping/>
+  </p:clrMapOvr>
+</p:sld>
+</file>
+
+<file path=ppt/slides/slide10.xml><?xml version="1.0" encoding="utf-8"?>
+<p:sld xmlns:a="http://schemas.openxmlformats.org/drawingml/2006/main" xmlns:r="http://schemas.openxmlformats.org/officeDocument/2006/relationships" xmlns:p="http://schemas.openxmlformats.org/presentationml/2006/main">
+  <p:cSld>
+    <p:bg>
+      <p:bgPr>
+        <a:solidFill>
+          <a:srgbClr val="FFFFFF"/>
+        </a:solidFill>
+        <a:effectLst/>
+      </p:bgPr>
+    </p:bg>
+    <p:spTree>
+      <p:nvGrpSpPr>
+        <p:cNvPr id="1" name=""/>
+        <p:cNvGrpSpPr/>
+        <p:nvPr/>
+      </p:nvGrpSpPr>
+      <p:grpSpPr>
+        <a:xfrm>
+          <a:off x="0" y="0"/>
+          <a:ext cx="0" cy="0"/>
+          <a:chOff x="0" y="0"/>
+          <a:chExt cx="0" cy="0"/>
+        </a:xfrm>
+      </p:grpSpPr>
+      <p:sp>
+        <p:nvSpPr>
+          <p:cNvPr id="6" name="Rectangle 5">
+            <a:extLst>
+              <a:ext uri="{FF2B5EF4-FFF2-40B4-BE49-F238E27FC236}">
+                <a16:creationId xmlns:a16="http://schemas.microsoft.com/office/drawing/2014/main" id="{E8D149C5-204A-4CD8-A9C2-23FC31067220}"/>
+              </a:ext>
+            </a:extLst>
+          </p:cNvPr>
+          <p:cNvSpPr>
+            <a:spLocks noGrp="1"/>
+          </p:cNvSpPr>
+          <p:nvPr/>
         </p:nvSpPr>
         <p:spPr>
           <a:xfrm>
             <a:off x="666750" y="428625"/>
             <a:ext cx="10858500" cy="857250"/>
           </a:xfrm>
-        </p:spPr>
-        <p:txBody>
-          <a:bodyPr>
-            <a:normAutofit/>
-          </a:bodyPr>
-          <a:lstStyle/>
-          <a:p>
-            <a:pPr algn="l">
-              <a:defRPr sz="3150" b="1">
-                <a:solidFill>
-                  <a:srgbClr val="172B45"/>
-                </a:solidFill>
-                <a:latin typeface="Aptos"/>
-                <a:ea typeface="Aptos"/>
-                <a:cs typeface="Aptos"/>
-              </a:defRPr>
-            </a:pPr>
-            <a:r>
-              <a:rPr sz="3150" b="1">
-                <a:solidFill>
-                  <a:srgbClr val="172B45"/>
-                </a:solidFill>
-                <a:latin typeface="Aptos"/>
-                <a:ea typeface="Aptos"/>
-                <a:cs typeface="Aptos"/>
-              </a:rPr>
-              <a:t>Problem statement</a:t>
-            </a:r>
-            <a:endParaRPr/>
-          </a:p>
-        </p:txBody>
-      </p:sp>
-      <p:sp>
-        <p:nvSpPr>
-          <p:cNvPr id="3" name="Subtitle 2">
-            <a:extLst>
-              <a:ext uri="{FF2B5EF4-FFF2-40B4-BE49-F238E27FC236}">
-                <a16:creationId xmlns:a16="http://schemas.microsoft.com/office/drawing/2014/main" id="{1E47AFC6-C82A-2922-535F-D3662ED622F1}"/>
-              </a:ext>
-            </a:extLst>
-          </p:cNvPr>
-          <p:cNvSpPr>
-            <a:spLocks noGrp="1"/>
-          </p:cNvSpPr>
-          <p:nvPr>
-            <p:ph type="subTitle" idx="1"/>
-          </p:nvPr>
-        </p:nvSpPr>
-        <p:spPr>
-          <a:xfrm>
-            <a:off x="762000" y="1714500"/>
-            <a:ext cx="10572750" cy="3238500"/>
-          </a:xfrm>
+          <a:prstGeom prst="rect">
+            <a:avLst/>
+          </a:prstGeom>
+          <a:noFill/>
+          <a:ln w="0">
+            <a:noFill/>
+          </a:ln>
         </p:spPr>
         <p:txBody>
           <a:bodyPr>
@@ -4735,8 +4782,8 @@
           </a:bodyPr>
           <a:lstStyle/>
           <a:p>
-            <a:pPr algn="l">
-              <a:defRPr sz="2325">
+            <a:pPr>
+              <a:defRPr sz="3150" b="1">
                 <a:solidFill>
                   <a:srgbClr val="172B45"/>
                 </a:solidFill>
@@ -4746,7 +4793,7 @@
               </a:defRPr>
             </a:pPr>
             <a:r>
-              <a:rPr sz="2325">
+              <a:rPr sz="3150" b="1">
                 <a:solidFill>
                   <a:srgbClr val="172B45"/>
                 </a:solidFill>
@@ -4754,28 +4801,330 @@
                 <a:ea typeface="Aptos"/>
                 <a:cs typeface="Aptos"/>
               </a:rPr>
-              <a:t>The rapid expansion of AI-related employment has created inconsistent and overlapping job titles across industries, making it difficult for job seekers and analysts to understand how AI roles differ in compensation, experience expectations, work arrangements, and market positioning. </a:t>
-            </a:r>
-            <a:r>
-              <a:rPr sz="2325" dirty="0">
+              <a:t>The salary model is an initial analytical result</a:t>
+            </a:r>
+          </a:p>
+        </p:txBody>
+      </p:sp>
+      <p:sp>
+        <p:nvSpPr>
+          <p:cNvPr id="2" name="Rectangle 1">
+            <a:extLst>
+              <a:ext uri="{FF2B5EF4-FFF2-40B4-BE49-F238E27FC236}">
+                <a16:creationId xmlns:a16="http://schemas.microsoft.com/office/drawing/2014/main" id="{8B97B610-FCB9-41BA-BE1D-4E490BE13433}"/>
+              </a:ext>
+            </a:extLst>
+          </p:cNvPr>
+          <p:cNvSpPr>
+            <a:spLocks noGrp="1"/>
+          </p:cNvSpPr>
+          <p:nvPr/>
+        </p:nvSpPr>
+        <p:spPr>
+          <a:xfrm>
+            <a:off x="11334750" y="6381750"/>
+            <a:ext cx="381000" cy="238125"/>
+          </a:xfrm>
+          <a:prstGeom prst="rect">
+            <a:avLst/>
+          </a:prstGeom>
+          <a:noFill/>
+          <a:ln w="0">
+            <a:noFill/>
+          </a:ln>
+        </p:spPr>
+        <p:txBody>
+          <a:bodyPr>
+            <a:noAutofit/>
+          </a:bodyPr>
+          <a:lstStyle/>
+          <a:p>
+            <a:pPr>
+              <a:defRPr sz="1200" b="0">
+                <a:solidFill>
+                  <a:srgbClr val="687887"/>
+                </a:solidFill>
+                <a:latin typeface="Aptos"/>
+                <a:ea typeface="Aptos"/>
+                <a:cs typeface="Aptos"/>
+              </a:defRPr>
+            </a:pPr>
+            <a:r>
+              <a:rPr sz="1200" b="0">
+                <a:solidFill>
+                  <a:srgbClr val="687887"/>
+                </a:solidFill>
+                <a:latin typeface="Aptos"/>
+                <a:ea typeface="Aptos"/>
+                <a:cs typeface="Aptos"/>
+              </a:rPr>
+              <a:t>9</a:t>
+            </a:r>
+          </a:p>
+        </p:txBody>
+      </p:sp>
+      <p:graphicFrame>
+        <p:nvGraphicFramePr>
+          <p:cNvPr id="8" name="Table 7"/>
+          <p:cNvGraphicFramePr/>
+          <p:nvPr/>
+        </p:nvGraphicFramePr>
+        <p:xfrm>
+          <a:off x="762000" y="1571625"/>
+          <a:ext cx="10668000" cy="2286000"/>
+        </p:xfrm>
+        <a:graphic>
+          <a:graphicData uri="http://schemas.openxmlformats.org/drawingml/2006/table">
+            <a:tbl>
+              <a:tblPr/>
+              <a:tblGrid>
+                <a:gridCol w="6096000">
+                  <a:extLst>
+                    <a:ext uri="{9D8B030D-6E8A-4147-A177-3AD203B41FA5}">
+                      <a16:colId xmlns:a16="http://schemas.microsoft.com/office/drawing/2014/main" val="20000"/>
+                    </a:ext>
+                  </a:extLst>
+                </a:gridCol>
+                <a:gridCol w="4572000">
+                  <a:extLst>
+                    <a:ext uri="{9D8B030D-6E8A-4147-A177-3AD203B41FA5}">
+                      <a16:colId xmlns:a16="http://schemas.microsoft.com/office/drawing/2014/main" val="20001"/>
+                    </a:ext>
+                  </a:extLst>
+                </a:gridCol>
+              </a:tblGrid>
+              <a:tr h="762000">
+                <a:tc>
+                  <a:txBody>
+                    <a:bodyPr/>
+                    <a:lstStyle/>
+                    <a:p>
+                      <a:r>
+                        <a:rPr sz="2175" b="1">
+                          <a:solidFill>
+                            <a:srgbClr val="FFFFFF"/>
+                          </a:solidFill>
+                          <a:latin typeface="Aptos"/>
+                          <a:ea typeface="Aptos"/>
+                          <a:cs typeface="Aptos"/>
+                        </a:rPr>
+                        <a:t>Model</a:t>
+                      </a:r>
+                    </a:p>
+                  </a:txBody>
+                  <a:tcPr>
+                    <a:solidFill>
+                      <a:srgbClr val="172B45"/>
+                    </a:solidFill>
+                  </a:tcPr>
+                </a:tc>
+                <a:tc>
+                  <a:txBody>
+                    <a:bodyPr/>
+                    <a:lstStyle/>
+                    <a:p>
+                      <a:r>
+                        <a:rPr sz="2175" b="1">
+                          <a:solidFill>
+                            <a:srgbClr val="FFFFFF"/>
+                          </a:solidFill>
+                          <a:latin typeface="Aptos"/>
+                          <a:ea typeface="Aptos"/>
+                          <a:cs typeface="Aptos"/>
+                        </a:rPr>
+                        <a:t>Average absolute test error</a:t>
+                      </a:r>
+                    </a:p>
+                  </a:txBody>
+                  <a:tcPr>
+                    <a:solidFill>
+                      <a:srgbClr val="172B45"/>
+                    </a:solidFill>
+                  </a:tcPr>
+                </a:tc>
+                <a:extLst>
+                  <a:ext uri="{0D108BD9-81ED-4DB2-BD59-A6C34878D82A}">
+                    <a16:rowId xmlns:a16="http://schemas.microsoft.com/office/drawing/2014/main" val="10000"/>
+                  </a:ext>
+                </a:extLst>
+              </a:tr>
+              <a:tr h="762000">
+                <a:tc>
+                  <a:txBody>
+                    <a:bodyPr/>
+                    <a:lstStyle/>
+                    <a:p>
+                      <a:r>
+                        <a:rPr sz="2175" b="0">
+                          <a:solidFill>
+                            <a:srgbClr val="172B45"/>
+                          </a:solidFill>
+                          <a:latin typeface="Aptos"/>
+                          <a:ea typeface="Aptos"/>
+                          <a:cs typeface="Aptos"/>
+                        </a:rPr>
+                        <a:t>Linear Regression</a:t>
+                      </a:r>
+                    </a:p>
+                  </a:txBody>
+                  <a:tcPr>
+                    <a:solidFill>
+                      <a:srgbClr val="F0F4F8"/>
+                    </a:solidFill>
+                  </a:tcPr>
+                </a:tc>
+                <a:tc>
+                  <a:txBody>
+                    <a:bodyPr/>
+                    <a:lstStyle/>
+                    <a:p>
+                      <a:r>
+                        <a:rPr sz="2175" b="0">
+                          <a:solidFill>
+                            <a:srgbClr val="172B45"/>
+                          </a:solidFill>
+                          <a:latin typeface="Aptos"/>
+                          <a:ea typeface="Aptos"/>
+                          <a:cs typeface="Aptos"/>
+                        </a:rPr>
+                        <a:t>$9,478.15</a:t>
+                      </a:r>
+                    </a:p>
+                  </a:txBody>
+                  <a:tcPr>
+                    <a:solidFill>
+                      <a:srgbClr val="F0F4F8"/>
+                    </a:solidFill>
+                  </a:tcPr>
+                </a:tc>
+                <a:extLst>
+                  <a:ext uri="{0D108BD9-81ED-4DB2-BD59-A6C34878D82A}">
+                    <a16:rowId xmlns:a16="http://schemas.microsoft.com/office/drawing/2014/main" val="10001"/>
+                  </a:ext>
+                </a:extLst>
+              </a:tr>
+              <a:tr h="762000">
+                <a:tc>
+                  <a:txBody>
+                    <a:bodyPr/>
+                    <a:lstStyle/>
+                    <a:p>
+                      <a:r>
+                        <a:rPr sz="2175" b="0">
+                          <a:solidFill>
+                            <a:srgbClr val="172B45"/>
+                          </a:solidFill>
+                          <a:latin typeface="Aptos"/>
+                          <a:ea typeface="Aptos"/>
+                          <a:cs typeface="Aptos"/>
+                        </a:rPr>
+                        <a:t>Random Forest</a:t>
+                      </a:r>
+                    </a:p>
+                  </a:txBody>
+                  <a:tcPr>
+                    <a:solidFill>
+                      <a:srgbClr val="FFFFFF"/>
+                    </a:solidFill>
+                  </a:tcPr>
+                </a:tc>
+                <a:tc>
+                  <a:txBody>
+                    <a:bodyPr/>
+                    <a:lstStyle/>
+                    <a:p>
+                      <a:r>
+                        <a:rPr sz="2175" b="0">
+                          <a:solidFill>
+                            <a:srgbClr val="172B45"/>
+                          </a:solidFill>
+                          <a:latin typeface="Aptos"/>
+                          <a:ea typeface="Aptos"/>
+                          <a:cs typeface="Aptos"/>
+                        </a:rPr>
+                        <a:t>$9,250.28</a:t>
+                      </a:r>
+                    </a:p>
+                  </a:txBody>
+                  <a:tcPr>
+                    <a:solidFill>
+                      <a:srgbClr val="FFFFFF"/>
+                    </a:solidFill>
+                  </a:tcPr>
+                </a:tc>
+                <a:extLst>
+                  <a:ext uri="{0D108BD9-81ED-4DB2-BD59-A6C34878D82A}">
+                    <a16:rowId xmlns:a16="http://schemas.microsoft.com/office/drawing/2014/main" val="10002"/>
+                  </a:ext>
+                </a:extLst>
+              </a:tr>
+            </a:tbl>
+          </a:graphicData>
+        </a:graphic>
+      </p:graphicFrame>
+      <p:sp>
+        <p:nvSpPr>
+          <p:cNvPr id="4" name="Rectangle 3">
+            <a:extLst>
+              <a:ext uri="{FF2B5EF4-FFF2-40B4-BE49-F238E27FC236}">
+                <a16:creationId xmlns:a16="http://schemas.microsoft.com/office/drawing/2014/main" id="{AC2C4E7E-D368-49E9-8E4E-1A9E022FE808}"/>
+              </a:ext>
+            </a:extLst>
+          </p:cNvPr>
+          <p:cNvSpPr>
+            <a:spLocks noGrp="1"/>
+          </p:cNvSpPr>
+          <p:nvPr/>
+        </p:nvSpPr>
+        <p:spPr>
+          <a:xfrm>
+            <a:off x="762000" y="4238625"/>
+            <a:ext cx="10572750" cy="952500"/>
+          </a:xfrm>
+          <a:prstGeom prst="rect">
+            <a:avLst/>
+          </a:prstGeom>
+          <a:noFill/>
+          <a:ln w="0">
+            <a:noFill/>
+          </a:ln>
+        </p:spPr>
+        <p:txBody>
+          <a:bodyPr>
+            <a:noAutofit/>
+          </a:bodyPr>
+          <a:lstStyle/>
+          <a:p>
+            <a:pPr>
+              <a:defRPr sz="2250" b="0">
                 <a:solidFill>
                   <a:srgbClr val="172B45"/>
                 </a:solidFill>
                 <a:latin typeface="Aptos"/>
                 <a:ea typeface="Aptos"/>
                 <a:cs typeface="Aptos"/>
+              </a:defRPr>
+            </a:pPr>
+            <a:r>
+              <a:rPr sz="2250" b="0">
+                <a:solidFill>
+                  <a:srgbClr val="172B45"/>
+                </a:solidFill>
+                <a:latin typeface="Aptos"/>
+                <a:ea typeface="Aptos"/>
+                <a:cs typeface="Aptos"/>
               </a:rPr>
-              <a:t>This project aims to identify meaningful categories of AI jobs across North America and explain the characteristics that distinguish them and what can be expected of them.</a:t>
-            </a:r>
-          </a:p>
-        </p:txBody>
-      </p:sp>
-      <p:sp>
-        <p:nvSpPr>
-          <p:cNvPr id="4" name="Rectangle 3">
-            <a:extLst>
-              <a:ext uri="{FF2B5EF4-FFF2-40B4-BE49-F238E27FC236}">
-                <a16:creationId xmlns:a16="http://schemas.microsoft.com/office/drawing/2014/main" id="{747FBD86-6753-4384-B1B5-8EAF68445059}"/>
+              <a:t>Random Forest improved error by about 2.4%. This modest gain does not establish readiness for business use.</a:t>
+            </a:r>
+          </a:p>
+        </p:txBody>
+      </p:sp>
+      <p:sp>
+        <p:nvSpPr>
+          <p:cNvPr id="5" name="Rectangle 4">
+            <a:extLst>
+              <a:ext uri="{FF2B5EF4-FFF2-40B4-BE49-F238E27FC236}">
+                <a16:creationId xmlns:a16="http://schemas.microsoft.com/office/drawing/2014/main" id="{050AA144-D25B-40C5-BC43-DE44C19AAB72}"/>
               </a:ext>
             </a:extLst>
           </p:cNvPr>
@@ -4822,7 +5171,7 @@
                 <a:ea typeface="Aptos"/>
                 <a:cs typeface="Aptos"/>
               </a:rPr>
-              <a:t>AI Jobs Project   Bruno Sanchez Parra</a:t>
+              <a:t>PROVISIONAL: Errors use the currently processed salary-range midpoints. Currency and geography need correction.</a:t>
             </a:r>
           </a:p>
         </p:txBody>
@@ -4830,7 +5179,7 @@
     </p:spTree>
     <p:extLst>
       <p:ext uri="{BB962C8B-B14F-4D97-AF65-F5344CB8AC3E}">
-        <p14:creationId xmlns:p14="http://schemas.microsoft.com/office/powerpoint/2010/main" val="2238762292"/>
+        <p14:creationId xmlns:p14="http://schemas.microsoft.com/office/powerpoint/2010/main" val="2113613"/>
       </p:ext>
     </p:extLst>
   </p:cSld>
@@ -4840,7 +5189,7 @@
 </p:sld>
 </file>
 
-<file path=ppt/slides/slide10.xml><?xml version="1.0" encoding="utf-8"?>
+<file path=ppt/slides/slide11.xml><?xml version="1.0" encoding="utf-8"?>
 <p:sld xmlns:a="http://schemas.openxmlformats.org/drawingml/2006/main" xmlns:r="http://schemas.openxmlformats.org/officeDocument/2006/relationships" xmlns:p="http://schemas.openxmlformats.org/presentationml/2006/main">
   <p:cSld>
     <p:bg>
@@ -5303,7 +5652,7 @@
 </p:sld>
 </file>
 
-<file path=ppt/slides/slide11.xml><?xml version="1.0" encoding="utf-8"?>
+<file path=ppt/slides/slide12.xml><?xml version="1.0" encoding="utf-8"?>
 <p:sld xmlns:a="http://schemas.openxmlformats.org/drawingml/2006/main" xmlns:r="http://schemas.openxmlformats.org/officeDocument/2006/relationships" xmlns:p="http://schemas.openxmlformats.org/presentationml/2006/main">
   <p:cSld>
     <p:bg>
@@ -5821,386 +6170,6 @@
 </p:sld>
 </file>
 
-<file path=ppt/slides/slide12.xml><?xml version="1.0" encoding="utf-8"?>
-<p:sld xmlns:a="http://schemas.openxmlformats.org/drawingml/2006/main" xmlns:r="http://schemas.openxmlformats.org/officeDocument/2006/relationships" xmlns:p="http://schemas.openxmlformats.org/presentationml/2006/main">
-  <p:cSld>
-    <p:bg>
-      <p:bgPr>
-        <a:solidFill>
-          <a:srgbClr val="FFFFFF"/>
-        </a:solidFill>
-        <a:effectLst/>
-      </p:bgPr>
-    </p:bg>
-    <p:spTree>
-      <p:nvGrpSpPr>
-        <p:cNvPr id="1" name=""/>
-        <p:cNvGrpSpPr/>
-        <p:nvPr/>
-      </p:nvGrpSpPr>
-      <p:grpSpPr>
-        <a:xfrm>
-          <a:off x="0" y="0"/>
-          <a:ext cx="0" cy="0"/>
-          <a:chOff x="0" y="0"/>
-          <a:chExt cx="0" cy="0"/>
-        </a:xfrm>
-      </p:grpSpPr>
-      <p:sp>
-        <p:nvSpPr>
-          <p:cNvPr id="7" name="Rectangle 6">
-            <a:extLst>
-              <a:ext uri="{FF2B5EF4-FFF2-40B4-BE49-F238E27FC236}">
-                <a16:creationId xmlns:a16="http://schemas.microsoft.com/office/drawing/2014/main" id="{F0A300F6-84DA-4A1A-8574-377CBEB591B5}"/>
-              </a:ext>
-            </a:extLst>
-          </p:cNvPr>
-          <p:cNvSpPr>
-            <a:spLocks noGrp="1"/>
-          </p:cNvSpPr>
-          <p:nvPr/>
-        </p:nvSpPr>
-        <p:spPr>
-          <a:xfrm>
-            <a:off x="666750" y="428625"/>
-            <a:ext cx="10858500" cy="857250"/>
-          </a:xfrm>
-          <a:prstGeom prst="rect">
-            <a:avLst/>
-          </a:prstGeom>
-          <a:noFill/>
-          <a:ln w="0">
-            <a:noFill/>
-          </a:ln>
-        </p:spPr>
-        <p:txBody>
-          <a:bodyPr>
-            <a:noAutofit/>
-          </a:bodyPr>
-          <a:lstStyle/>
-          <a:p>
-            <a:pPr>
-              <a:defRPr sz="3150" b="1">
-                <a:solidFill>
-                  <a:srgbClr val="172B45"/>
-                </a:solidFill>
-                <a:latin typeface="Aptos"/>
-                <a:ea typeface="Aptos"/>
-                <a:cs typeface="Aptos"/>
-              </a:defRPr>
-            </a:pPr>
-            <a:r>
-              <a:rPr sz="3150" b="1">
-                <a:solidFill>
-                  <a:srgbClr val="172B45"/>
-                </a:solidFill>
-                <a:latin typeface="Aptos"/>
-                <a:ea typeface="Aptos"/>
-                <a:cs typeface="Aptos"/>
-              </a:rPr>
-              <a:t>Next steps for a defensible business application</a:t>
-            </a:r>
-          </a:p>
-        </p:txBody>
-      </p:sp>
-      <p:sp>
-        <p:nvSpPr>
-          <p:cNvPr id="2" name="Rectangle 1">
-            <a:extLst>
-              <a:ext uri="{FF2B5EF4-FFF2-40B4-BE49-F238E27FC236}">
-                <a16:creationId xmlns:a16="http://schemas.microsoft.com/office/drawing/2014/main" id="{A339483C-93B9-4C89-B702-16FCF260FB2E}"/>
-              </a:ext>
-            </a:extLst>
-          </p:cNvPr>
-          <p:cNvSpPr>
-            <a:spLocks noGrp="1"/>
-          </p:cNvSpPr>
-          <p:nvPr/>
-        </p:nvSpPr>
-        <p:spPr>
-          <a:xfrm>
-            <a:off x="11334750" y="6381750"/>
-            <a:ext cx="381000" cy="238125"/>
-          </a:xfrm>
-          <a:prstGeom prst="rect">
-            <a:avLst/>
-          </a:prstGeom>
-          <a:noFill/>
-          <a:ln w="0">
-            <a:noFill/>
-          </a:ln>
-        </p:spPr>
-        <p:txBody>
-          <a:bodyPr>
-            <a:noAutofit/>
-          </a:bodyPr>
-          <a:lstStyle/>
-          <a:p>
-            <a:pPr>
-              <a:defRPr sz="1200" b="0">
-                <a:solidFill>
-                  <a:srgbClr val="687887"/>
-                </a:solidFill>
-                <a:latin typeface="Aptos"/>
-                <a:ea typeface="Aptos"/>
-                <a:cs typeface="Aptos"/>
-              </a:defRPr>
-            </a:pPr>
-            <a:r>
-              <a:rPr sz="1200" b="0">
-                <a:solidFill>
-                  <a:srgbClr val="687887"/>
-                </a:solidFill>
-                <a:latin typeface="Aptos"/>
-                <a:ea typeface="Aptos"/>
-                <a:cs typeface="Aptos"/>
-              </a:rPr>
-              <a:t>12</a:t>
-            </a:r>
-          </a:p>
-        </p:txBody>
-      </p:sp>
-      <p:sp>
-        <p:nvSpPr>
-          <p:cNvPr id="3" name="Rectangle 2">
-            <a:extLst>
-              <a:ext uri="{FF2B5EF4-FFF2-40B4-BE49-F238E27FC236}">
-                <a16:creationId xmlns:a16="http://schemas.microsoft.com/office/drawing/2014/main" id="{7BC8EF08-872D-4A04-9B20-2B667EA75A0A}"/>
-              </a:ext>
-            </a:extLst>
-          </p:cNvPr>
-          <p:cNvSpPr>
-            <a:spLocks noGrp="1"/>
-          </p:cNvSpPr>
-          <p:nvPr/>
-        </p:nvSpPr>
-        <p:spPr>
-          <a:xfrm>
-            <a:off x="762000" y="1571625"/>
-            <a:ext cx="10572750" cy="857250"/>
-          </a:xfrm>
-          <a:prstGeom prst="rect">
-            <a:avLst/>
-          </a:prstGeom>
-          <a:noFill/>
-          <a:ln w="0">
-            <a:noFill/>
-          </a:ln>
-        </p:spPr>
-        <p:txBody>
-          <a:bodyPr>
-            <a:noAutofit/>
-          </a:bodyPr>
-          <a:lstStyle/>
-          <a:p>
-            <a:pPr>
-              <a:defRPr sz="2100" b="0">
-                <a:solidFill>
-                  <a:srgbClr val="172B45"/>
-                </a:solidFill>
-                <a:latin typeface="Aptos"/>
-                <a:ea typeface="Aptos"/>
-                <a:cs typeface="Aptos"/>
-              </a:defRPr>
-            </a:pPr>
-            <a:r>
-              <a:rPr sz="2100" b="0">
-                <a:solidFill>
-                  <a:srgbClr val="172B45"/>
-                </a:solidFill>
-                <a:latin typeface="Aptos"/>
-                <a:ea typeface="Aptos"/>
-                <a:cs typeface="Aptos"/>
-              </a:rPr>
-              <a:t>Correct currency conversion and country labels, then rerun the salary pipeline.</a:t>
-            </a:r>
-          </a:p>
-        </p:txBody>
-      </p:sp>
-      <p:sp>
-        <p:nvSpPr>
-          <p:cNvPr id="4" name="Rectangle 3">
-            <a:extLst>
-              <a:ext uri="{FF2B5EF4-FFF2-40B4-BE49-F238E27FC236}">
-                <a16:creationId xmlns:a16="http://schemas.microsoft.com/office/drawing/2014/main" id="{A2F8F8B3-F341-48A3-94C8-3B39F9A06B9E}"/>
-              </a:ext>
-            </a:extLst>
-          </p:cNvPr>
-          <p:cNvSpPr>
-            <a:spLocks noGrp="1"/>
-          </p:cNvSpPr>
-          <p:nvPr/>
-        </p:nvSpPr>
-        <p:spPr>
-          <a:xfrm>
-            <a:off x="762000" y="2571750"/>
-            <a:ext cx="10572750" cy="857250"/>
-          </a:xfrm>
-          <a:prstGeom prst="rect">
-            <a:avLst/>
-          </a:prstGeom>
-          <a:noFill/>
-          <a:ln w="0">
-            <a:noFill/>
-          </a:ln>
-        </p:spPr>
-        <p:txBody>
-          <a:bodyPr>
-            <a:noAutofit/>
-          </a:bodyPr>
-          <a:lstStyle/>
-          <a:p>
-            <a:pPr>
-              <a:defRPr sz="2100" b="0">
-                <a:solidFill>
-                  <a:srgbClr val="172B45"/>
-                </a:solidFill>
-                <a:latin typeface="Aptos"/>
-                <a:ea typeface="Aptos"/>
-                <a:cs typeface="Aptos"/>
-              </a:defRPr>
-            </a:pPr>
-            <a:r>
-              <a:rPr sz="2100" b="0">
-                <a:solidFill>
-                  <a:srgbClr val="172B45"/>
-                </a:solidFill>
-                <a:latin typeface="Aptos"/>
-                <a:ea typeface="Aptos"/>
-                <a:cs typeface="Aptos"/>
-              </a:rPr>
-              <a:t>Test location, title, specialization, and industry. Evaluate errors by relevant workforce segment.</a:t>
-            </a:r>
-          </a:p>
-        </p:txBody>
-      </p:sp>
-      <p:sp>
-        <p:nvSpPr>
-          <p:cNvPr id="5" name="Rectangle 4">
-            <a:extLst>
-              <a:ext uri="{FF2B5EF4-FFF2-40B4-BE49-F238E27FC236}">
-                <a16:creationId xmlns:a16="http://schemas.microsoft.com/office/drawing/2014/main" id="{0703F2E5-F2CB-4E97-9807-F7C7E44CD5F2}"/>
-              </a:ext>
-            </a:extLst>
-          </p:cNvPr>
-          <p:cNvSpPr>
-            <a:spLocks noGrp="1"/>
-          </p:cNvSpPr>
-          <p:nvPr/>
-        </p:nvSpPr>
-        <p:spPr>
-          <a:xfrm>
-            <a:off x="762000" y="3571875"/>
-            <a:ext cx="10572750" cy="857250"/>
-          </a:xfrm>
-          <a:prstGeom prst="rect">
-            <a:avLst/>
-          </a:prstGeom>
-          <a:noFill/>
-          <a:ln w="0">
-            <a:noFill/>
-          </a:ln>
-        </p:spPr>
-        <p:txBody>
-          <a:bodyPr>
-            <a:noAutofit/>
-          </a:bodyPr>
-          <a:lstStyle/>
-          <a:p>
-            <a:pPr>
-              <a:defRPr sz="2100" b="0">
-                <a:solidFill>
-                  <a:srgbClr val="172B45"/>
-                </a:solidFill>
-                <a:latin typeface="Aptos"/>
-                <a:ea typeface="Aptos"/>
-                <a:cs typeface="Aptos"/>
-              </a:defRPr>
-            </a:pPr>
-            <a:r>
-              <a:rPr sz="2100" b="0">
-                <a:solidFill>
-                  <a:srgbClr val="172B45"/>
-                </a:solidFill>
-                <a:latin typeface="Aptos"/>
-                <a:ea typeface="Aptos"/>
-                <a:cs typeface="Aptos"/>
-              </a:rPr>
-              <a:t>Validate on future postings or unfamiliar employers before using predictions in planning.</a:t>
-            </a:r>
-          </a:p>
-        </p:txBody>
-      </p:sp>
-      <p:sp>
-        <p:nvSpPr>
-          <p:cNvPr id="6" name="Rectangle 5">
-            <a:extLst>
-              <a:ext uri="{FF2B5EF4-FFF2-40B4-BE49-F238E27FC236}">
-                <a16:creationId xmlns:a16="http://schemas.microsoft.com/office/drawing/2014/main" id="{10D53081-454A-4338-A7DD-090DDEACC632}"/>
-              </a:ext>
-            </a:extLst>
-          </p:cNvPr>
-          <p:cNvSpPr>
-            <a:spLocks noGrp="1"/>
-          </p:cNvSpPr>
-          <p:nvPr/>
-        </p:nvSpPr>
-        <p:spPr>
-          <a:xfrm>
-            <a:off x="762000" y="5867400"/>
-            <a:ext cx="10477500" cy="447675"/>
-          </a:xfrm>
-          <a:prstGeom prst="rect">
-            <a:avLst/>
-          </a:prstGeom>
-          <a:noFill/>
-          <a:ln w="0">
-            <a:noFill/>
-          </a:ln>
-        </p:spPr>
-        <p:txBody>
-          <a:bodyPr>
-            <a:noAutofit/>
-          </a:bodyPr>
-          <a:lstStyle/>
-          <a:p>
-            <a:pPr>
-              <a:defRPr sz="1350" b="0">
-                <a:solidFill>
-                  <a:srgbClr val="687887"/>
-                </a:solidFill>
-                <a:latin typeface="Aptos"/>
-                <a:ea typeface="Aptos"/>
-                <a:cs typeface="Aptos"/>
-              </a:defRPr>
-            </a:pPr>
-            <a:r>
-              <a:rPr sz="1350" b="0">
-                <a:solidFill>
-                  <a:srgbClr val="687887"/>
-                </a:solidFill>
-                <a:latin typeface="Aptos"/>
-                <a:ea typeface="Aptos"/>
-                <a:cs typeface="Aptos"/>
-              </a:rPr>
-              <a:t>Proposed sequence based on the report’s future work. No deployment decision has been established.</a:t>
-            </a:r>
-          </a:p>
-        </p:txBody>
-      </p:sp>
-    </p:spTree>
-    <p:extLst>
-      <p:ext uri="{BB962C8B-B14F-4D97-AF65-F5344CB8AC3E}">
-        <p14:creationId xmlns:p14="http://schemas.microsoft.com/office/powerpoint/2010/main" val="1358412867"/>
-      </p:ext>
-    </p:extLst>
-  </p:cSld>
-  <p:clrMapOvr>
-    <a:masterClrMapping/>
-  </p:clrMapOvr>
-</p:sld>
-</file>
-
 <file path=ppt/slides/slide13.xml><?xml version="1.0" encoding="utf-8"?>
 <p:sld xmlns:a="http://schemas.openxmlformats.org/drawingml/2006/main" xmlns:r="http://schemas.openxmlformats.org/officeDocument/2006/relationships" xmlns:p="http://schemas.openxmlformats.org/presentationml/2006/main">
   <p:cSld>
@@ -6231,7 +6200,7 @@
           <p:cNvPr id="7" name="Rectangle 6">
             <a:extLst>
               <a:ext uri="{FF2B5EF4-FFF2-40B4-BE49-F238E27FC236}">
-                <a16:creationId xmlns:a16="http://schemas.microsoft.com/office/drawing/2014/main" id="{862E0CBA-822A-4142-AE3B-0AEAA58A30DD}"/>
+                <a16:creationId xmlns:a16="http://schemas.microsoft.com/office/drawing/2014/main" id="{F0A300F6-84DA-4A1A-8574-377CBEB591B5}"/>
               </a:ext>
             </a:extLst>
           </p:cNvPr>
@@ -6278,7 +6247,7 @@
                 <a:ea typeface="Aptos"/>
                 <a:cs typeface="Aptos"/>
               </a:rPr>
-              <a:t>Closing perspective</a:t>
+              <a:t>Next steps for a defensible business application</a:t>
             </a:r>
           </a:p>
         </p:txBody>
@@ -6288,7 +6257,7 @@
           <p:cNvPr id="2" name="Rectangle 1">
             <a:extLst>
               <a:ext uri="{FF2B5EF4-FFF2-40B4-BE49-F238E27FC236}">
-                <a16:creationId xmlns:a16="http://schemas.microsoft.com/office/drawing/2014/main" id="{AA326C6A-F7A2-49EB-B00D-E4A4C1BD8249}"/>
+                <a16:creationId xmlns:a16="http://schemas.microsoft.com/office/drawing/2014/main" id="{A339483C-93B9-4C89-B702-16FCF260FB2E}"/>
               </a:ext>
             </a:extLst>
           </p:cNvPr>
@@ -6335,6 +6304,386 @@
                 <a:ea typeface="Aptos"/>
                 <a:cs typeface="Aptos"/>
               </a:rPr>
+              <a:t>12</a:t>
+            </a:r>
+          </a:p>
+        </p:txBody>
+      </p:sp>
+      <p:sp>
+        <p:nvSpPr>
+          <p:cNvPr id="3" name="Rectangle 2">
+            <a:extLst>
+              <a:ext uri="{FF2B5EF4-FFF2-40B4-BE49-F238E27FC236}">
+                <a16:creationId xmlns:a16="http://schemas.microsoft.com/office/drawing/2014/main" id="{7BC8EF08-872D-4A04-9B20-2B667EA75A0A}"/>
+              </a:ext>
+            </a:extLst>
+          </p:cNvPr>
+          <p:cNvSpPr>
+            <a:spLocks noGrp="1"/>
+          </p:cNvSpPr>
+          <p:nvPr/>
+        </p:nvSpPr>
+        <p:spPr>
+          <a:xfrm>
+            <a:off x="762000" y="1571625"/>
+            <a:ext cx="10572750" cy="857250"/>
+          </a:xfrm>
+          <a:prstGeom prst="rect">
+            <a:avLst/>
+          </a:prstGeom>
+          <a:noFill/>
+          <a:ln w="0">
+            <a:noFill/>
+          </a:ln>
+        </p:spPr>
+        <p:txBody>
+          <a:bodyPr>
+            <a:noAutofit/>
+          </a:bodyPr>
+          <a:lstStyle/>
+          <a:p>
+            <a:pPr>
+              <a:defRPr sz="2100" b="0">
+                <a:solidFill>
+                  <a:srgbClr val="172B45"/>
+                </a:solidFill>
+                <a:latin typeface="Aptos"/>
+                <a:ea typeface="Aptos"/>
+                <a:cs typeface="Aptos"/>
+              </a:defRPr>
+            </a:pPr>
+            <a:r>
+              <a:rPr sz="2100" b="0">
+                <a:solidFill>
+                  <a:srgbClr val="172B45"/>
+                </a:solidFill>
+                <a:latin typeface="Aptos"/>
+                <a:ea typeface="Aptos"/>
+                <a:cs typeface="Aptos"/>
+              </a:rPr>
+              <a:t>Correct currency conversion and country labels, then rerun the salary pipeline.</a:t>
+            </a:r>
+          </a:p>
+        </p:txBody>
+      </p:sp>
+      <p:sp>
+        <p:nvSpPr>
+          <p:cNvPr id="4" name="Rectangle 3">
+            <a:extLst>
+              <a:ext uri="{FF2B5EF4-FFF2-40B4-BE49-F238E27FC236}">
+                <a16:creationId xmlns:a16="http://schemas.microsoft.com/office/drawing/2014/main" id="{A2F8F8B3-F341-48A3-94C8-3B39F9A06B9E}"/>
+              </a:ext>
+            </a:extLst>
+          </p:cNvPr>
+          <p:cNvSpPr>
+            <a:spLocks noGrp="1"/>
+          </p:cNvSpPr>
+          <p:nvPr/>
+        </p:nvSpPr>
+        <p:spPr>
+          <a:xfrm>
+            <a:off x="762000" y="2571750"/>
+            <a:ext cx="10572750" cy="857250"/>
+          </a:xfrm>
+          <a:prstGeom prst="rect">
+            <a:avLst/>
+          </a:prstGeom>
+          <a:noFill/>
+          <a:ln w="0">
+            <a:noFill/>
+          </a:ln>
+        </p:spPr>
+        <p:txBody>
+          <a:bodyPr>
+            <a:noAutofit/>
+          </a:bodyPr>
+          <a:lstStyle/>
+          <a:p>
+            <a:pPr>
+              <a:defRPr sz="2100" b="0">
+                <a:solidFill>
+                  <a:srgbClr val="172B45"/>
+                </a:solidFill>
+                <a:latin typeface="Aptos"/>
+                <a:ea typeface="Aptos"/>
+                <a:cs typeface="Aptos"/>
+              </a:defRPr>
+            </a:pPr>
+            <a:r>
+              <a:rPr sz="2100" b="0">
+                <a:solidFill>
+                  <a:srgbClr val="172B45"/>
+                </a:solidFill>
+                <a:latin typeface="Aptos"/>
+                <a:ea typeface="Aptos"/>
+                <a:cs typeface="Aptos"/>
+              </a:rPr>
+              <a:t>Test location, title, specialization, and industry. Evaluate errors by relevant workforce segment.</a:t>
+            </a:r>
+          </a:p>
+        </p:txBody>
+      </p:sp>
+      <p:sp>
+        <p:nvSpPr>
+          <p:cNvPr id="5" name="Rectangle 4">
+            <a:extLst>
+              <a:ext uri="{FF2B5EF4-FFF2-40B4-BE49-F238E27FC236}">
+                <a16:creationId xmlns:a16="http://schemas.microsoft.com/office/drawing/2014/main" id="{0703F2E5-F2CB-4E97-9807-F7C7E44CD5F2}"/>
+              </a:ext>
+            </a:extLst>
+          </p:cNvPr>
+          <p:cNvSpPr>
+            <a:spLocks noGrp="1"/>
+          </p:cNvSpPr>
+          <p:nvPr/>
+        </p:nvSpPr>
+        <p:spPr>
+          <a:xfrm>
+            <a:off x="762000" y="3571875"/>
+            <a:ext cx="10572750" cy="857250"/>
+          </a:xfrm>
+          <a:prstGeom prst="rect">
+            <a:avLst/>
+          </a:prstGeom>
+          <a:noFill/>
+          <a:ln w="0">
+            <a:noFill/>
+          </a:ln>
+        </p:spPr>
+        <p:txBody>
+          <a:bodyPr>
+            <a:noAutofit/>
+          </a:bodyPr>
+          <a:lstStyle/>
+          <a:p>
+            <a:pPr>
+              <a:defRPr sz="2100" b="0">
+                <a:solidFill>
+                  <a:srgbClr val="172B45"/>
+                </a:solidFill>
+                <a:latin typeface="Aptos"/>
+                <a:ea typeface="Aptos"/>
+                <a:cs typeface="Aptos"/>
+              </a:defRPr>
+            </a:pPr>
+            <a:r>
+              <a:rPr sz="2100" b="0">
+                <a:solidFill>
+                  <a:srgbClr val="172B45"/>
+                </a:solidFill>
+                <a:latin typeface="Aptos"/>
+                <a:ea typeface="Aptos"/>
+                <a:cs typeface="Aptos"/>
+              </a:rPr>
+              <a:t>Validate on future postings or unfamiliar employers before using predictions in planning.</a:t>
+            </a:r>
+          </a:p>
+        </p:txBody>
+      </p:sp>
+      <p:sp>
+        <p:nvSpPr>
+          <p:cNvPr id="6" name="Rectangle 5">
+            <a:extLst>
+              <a:ext uri="{FF2B5EF4-FFF2-40B4-BE49-F238E27FC236}">
+                <a16:creationId xmlns:a16="http://schemas.microsoft.com/office/drawing/2014/main" id="{10D53081-454A-4338-A7DD-090DDEACC632}"/>
+              </a:ext>
+            </a:extLst>
+          </p:cNvPr>
+          <p:cNvSpPr>
+            <a:spLocks noGrp="1"/>
+          </p:cNvSpPr>
+          <p:nvPr/>
+        </p:nvSpPr>
+        <p:spPr>
+          <a:xfrm>
+            <a:off x="762000" y="5867400"/>
+            <a:ext cx="10477500" cy="447675"/>
+          </a:xfrm>
+          <a:prstGeom prst="rect">
+            <a:avLst/>
+          </a:prstGeom>
+          <a:noFill/>
+          <a:ln w="0">
+            <a:noFill/>
+          </a:ln>
+        </p:spPr>
+        <p:txBody>
+          <a:bodyPr>
+            <a:noAutofit/>
+          </a:bodyPr>
+          <a:lstStyle/>
+          <a:p>
+            <a:pPr>
+              <a:defRPr sz="1350" b="0">
+                <a:solidFill>
+                  <a:srgbClr val="687887"/>
+                </a:solidFill>
+                <a:latin typeface="Aptos"/>
+                <a:ea typeface="Aptos"/>
+                <a:cs typeface="Aptos"/>
+              </a:defRPr>
+            </a:pPr>
+            <a:r>
+              <a:rPr sz="1350" b="0">
+                <a:solidFill>
+                  <a:srgbClr val="687887"/>
+                </a:solidFill>
+                <a:latin typeface="Aptos"/>
+                <a:ea typeface="Aptos"/>
+                <a:cs typeface="Aptos"/>
+              </a:rPr>
+              <a:t>Proposed sequence based on the report’s future work. No deployment decision has been established.</a:t>
+            </a:r>
+          </a:p>
+        </p:txBody>
+      </p:sp>
+    </p:spTree>
+    <p:extLst>
+      <p:ext uri="{BB962C8B-B14F-4D97-AF65-F5344CB8AC3E}">
+        <p14:creationId xmlns:p14="http://schemas.microsoft.com/office/powerpoint/2010/main" val="1358412867"/>
+      </p:ext>
+    </p:extLst>
+  </p:cSld>
+  <p:clrMapOvr>
+    <a:masterClrMapping/>
+  </p:clrMapOvr>
+</p:sld>
+</file>
+
+<file path=ppt/slides/slide14.xml><?xml version="1.0" encoding="utf-8"?>
+<p:sld xmlns:a="http://schemas.openxmlformats.org/drawingml/2006/main" xmlns:r="http://schemas.openxmlformats.org/officeDocument/2006/relationships" xmlns:p="http://schemas.openxmlformats.org/presentationml/2006/main">
+  <p:cSld>
+    <p:bg>
+      <p:bgPr>
+        <a:solidFill>
+          <a:srgbClr val="FFFFFF"/>
+        </a:solidFill>
+        <a:effectLst/>
+      </p:bgPr>
+    </p:bg>
+    <p:spTree>
+      <p:nvGrpSpPr>
+        <p:cNvPr id="1" name=""/>
+        <p:cNvGrpSpPr/>
+        <p:nvPr/>
+      </p:nvGrpSpPr>
+      <p:grpSpPr>
+        <a:xfrm>
+          <a:off x="0" y="0"/>
+          <a:ext cx="0" cy="0"/>
+          <a:chOff x="0" y="0"/>
+          <a:chExt cx="0" cy="0"/>
+        </a:xfrm>
+      </p:grpSpPr>
+      <p:sp>
+        <p:nvSpPr>
+          <p:cNvPr id="7" name="Rectangle 6">
+            <a:extLst>
+              <a:ext uri="{FF2B5EF4-FFF2-40B4-BE49-F238E27FC236}">
+                <a16:creationId xmlns:a16="http://schemas.microsoft.com/office/drawing/2014/main" id="{862E0CBA-822A-4142-AE3B-0AEAA58A30DD}"/>
+              </a:ext>
+            </a:extLst>
+          </p:cNvPr>
+          <p:cNvSpPr>
+            <a:spLocks noGrp="1"/>
+          </p:cNvSpPr>
+          <p:nvPr/>
+        </p:nvSpPr>
+        <p:spPr>
+          <a:xfrm>
+            <a:off x="666750" y="428625"/>
+            <a:ext cx="10858500" cy="857250"/>
+          </a:xfrm>
+          <a:prstGeom prst="rect">
+            <a:avLst/>
+          </a:prstGeom>
+          <a:noFill/>
+          <a:ln w="0">
+            <a:noFill/>
+          </a:ln>
+        </p:spPr>
+        <p:txBody>
+          <a:bodyPr>
+            <a:noAutofit/>
+          </a:bodyPr>
+          <a:lstStyle/>
+          <a:p>
+            <a:pPr>
+              <a:defRPr sz="3150" b="1">
+                <a:solidFill>
+                  <a:srgbClr val="172B45"/>
+                </a:solidFill>
+                <a:latin typeface="Aptos"/>
+                <a:ea typeface="Aptos"/>
+                <a:cs typeface="Aptos"/>
+              </a:defRPr>
+            </a:pPr>
+            <a:r>
+              <a:rPr sz="3150" b="1">
+                <a:solidFill>
+                  <a:srgbClr val="172B45"/>
+                </a:solidFill>
+                <a:latin typeface="Aptos"/>
+                <a:ea typeface="Aptos"/>
+                <a:cs typeface="Aptos"/>
+              </a:rPr>
+              <a:t>Closing perspective</a:t>
+            </a:r>
+          </a:p>
+        </p:txBody>
+      </p:sp>
+      <p:sp>
+        <p:nvSpPr>
+          <p:cNvPr id="2" name="Rectangle 1">
+            <a:extLst>
+              <a:ext uri="{FF2B5EF4-FFF2-40B4-BE49-F238E27FC236}">
+                <a16:creationId xmlns:a16="http://schemas.microsoft.com/office/drawing/2014/main" id="{AA326C6A-F7A2-49EB-B00D-E4A4C1BD8249}"/>
+              </a:ext>
+            </a:extLst>
+          </p:cNvPr>
+          <p:cNvSpPr>
+            <a:spLocks noGrp="1"/>
+          </p:cNvSpPr>
+          <p:nvPr/>
+        </p:nvSpPr>
+        <p:spPr>
+          <a:xfrm>
+            <a:off x="11334750" y="6381750"/>
+            <a:ext cx="381000" cy="238125"/>
+          </a:xfrm>
+          <a:prstGeom prst="rect">
+            <a:avLst/>
+          </a:prstGeom>
+          <a:noFill/>
+          <a:ln w="0">
+            <a:noFill/>
+          </a:ln>
+        </p:spPr>
+        <p:txBody>
+          <a:bodyPr>
+            <a:noAutofit/>
+          </a:bodyPr>
+          <a:lstStyle/>
+          <a:p>
+            <a:pPr>
+              <a:defRPr sz="1200" b="0">
+                <a:solidFill>
+                  <a:srgbClr val="687887"/>
+                </a:solidFill>
+                <a:latin typeface="Aptos"/>
+                <a:ea typeface="Aptos"/>
+                <a:cs typeface="Aptos"/>
+              </a:defRPr>
+            </a:pPr>
+            <a:r>
+              <a:rPr sz="1200" b="0">
+                <a:solidFill>
+                  <a:srgbClr val="687887"/>
+                </a:solidFill>
+                <a:latin typeface="Aptos"/>
+                <a:ea typeface="Aptos"/>
+                <a:cs typeface="Aptos"/>
+              </a:rPr>
               <a:t>13</a:t>
             </a:r>
           </a:p>
@@ -6581,7 +6930,7 @@
 </p:sld>
 </file>
 
-<file path=ppt/slides/slide14.xml><?xml version="1.0" encoding="utf-8"?>
+<file path=ppt/slides/slide15.xml><?xml version="1.0" encoding="utf-8"?>
 <p:sld xmlns:a="http://schemas.openxmlformats.org/drawingml/2006/main" xmlns:r="http://schemas.openxmlformats.org/officeDocument/2006/relationships" xmlns:p="http://schemas.openxmlformats.org/presentationml/2006/main">
   <p:cSld>
     <p:bg>
@@ -7264,7 +7613,7 @@
 </p:sld>
 </file>
 
-<file path=ppt/slides/slide15.xml><?xml version="1.0" encoding="utf-8"?>
+<file path=ppt/slides/slide16.xml><?xml version="1.0" encoding="utf-8"?>
 <p:sld xmlns:a="http://schemas.openxmlformats.org/drawingml/2006/main" xmlns:r="http://schemas.openxmlformats.org/officeDocument/2006/relationships" xmlns:p="http://schemas.openxmlformats.org/presentationml/2006/main">
   <p:cSld>
     <p:bg>
@@ -7840,6 +8189,209 @@
 <file path=ppt/slides/slide2.xml><?xml version="1.0" encoding="utf-8"?>
 <p:sld xmlns:a="http://schemas.openxmlformats.org/drawingml/2006/main" xmlns:r="http://schemas.openxmlformats.org/officeDocument/2006/relationships" xmlns:p="http://schemas.openxmlformats.org/presentationml/2006/main">
   <p:cSld>
+    <p:spTree>
+      <p:nvGrpSpPr>
+        <p:cNvPr id="1" name=""/>
+        <p:cNvGrpSpPr/>
+        <p:nvPr/>
+      </p:nvGrpSpPr>
+      <p:grpSpPr>
+        <a:xfrm>
+          <a:off x="0" y="0"/>
+          <a:ext cx="0" cy="0"/>
+          <a:chOff x="0" y="0"/>
+          <a:chExt cx="0" cy="0"/>
+        </a:xfrm>
+      </p:grpSpPr>
+      <p:sp>
+        <p:nvSpPr>
+          <p:cNvPr id="2" name="Title 1">
+            <a:extLst>
+              <a:ext uri="{FF2B5EF4-FFF2-40B4-BE49-F238E27FC236}">
+                <a16:creationId xmlns:a16="http://schemas.microsoft.com/office/drawing/2014/main" id="{C576054E-6BDC-5965-777B-8E5A146AF99F}"/>
+              </a:ext>
+            </a:extLst>
+          </p:cNvPr>
+          <p:cNvSpPr>
+            <a:spLocks noGrp="1"/>
+          </p:cNvSpPr>
+          <p:nvPr>
+            <p:ph type="ctrTitle"/>
+          </p:nvPr>
+        </p:nvSpPr>
+        <p:spPr>
+          <a:xfrm>
+            <a:off x="666750" y="428625"/>
+            <a:ext cx="10858500" cy="857250"/>
+          </a:xfrm>
+        </p:spPr>
+        <p:txBody>
+          <a:bodyPr>
+            <a:normAutofit/>
+          </a:bodyPr>
+          <a:lstStyle/>
+          <a:p>
+            <a:pPr algn="l">
+              <a:defRPr sz="3150" b="1">
+                <a:solidFill>
+                  <a:srgbClr val="172B45"/>
+                </a:solidFill>
+                <a:latin typeface="Aptos"/>
+                <a:ea typeface="Aptos"/>
+                <a:cs typeface="Aptos"/>
+              </a:defRPr>
+            </a:pPr>
+            <a:r>
+              <a:rPr sz="3150" b="1">
+                <a:solidFill>
+                  <a:srgbClr val="172B45"/>
+                </a:solidFill>
+                <a:latin typeface="Aptos"/>
+                <a:ea typeface="Aptos"/>
+                <a:cs typeface="Aptos"/>
+              </a:rPr>
+              <a:t>Problem statement</a:t>
+            </a:r>
+            <a:endParaRPr/>
+          </a:p>
+        </p:txBody>
+      </p:sp>
+      <p:sp>
+        <p:nvSpPr>
+          <p:cNvPr id="3" name="Subtitle 2">
+            <a:extLst>
+              <a:ext uri="{FF2B5EF4-FFF2-40B4-BE49-F238E27FC236}">
+                <a16:creationId xmlns:a16="http://schemas.microsoft.com/office/drawing/2014/main" id="{1E47AFC6-C82A-2922-535F-D3662ED622F1}"/>
+              </a:ext>
+            </a:extLst>
+          </p:cNvPr>
+          <p:cNvSpPr>
+            <a:spLocks noGrp="1"/>
+          </p:cNvSpPr>
+          <p:nvPr>
+            <p:ph type="subTitle" idx="1"/>
+          </p:nvPr>
+        </p:nvSpPr>
+        <p:spPr>
+          <a:xfrm>
+            <a:off x="762000" y="1714500"/>
+            <a:ext cx="10572750" cy="3238500"/>
+          </a:xfrm>
+        </p:spPr>
+        <p:txBody>
+          <a:bodyPr>
+            <a:noAutofit/>
+          </a:bodyPr>
+          <a:lstStyle/>
+          <a:p>
+            <a:pPr algn="l">
+              <a:defRPr sz="2325">
+                <a:solidFill>
+                  <a:srgbClr val="172B45"/>
+                </a:solidFill>
+                <a:latin typeface="Aptos"/>
+                <a:ea typeface="Aptos"/>
+                <a:cs typeface="Aptos"/>
+              </a:defRPr>
+            </a:pPr>
+            <a:r>
+              <a:rPr sz="2325">
+                <a:solidFill>
+                  <a:srgbClr val="172B45"/>
+                </a:solidFill>
+                <a:latin typeface="Aptos"/>
+                <a:ea typeface="Aptos"/>
+                <a:cs typeface="Aptos"/>
+              </a:rPr>
+              <a:t>The rapid expansion of AI-related employment has created inconsistent and overlapping job titles across industries, making it difficult for job seekers and analysts to understand how AI roles differ in compensation, experience expectations, work arrangements, and market positioning. </a:t>
+            </a:r>
+            <a:r>
+              <a:rPr sz="2325" dirty="0">
+                <a:solidFill>
+                  <a:srgbClr val="172B45"/>
+                </a:solidFill>
+                <a:latin typeface="Aptos"/>
+                <a:ea typeface="Aptos"/>
+                <a:cs typeface="Aptos"/>
+              </a:rPr>
+              <a:t>This project aims to identify meaningful categories of AI jobs across North America and explain the characteristics that distinguish them and what can be expected of them.</a:t>
+            </a:r>
+          </a:p>
+        </p:txBody>
+      </p:sp>
+      <p:sp>
+        <p:nvSpPr>
+          <p:cNvPr id="4" name="Rectangle 3">
+            <a:extLst>
+              <a:ext uri="{FF2B5EF4-FFF2-40B4-BE49-F238E27FC236}">
+                <a16:creationId xmlns:a16="http://schemas.microsoft.com/office/drawing/2014/main" id="{747FBD86-6753-4384-B1B5-8EAF68445059}"/>
+              </a:ext>
+            </a:extLst>
+          </p:cNvPr>
+          <p:cNvSpPr>
+            <a:spLocks noGrp="1"/>
+          </p:cNvSpPr>
+          <p:nvPr/>
+        </p:nvSpPr>
+        <p:spPr>
+          <a:xfrm>
+            <a:off x="762000" y="5867400"/>
+            <a:ext cx="10477500" cy="447675"/>
+          </a:xfrm>
+          <a:prstGeom prst="rect">
+            <a:avLst/>
+          </a:prstGeom>
+          <a:noFill/>
+          <a:ln w="0">
+            <a:noFill/>
+          </a:ln>
+        </p:spPr>
+        <p:txBody>
+          <a:bodyPr>
+            <a:noAutofit/>
+          </a:bodyPr>
+          <a:lstStyle/>
+          <a:p>
+            <a:pPr>
+              <a:defRPr sz="1350" b="0">
+                <a:solidFill>
+                  <a:srgbClr val="687887"/>
+                </a:solidFill>
+                <a:latin typeface="Aptos"/>
+                <a:ea typeface="Aptos"/>
+                <a:cs typeface="Aptos"/>
+              </a:defRPr>
+            </a:pPr>
+            <a:r>
+              <a:rPr sz="1350" b="0">
+                <a:solidFill>
+                  <a:srgbClr val="687887"/>
+                </a:solidFill>
+                <a:latin typeface="Aptos"/>
+                <a:ea typeface="Aptos"/>
+                <a:cs typeface="Aptos"/>
+              </a:rPr>
+              <a:t>AI Jobs Project   Bruno Sanchez Parra</a:t>
+            </a:r>
+          </a:p>
+        </p:txBody>
+      </p:sp>
+    </p:spTree>
+    <p:extLst>
+      <p:ext uri="{BB962C8B-B14F-4D97-AF65-F5344CB8AC3E}">
+        <p14:creationId xmlns:p14="http://schemas.microsoft.com/office/powerpoint/2010/main" val="2238762292"/>
+      </p:ext>
+    </p:extLst>
+  </p:cSld>
+  <p:clrMapOvr>
+    <a:masterClrMapping/>
+  </p:clrMapOvr>
+</p:sld>
+</file>
+
+<file path=ppt/slides/slide3.xml><?xml version="1.0" encoding="utf-8"?>
+<p:sld xmlns:a="http://schemas.openxmlformats.org/drawingml/2006/main" xmlns:r="http://schemas.openxmlformats.org/officeDocument/2006/relationships" xmlns:p="http://schemas.openxmlformats.org/presentationml/2006/main">
+  <p:cSld>
     <p:bg>
       <p:bgPr>
         <a:solidFill>
@@ -8160,7 +8712,7 @@
 </p:sld>
 </file>
 
-<file path=ppt/slides/slide3.xml><?xml version="1.0" encoding="utf-8"?>
+<file path=ppt/slides/slide4.xml><?xml version="1.0" encoding="utf-8"?>
 <p:sld xmlns:a="http://schemas.openxmlformats.org/drawingml/2006/main" xmlns:r="http://schemas.openxmlformats.org/officeDocument/2006/relationships" xmlns:p="http://schemas.openxmlformats.org/presentationml/2006/main">
   <p:cSld>
     <p:bg>
@@ -8623,7 +9175,7 @@
 </p:sld>
 </file>
 
-<file path=ppt/slides/slide4.xml><?xml version="1.0" encoding="utf-8"?>
+<file path=ppt/slides/slide5.xml><?xml version="1.0" encoding="utf-8"?>
 <p:sld xmlns:a="http://schemas.openxmlformats.org/drawingml/2006/main" xmlns:r="http://schemas.openxmlformats.org/officeDocument/2006/relationships" xmlns:p="http://schemas.openxmlformats.org/presentationml/2006/main">
   <p:cSld>
     <p:bg>
@@ -9325,7 +9877,7 @@
 </p:sld>
 </file>
 
-<file path=ppt/slides/slide5.xml><?xml version="1.0" encoding="utf-8"?>
+<file path=ppt/slides/slide6.xml><?xml version="1.0" encoding="utf-8"?>
 <p:sld xmlns:a="http://schemas.openxmlformats.org/drawingml/2006/main" xmlns:r="http://schemas.openxmlformats.org/officeDocument/2006/relationships" xmlns:p="http://schemas.openxmlformats.org/presentationml/2006/main">
   <p:cSld>
     <p:bg>
@@ -9819,7 +10371,7 @@
 </p:sld>
 </file>
 
-<file path=ppt/slides/slide6.xml><?xml version="1.0" encoding="utf-8"?>
+<file path=ppt/slides/slide7.xml><?xml version="1.0" encoding="utf-8"?>
 <p:sld xmlns:a="http://schemas.openxmlformats.org/drawingml/2006/main" xmlns:r="http://schemas.openxmlformats.org/officeDocument/2006/relationships" xmlns:p="http://schemas.openxmlformats.org/presentationml/2006/main">
   <p:cSld>
     <p:bg>
@@ -10442,386 +10994,6 @@
 </p:sld>
 </file>
 
-<file path=ppt/slides/slide7.xml><?xml version="1.0" encoding="utf-8"?>
-<p:sld xmlns:a="http://schemas.openxmlformats.org/drawingml/2006/main" xmlns:r="http://schemas.openxmlformats.org/officeDocument/2006/relationships" xmlns:p="http://schemas.openxmlformats.org/presentationml/2006/main">
-  <p:cSld>
-    <p:bg>
-      <p:bgPr>
-        <a:solidFill>
-          <a:srgbClr val="FFFFFF"/>
-        </a:solidFill>
-        <a:effectLst/>
-      </p:bgPr>
-    </p:bg>
-    <p:spTree>
-      <p:nvGrpSpPr>
-        <p:cNvPr id="1" name=""/>
-        <p:cNvGrpSpPr/>
-        <p:nvPr/>
-      </p:nvGrpSpPr>
-      <p:grpSpPr>
-        <a:xfrm>
-          <a:off x="0" y="0"/>
-          <a:ext cx="0" cy="0"/>
-          <a:chOff x="0" y="0"/>
-          <a:chExt cx="0" cy="0"/>
-        </a:xfrm>
-      </p:grpSpPr>
-      <p:sp>
-        <p:nvSpPr>
-          <p:cNvPr id="7" name="Rectangle 6">
-            <a:extLst>
-              <a:ext uri="{FF2B5EF4-FFF2-40B4-BE49-F238E27FC236}">
-                <a16:creationId xmlns:a16="http://schemas.microsoft.com/office/drawing/2014/main" id="{FCA74D15-2201-4048-84BD-387AD5C52359}"/>
-              </a:ext>
-            </a:extLst>
-          </p:cNvPr>
-          <p:cNvSpPr>
-            <a:spLocks noGrp="1"/>
-          </p:cNvSpPr>
-          <p:nvPr/>
-        </p:nvSpPr>
-        <p:spPr>
-          <a:xfrm>
-            <a:off x="666750" y="428625"/>
-            <a:ext cx="10858500" cy="857250"/>
-          </a:xfrm>
-          <a:prstGeom prst="rect">
-            <a:avLst/>
-          </a:prstGeom>
-          <a:noFill/>
-          <a:ln w="0">
-            <a:noFill/>
-          </a:ln>
-        </p:spPr>
-        <p:txBody>
-          <a:bodyPr>
-            <a:noAutofit/>
-          </a:bodyPr>
-          <a:lstStyle/>
-          <a:p>
-            <a:pPr>
-              <a:defRPr sz="3150" b="1">
-                <a:solidFill>
-                  <a:srgbClr val="172B45"/>
-                </a:solidFill>
-                <a:latin typeface="Aptos"/>
-                <a:ea typeface="Aptos"/>
-                <a:cs typeface="Aptos"/>
-              </a:defRPr>
-            </a:pPr>
-            <a:r>
-              <a:rPr sz="3150" b="1">
-                <a:solidFill>
-                  <a:srgbClr val="172B45"/>
-                </a:solidFill>
-                <a:latin typeface="Aptos"/>
-                <a:ea typeface="Aptos"/>
-                <a:cs typeface="Aptos"/>
-              </a:rPr>
-              <a:t>Applicant counts offer limited differentiation</a:t>
-            </a:r>
-          </a:p>
-        </p:txBody>
-      </p:sp>
-      <p:sp>
-        <p:nvSpPr>
-          <p:cNvPr id="2" name="Rectangle 1">
-            <a:extLst>
-              <a:ext uri="{FF2B5EF4-FFF2-40B4-BE49-F238E27FC236}">
-                <a16:creationId xmlns:a16="http://schemas.microsoft.com/office/drawing/2014/main" id="{CF57E2E6-5B54-4A84-9521-F7825E8A4988}"/>
-              </a:ext>
-            </a:extLst>
-          </p:cNvPr>
-          <p:cNvSpPr>
-            <a:spLocks noGrp="1"/>
-          </p:cNvSpPr>
-          <p:nvPr/>
-        </p:nvSpPr>
-        <p:spPr>
-          <a:xfrm>
-            <a:off x="11334750" y="6381750"/>
-            <a:ext cx="381000" cy="238125"/>
-          </a:xfrm>
-          <a:prstGeom prst="rect">
-            <a:avLst/>
-          </a:prstGeom>
-          <a:noFill/>
-          <a:ln w="0">
-            <a:noFill/>
-          </a:ln>
-        </p:spPr>
-        <p:txBody>
-          <a:bodyPr>
-            <a:noAutofit/>
-          </a:bodyPr>
-          <a:lstStyle/>
-          <a:p>
-            <a:pPr>
-              <a:defRPr sz="1200" b="0">
-                <a:solidFill>
-                  <a:srgbClr val="687887"/>
-                </a:solidFill>
-                <a:latin typeface="Aptos"/>
-                <a:ea typeface="Aptos"/>
-                <a:cs typeface="Aptos"/>
-              </a:defRPr>
-            </a:pPr>
-            <a:r>
-              <a:rPr sz="1200" b="0">
-                <a:solidFill>
-                  <a:srgbClr val="687887"/>
-                </a:solidFill>
-                <a:latin typeface="Aptos"/>
-                <a:ea typeface="Aptos"/>
-                <a:cs typeface="Aptos"/>
-              </a:rPr>
-              <a:t>7</a:t>
-            </a:r>
-          </a:p>
-        </p:txBody>
-      </p:sp>
-      <p:sp>
-        <p:nvSpPr>
-          <p:cNvPr id="3" name="Rectangle 2">
-            <a:extLst>
-              <a:ext uri="{FF2B5EF4-FFF2-40B4-BE49-F238E27FC236}">
-                <a16:creationId xmlns:a16="http://schemas.microsoft.com/office/drawing/2014/main" id="{49E992DB-EB21-4E12-BBDC-D1C65799FA43}"/>
-              </a:ext>
-            </a:extLst>
-          </p:cNvPr>
-          <p:cNvSpPr>
-            <a:spLocks noGrp="1"/>
-          </p:cNvSpPr>
-          <p:nvPr/>
-        </p:nvSpPr>
-        <p:spPr>
-          <a:xfrm>
-            <a:off x="762000" y="1666875"/>
-            <a:ext cx="5715000" cy="1047750"/>
-          </a:xfrm>
-          <a:prstGeom prst="rect">
-            <a:avLst/>
-          </a:prstGeom>
-          <a:noFill/>
-          <a:ln w="0">
-            <a:noFill/>
-          </a:ln>
-        </p:spPr>
-        <p:txBody>
-          <a:bodyPr>
-            <a:noAutofit/>
-          </a:bodyPr>
-          <a:lstStyle/>
-          <a:p>
-            <a:pPr>
-              <a:defRPr sz="5850" b="1">
-                <a:solidFill>
-                  <a:srgbClr val="275F96"/>
-                </a:solidFill>
-                <a:latin typeface="Aptos"/>
-                <a:ea typeface="Aptos"/>
-                <a:cs typeface="Aptos"/>
-              </a:defRPr>
-            </a:pPr>
-            <a:r>
-              <a:rPr sz="5850" b="1">
-                <a:solidFill>
-                  <a:srgbClr val="275F96"/>
-                </a:solidFill>
-                <a:latin typeface="Aptos"/>
-                <a:ea typeface="Aptos"/>
-                <a:cs typeface="Aptos"/>
-              </a:rPr>
-              <a:t>212–238</a:t>
-            </a:r>
-          </a:p>
-        </p:txBody>
-      </p:sp>
-      <p:sp>
-        <p:nvSpPr>
-          <p:cNvPr id="4" name="Rectangle 3">
-            <a:extLst>
-              <a:ext uri="{FF2B5EF4-FFF2-40B4-BE49-F238E27FC236}">
-                <a16:creationId xmlns:a16="http://schemas.microsoft.com/office/drawing/2014/main" id="{AED1595D-549B-4D69-B460-9C63E96CB883}"/>
-              </a:ext>
-            </a:extLst>
-          </p:cNvPr>
-          <p:cNvSpPr>
-            <a:spLocks noGrp="1"/>
-          </p:cNvSpPr>
-          <p:nvPr/>
-        </p:nvSpPr>
-        <p:spPr>
-          <a:xfrm>
-            <a:off x="762000" y="2857500"/>
-            <a:ext cx="10001250" cy="619125"/>
-          </a:xfrm>
-          <a:prstGeom prst="rect">
-            <a:avLst/>
-          </a:prstGeom>
-          <a:noFill/>
-          <a:ln w="0">
-            <a:noFill/>
-          </a:ln>
-        </p:spPr>
-        <p:txBody>
-          <a:bodyPr>
-            <a:noAutofit/>
-          </a:bodyPr>
-          <a:lstStyle/>
-          <a:p>
-            <a:pPr>
-              <a:defRPr sz="2250" b="0">
-                <a:solidFill>
-                  <a:srgbClr val="172B45"/>
-                </a:solidFill>
-                <a:latin typeface="Aptos"/>
-                <a:ea typeface="Aptos"/>
-                <a:cs typeface="Aptos"/>
-              </a:defRPr>
-            </a:pPr>
-            <a:r>
-              <a:rPr sz="2250" b="0">
-                <a:solidFill>
-                  <a:srgbClr val="172B45"/>
-                </a:solidFill>
-                <a:latin typeface="Aptos"/>
-                <a:ea typeface="Aptos"/>
-                <a:cs typeface="Aptos"/>
-              </a:rPr>
-              <a:t>Median applicants by specialization</a:t>
-            </a:r>
-          </a:p>
-        </p:txBody>
-      </p:sp>
-      <p:sp>
-        <p:nvSpPr>
-          <p:cNvPr id="5" name="Rectangle 4">
-            <a:extLst>
-              <a:ext uri="{FF2B5EF4-FFF2-40B4-BE49-F238E27FC236}">
-                <a16:creationId xmlns:a16="http://schemas.microsoft.com/office/drawing/2014/main" id="{18CE96BE-AE77-4E6E-82D0-EBD738B945D3}"/>
-              </a:ext>
-            </a:extLst>
-          </p:cNvPr>
-          <p:cNvSpPr>
-            <a:spLocks noGrp="1"/>
-          </p:cNvSpPr>
-          <p:nvPr/>
-        </p:nvSpPr>
-        <p:spPr>
-          <a:xfrm>
-            <a:off x="762000" y="3857625"/>
-            <a:ext cx="10477500" cy="952500"/>
-          </a:xfrm>
-          <a:prstGeom prst="rect">
-            <a:avLst/>
-          </a:prstGeom>
-          <a:noFill/>
-          <a:ln w="0">
-            <a:noFill/>
-          </a:ln>
-        </p:spPr>
-        <p:txBody>
-          <a:bodyPr>
-            <a:noAutofit/>
-          </a:bodyPr>
-          <a:lstStyle/>
-          <a:p>
-            <a:pPr>
-              <a:defRPr sz="2250" b="0">
-                <a:solidFill>
-                  <a:srgbClr val="172B45"/>
-                </a:solidFill>
-                <a:latin typeface="Aptos"/>
-                <a:ea typeface="Aptos"/>
-                <a:cs typeface="Aptos"/>
-              </a:defRPr>
-            </a:pPr>
-            <a:r>
-              <a:rPr sz="2250" b="0">
-                <a:solidFill>
-                  <a:srgbClr val="172B45"/>
-                </a:solidFill>
-                <a:latin typeface="Aptos"/>
-                <a:ea typeface="Aptos"/>
-                <a:cs typeface="Aptos"/>
-              </a:rPr>
-              <a:t>Variation within groups was much larger than differences between their typical applicant counts.</a:t>
-            </a:r>
-          </a:p>
-        </p:txBody>
-      </p:sp>
-      <p:sp>
-        <p:nvSpPr>
-          <p:cNvPr id="6" name="Rectangle 5">
-            <a:extLst>
-              <a:ext uri="{FF2B5EF4-FFF2-40B4-BE49-F238E27FC236}">
-                <a16:creationId xmlns:a16="http://schemas.microsoft.com/office/drawing/2014/main" id="{30889914-CDBE-4219-B4A4-A3642009450F}"/>
-              </a:ext>
-            </a:extLst>
-          </p:cNvPr>
-          <p:cNvSpPr>
-            <a:spLocks noGrp="1"/>
-          </p:cNvSpPr>
-          <p:nvPr/>
-        </p:nvSpPr>
-        <p:spPr>
-          <a:xfrm>
-            <a:off x="762000" y="5867400"/>
-            <a:ext cx="10477500" cy="447675"/>
-          </a:xfrm>
-          <a:prstGeom prst="rect">
-            <a:avLst/>
-          </a:prstGeom>
-          <a:noFill/>
-          <a:ln w="0">
-            <a:noFill/>
-          </a:ln>
-        </p:spPr>
-        <p:txBody>
-          <a:bodyPr>
-            <a:noAutofit/>
-          </a:bodyPr>
-          <a:lstStyle/>
-          <a:p>
-            <a:pPr>
-              <a:defRPr sz="1350" b="0">
-                <a:solidFill>
-                  <a:srgbClr val="687887"/>
-                </a:solidFill>
-                <a:latin typeface="Aptos"/>
-                <a:ea typeface="Aptos"/>
-                <a:cs typeface="Aptos"/>
-              </a:defRPr>
-            </a:pPr>
-            <a:r>
-              <a:rPr sz="1350" b="0">
-                <a:solidFill>
-                  <a:srgbClr val="687887"/>
-                </a:solidFill>
-                <a:latin typeface="Aptos"/>
-                <a:ea typeface="Aptos"/>
-                <a:cs typeface="Aptos"/>
-              </a:rPr>
-              <a:t>The analysis does not establish hiring difficulty, candidate quality, or the causes of applicant volume.</a:t>
-            </a:r>
-          </a:p>
-        </p:txBody>
-      </p:sp>
-    </p:spTree>
-    <p:extLst>
-      <p:ext uri="{BB962C8B-B14F-4D97-AF65-F5344CB8AC3E}">
-        <p14:creationId xmlns:p14="http://schemas.microsoft.com/office/powerpoint/2010/main" val="1912377907"/>
-      </p:ext>
-    </p:extLst>
-  </p:cSld>
-  <p:clrMapOvr>
-    <a:masterClrMapping/>
-  </p:clrMapOvr>
-</p:sld>
-</file>
-
 <file path=ppt/slides/slide8.xml><?xml version="1.0" encoding="utf-8"?>
 <p:sld xmlns:a="http://schemas.openxmlformats.org/drawingml/2006/main" xmlns:r="http://schemas.openxmlformats.org/officeDocument/2006/relationships" xmlns:p="http://schemas.openxmlformats.org/presentationml/2006/main">
   <p:cSld>
@@ -10849,10 +11021,10 @@
       </p:grpSpPr>
       <p:sp>
         <p:nvSpPr>
-          <p:cNvPr id="8" name="Rectangle 7">
-            <a:extLst>
-              <a:ext uri="{FF2B5EF4-FFF2-40B4-BE49-F238E27FC236}">
-                <a16:creationId xmlns:a16="http://schemas.microsoft.com/office/drawing/2014/main" id="{FCC1D0E6-E1E1-432C-97A5-49283F27E5DC}"/>
+          <p:cNvPr id="7" name="Rectangle 6">
+            <a:extLst>
+              <a:ext uri="{FF2B5EF4-FFF2-40B4-BE49-F238E27FC236}">
+                <a16:creationId xmlns:a16="http://schemas.microsoft.com/office/drawing/2014/main" id="{FCA74D15-2201-4048-84BD-387AD5C52359}"/>
               </a:ext>
             </a:extLst>
           </p:cNvPr>
@@ -10899,7 +11071,7 @@
                 <a:ea typeface="Aptos"/>
                 <a:cs typeface="Aptos"/>
               </a:rPr>
-              <a:t>Experience carries most of the current salary signal</a:t>
+              <a:t>Applicant counts offer limited differentiation</a:t>
             </a:r>
           </a:p>
         </p:txBody>
@@ -10909,7 +11081,7 @@
           <p:cNvPr id="2" name="Rectangle 1">
             <a:extLst>
               <a:ext uri="{FF2B5EF4-FFF2-40B4-BE49-F238E27FC236}">
-                <a16:creationId xmlns:a16="http://schemas.microsoft.com/office/drawing/2014/main" id="{D1ADB659-AE9C-4DB1-BEE5-FC6C24835C86}"/>
+                <a16:creationId xmlns:a16="http://schemas.microsoft.com/office/drawing/2014/main" id="{CF57E2E6-5B54-4A84-9521-F7825E8A4988}"/>
               </a:ext>
             </a:extLst>
           </p:cNvPr>
@@ -10956,7 +11128,7 @@
                 <a:ea typeface="Aptos"/>
                 <a:cs typeface="Aptos"/>
               </a:rPr>
-              <a:t>8</a:t>
+              <a:t>7</a:t>
             </a:r>
           </a:p>
         </p:txBody>
@@ -10966,7 +11138,7 @@
           <p:cNvPr id="3" name="Rectangle 2">
             <a:extLst>
               <a:ext uri="{FF2B5EF4-FFF2-40B4-BE49-F238E27FC236}">
-                <a16:creationId xmlns:a16="http://schemas.microsoft.com/office/drawing/2014/main" id="{D158BD30-268D-4DC7-9546-E914096DB01F}"/>
+                <a16:creationId xmlns:a16="http://schemas.microsoft.com/office/drawing/2014/main" id="{49E992DB-EB21-4E12-BBDC-D1C65799FA43}"/>
               </a:ext>
             </a:extLst>
           </p:cNvPr>
@@ -10977,8 +11149,8 @@
         </p:nvSpPr>
         <p:spPr>
           <a:xfrm>
-            <a:off x="762000" y="1619250"/>
-            <a:ext cx="5238750" cy="1238250"/>
+            <a:off x="762000" y="1666875"/>
+            <a:ext cx="5715000" cy="1047750"/>
           </a:xfrm>
           <a:prstGeom prst="rect">
             <a:avLst/>
@@ -10995,7 +11167,7 @@
           <a:lstStyle/>
           <a:p>
             <a:pPr>
-              <a:defRPr sz="7200" b="1">
+              <a:defRPr sz="5850" b="1">
                 <a:solidFill>
                   <a:srgbClr val="275F96"/>
                 </a:solidFill>
@@ -11005,7 +11177,7 @@
               </a:defRPr>
             </a:pPr>
             <a:r>
-              <a:rPr sz="7200" b="1">
+              <a:rPr sz="5850" b="1">
                 <a:solidFill>
                   <a:srgbClr val="275F96"/>
                 </a:solidFill>
@@ -11013,7 +11185,7 @@
                 <a:ea typeface="Aptos"/>
                 <a:cs typeface="Aptos"/>
               </a:rPr>
-              <a:t>96.8%</a:t>
+              <a:t>212–238</a:t>
             </a:r>
           </a:p>
         </p:txBody>
@@ -11023,7 +11195,7 @@
           <p:cNvPr id="4" name="Rectangle 3">
             <a:extLst>
               <a:ext uri="{FF2B5EF4-FFF2-40B4-BE49-F238E27FC236}">
-                <a16:creationId xmlns:a16="http://schemas.microsoft.com/office/drawing/2014/main" id="{2CEC0ECA-CDE7-429C-BF38-6FFBDD61FF65}"/>
+                <a16:creationId xmlns:a16="http://schemas.microsoft.com/office/drawing/2014/main" id="{AED1595D-549B-4D69-B460-9C63E96CB883}"/>
               </a:ext>
             </a:extLst>
           </p:cNvPr>
@@ -11034,8 +11206,8 @@
         </p:nvSpPr>
         <p:spPr>
           <a:xfrm>
-            <a:off x="762000" y="3143250"/>
-            <a:ext cx="5238750" cy="1238250"/>
+            <a:off x="762000" y="2857500"/>
+            <a:ext cx="10001250" cy="619125"/>
           </a:xfrm>
           <a:prstGeom prst="rect">
             <a:avLst/>
@@ -11052,7 +11224,7 @@
           <a:lstStyle/>
           <a:p>
             <a:pPr>
-              <a:defRPr sz="2175" b="0">
+              <a:defRPr sz="2250" b="0">
                 <a:solidFill>
                   <a:srgbClr val="172B45"/>
                 </a:solidFill>
@@ -11062,7 +11234,7 @@
               </a:defRPr>
             </a:pPr>
             <a:r>
-              <a:rPr sz="2175" b="0">
+              <a:rPr sz="2250" b="0">
                 <a:solidFill>
                   <a:srgbClr val="172B45"/>
                 </a:solidFill>
@@ -11070,7 +11242,7 @@
                 <a:ea typeface="Aptos"/>
                 <a:cs typeface="Aptos"/>
               </a:rPr>
-              <a:t>Random Forest importance attributed to experience-related features</a:t>
+              <a:t>Median applicants by specialization</a:t>
             </a:r>
           </a:p>
         </p:txBody>
@@ -11080,7 +11252,7 @@
           <p:cNvPr id="5" name="Rectangle 4">
             <a:extLst>
               <a:ext uri="{FF2B5EF4-FFF2-40B4-BE49-F238E27FC236}">
-                <a16:creationId xmlns:a16="http://schemas.microsoft.com/office/drawing/2014/main" id="{14300B84-DDDA-40E8-A6DA-2090544FE161}"/>
+                <a16:creationId xmlns:a16="http://schemas.microsoft.com/office/drawing/2014/main" id="{18CE96BE-AE77-4E6E-82D0-EBD738B945D3}"/>
               </a:ext>
             </a:extLst>
           </p:cNvPr>
@@ -11091,8 +11263,8 @@
         </p:nvSpPr>
         <p:spPr>
           <a:xfrm>
-            <a:off x="6858000" y="1666875"/>
-            <a:ext cx="4476750" cy="571500"/>
+            <a:off x="762000" y="3857625"/>
+            <a:ext cx="10477500" cy="952500"/>
           </a:xfrm>
           <a:prstGeom prst="rect">
             <a:avLst/>
@@ -11109,7 +11281,7 @@
           <a:lstStyle/>
           <a:p>
             <a:pPr>
-              <a:defRPr sz="2400" b="1">
+              <a:defRPr sz="2250" b="0">
                 <a:solidFill>
                   <a:srgbClr val="172B45"/>
                 </a:solidFill>
@@ -11119,7 +11291,7 @@
               </a:defRPr>
             </a:pPr>
             <a:r>
-              <a:rPr sz="2400" b="1">
+              <a:rPr sz="2250" b="0">
                 <a:solidFill>
                   <a:srgbClr val="172B45"/>
                 </a:solidFill>
@@ -11127,7 +11299,7 @@
                 <a:ea typeface="Aptos"/>
                 <a:cs typeface="Aptos"/>
               </a:rPr>
-              <a:t>Business implication</a:t>
+              <a:t>Variation within groups was much larger than differences between their typical applicant counts.</a:t>
             </a:r>
           </a:p>
         </p:txBody>
@@ -11137,64 +11309,7 @@
           <p:cNvPr id="6" name="Rectangle 5">
             <a:extLst>
               <a:ext uri="{FF2B5EF4-FFF2-40B4-BE49-F238E27FC236}">
-                <a16:creationId xmlns:a16="http://schemas.microsoft.com/office/drawing/2014/main" id="{D1F25515-80E7-4958-B613-EB2C2CF3277D}"/>
-              </a:ext>
-            </a:extLst>
-          </p:cNvPr>
-          <p:cNvSpPr>
-            <a:spLocks noGrp="1"/>
-          </p:cNvSpPr>
-          <p:nvPr/>
-        </p:nvSpPr>
-        <p:spPr>
-          <a:xfrm>
-            <a:off x="6858000" y="2428875"/>
-            <a:ext cx="4476750" cy="1476375"/>
-          </a:xfrm>
-          <a:prstGeom prst="rect">
-            <a:avLst/>
-          </a:prstGeom>
-          <a:noFill/>
-          <a:ln w="0">
-            <a:noFill/>
-          </a:ln>
-        </p:spPr>
-        <p:txBody>
-          <a:bodyPr>
-            <a:noAutofit/>
-          </a:bodyPr>
-          <a:lstStyle/>
-          <a:p>
-            <a:pPr>
-              <a:defRPr sz="2250" b="0">
-                <a:solidFill>
-                  <a:srgbClr val="172B45"/>
-                </a:solidFill>
-                <a:latin typeface="Aptos"/>
-                <a:ea typeface="Aptos"/>
-                <a:cs typeface="Aptos"/>
-              </a:defRPr>
-            </a:pPr>
-            <a:r>
-              <a:rPr sz="2250" b="0">
-                <a:solidFill>
-                  <a:srgbClr val="172B45"/>
-                </a:solidFill>
-                <a:latin typeface="Aptos"/>
-                <a:ea typeface="Aptos"/>
-                <a:cs typeface="Aptos"/>
-              </a:rPr>
-              <a:t>Consistent seniority and experience definitions deserve attention in role design.</a:t>
-            </a:r>
-          </a:p>
-        </p:txBody>
-      </p:sp>
-      <p:sp>
-        <p:nvSpPr>
-          <p:cNvPr id="7" name="Rectangle 6">
-            <a:extLst>
-              <a:ext uri="{FF2B5EF4-FFF2-40B4-BE49-F238E27FC236}">
-                <a16:creationId xmlns:a16="http://schemas.microsoft.com/office/drawing/2014/main" id="{0C70719A-E441-48A8-87C0-DB7454467B02}"/>
+                <a16:creationId xmlns:a16="http://schemas.microsoft.com/office/drawing/2014/main" id="{30889914-CDBE-4219-B4A4-A3642009450F}"/>
               </a:ext>
             </a:extLst>
           </p:cNvPr>
@@ -11241,7 +11356,7 @@
                 <a:ea typeface="Aptos"/>
                 <a:cs typeface="Aptos"/>
               </a:rPr>
-              <a:t>Provisional model finding. Feature importance describes model behavior and does not establish causation.</a:t>
+              <a:t>The analysis does not establish hiring difficulty, candidate quality, or the causes of applicant volume.</a:t>
             </a:r>
           </a:p>
         </p:txBody>
@@ -11249,7 +11364,7 @@
     </p:spTree>
     <p:extLst>
       <p:ext uri="{BB962C8B-B14F-4D97-AF65-F5344CB8AC3E}">
-        <p14:creationId xmlns:p14="http://schemas.microsoft.com/office/powerpoint/2010/main" val="1464580989"/>
+        <p14:creationId xmlns:p14="http://schemas.microsoft.com/office/powerpoint/2010/main" val="1912377907"/>
       </p:ext>
     </p:extLst>
   </p:cSld>
@@ -11286,10 +11401,10 @@
       </p:grpSpPr>
       <p:sp>
         <p:nvSpPr>
-          <p:cNvPr id="6" name="Rectangle 5">
-            <a:extLst>
-              <a:ext uri="{FF2B5EF4-FFF2-40B4-BE49-F238E27FC236}">
-                <a16:creationId xmlns:a16="http://schemas.microsoft.com/office/drawing/2014/main" id="{E8D149C5-204A-4CD8-A9C2-23FC31067220}"/>
+          <p:cNvPr id="8" name="Rectangle 7">
+            <a:extLst>
+              <a:ext uri="{FF2B5EF4-FFF2-40B4-BE49-F238E27FC236}">
+                <a16:creationId xmlns:a16="http://schemas.microsoft.com/office/drawing/2014/main" id="{FCC1D0E6-E1E1-432C-97A5-49283F27E5DC}"/>
               </a:ext>
             </a:extLst>
           </p:cNvPr>
@@ -11336,7 +11451,7 @@
                 <a:ea typeface="Aptos"/>
                 <a:cs typeface="Aptos"/>
               </a:rPr>
-              <a:t>The salary model is an initial analytical result</a:t>
+              <a:t>Experience carries most of the current salary signal</a:t>
             </a:r>
           </a:p>
         </p:txBody>
@@ -11346,7 +11461,7 @@
           <p:cNvPr id="2" name="Rectangle 1">
             <a:extLst>
               <a:ext uri="{FF2B5EF4-FFF2-40B4-BE49-F238E27FC236}">
-                <a16:creationId xmlns:a16="http://schemas.microsoft.com/office/drawing/2014/main" id="{8B97B610-FCB9-41BA-BE1D-4E490BE13433}"/>
+                <a16:creationId xmlns:a16="http://schemas.microsoft.com/office/drawing/2014/main" id="{D1ADB659-AE9C-4DB1-BEE5-FC6C24835C86}"/>
               </a:ext>
             </a:extLst>
           </p:cNvPr>
@@ -11393,216 +11508,17 @@
                 <a:ea typeface="Aptos"/>
                 <a:cs typeface="Aptos"/>
               </a:rPr>
-              <a:t>9</a:t>
-            </a:r>
-          </a:p>
-        </p:txBody>
-      </p:sp>
-      <p:graphicFrame>
-        <p:nvGraphicFramePr>
-          <p:cNvPr id="8" name="Table 7"/>
-          <p:cNvGraphicFramePr/>
-          <p:nvPr/>
-        </p:nvGraphicFramePr>
-        <p:xfrm>
-          <a:off x="762000" y="1571625"/>
-          <a:ext cx="10668000" cy="2286000"/>
-        </p:xfrm>
-        <a:graphic>
-          <a:graphicData uri="http://schemas.openxmlformats.org/drawingml/2006/table">
-            <a:tbl>
-              <a:tblPr/>
-              <a:tblGrid>
-                <a:gridCol w="6096000">
-                  <a:extLst>
-                    <a:ext uri="{9D8B030D-6E8A-4147-A177-3AD203B41FA5}">
-                      <a16:colId xmlns:a16="http://schemas.microsoft.com/office/drawing/2014/main" val="20000"/>
-                    </a:ext>
-                  </a:extLst>
-                </a:gridCol>
-                <a:gridCol w="4572000">
-                  <a:extLst>
-                    <a:ext uri="{9D8B030D-6E8A-4147-A177-3AD203B41FA5}">
-                      <a16:colId xmlns:a16="http://schemas.microsoft.com/office/drawing/2014/main" val="20001"/>
-                    </a:ext>
-                  </a:extLst>
-                </a:gridCol>
-              </a:tblGrid>
-              <a:tr h="762000">
-                <a:tc>
-                  <a:txBody>
-                    <a:bodyPr/>
-                    <a:lstStyle/>
-                    <a:p>
-                      <a:r>
-                        <a:rPr sz="2175" b="1">
-                          <a:solidFill>
-                            <a:srgbClr val="FFFFFF"/>
-                          </a:solidFill>
-                          <a:latin typeface="Aptos"/>
-                          <a:ea typeface="Aptos"/>
-                          <a:cs typeface="Aptos"/>
-                        </a:rPr>
-                        <a:t>Model</a:t>
-                      </a:r>
-                    </a:p>
-                  </a:txBody>
-                  <a:tcPr>
-                    <a:solidFill>
-                      <a:srgbClr val="172B45"/>
-                    </a:solidFill>
-                  </a:tcPr>
-                </a:tc>
-                <a:tc>
-                  <a:txBody>
-                    <a:bodyPr/>
-                    <a:lstStyle/>
-                    <a:p>
-                      <a:r>
-                        <a:rPr sz="2175" b="1">
-                          <a:solidFill>
-                            <a:srgbClr val="FFFFFF"/>
-                          </a:solidFill>
-                          <a:latin typeface="Aptos"/>
-                          <a:ea typeface="Aptos"/>
-                          <a:cs typeface="Aptos"/>
-                        </a:rPr>
-                        <a:t>Average absolute test error</a:t>
-                      </a:r>
-                    </a:p>
-                  </a:txBody>
-                  <a:tcPr>
-                    <a:solidFill>
-                      <a:srgbClr val="172B45"/>
-                    </a:solidFill>
-                  </a:tcPr>
-                </a:tc>
-                <a:extLst>
-                  <a:ext uri="{0D108BD9-81ED-4DB2-BD59-A6C34878D82A}">
-                    <a16:rowId xmlns:a16="http://schemas.microsoft.com/office/drawing/2014/main" val="10000"/>
-                  </a:ext>
-                </a:extLst>
-              </a:tr>
-              <a:tr h="762000">
-                <a:tc>
-                  <a:txBody>
-                    <a:bodyPr/>
-                    <a:lstStyle/>
-                    <a:p>
-                      <a:r>
-                        <a:rPr sz="2175" b="0">
-                          <a:solidFill>
-                            <a:srgbClr val="172B45"/>
-                          </a:solidFill>
-                          <a:latin typeface="Aptos"/>
-                          <a:ea typeface="Aptos"/>
-                          <a:cs typeface="Aptos"/>
-                        </a:rPr>
-                        <a:t>Linear Regression</a:t>
-                      </a:r>
-                    </a:p>
-                  </a:txBody>
-                  <a:tcPr>
-                    <a:solidFill>
-                      <a:srgbClr val="F0F4F8"/>
-                    </a:solidFill>
-                  </a:tcPr>
-                </a:tc>
-                <a:tc>
-                  <a:txBody>
-                    <a:bodyPr/>
-                    <a:lstStyle/>
-                    <a:p>
-                      <a:r>
-                        <a:rPr sz="2175" b="0">
-                          <a:solidFill>
-                            <a:srgbClr val="172B45"/>
-                          </a:solidFill>
-                          <a:latin typeface="Aptos"/>
-                          <a:ea typeface="Aptos"/>
-                          <a:cs typeface="Aptos"/>
-                        </a:rPr>
-                        <a:t>$9,478.15</a:t>
-                      </a:r>
-                    </a:p>
-                  </a:txBody>
-                  <a:tcPr>
-                    <a:solidFill>
-                      <a:srgbClr val="F0F4F8"/>
-                    </a:solidFill>
-                  </a:tcPr>
-                </a:tc>
-                <a:extLst>
-                  <a:ext uri="{0D108BD9-81ED-4DB2-BD59-A6C34878D82A}">
-                    <a16:rowId xmlns:a16="http://schemas.microsoft.com/office/drawing/2014/main" val="10001"/>
-                  </a:ext>
-                </a:extLst>
-              </a:tr>
-              <a:tr h="762000">
-                <a:tc>
-                  <a:txBody>
-                    <a:bodyPr/>
-                    <a:lstStyle/>
-                    <a:p>
-                      <a:r>
-                        <a:rPr sz="2175" b="0">
-                          <a:solidFill>
-                            <a:srgbClr val="172B45"/>
-                          </a:solidFill>
-                          <a:latin typeface="Aptos"/>
-                          <a:ea typeface="Aptos"/>
-                          <a:cs typeface="Aptos"/>
-                        </a:rPr>
-                        <a:t>Random Forest</a:t>
-                      </a:r>
-                    </a:p>
-                  </a:txBody>
-                  <a:tcPr>
-                    <a:solidFill>
-                      <a:srgbClr val="FFFFFF"/>
-                    </a:solidFill>
-                  </a:tcPr>
-                </a:tc>
-                <a:tc>
-                  <a:txBody>
-                    <a:bodyPr/>
-                    <a:lstStyle/>
-                    <a:p>
-                      <a:r>
-                        <a:rPr sz="2175" b="0">
-                          <a:solidFill>
-                            <a:srgbClr val="172B45"/>
-                          </a:solidFill>
-                          <a:latin typeface="Aptos"/>
-                          <a:ea typeface="Aptos"/>
-                          <a:cs typeface="Aptos"/>
-                        </a:rPr>
-                        <a:t>$9,250.28</a:t>
-                      </a:r>
-                    </a:p>
-                  </a:txBody>
-                  <a:tcPr>
-                    <a:solidFill>
-                      <a:srgbClr val="FFFFFF"/>
-                    </a:solidFill>
-                  </a:tcPr>
-                </a:tc>
-                <a:extLst>
-                  <a:ext uri="{0D108BD9-81ED-4DB2-BD59-A6C34878D82A}">
-                    <a16:rowId xmlns:a16="http://schemas.microsoft.com/office/drawing/2014/main" val="10002"/>
-                  </a:ext>
-                </a:extLst>
-              </a:tr>
-            </a:tbl>
-          </a:graphicData>
-        </a:graphic>
-      </p:graphicFrame>
-      <p:sp>
-        <p:nvSpPr>
-          <p:cNvPr id="4" name="Rectangle 3">
-            <a:extLst>
-              <a:ext uri="{FF2B5EF4-FFF2-40B4-BE49-F238E27FC236}">
-                <a16:creationId xmlns:a16="http://schemas.microsoft.com/office/drawing/2014/main" id="{AC2C4E7E-D368-49E9-8E4E-1A9E022FE808}"/>
+              <a:t>8</a:t>
+            </a:r>
+          </a:p>
+        </p:txBody>
+      </p:sp>
+      <p:sp>
+        <p:nvSpPr>
+          <p:cNvPr id="3" name="Rectangle 2">
+            <a:extLst>
+              <a:ext uri="{FF2B5EF4-FFF2-40B4-BE49-F238E27FC236}">
+                <a16:creationId xmlns:a16="http://schemas.microsoft.com/office/drawing/2014/main" id="{D158BD30-268D-4DC7-9546-E914096DB01F}"/>
               </a:ext>
             </a:extLst>
           </p:cNvPr>
@@ -11613,8 +11529,8 @@
         </p:nvSpPr>
         <p:spPr>
           <a:xfrm>
-            <a:off x="762000" y="4238625"/>
-            <a:ext cx="10572750" cy="952500"/>
+            <a:off x="762000" y="1619250"/>
+            <a:ext cx="5238750" cy="1238250"/>
           </a:xfrm>
           <a:prstGeom prst="rect">
             <a:avLst/>
@@ -11631,9 +11547,9 @@
           <a:lstStyle/>
           <a:p>
             <a:pPr>
-              <a:defRPr sz="2250" b="0">
-                <a:solidFill>
-                  <a:srgbClr val="172B45"/>
+              <a:defRPr sz="7200" b="1">
+                <a:solidFill>
+                  <a:srgbClr val="275F96"/>
                 </a:solidFill>
                 <a:latin typeface="Aptos"/>
                 <a:ea typeface="Aptos"/>
@@ -11641,6 +11557,177 @@
               </a:defRPr>
             </a:pPr>
             <a:r>
+              <a:rPr sz="7200" b="1">
+                <a:solidFill>
+                  <a:srgbClr val="275F96"/>
+                </a:solidFill>
+                <a:latin typeface="Aptos"/>
+                <a:ea typeface="Aptos"/>
+                <a:cs typeface="Aptos"/>
+              </a:rPr>
+              <a:t>96.8%</a:t>
+            </a:r>
+          </a:p>
+        </p:txBody>
+      </p:sp>
+      <p:sp>
+        <p:nvSpPr>
+          <p:cNvPr id="4" name="Rectangle 3">
+            <a:extLst>
+              <a:ext uri="{FF2B5EF4-FFF2-40B4-BE49-F238E27FC236}">
+                <a16:creationId xmlns:a16="http://schemas.microsoft.com/office/drawing/2014/main" id="{2CEC0ECA-CDE7-429C-BF38-6FFBDD61FF65}"/>
+              </a:ext>
+            </a:extLst>
+          </p:cNvPr>
+          <p:cNvSpPr>
+            <a:spLocks noGrp="1"/>
+          </p:cNvSpPr>
+          <p:nvPr/>
+        </p:nvSpPr>
+        <p:spPr>
+          <a:xfrm>
+            <a:off x="762000" y="3143250"/>
+            <a:ext cx="5238750" cy="1238250"/>
+          </a:xfrm>
+          <a:prstGeom prst="rect">
+            <a:avLst/>
+          </a:prstGeom>
+          <a:noFill/>
+          <a:ln w="0">
+            <a:noFill/>
+          </a:ln>
+        </p:spPr>
+        <p:txBody>
+          <a:bodyPr>
+            <a:noAutofit/>
+          </a:bodyPr>
+          <a:lstStyle/>
+          <a:p>
+            <a:pPr>
+              <a:defRPr sz="2175" b="0">
+                <a:solidFill>
+                  <a:srgbClr val="172B45"/>
+                </a:solidFill>
+                <a:latin typeface="Aptos"/>
+                <a:ea typeface="Aptos"/>
+                <a:cs typeface="Aptos"/>
+              </a:defRPr>
+            </a:pPr>
+            <a:r>
+              <a:rPr sz="2175" b="0">
+                <a:solidFill>
+                  <a:srgbClr val="172B45"/>
+                </a:solidFill>
+                <a:latin typeface="Aptos"/>
+                <a:ea typeface="Aptos"/>
+                <a:cs typeface="Aptos"/>
+              </a:rPr>
+              <a:t>Random Forest importance attributed to experience-related features</a:t>
+            </a:r>
+          </a:p>
+        </p:txBody>
+      </p:sp>
+      <p:sp>
+        <p:nvSpPr>
+          <p:cNvPr id="5" name="Rectangle 4">
+            <a:extLst>
+              <a:ext uri="{FF2B5EF4-FFF2-40B4-BE49-F238E27FC236}">
+                <a16:creationId xmlns:a16="http://schemas.microsoft.com/office/drawing/2014/main" id="{14300B84-DDDA-40E8-A6DA-2090544FE161}"/>
+              </a:ext>
+            </a:extLst>
+          </p:cNvPr>
+          <p:cNvSpPr>
+            <a:spLocks noGrp="1"/>
+          </p:cNvSpPr>
+          <p:nvPr/>
+        </p:nvSpPr>
+        <p:spPr>
+          <a:xfrm>
+            <a:off x="6858000" y="1666875"/>
+            <a:ext cx="4476750" cy="571500"/>
+          </a:xfrm>
+          <a:prstGeom prst="rect">
+            <a:avLst/>
+          </a:prstGeom>
+          <a:noFill/>
+          <a:ln w="0">
+            <a:noFill/>
+          </a:ln>
+        </p:spPr>
+        <p:txBody>
+          <a:bodyPr>
+            <a:noAutofit/>
+          </a:bodyPr>
+          <a:lstStyle/>
+          <a:p>
+            <a:pPr>
+              <a:defRPr sz="2400" b="1">
+                <a:solidFill>
+                  <a:srgbClr val="172B45"/>
+                </a:solidFill>
+                <a:latin typeface="Aptos"/>
+                <a:ea typeface="Aptos"/>
+                <a:cs typeface="Aptos"/>
+              </a:defRPr>
+            </a:pPr>
+            <a:r>
+              <a:rPr sz="2400" b="1">
+                <a:solidFill>
+                  <a:srgbClr val="172B45"/>
+                </a:solidFill>
+                <a:latin typeface="Aptos"/>
+                <a:ea typeface="Aptos"/>
+                <a:cs typeface="Aptos"/>
+              </a:rPr>
+              <a:t>Business implication</a:t>
+            </a:r>
+          </a:p>
+        </p:txBody>
+      </p:sp>
+      <p:sp>
+        <p:nvSpPr>
+          <p:cNvPr id="6" name="Rectangle 5">
+            <a:extLst>
+              <a:ext uri="{FF2B5EF4-FFF2-40B4-BE49-F238E27FC236}">
+                <a16:creationId xmlns:a16="http://schemas.microsoft.com/office/drawing/2014/main" id="{D1F25515-80E7-4958-B613-EB2C2CF3277D}"/>
+              </a:ext>
+            </a:extLst>
+          </p:cNvPr>
+          <p:cNvSpPr>
+            <a:spLocks noGrp="1"/>
+          </p:cNvSpPr>
+          <p:nvPr/>
+        </p:nvSpPr>
+        <p:spPr>
+          <a:xfrm>
+            <a:off x="6858000" y="2428875"/>
+            <a:ext cx="4476750" cy="1476375"/>
+          </a:xfrm>
+          <a:prstGeom prst="rect">
+            <a:avLst/>
+          </a:prstGeom>
+          <a:noFill/>
+          <a:ln w="0">
+            <a:noFill/>
+          </a:ln>
+        </p:spPr>
+        <p:txBody>
+          <a:bodyPr>
+            <a:noAutofit/>
+          </a:bodyPr>
+          <a:lstStyle/>
+          <a:p>
+            <a:pPr>
+              <a:defRPr sz="2250" b="0">
+                <a:solidFill>
+                  <a:srgbClr val="172B45"/>
+                </a:solidFill>
+                <a:latin typeface="Aptos"/>
+                <a:ea typeface="Aptos"/>
+                <a:cs typeface="Aptos"/>
+              </a:defRPr>
+            </a:pPr>
+            <a:r>
               <a:rPr sz="2250" b="0">
                 <a:solidFill>
                   <a:srgbClr val="172B45"/>
@@ -11649,17 +11736,17 @@
                 <a:ea typeface="Aptos"/>
                 <a:cs typeface="Aptos"/>
               </a:rPr>
-              <a:t>Random Forest improved error by about 2.4%. This modest gain does not establish readiness for business use.</a:t>
-            </a:r>
-          </a:p>
-        </p:txBody>
-      </p:sp>
-      <p:sp>
-        <p:nvSpPr>
-          <p:cNvPr id="5" name="Rectangle 4">
-            <a:extLst>
-              <a:ext uri="{FF2B5EF4-FFF2-40B4-BE49-F238E27FC236}">
-                <a16:creationId xmlns:a16="http://schemas.microsoft.com/office/drawing/2014/main" id="{050AA144-D25B-40C5-BC43-DE44C19AAB72}"/>
+              <a:t>Consistent seniority and experience definitions deserve attention in role design.</a:t>
+            </a:r>
+          </a:p>
+        </p:txBody>
+      </p:sp>
+      <p:sp>
+        <p:nvSpPr>
+          <p:cNvPr id="7" name="Rectangle 6">
+            <a:extLst>
+              <a:ext uri="{FF2B5EF4-FFF2-40B4-BE49-F238E27FC236}">
+                <a16:creationId xmlns:a16="http://schemas.microsoft.com/office/drawing/2014/main" id="{0C70719A-E441-48A8-87C0-DB7454467B02}"/>
               </a:ext>
             </a:extLst>
           </p:cNvPr>
@@ -11706,7 +11793,7 @@
                 <a:ea typeface="Aptos"/>
                 <a:cs typeface="Aptos"/>
               </a:rPr>
-              <a:t>PROVISIONAL: Errors use the currently processed salary-range midpoints. Currency and geography need correction.</a:t>
+              <a:t>Provisional model finding. Feature importance describes model behavior and does not establish causation.</a:t>
             </a:r>
           </a:p>
         </p:txBody>
@@ -11714,7 +11801,7 @@
     </p:spTree>
     <p:extLst>
       <p:ext uri="{BB962C8B-B14F-4D97-AF65-F5344CB8AC3E}">
-        <p14:creationId xmlns:p14="http://schemas.microsoft.com/office/powerpoint/2010/main" val="2113613"/>
+        <p14:creationId xmlns:p14="http://schemas.microsoft.com/office/powerpoint/2010/main" val="1464580989"/>
       </p:ext>
     </p:extLst>
   </p:cSld>
